--- a/docs/aster-pricing-cfo.pptx
+++ b/docs/aster-pricing-cfo.pptx
@@ -153,7 +153,7 @@
           </c:spPr>
           <c:invertIfNegative val="0"/>
           <c:dLbls>
-            <c:numFmt formatCode="$#,##0" sourceLinked="0"/>
+            <c:numFmt formatCode="&quot;RM&quot;#,##0" sourceLinked="0"/>
             <c:txPr>
               <a:bodyPr/>
               <a:lstStyle/>
@@ -202,13 +202,13 @@
                 <c:formatCode>General</c:formatCode>
                 <c:ptCount val="3"/>
                 <c:pt idx="0">
-                  <c:v>49</c:v>
+                  <c:v>199</c:v>
                 </c:pt>
                 <c:pt idx="1">
-                  <c:v>199</c:v>
+                  <c:v>799</c:v>
                 </c:pt>
                 <c:pt idx="2">
-                  <c:v>499</c:v>
+                  <c:v>1999</c:v>
                 </c:pt>
               </c:numCache>
             </c:numRef>
@@ -236,7 +236,7 @@
           </c:spPr>
           <c:invertIfNegative val="0"/>
           <c:dLbls>
-            <c:numFmt formatCode="$#,##0" sourceLinked="0"/>
+            <c:numFmt formatCode="&quot;RM&quot;#,##0" sourceLinked="0"/>
             <c:txPr>
               <a:bodyPr/>
               <a:lstStyle/>
@@ -285,20 +285,20 @@
                 <c:formatCode>General</c:formatCode>
                 <c:ptCount val="3"/>
                 <c:pt idx="0">
-                  <c:v>4.95</c:v>
+                  <c:v>20</c:v>
                 </c:pt>
                 <c:pt idx="1">
-                  <c:v>28.8</c:v>
+                  <c:v>115</c:v>
                 </c:pt>
                 <c:pt idx="2">
-                  <c:v>65</c:v>
+                  <c:v>260</c:v>
                 </c:pt>
               </c:numCache>
             </c:numRef>
           </c:val>
         </c:ser>
         <c:dLbls>
-          <c:numFmt formatCode="$#,##0" sourceLinked="0"/>
+          <c:numFmt formatCode="&quot;RM&quot;#,##0" sourceLinked="0"/>
           <c:txPr>
             <a:bodyPr/>
             <a:lstStyle/>
@@ -372,7 +372,7 @@
         <c:axId val="2094734552"/>
         <c:scaling>
           <c:orientation val="minMax"/>
-          <c:max val="560"/>
+          <c:max val="2200"/>
           <c:min val="0"/>
         </c:scaling>
         <c:delete val="1"/>
@@ -3096,7 +3096,7 @@
                 <a:ea typeface="Calibri" pitchFamily="34" charset="-122"/>
                 <a:cs typeface="Calibri" pitchFamily="34" charset="-120"/>
               </a:rPr>
-              <a:t>$1.00   </a:t>
+              <a:t>RM4.09   </a:t>
             </a:r>
             <a:pPr algn="l" indent="0" marL="0">
               <a:buNone/>
@@ -3124,7 +3124,7 @@
                 <a:ea typeface="Calibri" pitchFamily="34" charset="-122"/>
                 <a:cs typeface="Calibri" pitchFamily="34" charset="-120"/>
               </a:rPr>
-              <a:t>$0.04</a:t>
+              <a:t>RM0.16</a:t>
             </a:r>
             <a:endParaRPr lang="en-US" sz="1300" dirty="0"/>
           </a:p>
@@ -3351,7 +3351,7 @@
                 <a:ea typeface="Calibri" pitchFamily="34" charset="-122"/>
                 <a:cs typeface="Calibri" pitchFamily="34" charset="-120"/>
               </a:rPr>
-              <a:t>$0.40   </a:t>
+              <a:t>RM1.64   </a:t>
             </a:r>
             <a:pPr algn="l" indent="0" marL="0">
               <a:buNone/>
@@ -3379,7 +3379,7 @@
                 <a:ea typeface="Calibri" pitchFamily="34" charset="-122"/>
                 <a:cs typeface="Calibri" pitchFamily="34" charset="-120"/>
               </a:rPr>
-              <a:t>$0.05</a:t>
+              <a:t>RM0.20</a:t>
             </a:r>
             <a:endParaRPr lang="en-US" sz="1300" dirty="0"/>
           </a:p>
@@ -3606,7 +3606,7 @@
                 <a:ea typeface="Calibri" pitchFamily="34" charset="-122"/>
                 <a:cs typeface="Calibri" pitchFamily="34" charset="-120"/>
               </a:rPr>
-              <a:t>$0.50   </a:t>
+              <a:t>RM2.05   </a:t>
             </a:r>
             <a:pPr algn="l" indent="0" marL="0">
               <a:buNone/>
@@ -3634,7 +3634,7 @@
                 <a:ea typeface="Calibri" pitchFamily="34" charset="-122"/>
                 <a:cs typeface="Calibri" pitchFamily="34" charset="-120"/>
               </a:rPr>
-              <a:t>$0.07</a:t>
+              <a:t>RM0.29</a:t>
             </a:r>
             <a:endParaRPr lang="en-US" sz="1300" dirty="0"/>
           </a:p>
@@ -5340,7 +5340,7 @@
                           <a:ea typeface="Calibri" pitchFamily="34" charset="-122"/>
                           <a:cs typeface="Calibri" pitchFamily="34" charset="-120"/>
                         </a:rPr>
-                        <a:t>$16,900</a:t>
+                        <a:t>RM67,900</a:t>
                       </a:r>
                       <a:endParaRPr lang="en-US" sz="1250" dirty="0">
                         <a:latin typeface="Calibri" charset="0"/>
@@ -5408,7 +5408,7 @@
                           <a:ea typeface="Calibri" pitchFamily="34" charset="-122"/>
                           <a:cs typeface="Calibri" pitchFamily="34" charset="-120"/>
                         </a:rPr>
-                        <a:t>$41,285</a:t>
+                        <a:t>RM165,785</a:t>
                       </a:r>
                       <a:endParaRPr lang="en-US" sz="1250" dirty="0">
                         <a:latin typeface="Calibri" charset="0"/>
@@ -5476,7 +5476,7 @@
                           <a:ea typeface="Calibri" pitchFamily="34" charset="-122"/>
                           <a:cs typeface="Calibri" pitchFamily="34" charset="-120"/>
                         </a:rPr>
-                        <a:t>$94,540</a:t>
+                        <a:t>RM379,540</a:t>
                       </a:r>
                       <a:endParaRPr lang="en-US" sz="1250" dirty="0">
                         <a:latin typeface="Calibri" charset="0"/>
@@ -5614,7 +5614,7 @@
                           <a:ea typeface="Calibri" pitchFamily="34" charset="-122"/>
                           <a:cs typeface="Calibri" pitchFamily="34" charset="-120"/>
                         </a:rPr>
-                        <a:t>$2,535</a:t>
+                        <a:t>RM10,185</a:t>
                       </a:r>
                       <a:endParaRPr lang="en-US" sz="1250" dirty="0">
                         <a:latin typeface="Calibri" charset="0"/>
@@ -5682,7 +5682,7 @@
                           <a:ea typeface="Calibri" pitchFamily="34" charset="-122"/>
                           <a:cs typeface="Calibri" pitchFamily="34" charset="-120"/>
                         </a:rPr>
-                        <a:t>$6,193</a:t>
+                        <a:t>RM24,868</a:t>
                       </a:r>
                       <a:endParaRPr lang="en-US" sz="1250" dirty="0">
                         <a:latin typeface="Calibri" charset="0"/>
@@ -5750,7 +5750,7 @@
                           <a:ea typeface="Calibri" pitchFamily="34" charset="-122"/>
                           <a:cs typeface="Calibri" pitchFamily="34" charset="-120"/>
                         </a:rPr>
-                        <a:t>$14,181</a:t>
+                        <a:t>RM56,931</a:t>
                       </a:r>
                       <a:endParaRPr lang="en-US" sz="1250" dirty="0">
                         <a:latin typeface="Calibri" charset="0"/>
@@ -5888,7 +5888,7 @@
                           <a:ea typeface="Calibri" pitchFamily="34" charset="-122"/>
                           <a:cs typeface="Calibri" pitchFamily="34" charset="-120"/>
                         </a:rPr>
-                        <a:t>$19,435</a:t>
+                        <a:t>RM78,085</a:t>
                       </a:r>
                       <a:endParaRPr lang="en-US" sz="1400" dirty="0">
                         <a:latin typeface="Calibri" charset="0"/>
@@ -5956,7 +5956,7 @@
                           <a:ea typeface="Calibri" pitchFamily="34" charset="-122"/>
                           <a:cs typeface="Calibri" pitchFamily="34" charset="-120"/>
                         </a:rPr>
-                        <a:t>$47,478</a:t>
+                        <a:t>RM190,653</a:t>
                       </a:r>
                       <a:endParaRPr lang="en-US" sz="1400" dirty="0">
                         <a:latin typeface="Calibri" charset="0"/>
@@ -6024,7 +6024,7 @@
                           <a:ea typeface="Calibri" pitchFamily="34" charset="-122"/>
                           <a:cs typeface="Calibri" pitchFamily="34" charset="-120"/>
                         </a:rPr>
-                        <a:t>$108,721</a:t>
+                        <a:t>RM436,471</a:t>
                       </a:r>
                       <a:endParaRPr lang="en-US" sz="1400" dirty="0">
                         <a:latin typeface="Calibri" charset="0"/>
@@ -6162,7 +6162,7 @@
                           <a:ea typeface="Calibri" pitchFamily="34" charset="-122"/>
                           <a:cs typeface="Calibri" pitchFamily="34" charset="-120"/>
                         </a:rPr>
-                        <a:t>$233K</a:t>
+                        <a:t>RM937K</a:t>
                       </a:r>
                       <a:endParaRPr lang="en-US" sz="1400" dirty="0">
                         <a:latin typeface="Calibri" charset="0"/>
@@ -6230,7 +6230,7 @@
                           <a:ea typeface="Calibri" pitchFamily="34" charset="-122"/>
                           <a:cs typeface="Calibri" pitchFamily="34" charset="-120"/>
                         </a:rPr>
-                        <a:t>$570K</a:t>
+                        <a:t>RM2.29M</a:t>
                       </a:r>
                       <a:endParaRPr lang="en-US" sz="1400" dirty="0">
                         <a:latin typeface="Calibri" charset="0"/>
@@ -6298,7 +6298,7 @@
                           <a:ea typeface="Calibri" pitchFamily="34" charset="-122"/>
                           <a:cs typeface="Calibri" pitchFamily="34" charset="-120"/>
                         </a:rPr>
-                        <a:t>$1.30M</a:t>
+                        <a:t>RM5.24M</a:t>
                       </a:r>
                       <a:endParaRPr lang="en-US" sz="1400" dirty="0">
                         <a:latin typeface="Calibri" charset="0"/>
@@ -6452,7 +6452,7 @@
               <a:buNone/>
             </a:pPr>
             <a:r>
-              <a:rPr lang="en-US" sz="4400" b="1" dirty="0">
+              <a:rPr lang="en-US" sz="4000" b="1" dirty="0">
                 <a:solidFill>
                   <a:srgbClr val="FFFFFF"/>
                 </a:solidFill>
@@ -6460,9 +6460,9 @@
                 <a:ea typeface="Calibri" pitchFamily="34" charset="-122"/>
                 <a:cs typeface="Calibri" pitchFamily="34" charset="-120"/>
               </a:rPr>
-              <a:t>$570K</a:t>
-            </a:r>
-            <a:endParaRPr lang="en-US" sz="4400" dirty="0"/>
+              <a:t>RM2.29M</a:t>
+            </a:r>
+            <a:endParaRPr lang="en-US" sz="4000" dirty="0"/>
           </a:p>
         </p:txBody>
       </p:sp>
@@ -6614,7 +6614,7 @@
                 <a:ea typeface="Calibri" pitchFamily="34" charset="-122"/>
                 <a:cs typeface="Calibri" pitchFamily="34" charset="-120"/>
               </a:rPr>
-              <a:t>$215 </a:t>
+              <a:t>RM863 </a:t>
             </a:r>
             <a:pPr algn="l" indent="0" marL="0">
               <a:buNone/>
@@ -7083,7 +7083,7 @@
                 <a:ea typeface="Calibri" pitchFamily="34" charset="-122"/>
                 <a:cs typeface="Calibri" pitchFamily="34" charset="-120"/>
               </a:rPr>
-              <a:t>Sign off the list prices ($49 / $199 / $499) or reset them; they are proposed, not live in Stripe.</a:t>
+              <a:t>Sign off the list prices (RM199 / RM799 / RM1,999) or reset them; they are proposed, not live in Stripe.</a:t>
             </a:r>
             <a:endParaRPr lang="en-US" sz="1250" dirty="0"/>
           </a:p>
@@ -7282,7 +7282,7 @@
                 <a:ea typeface="Calibri" pitchFamily="34" charset="-122"/>
                 <a:cs typeface="Calibri" pitchFamily="34" charset="-120"/>
               </a:rPr>
-              <a:t>Heavy web-search use on screening pushes toward the max-cost end.</a:t>
+              <a:t>AI is billed in USD (≈ RM4.09); a weaker ringgit raises real cost of goods.</a:t>
             </a:r>
             <a:endParaRPr lang="en-US" sz="1250" dirty="0"/>
           </a:p>
@@ -7303,7 +7303,7 @@
                 <a:ea typeface="Calibri" pitchFamily="34" charset="-122"/>
                 <a:cs typeface="Calibri" pitchFamily="34" charset="-120"/>
               </a:rPr>
-              <a:t>FX drift (MYR / SGD) moves realized price; rates are admin-set, not automated.</a:t>
+              <a:t>Heavy web-search use on screening pushes toward the max-cost end.</a:t>
             </a:r>
             <a:endParaRPr lang="en-US" sz="1250" dirty="0"/>
           </a:p>
@@ -8872,7 +8872,7 @@
                 <a:ea typeface="Calibri" pitchFamily="34" charset="-122"/>
                 <a:cs typeface="Calibri" pitchFamily="34" charset="-120"/>
               </a:rPr>
-              <a:t>Overage sells at $1.00 / $0.40 / $0.50 per action against an AI cost of a few cents. This is where blended margin expands as accounts grow.</a:t>
+              <a:t>Overage sells at RM4.09 / RM1.64 / RM2.05 per action against an AI cost of a few sen. This is where blended margin expands as accounts grow.</a:t>
             </a:r>
             <a:endParaRPr lang="en-US" sz="1250" dirty="0"/>
           </a:p>
@@ -10234,7 +10234,7 @@
                 <a:ea typeface="Calibri" pitchFamily="34" charset="-122"/>
                 <a:cs typeface="Calibri" pitchFamily="34" charset="-120"/>
               </a:rPr>
-              <a:t>Model currency USD. Home-market MYR shown beneath (≈ FX 4.09). Annual = 2 months free (17% off).</a:t>
+              <a:t>All prices in Malaysian Ringgit (MYR), the workspace default. Annual = 2 months free (17% off).</a:t>
             </a:r>
             <a:endParaRPr lang="en-US" sz="1300" dirty="0"/>
           </a:p>
@@ -10377,7 +10377,7 @@
               <a:buNone/>
             </a:pPr>
             <a:r>
-              <a:rPr lang="en-US" sz="3400" b="1" dirty="0">
+              <a:rPr lang="en-US" sz="3000" b="1" dirty="0">
                 <a:solidFill>
                   <a:srgbClr val="12132A"/>
                 </a:solidFill>
@@ -10385,7 +10385,7 @@
                 <a:ea typeface="Calibri" pitchFamily="34" charset="-122"/>
                 <a:cs typeface="Calibri" pitchFamily="34" charset="-120"/>
               </a:rPr>
-              <a:t>$49</a:t>
+              <a:t>RM199</a:t>
             </a:r>
             <a:pPr algn="l" indent="0" marL="0">
               <a:buNone/>
@@ -10401,7 +10401,7 @@
               </a:rPr>
               <a:t> /mo</a:t>
             </a:r>
-            <a:endParaRPr lang="en-US" sz="3400" dirty="0"/>
+            <a:endParaRPr lang="en-US" sz="3000" dirty="0"/>
           </a:p>
         </p:txBody>
       </p:sp>
@@ -10438,7 +10438,7 @@
                 <a:ea typeface="Calibri" pitchFamily="34" charset="-122"/>
                 <a:cs typeface="Calibri" pitchFamily="34" charset="-120"/>
               </a:rPr>
-              <a:t>RM200 / mo</a:t>
+              <a:t>RM166 / mo on annual</a:t>
             </a:r>
             <a:endParaRPr lang="en-US" sz="1150" dirty="0"/>
           </a:p>
@@ -10477,7 +10477,7 @@
                 <a:ea typeface="Calibri" pitchFamily="34" charset="-122"/>
                 <a:cs typeface="Calibri" pitchFamily="34" charset="-120"/>
               </a:rPr>
-              <a:t>$490 billed yearly</a:t>
+              <a:t>RM1,990 billed yearly</a:t>
             </a:r>
             <a:endParaRPr lang="en-US" sz="1150" dirty="0"/>
           </a:p>
@@ -10821,7 +10821,7 @@
               <a:buNone/>
             </a:pPr>
             <a:r>
-              <a:rPr lang="en-US" sz="3400" b="1" dirty="0">
+              <a:rPr lang="en-US" sz="3000" b="1" dirty="0">
                 <a:solidFill>
                   <a:srgbClr val="FFFFFF"/>
                 </a:solidFill>
@@ -10829,7 +10829,7 @@
                 <a:ea typeface="Calibri" pitchFamily="34" charset="-122"/>
                 <a:cs typeface="Calibri" pitchFamily="34" charset="-120"/>
               </a:rPr>
-              <a:t>$199</a:t>
+              <a:t>RM799</a:t>
             </a:r>
             <a:pPr algn="l" indent="0" marL="0">
               <a:buNone/>
@@ -10845,7 +10845,7 @@
               </a:rPr>
               <a:t> /mo</a:t>
             </a:r>
-            <a:endParaRPr lang="en-US" sz="3400" dirty="0"/>
+            <a:endParaRPr lang="en-US" sz="3000" dirty="0"/>
           </a:p>
         </p:txBody>
       </p:sp>
@@ -10882,7 +10882,7 @@
                 <a:ea typeface="Calibri" pitchFamily="34" charset="-122"/>
                 <a:cs typeface="Calibri" pitchFamily="34" charset="-120"/>
               </a:rPr>
-              <a:t>RM810 / mo</a:t>
+              <a:t>RM666 / mo on annual</a:t>
             </a:r>
             <a:endParaRPr lang="en-US" sz="1150" dirty="0"/>
           </a:p>
@@ -10921,7 +10921,7 @@
                 <a:ea typeface="Calibri" pitchFamily="34" charset="-122"/>
                 <a:cs typeface="Calibri" pitchFamily="34" charset="-120"/>
               </a:rPr>
-              <a:t>$1,990 billed yearly</a:t>
+              <a:t>RM7,990 billed yearly</a:t>
             </a:r>
             <a:endParaRPr lang="en-US" sz="1150" dirty="0"/>
           </a:p>
@@ -11204,7 +11204,7 @@
               <a:buNone/>
             </a:pPr>
             <a:r>
-              <a:rPr lang="en-US" sz="3400" b="1" dirty="0">
+              <a:rPr lang="en-US" sz="3000" b="1" dirty="0">
                 <a:solidFill>
                   <a:srgbClr val="12132A"/>
                 </a:solidFill>
@@ -11212,7 +11212,7 @@
                 <a:ea typeface="Calibri" pitchFamily="34" charset="-122"/>
                 <a:cs typeface="Calibri" pitchFamily="34" charset="-120"/>
               </a:rPr>
-              <a:t>$499</a:t>
+              <a:t>RM1,999</a:t>
             </a:r>
             <a:pPr algn="l" indent="0" marL="0">
               <a:buNone/>
@@ -11228,7 +11228,7 @@
               </a:rPr>
               <a:t> /mo</a:t>
             </a:r>
-            <a:endParaRPr lang="en-US" sz="3400" dirty="0"/>
+            <a:endParaRPr lang="en-US" sz="3000" dirty="0"/>
           </a:p>
         </p:txBody>
       </p:sp>
@@ -11265,7 +11265,7 @@
                 <a:ea typeface="Calibri" pitchFamily="34" charset="-122"/>
                 <a:cs typeface="Calibri" pitchFamily="34" charset="-120"/>
               </a:rPr>
-              <a:t>RM2,040 / mo</a:t>
+              <a:t>RM1,666 / mo on annual</a:t>
             </a:r>
             <a:endParaRPr lang="en-US" sz="1150" dirty="0"/>
           </a:p>
@@ -11304,7 +11304,7 @@
                 <a:ea typeface="Calibri" pitchFamily="34" charset="-122"/>
                 <a:cs typeface="Calibri" pitchFamily="34" charset="-120"/>
               </a:rPr>
-              <a:t>$4,990 billed yearly</a:t>
+              <a:t>RM19,990 billed yearly</a:t>
             </a:r>
             <a:endParaRPr lang="en-US" sz="1150" dirty="0"/>
           </a:p>
@@ -11634,7 +11634,7 @@
                 <a:ea typeface="Calibri" pitchFamily="34" charset="-122"/>
                 <a:cs typeface="Calibri" pitchFamily="34" charset="-120"/>
               </a:rPr>
-              <a:t>From ~$1,500 / mo</a:t>
+              <a:t>From ~RM6,000 / mo</a:t>
             </a:r>
             <a:endParaRPr lang="en-US" sz="1150" dirty="0"/>
           </a:p>
@@ -16995,7 +16995,7 @@
               <a:buNone/>
             </a:pPr>
             <a:r>
-              <a:rPr lang="en-US" sz="3000" b="1" dirty="0">
+              <a:rPr lang="en-US" sz="2800" b="1" dirty="0">
                 <a:solidFill>
                   <a:srgbClr val="0B2AE0"/>
                 </a:solidFill>
@@ -17003,9 +17003,9 @@
                 <a:ea typeface="Calibri" pitchFamily="34" charset="-122"/>
                 <a:cs typeface="Calibri" pitchFamily="34" charset="-120"/>
               </a:rPr>
-              <a:t>$116</a:t>
-            </a:r>
-            <a:endParaRPr lang="en-US" sz="3000" dirty="0"/>
+              <a:t>RM474</a:t>
+            </a:r>
+            <a:endParaRPr lang="en-US" sz="2800" dirty="0"/>
           </a:p>
         </p:txBody>
       </p:sp>
@@ -17104,7 +17104,7 @@
                 <a:ea typeface="Calibri" pitchFamily="34" charset="-122"/>
                 <a:cs typeface="Calibri" pitchFamily="34" charset="-120"/>
               </a:rPr>
-              <a:t>$49</a:t>
+              <a:t>RM199</a:t>
             </a:r>
             <a:endParaRPr lang="en-US" sz="2400" dirty="0"/>
           </a:p>
@@ -17325,7 +17325,7 @@
               <a:buNone/>
             </a:pPr>
             <a:r>
-              <a:rPr lang="en-US" sz="3000" b="1" dirty="0">
+              <a:rPr lang="en-US" sz="2800" b="1" dirty="0">
                 <a:solidFill>
                   <a:srgbClr val="0B2AE0"/>
                 </a:solidFill>
@@ -17333,9 +17333,9 @@
                 <a:ea typeface="Calibri" pitchFamily="34" charset="-122"/>
                 <a:cs typeface="Calibri" pitchFamily="34" charset="-120"/>
               </a:rPr>
-              <a:t>$614</a:t>
-            </a:r>
-            <a:endParaRPr lang="en-US" sz="3000" dirty="0"/>
+              <a:t>RM2,511</a:t>
+            </a:r>
+            <a:endParaRPr lang="en-US" sz="2800" dirty="0"/>
           </a:p>
         </p:txBody>
       </p:sp>
@@ -17434,7 +17434,7 @@
                 <a:ea typeface="Calibri" pitchFamily="34" charset="-122"/>
                 <a:cs typeface="Calibri" pitchFamily="34" charset="-120"/>
               </a:rPr>
-              <a:t>$199</a:t>
+              <a:t>RM799</a:t>
             </a:r>
             <a:endParaRPr lang="en-US" sz="2400" dirty="0"/>
           </a:p>
@@ -17546,7 +17546,7 @@
                 <a:ea typeface="Calibri" pitchFamily="34" charset="-122"/>
                 <a:cs typeface="Calibri" pitchFamily="34" charset="-120"/>
               </a:rPr>
-              <a:t>2.6×</a:t>
+              <a:t>2.7×</a:t>
             </a:r>
             <a:endParaRPr lang="en-US" sz="2400" dirty="0"/>
           </a:p>
@@ -17655,7 +17655,7 @@
               <a:buNone/>
             </a:pPr>
             <a:r>
-              <a:rPr lang="en-US" sz="3000" b="1" dirty="0">
+              <a:rPr lang="en-US" sz="2800" b="1" dirty="0">
                 <a:solidFill>
                   <a:srgbClr val="0B2AE0"/>
                 </a:solidFill>
@@ -17663,9 +17663,9 @@
                 <a:ea typeface="Calibri" pitchFamily="34" charset="-122"/>
                 <a:cs typeface="Calibri" pitchFamily="34" charset="-120"/>
               </a:rPr>
-              <a:t>$1,300</a:t>
-            </a:r>
-            <a:endParaRPr lang="en-US" sz="3000" dirty="0"/>
+              <a:t>RM5,317</a:t>
+            </a:r>
+            <a:endParaRPr lang="en-US" sz="2800" dirty="0"/>
           </a:p>
         </p:txBody>
       </p:sp>
@@ -17764,7 +17764,7 @@
                 <a:ea typeface="Calibri" pitchFamily="34" charset="-122"/>
                 <a:cs typeface="Calibri" pitchFamily="34" charset="-120"/>
               </a:rPr>
-              <a:t>$499</a:t>
+              <a:t>RM1,999</a:t>
             </a:r>
             <a:endParaRPr lang="en-US" sz="2400" dirty="0"/>
           </a:p>
@@ -17803,7 +17803,7 @@
                 <a:ea typeface="Calibri" pitchFamily="34" charset="-122"/>
                 <a:cs typeface="Calibri" pitchFamily="34" charset="-120"/>
               </a:rPr>
-              <a:t>Included value = monthly allowance priced at list credit rates ($1.00 screening · $0.40 AI Rank / Insight / Questions).</a:t>
+              <a:t>Included value = monthly allowance priced at list credit rates (RM4.09 screening · RM1.64 AI Rank / Insight / Questions).</a:t>
             </a:r>
             <a:endParaRPr lang="en-US" sz="1050" dirty="0"/>
           </a:p>
@@ -18109,7 +18109,7 @@
                           <a:ea typeface="Calibri" pitchFamily="34" charset="-122"/>
                           <a:cs typeface="Calibri" pitchFamily="34" charset="-120"/>
                         </a:rPr>
-                        <a:t>List price (USD)</a:t>
+                        <a:t>List price (MYR)</a:t>
                       </a:r>
                       <a:endParaRPr lang="en-US" sz="1300" dirty="0">
                         <a:latin typeface="Calibri" charset="0"/>
@@ -18247,7 +18247,7 @@
                           <a:ea typeface="Calibri" pitchFamily="34" charset="-122"/>
                           <a:cs typeface="Calibri" pitchFamily="34" charset="-120"/>
                         </a:rPr>
-                        <a:t>$1.00</a:t>
+                        <a:t>RM4.09</a:t>
                       </a:r>
                       <a:endParaRPr lang="en-US" sz="1300" dirty="0">
                         <a:latin typeface="Calibri" charset="0"/>
@@ -18385,7 +18385,7 @@
                           <a:ea typeface="Calibri" pitchFamily="34" charset="-122"/>
                           <a:cs typeface="Calibri" pitchFamily="34" charset="-120"/>
                         </a:rPr>
-                        <a:t>$0.40</a:t>
+                        <a:t>RM1.64</a:t>
                       </a:r>
                       <a:endParaRPr lang="en-US" sz="1300" dirty="0">
                         <a:latin typeface="Calibri" charset="0"/>
@@ -18523,7 +18523,7 @@
                           <a:ea typeface="Calibri" pitchFamily="34" charset="-122"/>
                           <a:cs typeface="Calibri" pitchFamily="34" charset="-120"/>
                         </a:rPr>
-                        <a:t>$0.40</a:t>
+                        <a:t>RM1.64</a:t>
                       </a:r>
                       <a:endParaRPr lang="en-US" sz="1300" dirty="0">
                         <a:latin typeface="Calibri" charset="0"/>
@@ -18661,7 +18661,7 @@
                           <a:ea typeface="Calibri" pitchFamily="34" charset="-122"/>
                           <a:cs typeface="Calibri" pitchFamily="34" charset="-120"/>
                         </a:rPr>
-                        <a:t>$0.40</a:t>
+                        <a:t>RM1.64</a:t>
                       </a:r>
                       <a:endParaRPr lang="en-US" sz="1300" dirty="0">
                         <a:latin typeface="Calibri" charset="0"/>
@@ -18799,7 +18799,7 @@
                           <a:ea typeface="Calibri" pitchFamily="34" charset="-122"/>
                           <a:cs typeface="Calibri" pitchFamily="34" charset="-120"/>
                         </a:rPr>
-                        <a:t>$0.50</a:t>
+                        <a:t>RM2.05</a:t>
                       </a:r>
                       <a:endParaRPr lang="en-US" sz="1300" dirty="0">
                         <a:latin typeface="Calibri" charset="0"/>
@@ -20395,7 +20395,7 @@
                           <a:ea typeface="Calibri" pitchFamily="34" charset="-122"/>
                           <a:cs typeface="Calibri" pitchFamily="34" charset="-120"/>
                         </a:rPr>
-                        <a:t>$1.00</a:t>
+                        <a:t>RM4.09</a:t>
                       </a:r>
                       <a:endParaRPr lang="en-US" sz="1250" dirty="0">
                         <a:latin typeface="Calibri" charset="0"/>
@@ -20463,7 +20463,7 @@
                           <a:ea typeface="Calibri" pitchFamily="34" charset="-122"/>
                           <a:cs typeface="Calibri" pitchFamily="34" charset="-120"/>
                         </a:rPr>
-                        <a:t>~$0.04</a:t>
+                        <a:t>~RM0.16</a:t>
                       </a:r>
                       <a:endParaRPr lang="en-US" sz="1250" dirty="0">
                         <a:latin typeface="Calibri" charset="0"/>
@@ -20531,7 +20531,7 @@
                           <a:ea typeface="Calibri" pitchFamily="34" charset="-122"/>
                           <a:cs typeface="Calibri" pitchFamily="34" charset="-120"/>
                         </a:rPr>
-                        <a:t>~$0.14</a:t>
+                        <a:t>~RM0.57</a:t>
                       </a:r>
                       <a:endParaRPr lang="en-US" sz="1250" dirty="0">
                         <a:latin typeface="Calibri" charset="0"/>
@@ -20805,7 +20805,7 @@
                           <a:ea typeface="Calibri" pitchFamily="34" charset="-122"/>
                           <a:cs typeface="Calibri" pitchFamily="34" charset="-120"/>
                         </a:rPr>
-                        <a:t>$0.40</a:t>
+                        <a:t>RM1.64</a:t>
                       </a:r>
                       <a:endParaRPr lang="en-US" sz="1250" dirty="0">
                         <a:latin typeface="Calibri" charset="0"/>
@@ -20873,7 +20873,7 @@
                           <a:ea typeface="Calibri" pitchFamily="34" charset="-122"/>
                           <a:cs typeface="Calibri" pitchFamily="34" charset="-120"/>
                         </a:rPr>
-                        <a:t>~$0.05</a:t>
+                        <a:t>~RM0.20</a:t>
                       </a:r>
                       <a:endParaRPr lang="en-US" sz="1250" dirty="0">
                         <a:latin typeface="Calibri" charset="0"/>
@@ -20941,7 +20941,7 @@
                           <a:ea typeface="Calibri" pitchFamily="34" charset="-122"/>
                           <a:cs typeface="Calibri" pitchFamily="34" charset="-120"/>
                         </a:rPr>
-                        <a:t>~$0.12</a:t>
+                        <a:t>~RM0.49</a:t>
                       </a:r>
                       <a:endParaRPr lang="en-US" sz="1250" dirty="0">
                         <a:latin typeface="Calibri" charset="0"/>
@@ -21215,7 +21215,7 @@
                           <a:ea typeface="Calibri" pitchFamily="34" charset="-122"/>
                           <a:cs typeface="Calibri" pitchFamily="34" charset="-120"/>
                         </a:rPr>
-                        <a:t>$0.40</a:t>
+                        <a:t>RM1.64</a:t>
                       </a:r>
                       <a:endParaRPr lang="en-US" sz="1250" dirty="0">
                         <a:latin typeface="Calibri" charset="0"/>
@@ -21283,7 +21283,7 @@
                           <a:ea typeface="Calibri" pitchFamily="34" charset="-122"/>
                           <a:cs typeface="Calibri" pitchFamily="34" charset="-120"/>
                         </a:rPr>
-                        <a:t>~$0.01</a:t>
+                        <a:t>~RM0.04</a:t>
                       </a:r>
                       <a:endParaRPr lang="en-US" sz="1250" dirty="0">
                         <a:latin typeface="Calibri" charset="0"/>
@@ -21351,7 +21351,7 @@
                           <a:ea typeface="Calibri" pitchFamily="34" charset="-122"/>
                           <a:cs typeface="Calibri" pitchFamily="34" charset="-120"/>
                         </a:rPr>
-                        <a:t>~$0.01</a:t>
+                        <a:t>~RM0.04</a:t>
                       </a:r>
                       <a:endParaRPr lang="en-US" sz="1250" dirty="0">
                         <a:latin typeface="Calibri" charset="0"/>
@@ -21625,7 +21625,7 @@
                           <a:ea typeface="Calibri" pitchFamily="34" charset="-122"/>
                           <a:cs typeface="Calibri" pitchFamily="34" charset="-120"/>
                         </a:rPr>
-                        <a:t>$0.50</a:t>
+                        <a:t>RM2.05</a:t>
                       </a:r>
                       <a:endParaRPr lang="en-US" sz="1250" dirty="0">
                         <a:latin typeface="Calibri" charset="0"/>
@@ -21693,7 +21693,7 @@
                           <a:ea typeface="Calibri" pitchFamily="34" charset="-122"/>
                           <a:cs typeface="Calibri" pitchFamily="34" charset="-120"/>
                         </a:rPr>
-                        <a:t>~$0.07</a:t>
+                        <a:t>~RM0.29</a:t>
                       </a:r>
                       <a:endParaRPr lang="en-US" sz="1250" dirty="0">
                         <a:latin typeface="Calibri" charset="0"/>
@@ -21761,7 +21761,7 @@
                           <a:ea typeface="Calibri" pitchFamily="34" charset="-122"/>
                           <a:cs typeface="Calibri" pitchFamily="34" charset="-120"/>
                         </a:rPr>
-                        <a:t>~$0.11</a:t>
+                        <a:t>~RM0.45</a:t>
                       </a:r>
                       <a:endParaRPr lang="en-US" sz="1250" dirty="0">
                         <a:latin typeface="Calibri" charset="0"/>
@@ -22068,7 +22068,7 @@
                 <a:ea typeface="Calibri" pitchFamily="34" charset="-122"/>
                 <a:cs typeface="Calibri" pitchFamily="34" charset="-120"/>
               </a:rPr>
-              <a:t>~$0.04
+              <a:t>~RM0.16
 </a:t>
             </a:r>
             <a:pPr algn="l" indent="0" marL="0">
@@ -22103,7 +22103,7 @@
                 <a:ea typeface="Calibri" pitchFamily="34" charset="-122"/>
                 <a:cs typeface="Calibri" pitchFamily="34" charset="-120"/>
               </a:rPr>
-              <a:t>~$0.14</a:t>
+              <a:t>~RM0.57</a:t>
             </a:r>
             <a:pPr algn="l" indent="0" marL="0">
               <a:lnSpc>
@@ -22155,7 +22155,7 @@
                 <a:ea typeface="Calibri" pitchFamily="34" charset="-122"/>
                 <a:cs typeface="Calibri" pitchFamily="34" charset="-120"/>
               </a:rPr>
-              <a:t>$1.00</a:t>
+              <a:t>RM4.09</a:t>
             </a:r>
             <a:pPr algn="l" indent="0" marL="0">
               <a:lnSpc>
@@ -22228,7 +22228,7 @@
                 <a:ea typeface="Calibri" pitchFamily="34" charset="-122"/>
                 <a:cs typeface="Calibri" pitchFamily="34" charset="-120"/>
               </a:rPr>
-              <a:t>Model pricing per 1M tokens: Sonnet 5 $3 in / $15 out, Opus 5 $5 / $25, Haiku 4.5 $1 / $5. Web search ≈ $0.01 per lookup. Sonnet's introductory $2 / $10 rate (through 31 Aug) is a near-term tailwind.</a:t>
+              <a:t>Claude API is billed in USD (Sonnet 5 $3/$15, Opus 5 $5/$25, Haiku 4.5 $1/$5 per 1M tokens), converted here at RM4.09/USD. Web search ≈ RM0.04 per lookup. Sonnet's intro $2/$10 rate (through 31 Aug) is a near-term tailwind; a weaker ringgit is a risk (see slide 12).</a:t>
             </a:r>
             <a:endParaRPr lang="en-US" sz="1000" dirty="0"/>
           </a:p>

--- a/docs/aster-pricing-cfo.pptx
+++ b/docs/aster-pricing-cfo.pptx
@@ -208,7 +208,7 @@
                   <c:v>799</c:v>
                 </c:pt>
                 <c:pt idx="2">
-                  <c:v>1999</c:v>
+                  <c:v>999</c:v>
                 </c:pt>
               </c:numCache>
             </c:numRef>
@@ -372,7 +372,7 @@
         <c:axId val="2094734552"/>
         <c:scaling>
           <c:orientation val="minMax"/>
-          <c:max val="2200"/>
+          <c:max val="1150"/>
           <c:min val="0"/>
         </c:scaling>
         <c:delete val="1"/>
@@ -5340,7 +5340,7 @@
                           <a:ea typeface="Calibri" pitchFamily="34" charset="-122"/>
                           <a:cs typeface="Calibri" pitchFamily="34" charset="-120"/>
                         </a:rPr>
-                        <a:t>RM67,900</a:t>
+                        <a:t>RM57,900</a:t>
                       </a:r>
                       <a:endParaRPr lang="en-US" sz="1250" dirty="0">
                         <a:latin typeface="Calibri" charset="0"/>
@@ -5408,7 +5408,7 @@
                           <a:ea typeface="Calibri" pitchFamily="34" charset="-122"/>
                           <a:cs typeface="Calibri" pitchFamily="34" charset="-120"/>
                         </a:rPr>
-                        <a:t>RM165,785</a:t>
+                        <a:t>RM140,785</a:t>
                       </a:r>
                       <a:endParaRPr lang="en-US" sz="1250" dirty="0">
                         <a:latin typeface="Calibri" charset="0"/>
@@ -5476,7 +5476,7 @@
                           <a:ea typeface="Calibri" pitchFamily="34" charset="-122"/>
                           <a:cs typeface="Calibri" pitchFamily="34" charset="-120"/>
                         </a:rPr>
-                        <a:t>RM379,540</a:t>
+                        <a:t>RM319,540</a:t>
                       </a:r>
                       <a:endParaRPr lang="en-US" sz="1250" dirty="0">
                         <a:latin typeface="Calibri" charset="0"/>
@@ -5614,7 +5614,7 @@
                           <a:ea typeface="Calibri" pitchFamily="34" charset="-122"/>
                           <a:cs typeface="Calibri" pitchFamily="34" charset="-120"/>
                         </a:rPr>
-                        <a:t>RM10,185</a:t>
+                        <a:t>RM8,685</a:t>
                       </a:r>
                       <a:endParaRPr lang="en-US" sz="1250" dirty="0">
                         <a:latin typeface="Calibri" charset="0"/>
@@ -5682,7 +5682,7 @@
                           <a:ea typeface="Calibri" pitchFamily="34" charset="-122"/>
                           <a:cs typeface="Calibri" pitchFamily="34" charset="-120"/>
                         </a:rPr>
-                        <a:t>RM24,868</a:t>
+                        <a:t>RM21,118</a:t>
                       </a:r>
                       <a:endParaRPr lang="en-US" sz="1250" dirty="0">
                         <a:latin typeface="Calibri" charset="0"/>
@@ -5750,7 +5750,7 @@
                           <a:ea typeface="Calibri" pitchFamily="34" charset="-122"/>
                           <a:cs typeface="Calibri" pitchFamily="34" charset="-120"/>
                         </a:rPr>
-                        <a:t>RM56,931</a:t>
+                        <a:t>RM47,931</a:t>
                       </a:r>
                       <a:endParaRPr lang="en-US" sz="1250" dirty="0">
                         <a:latin typeface="Calibri" charset="0"/>
@@ -5888,7 +5888,7 @@
                           <a:ea typeface="Calibri" pitchFamily="34" charset="-122"/>
                           <a:cs typeface="Calibri" pitchFamily="34" charset="-120"/>
                         </a:rPr>
-                        <a:t>RM78,085</a:t>
+                        <a:t>RM66,585</a:t>
                       </a:r>
                       <a:endParaRPr lang="en-US" sz="1400" dirty="0">
                         <a:latin typeface="Calibri" charset="0"/>
@@ -5956,7 +5956,7 @@
                           <a:ea typeface="Calibri" pitchFamily="34" charset="-122"/>
                           <a:cs typeface="Calibri" pitchFamily="34" charset="-120"/>
                         </a:rPr>
-                        <a:t>RM190,653</a:t>
+                        <a:t>RM161,903</a:t>
                       </a:r>
                       <a:endParaRPr lang="en-US" sz="1400" dirty="0">
                         <a:latin typeface="Calibri" charset="0"/>
@@ -6024,7 +6024,7 @@
                           <a:ea typeface="Calibri" pitchFamily="34" charset="-122"/>
                           <a:cs typeface="Calibri" pitchFamily="34" charset="-120"/>
                         </a:rPr>
-                        <a:t>RM436,471</a:t>
+                        <a:t>RM367,471</a:t>
                       </a:r>
                       <a:endParaRPr lang="en-US" sz="1400" dirty="0">
                         <a:latin typeface="Calibri" charset="0"/>
@@ -6162,7 +6162,7 @@
                           <a:ea typeface="Calibri" pitchFamily="34" charset="-122"/>
                           <a:cs typeface="Calibri" pitchFamily="34" charset="-120"/>
                         </a:rPr>
-                        <a:t>RM937K</a:t>
+                        <a:t>RM799K</a:t>
                       </a:r>
                       <a:endParaRPr lang="en-US" sz="1400" dirty="0">
                         <a:latin typeface="Calibri" charset="0"/>
@@ -6230,7 +6230,7 @@
                           <a:ea typeface="Calibri" pitchFamily="34" charset="-122"/>
                           <a:cs typeface="Calibri" pitchFamily="34" charset="-120"/>
                         </a:rPr>
-                        <a:t>RM2.29M</a:t>
+                        <a:t>RM1.94M</a:t>
                       </a:r>
                       <a:endParaRPr lang="en-US" sz="1400" dirty="0">
                         <a:latin typeface="Calibri" charset="0"/>
@@ -6298,7 +6298,7 @@
                           <a:ea typeface="Calibri" pitchFamily="34" charset="-122"/>
                           <a:cs typeface="Calibri" pitchFamily="34" charset="-120"/>
                         </a:rPr>
-                        <a:t>RM5.24M</a:t>
+                        <a:t>RM4.41M</a:t>
                       </a:r>
                       <a:endParaRPr lang="en-US" sz="1400" dirty="0">
                         <a:latin typeface="Calibri" charset="0"/>
@@ -6460,7 +6460,7 @@
                 <a:ea typeface="Calibri" pitchFamily="34" charset="-122"/>
                 <a:cs typeface="Calibri" pitchFamily="34" charset="-120"/>
               </a:rPr>
-              <a:t>RM2.29M</a:t>
+              <a:t>RM1.94M</a:t>
             </a:r>
             <a:endParaRPr lang="en-US" sz="4000" dirty="0"/>
           </a:p>
@@ -6614,7 +6614,7 @@
                 <a:ea typeface="Calibri" pitchFamily="34" charset="-122"/>
                 <a:cs typeface="Calibri" pitchFamily="34" charset="-120"/>
               </a:rPr>
-              <a:t>RM863 </a:t>
+              <a:t>RM733 </a:t>
             </a:r>
             <a:pPr algn="l" indent="0" marL="0">
               <a:buNone/>
@@ -6667,7 +6667,7 @@
                 <a:ea typeface="Calibri" pitchFamily="34" charset="-122"/>
                 <a:cs typeface="Calibri" pitchFamily="34" charset="-120"/>
               </a:rPr>
-              <a:t>~86% </a:t>
+              <a:t>~85% </a:t>
             </a:r>
             <a:pPr algn="l" indent="0" marL="0">
               <a:buNone/>
@@ -7083,7 +7083,7 @@
                 <a:ea typeface="Calibri" pitchFamily="34" charset="-122"/>
                 <a:cs typeface="Calibri" pitchFamily="34" charset="-120"/>
               </a:rPr>
-              <a:t>Sign off the list prices (RM199 / RM799 / RM1,999) or reset them; they are proposed, not live in Stripe.</a:t>
+              <a:t>Sign off the list prices (RM199 / RM799 / RM999) or reset them; they are proposed, not live in Stripe.</a:t>
             </a:r>
             <a:endParaRPr lang="en-US" sz="1250" dirty="0"/>
           </a:p>
@@ -8447,7 +8447,7 @@
                 <a:ea typeface="Calibri" pitchFamily="34" charset="-122"/>
                 <a:cs typeface="Calibri" pitchFamily="34" charset="-120"/>
               </a:rPr>
-              <a:t>86–90%</a:t>
+              <a:t>74–90%</a:t>
             </a:r>
             <a:endParaRPr lang="en-US" sz="3000" dirty="0"/>
           </a:p>
@@ -8735,7 +8735,7 @@
                 <a:ea typeface="Calibri" pitchFamily="34" charset="-122"/>
                 <a:cs typeface="Calibri" pitchFamily="34" charset="-120"/>
               </a:rPr>
-              <a:t>Each tier bundles enough screening and AI credits to run its open roles. The bundle is worth 2–3× the plan price at list credit rates, which anchors upgrades.</a:t>
+              <a:t>Each tier bundles enough screening and AI credits to run its open roles. The bundle is worth 2–5× the plan price at list credit rates, which anchors upgrades.</a:t>
             </a:r>
             <a:endParaRPr lang="en-US" sz="1250" dirty="0"/>
           </a:p>
@@ -11212,7 +11212,7 @@
                 <a:ea typeface="Calibri" pitchFamily="34" charset="-122"/>
                 <a:cs typeface="Calibri" pitchFamily="34" charset="-120"/>
               </a:rPr>
-              <a:t>RM1,999</a:t>
+              <a:t>RM999</a:t>
             </a:r>
             <a:pPr algn="l" indent="0" marL="0">
               <a:buNone/>
@@ -11265,7 +11265,7 @@
                 <a:ea typeface="Calibri" pitchFamily="34" charset="-122"/>
                 <a:cs typeface="Calibri" pitchFamily="34" charset="-120"/>
               </a:rPr>
-              <a:t>RM1,666 / mo on annual</a:t>
+              <a:t>RM833 / mo on annual</a:t>
             </a:r>
             <a:endParaRPr lang="en-US" sz="1150" dirty="0"/>
           </a:p>
@@ -11304,7 +11304,7 @@
                 <a:ea typeface="Calibri" pitchFamily="34" charset="-122"/>
                 <a:cs typeface="Calibri" pitchFamily="34" charset="-120"/>
               </a:rPr>
-              <a:t>RM19,990 billed yearly</a:t>
+              <a:t>RM9,990 billed yearly</a:t>
             </a:r>
             <a:endParaRPr lang="en-US" sz="1150" dirty="0"/>
           </a:p>
@@ -16735,7 +16735,7 @@
                 <a:ea typeface="Calibri" pitchFamily="34" charset="-122"/>
                 <a:cs typeface="Calibri" pitchFamily="34" charset="-120"/>
               </a:rPr>
-              <a:t>The included AI is worth 2–3× the plan price</a:t>
+              <a:t>The included AI is worth 2–5× the plan price</a:t>
             </a:r>
             <a:endParaRPr lang="en-US" sz="3400" dirty="0"/>
           </a:p>
@@ -17546,7 +17546,7 @@
                 <a:ea typeface="Calibri" pitchFamily="34" charset="-122"/>
                 <a:cs typeface="Calibri" pitchFamily="34" charset="-120"/>
               </a:rPr>
-              <a:t>2.7×</a:t>
+              <a:t>5.3×</a:t>
             </a:r>
             <a:endParaRPr lang="en-US" sz="2400" dirty="0"/>
           </a:p>
@@ -17764,7 +17764,7 @@
                 <a:ea typeface="Calibri" pitchFamily="34" charset="-122"/>
                 <a:cs typeface="Calibri" pitchFamily="34" charset="-120"/>
               </a:rPr>
-              <a:t>RM1,999</a:t>
+              <a:t>RM999</a:t>
             </a:r>
             <a:endParaRPr lang="en-US" sz="2400" dirty="0"/>
           </a:p>
@@ -22965,7 +22965,7 @@
                 <a:ea typeface="Calibri" pitchFamily="34" charset="-122"/>
                 <a:cs typeface="Calibri" pitchFamily="34" charset="-120"/>
               </a:rPr>
-              <a:t>87%</a:t>
+              <a:t>74%</a:t>
             </a:r>
             <a:endParaRPr lang="en-US" sz="3000" dirty="0"/>
           </a:p>
@@ -23018,7 +23018,7 @@
                 <a:ea typeface="Calibri" pitchFamily="34" charset="-122"/>
                 <a:cs typeface="Calibri" pitchFamily="34" charset="-120"/>
               </a:rPr>
-              <a:t>(max unit cost AND 100% usage): Launch 66% · Scale 53% · Elite 59%.</a:t>
+              <a:t>(max unit cost AND 100% usage): Launch 66% · Scale 53% · Elite 17%.</a:t>
             </a:r>
             <a:endParaRPr lang="en-US" sz="1100" dirty="0"/>
           </a:p>

--- a/docs/aster-pricing-cfo.pptx
+++ b/docs/aster-pricing-cfo.pptx
@@ -6759,7 +6759,7 @@
                 <a:ea typeface="Calibri" pitchFamily="34" charset="-122"/>
                 <a:cs typeface="Calibri" pitchFamily="34" charset="-120"/>
               </a:rPr>
-              <a:t>Illustrative. MRR uses the proposed list prices; adjust mix and top-up rate with your CFO. Margin per slide 9.</a:t>
+              <a:t>Illustrative. Enterprise is a custom plan with no list price; modelled here at an assumed ~RM6,000/mo for the scenario only. Adjust mix, Enterprise deal size, and top-up rate with your CFO.</a:t>
             </a:r>
             <a:endParaRPr lang="en-US" sz="1000" dirty="0"/>
           </a:p>
@@ -11634,7 +11634,7 @@
                 <a:ea typeface="Calibri" pitchFamily="34" charset="-122"/>
                 <a:cs typeface="Calibri" pitchFamily="34" charset="-120"/>
               </a:rPr>
-              <a:t>From ~RM6,000 / mo</a:t>
+              <a:t>Custom solution</a:t>
             </a:r>
             <a:endParaRPr lang="en-US" sz="1150" dirty="0"/>
           </a:p>
@@ -11673,7 +11673,7 @@
                 <a:ea typeface="Calibri" pitchFamily="34" charset="-122"/>
                 <a:cs typeface="Calibri" pitchFamily="34" charset="-120"/>
               </a:rPr>
-              <a:t>Annual contract</a:t>
+              <a:t>Tailored pricing</a:t>
             </a:r>
             <a:endParaRPr lang="en-US" sz="1150" dirty="0"/>
           </a:p>

--- a/docs/aster-pricing-cfo.pptx
+++ b/docs/aster-pricing-cfo.pptx
@@ -18,9 +18,10 @@
     <p:sldId id="266" r:id="rId12"/>
     <p:sldId id="267" r:id="rId13"/>
     <p:sldId id="268" r:id="rId14"/>
+    <p:sldId id="269" r:id="rId15"/>
   </p:sldIdLst>
   <p:notesMasterIdLst>
-    <p:notesMasterId r:id="rId15"/>
+    <p:notesMasterId r:id="rId16"/>
   </p:notesMasterIdLst>
   <p:sldSz cx="12192000" cy="6858000"/>
   <p:notesSz cx="6858000" cy="12192000"/>
@@ -117,340 +118,6 @@
     </a:lvl9pPr>
   </p:defaultTextStyle>
 </p:presentation>
-</file>
-
-<file path=ppt/charts/chart1.xml><?xml version="1.0" encoding="utf-8"?>
-<c:chartSpace xmlns:c="http://schemas.openxmlformats.org/drawingml/2006/chart" xmlns:a="http://schemas.openxmlformats.org/drawingml/2006/main" xmlns:r="http://schemas.openxmlformats.org/officeDocument/2006/relationships">
-  <c:date1904 val="0"/>
-  <c:roundedCorners val="1"/>
-  <c:chart>
-    <c:autoTitleDeleted val="1"/>
-    <c:plotArea>
-      <c:layout/>
-      <c:barChart>
-        <c:barDir val="col"/>
-        <c:grouping val="clustered"/>
-        <c:varyColors val="0"/>
-        <c:ser>
-          <c:idx val="0"/>
-          <c:order val="0"/>
-          <c:tx>
-            <c:strRef>
-              <c:f>Sheet1!$B$1</c:f>
-              <c:strCache>
-                <c:ptCount val="1"/>
-                <c:pt idx="0">
-                  <c:v>Revenue</c:v>
-                </c:pt>
-              </c:strCache>
-            </c:strRef>
-          </c:tx>
-          <c:spPr>
-            <a:solidFill>
-              <a:srgbClr val="0B2AE0"/>
-            </a:solidFill>
-            <a:effectLst/>
-          </c:spPr>
-          <c:invertIfNegative val="0"/>
-          <c:dLbls>
-            <c:numFmt formatCode="&quot;RM&quot;#,##0" sourceLinked="0"/>
-            <c:txPr>
-              <a:bodyPr/>
-              <a:lstStyle/>
-              <a:p>
-                <a:pPr>
-                  <a:defRPr b="0" i="0" strike="noStrike" sz="1000" u="none">
-                    <a:solidFill>
-                      <a:srgbClr val="12132A"/>
-                    </a:solidFill>
-                    <a:latin typeface="Calibri"/>
-                  </a:defRPr>
-                </a:pPr>
-              </a:p>
-            </c:txPr>
-            <c:showLegendKey val="0"/>
-            <c:showVal val="1"/>
-            <c:showCatName val="0"/>
-            <c:showSerName val="0"/>
-            <c:showPercent val="0"/>
-            <c:showBubbleSize val="0"/>
-            <c:showLeaderLines val="0"/>
-          </c:dLbls>
-          <c:cat>
-            <c:multiLvlStrRef>
-              <c:f>Sheet1!$A$2:$A$4</c:f>
-              <c:multiLvlStrCache>
-                <c:ptCount val="3"/>
-                <c:lvl>
-                  <c:pt idx="0">
-                    <c:v>Launch</c:v>
-                  </c:pt>
-                  <c:pt idx="1">
-                    <c:v>Scale</c:v>
-                  </c:pt>
-                  <c:pt idx="2">
-                    <c:v>Elite</c:v>
-                  </c:pt>
-                </c:lvl>
-              </c:multiLvlStrCache>
-            </c:multiLvlStrRef>
-          </c:cat>
-          <c:val>
-            <c:numRef>
-              <c:f>Sheet1!$B$2:$B$4</c:f>
-              <c:numCache>
-                <c:formatCode>General</c:formatCode>
-                <c:ptCount val="3"/>
-                <c:pt idx="0">
-                  <c:v>199</c:v>
-                </c:pt>
-                <c:pt idx="1">
-                  <c:v>799</c:v>
-                </c:pt>
-                <c:pt idx="2">
-                  <c:v>999</c:v>
-                </c:pt>
-              </c:numCache>
-            </c:numRef>
-          </c:val>
-        </c:ser>
-        <c:ser>
-          <c:idx val="1"/>
-          <c:order val="1"/>
-          <c:tx>
-            <c:strRef>
-              <c:f>Sheet1!$C$1</c:f>
-              <c:strCache>
-                <c:ptCount val="1"/>
-                <c:pt idx="0">
-                  <c:v>AI cost of goods</c:v>
-                </c:pt>
-              </c:strCache>
-            </c:strRef>
-          </c:tx>
-          <c:spPr>
-            <a:solidFill>
-              <a:srgbClr val="C6CEF6"/>
-            </a:solidFill>
-            <a:effectLst/>
-          </c:spPr>
-          <c:invertIfNegative val="0"/>
-          <c:dLbls>
-            <c:numFmt formatCode="&quot;RM&quot;#,##0" sourceLinked="0"/>
-            <c:txPr>
-              <a:bodyPr/>
-              <a:lstStyle/>
-              <a:p>
-                <a:pPr>
-                  <a:defRPr b="0" i="0" strike="noStrike" sz="1000" u="none">
-                    <a:solidFill>
-                      <a:srgbClr val="12132A"/>
-                    </a:solidFill>
-                    <a:latin typeface="Calibri"/>
-                  </a:defRPr>
-                </a:pPr>
-              </a:p>
-            </c:txPr>
-            <c:showLegendKey val="0"/>
-            <c:showVal val="1"/>
-            <c:showCatName val="0"/>
-            <c:showSerName val="0"/>
-            <c:showPercent val="0"/>
-            <c:showBubbleSize val="0"/>
-            <c:showLeaderLines val="0"/>
-          </c:dLbls>
-          <c:cat>
-            <c:multiLvlStrRef>
-              <c:f>Sheet1!$A$2:$A$4</c:f>
-              <c:multiLvlStrCache>
-                <c:ptCount val="3"/>
-                <c:lvl>
-                  <c:pt idx="0">
-                    <c:v>Launch</c:v>
-                  </c:pt>
-                  <c:pt idx="1">
-                    <c:v>Scale</c:v>
-                  </c:pt>
-                  <c:pt idx="2">
-                    <c:v>Elite</c:v>
-                  </c:pt>
-                </c:lvl>
-              </c:multiLvlStrCache>
-            </c:multiLvlStrRef>
-          </c:cat>
-          <c:val>
-            <c:numRef>
-              <c:f>Sheet1!$C$2:$C$4</c:f>
-              <c:numCache>
-                <c:formatCode>General</c:formatCode>
-                <c:ptCount val="3"/>
-                <c:pt idx="0">
-                  <c:v>20</c:v>
-                </c:pt>
-                <c:pt idx="1">
-                  <c:v>115</c:v>
-                </c:pt>
-                <c:pt idx="2">
-                  <c:v>260</c:v>
-                </c:pt>
-              </c:numCache>
-            </c:numRef>
-          </c:val>
-        </c:ser>
-        <c:dLbls>
-          <c:numFmt formatCode="&quot;RM&quot;#,##0" sourceLinked="0"/>
-          <c:txPr>
-            <a:bodyPr/>
-            <a:lstStyle/>
-            <a:p>
-              <a:pPr>
-                <a:defRPr b="0" i="0" strike="noStrike" sz="1000" u="none">
-                  <a:solidFill>
-                    <a:srgbClr val="12132A"/>
-                  </a:solidFill>
-                  <a:latin typeface="Calibri"/>
-                </a:defRPr>
-              </a:pPr>
-            </a:p>
-          </c:txPr>
-          <c:showLegendKey val="0"/>
-          <c:showVal val="1"/>
-          <c:showCatName val="0"/>
-          <c:showSerName val="0"/>
-          <c:showPercent val="0"/>
-          <c:showBubbleSize val="0"/>
-          <c:showLeaderLines val="0"/>
-        </c:dLbls>
-        <c:gapWidth val="150"/>
-        <c:overlap val="0"/>
-        <c:axId val="2094734554"/>
-        <c:axId val="2094734552"/>
-        <c:axId val="2094734556"/>
-      </c:barChart>
-      <c:catAx>
-        <c:axId val="2094734554"/>
-        <c:scaling>
-          <c:orientation val="minMax"/>
-        </c:scaling>
-        <c:delete val="0"/>
-        <c:axPos val="b"/>
-        <c:numFmt formatCode="General" sourceLinked="1"/>
-        <c:majorTickMark val="out"/>
-        <c:minorTickMark val="none"/>
-        <c:tickLblPos val="low"/>
-        <c:spPr>
-          <a:ln w="12700" cap="flat">
-            <a:solidFill>
-              <a:srgbClr val="888888"/>
-            </a:solidFill>
-            <a:prstDash val="solid"/>
-            <a:round/>
-          </a:ln>
-        </c:spPr>
-        <c:txPr>
-          <a:bodyPr/>
-          <a:lstStyle/>
-          <a:p>
-            <a:pPr>
-              <a:defRPr sz="1200" b="0" i="0" u="none" strike="noStrike">
-                <a:solidFill>
-                  <a:srgbClr val="4A5568"/>
-                </a:solidFill>
-                <a:latin typeface="Calibri"/>
-              </a:defRPr>
-            </a:pPr>
-            <a:endParaRPr lang="en-US"/>
-          </a:p>
-        </c:txPr>
-        <c:crossAx val="2094734552"/>
-        <c:crosses val="autoZero"/>
-        <c:auto val="1"/>
-        <c:lblAlgn val="ctr"/>
-        <c:noMultiLvlLbl val="1"/>
-      </c:catAx>
-      <c:valAx>
-        <c:axId val="2094734552"/>
-        <c:scaling>
-          <c:orientation val="minMax"/>
-          <c:max val="1150"/>
-          <c:min val="0"/>
-        </c:scaling>
-        <c:delete val="1"/>
-        <c:axPos val="l"/>
-        <c:numFmt formatCode="General" sourceLinked="0"/>
-        <c:majorTickMark val="out"/>
-        <c:minorTickMark val="none"/>
-        <c:tickLblPos val="nextTo"/>
-        <c:spPr>
-          <a:ln w="12700" cap="flat">
-            <a:solidFill>
-              <a:srgbClr val="888888"/>
-            </a:solidFill>
-            <a:prstDash val="solid"/>
-            <a:round/>
-          </a:ln>
-        </c:spPr>
-        <c:txPr>
-          <a:bodyPr/>
-          <a:lstStyle/>
-          <a:p>
-            <a:pPr>
-              <a:defRPr sz="1200" b="0" i="0" u="none" strike="noStrike">
-                <a:solidFill>
-                  <a:srgbClr val="000000"/>
-                </a:solidFill>
-                <a:latin typeface="Arial"/>
-              </a:defRPr>
-            </a:pPr>
-            <a:endParaRPr lang="en-US"/>
-          </a:p>
-        </c:txPr>
-        <c:crossAx val="2094734554"/>
-        <c:crosses val="autoZero"/>
-        <c:crossBetween val="between"/>
-      </c:valAx>
-      <c:spPr>
-        <a:noFill/>
-        <a:ln>
-          <a:noFill/>
-        </a:ln>
-        <a:effectLst/>
-      </c:spPr>
-    </c:plotArea>
-    <c:legend>
-      <c:legendPos val="t"/>
-      <c:overlay val="0"/>
-      <c:txPr>
-        <a:bodyPr/>
-        <a:lstStyle/>
-        <a:p>
-          <a:pPr>
-            <a:defRPr sz="1100">
-              <a:solidFill>
-                <a:srgbClr val="4A5568"/>
-              </a:solidFill>
-              <a:latin typeface="Calibri"/>
-              <a:cs typeface="Calibri"/>
-            </a:defRPr>
-          </a:pPr>
-          <a:endParaRPr lang="en-US"/>
-        </a:p>
-      </c:txPr>
-    </c:legend>
-    <c:plotVisOnly val="1"/>
-    <c:dispBlanksAs val="span"/>
-  </c:chart>
-  <c:spPr>
-    <a:noFill/>
-    <a:ln>
-      <a:noFill/>
-    </a:ln>
-    <a:effectLst/>
-  </c:spPr>
-  <c:externalData r:id="rId1">
-    <c:autoUpdate val="0"/>
-  </c:externalData>
-</c:chartSpace>
 </file>
 
 <file path=ppt/notesMasters/notesMaster1.xml><?xml version="1.0" encoding="utf-8"?>
@@ -1224,6 +891,94 @@
             <a:fld id="{F7021451-1387-4CA6-816F-3879F97B5CBC}" type="slidenum">
               <a:rPr lang="en-US"/>
               <a:t>13</a:t>
+            </a:fld>
+            <a:endParaRPr lang="en-US"/>
+          </a:p>
+        </p:txBody>
+      </p:sp>
+    </p:spTree>
+    <p:extLst>
+      <p:ext uri="{BB962C8B-B14F-4D97-AF65-F5344CB8AC3E}">
+        <p14:creationId xmlns:p14="http://schemas.microsoft.com/office/powerpoint/2010/main" val="1024086991"/>
+      </p:ext>
+    </p:extLst>
+  </p:cSld>
+  <p:clrMapOvr>
+    <a:masterClrMapping/>
+  </p:clrMapOvr>
+</p:notes>
+</file>
+
+<file path=ppt/notesSlides/notesSlide14.xml><?xml version="1.0" encoding="utf-8"?>
+<p:notes xmlns:a="http://schemas.openxmlformats.org/drawingml/2006/main" xmlns:r="http://schemas.openxmlformats.org/officeDocument/2006/relationships" xmlns:p="http://schemas.openxmlformats.org/presentationml/2006/main">
+  <p:cSld>
+    <p:spTree>
+      <p:nvGrpSpPr>
+        <p:cNvPr id="1" name=""/>
+        <p:cNvGrpSpPr/>
+        <p:nvPr/>
+      </p:nvGrpSpPr>
+      <p:grpSpPr>
+        <a:xfrm>
+          <a:off x="0" y="0"/>
+          <a:ext cx="0" cy="0"/>
+          <a:chOff x="0" y="0"/>
+          <a:chExt cx="0" cy="0"/>
+        </a:xfrm>
+      </p:grpSpPr>
+      <p:sp>
+        <p:nvSpPr>
+          <p:cNvPr id="2" name="Slide Image Placeholder 1"/>
+          <p:cNvSpPr>
+            <a:spLocks noGrp="1" noRot="1" noChangeAspect="1"/>
+          </p:cNvSpPr>
+          <p:nvPr>
+            <p:ph type="sldImg"/>
+          </p:nvPr>
+        </p:nvSpPr>
+        <p:spPr/>
+      </p:sp>
+      <p:sp>
+        <p:nvSpPr>
+          <p:cNvPr id="3" name="Notes Placeholder 2"/>
+          <p:cNvSpPr>
+            <a:spLocks noGrp="1"/>
+          </p:cNvSpPr>
+          <p:nvPr>
+            <p:ph type="body" idx="1"/>
+          </p:nvPr>
+        </p:nvSpPr>
+        <p:spPr/>
+        <p:txBody>
+          <a:bodyPr/>
+          <a:lstStyle/>
+          <a:p>
+            <a:r>
+              <a:rPr lang="en-US" dirty="0"/>
+              <a:t/>
+            </a:r>
+            <a:endParaRPr lang="en-US" dirty="0"/>
+          </a:p>
+        </p:txBody>
+      </p:sp>
+      <p:sp>
+        <p:nvSpPr>
+          <p:cNvPr id="4" name="Slide Number Placeholder 3"/>
+          <p:cNvSpPr>
+            <a:spLocks noGrp="1"/>
+          </p:cNvSpPr>
+          <p:nvPr>
+            <p:ph type="sldNum" sz="quarter" idx="10"/>
+          </p:nvPr>
+        </p:nvSpPr>
+        <p:spPr/>
+        <p:txBody>
+          <a:bodyPr/>
+          <a:lstStyle/>
+          <a:p>
+            <a:fld id="{F7021451-1387-4CA6-816F-3879F97B5CBC}" type="slidenum">
+              <a:rPr lang="en-US"/>
+              <a:t>14</a:t>
             </a:fld>
             <a:endParaRPr lang="en-US"/>
           </a:p>
@@ -2791,6 +2546,3458 @@
                 <a:ea typeface="Calibri" pitchFamily="34" charset="-122"/>
                 <a:cs typeface="Calibri" pitchFamily="34" charset="-120"/>
               </a:rPr>
+              <a:t>ALL-IN UNIT ECONOMICS</a:t>
+            </a:r>
+            <a:endParaRPr lang="en-US" sz="1200" dirty="0"/>
+          </a:p>
+        </p:txBody>
+      </p:sp>
+      <p:sp>
+        <p:nvSpPr>
+          <p:cNvPr id="3" name="Text 1"/>
+          <p:cNvSpPr/>
+          <p:nvPr/>
+        </p:nvSpPr>
+        <p:spPr>
+          <a:xfrm>
+            <a:off x="548640" y="777240"/>
+            <a:ext cx="11064240" cy="822960"/>
+          </a:xfrm>
+          <a:prstGeom prst="rect">
+            <a:avLst/>
+          </a:prstGeom>
+          <a:noFill/>
+          <a:ln/>
+        </p:spPr>
+        <p:txBody>
+          <a:bodyPr wrap="square" lIns="0" tIns="0" rIns="0" bIns="0" rtlCol="0" anchor="ctr"/>
+          <a:lstStyle/>
+          <a:p>
+            <a:pPr algn="l" indent="0" marL="0">
+              <a:buNone/>
+            </a:pPr>
+            <a:r>
+              <a:rPr lang="en-US" sz="3400" b="1" dirty="0">
+                <a:solidFill>
+                  <a:srgbClr val="12132A"/>
+                </a:solidFill>
+                <a:latin typeface="Calibri" pitchFamily="34" charset="0"/>
+                <a:ea typeface="Calibri" pitchFamily="34" charset="-122"/>
+                <a:cs typeface="Calibri" pitchFamily="34" charset="-120"/>
+              </a:rPr>
+              <a:t>Cost to serve, per company / month</a:t>
+            </a:r>
+            <a:endParaRPr lang="en-US" sz="3400" dirty="0"/>
+          </a:p>
+        </p:txBody>
+      </p:sp>
+      <p:graphicFrame>
+        <p:nvGraphicFramePr>
+          <p:cNvPr id="11" name="Table 0"/>
+          <p:cNvGraphicFramePr>
+            <a:graphicFrameLocks noGrp="1"/>
+          </p:cNvGraphicFramePr>
+          <p:nvPr>
+            <p:extLst>
+              <p:ext uri="{D42A27DB-BD31-4B8C-83A1-F6EECF244321}">
+                <p14:modId xmlns:p14="http://schemas.microsoft.com/office/powerpoint/2010/main" val="1579011935"/>
+              </p:ext>
+            </p:extLst>
+          </p:nvPr>
+        </p:nvGraphicFramePr>
+        <p:xfrm>
+          <a:off x="548640" y="1874520"/>
+          <a:ext cx="7680960" cy="914400"/>
+        </p:xfrm>
+        <a:graphic>
+          <a:graphicData uri="http://schemas.openxmlformats.org/drawingml/2006/table">
+            <a:tbl>
+              <a:tblPr/>
+              <a:tblGrid>
+                <a:gridCol w="2743200"/>
+                <a:gridCol w="1645920"/>
+                <a:gridCol w="1645920"/>
+                <a:gridCol w="1645920"/>
+              </a:tblGrid>
+              <a:tr h="411480">
+                <a:tc>
+                  <a:txBody>
+                    <a:bodyPr/>
+                    <a:lstStyle/>
+                    <a:p>
+                      <a:pPr algn="l" indent="0" marL="0">
+                        <a:buNone/>
+                      </a:pPr>
+                      <a:r>
+                        <a:rPr lang="en-US" sz="1250" b="1" dirty="0">
+                          <a:solidFill>
+                            <a:srgbClr val="FFFFFF"/>
+                          </a:solidFill>
+                          <a:latin typeface="Calibri" pitchFamily="34" charset="0"/>
+                          <a:ea typeface="Calibri" pitchFamily="34" charset="-122"/>
+                          <a:cs typeface="Calibri" pitchFamily="34" charset="-120"/>
+                        </a:rPr>
+                        <a:t>Cost line / mo</a:t>
+                      </a:r>
+                      <a:endParaRPr lang="en-US" sz="1250" dirty="0">
+                        <a:latin typeface="Calibri" charset="0"/>
+                        <a:ea typeface="Calibri" charset="0"/>
+                        <a:cs typeface="Calibri" charset="0"/>
+                      </a:endParaRPr>
+                    </a:p>
+                  </a:txBody>
+                  <a:tcPr marL="101600" marR="101600" marT="25400" marB="25400" anchor="ctr">
+                    <a:lnL w="6350" cap="flat" cmpd="sng" algn="ctr">
+                      <a:solidFill>
+                        <a:srgbClr val="E6E8F0"/>
+                      </a:solidFill>
+                      <a:prstDash val="solid"/>
+                      <a:round/>
+                      <a:headEnd type="none" w="med" len="med"/>
+                      <a:tailEnd type="none" w="med" len="med"/>
+                    </a:lnL>
+                    <a:lnR w="6350" cap="flat" cmpd="sng" algn="ctr">
+                      <a:solidFill>
+                        <a:srgbClr val="E6E8F0"/>
+                      </a:solidFill>
+                      <a:prstDash val="solid"/>
+                      <a:round/>
+                      <a:headEnd type="none" w="med" len="med"/>
+                      <a:tailEnd type="none" w="med" len="med"/>
+                    </a:lnR>
+                    <a:lnT w="6350" cap="flat" cmpd="sng" algn="ctr">
+                      <a:solidFill>
+                        <a:srgbClr val="E6E8F0"/>
+                      </a:solidFill>
+                      <a:prstDash val="solid"/>
+                      <a:round/>
+                      <a:headEnd type="none" w="med" len="med"/>
+                      <a:tailEnd type="none" w="med" len="med"/>
+                    </a:lnT>
+                    <a:lnB w="6350" cap="flat" cmpd="sng" algn="ctr">
+                      <a:solidFill>
+                        <a:srgbClr val="E6E8F0"/>
+                      </a:solidFill>
+                      <a:prstDash val="solid"/>
+                      <a:round/>
+                      <a:headEnd type="none" w="med" len="med"/>
+                      <a:tailEnd type="none" w="med" len="med"/>
+                    </a:lnB>
+                    <a:solidFill>
+                      <a:srgbClr val="0A1FC2"/>
+                    </a:solidFill>
+                  </a:tcPr>
+                </a:tc>
+                <a:tc>
+                  <a:txBody>
+                    <a:bodyPr/>
+                    <a:lstStyle/>
+                    <a:p>
+                      <a:pPr algn="ctr" indent="0" marL="0">
+                        <a:buNone/>
+                      </a:pPr>
+                      <a:r>
+                        <a:rPr lang="en-US" sz="1250" b="1" dirty="0">
+                          <a:solidFill>
+                            <a:srgbClr val="FFFFFF"/>
+                          </a:solidFill>
+                          <a:latin typeface="Calibri" pitchFamily="34" charset="0"/>
+                          <a:ea typeface="Calibri" pitchFamily="34" charset="-122"/>
+                          <a:cs typeface="Calibri" pitchFamily="34" charset="-120"/>
+                        </a:rPr>
+                        <a:t>Launch</a:t>
+                      </a:r>
+                      <a:endParaRPr lang="en-US" sz="1250" dirty="0">
+                        <a:latin typeface="Calibri" charset="0"/>
+                        <a:ea typeface="Calibri" charset="0"/>
+                        <a:cs typeface="Calibri" charset="0"/>
+                      </a:endParaRPr>
+                    </a:p>
+                  </a:txBody>
+                  <a:tcPr marL="101600" marR="101600" marT="25400" marB="25400" anchor="ctr">
+                    <a:lnL w="6350" cap="flat" cmpd="sng" algn="ctr">
+                      <a:solidFill>
+                        <a:srgbClr val="E6E8F0"/>
+                      </a:solidFill>
+                      <a:prstDash val="solid"/>
+                      <a:round/>
+                      <a:headEnd type="none" w="med" len="med"/>
+                      <a:tailEnd type="none" w="med" len="med"/>
+                    </a:lnL>
+                    <a:lnR w="6350" cap="flat" cmpd="sng" algn="ctr">
+                      <a:solidFill>
+                        <a:srgbClr val="E6E8F0"/>
+                      </a:solidFill>
+                      <a:prstDash val="solid"/>
+                      <a:round/>
+                      <a:headEnd type="none" w="med" len="med"/>
+                      <a:tailEnd type="none" w="med" len="med"/>
+                    </a:lnR>
+                    <a:lnT w="6350" cap="flat" cmpd="sng" algn="ctr">
+                      <a:solidFill>
+                        <a:srgbClr val="E6E8F0"/>
+                      </a:solidFill>
+                      <a:prstDash val="solid"/>
+                      <a:round/>
+                      <a:headEnd type="none" w="med" len="med"/>
+                      <a:tailEnd type="none" w="med" len="med"/>
+                    </a:lnT>
+                    <a:lnB w="6350" cap="flat" cmpd="sng" algn="ctr">
+                      <a:solidFill>
+                        <a:srgbClr val="E6E8F0"/>
+                      </a:solidFill>
+                      <a:prstDash val="solid"/>
+                      <a:round/>
+                      <a:headEnd type="none" w="med" len="med"/>
+                      <a:tailEnd type="none" w="med" len="med"/>
+                    </a:lnB>
+                    <a:solidFill>
+                      <a:srgbClr val="0A1FC2"/>
+                    </a:solidFill>
+                  </a:tcPr>
+                </a:tc>
+                <a:tc>
+                  <a:txBody>
+                    <a:bodyPr/>
+                    <a:lstStyle/>
+                    <a:p>
+                      <a:pPr algn="ctr" indent="0" marL="0">
+                        <a:buNone/>
+                      </a:pPr>
+                      <a:r>
+                        <a:rPr lang="en-US" sz="1250" b="1" dirty="0">
+                          <a:solidFill>
+                            <a:srgbClr val="FFFFFF"/>
+                          </a:solidFill>
+                          <a:latin typeface="Calibri" pitchFamily="34" charset="0"/>
+                          <a:ea typeface="Calibri" pitchFamily="34" charset="-122"/>
+                          <a:cs typeface="Calibri" pitchFamily="34" charset="-120"/>
+                        </a:rPr>
+                        <a:t>Scale</a:t>
+                      </a:r>
+                      <a:endParaRPr lang="en-US" sz="1250" dirty="0">
+                        <a:latin typeface="Calibri" charset="0"/>
+                        <a:ea typeface="Calibri" charset="0"/>
+                        <a:cs typeface="Calibri" charset="0"/>
+                      </a:endParaRPr>
+                    </a:p>
+                  </a:txBody>
+                  <a:tcPr marL="101600" marR="101600" marT="25400" marB="25400" anchor="ctr">
+                    <a:lnL w="6350" cap="flat" cmpd="sng" algn="ctr">
+                      <a:solidFill>
+                        <a:srgbClr val="E6E8F0"/>
+                      </a:solidFill>
+                      <a:prstDash val="solid"/>
+                      <a:round/>
+                      <a:headEnd type="none" w="med" len="med"/>
+                      <a:tailEnd type="none" w="med" len="med"/>
+                    </a:lnL>
+                    <a:lnR w="6350" cap="flat" cmpd="sng" algn="ctr">
+                      <a:solidFill>
+                        <a:srgbClr val="E6E8F0"/>
+                      </a:solidFill>
+                      <a:prstDash val="solid"/>
+                      <a:round/>
+                      <a:headEnd type="none" w="med" len="med"/>
+                      <a:tailEnd type="none" w="med" len="med"/>
+                    </a:lnR>
+                    <a:lnT w="6350" cap="flat" cmpd="sng" algn="ctr">
+                      <a:solidFill>
+                        <a:srgbClr val="E6E8F0"/>
+                      </a:solidFill>
+                      <a:prstDash val="solid"/>
+                      <a:round/>
+                      <a:headEnd type="none" w="med" len="med"/>
+                      <a:tailEnd type="none" w="med" len="med"/>
+                    </a:lnT>
+                    <a:lnB w="6350" cap="flat" cmpd="sng" algn="ctr">
+                      <a:solidFill>
+                        <a:srgbClr val="E6E8F0"/>
+                      </a:solidFill>
+                      <a:prstDash val="solid"/>
+                      <a:round/>
+                      <a:headEnd type="none" w="med" len="med"/>
+                      <a:tailEnd type="none" w="med" len="med"/>
+                    </a:lnB>
+                    <a:solidFill>
+                      <a:srgbClr val="0A1FC2"/>
+                    </a:solidFill>
+                  </a:tcPr>
+                </a:tc>
+                <a:tc>
+                  <a:txBody>
+                    <a:bodyPr/>
+                    <a:lstStyle/>
+                    <a:p>
+                      <a:pPr algn="ctr" indent="0" marL="0">
+                        <a:buNone/>
+                      </a:pPr>
+                      <a:r>
+                        <a:rPr lang="en-US" sz="1250" b="1" dirty="0">
+                          <a:solidFill>
+                            <a:srgbClr val="FFFFFF"/>
+                          </a:solidFill>
+                          <a:latin typeface="Calibri" pitchFamily="34" charset="0"/>
+                          <a:ea typeface="Calibri" pitchFamily="34" charset="-122"/>
+                          <a:cs typeface="Calibri" pitchFamily="34" charset="-120"/>
+                        </a:rPr>
+                        <a:t>Elite</a:t>
+                      </a:r>
+                      <a:endParaRPr lang="en-US" sz="1250" dirty="0">
+                        <a:latin typeface="Calibri" charset="0"/>
+                        <a:ea typeface="Calibri" charset="0"/>
+                        <a:cs typeface="Calibri" charset="0"/>
+                      </a:endParaRPr>
+                    </a:p>
+                  </a:txBody>
+                  <a:tcPr marL="101600" marR="101600" marT="25400" marB="25400" anchor="ctr">
+                    <a:lnL w="6350" cap="flat" cmpd="sng" algn="ctr">
+                      <a:solidFill>
+                        <a:srgbClr val="E6E8F0"/>
+                      </a:solidFill>
+                      <a:prstDash val="solid"/>
+                      <a:round/>
+                      <a:headEnd type="none" w="med" len="med"/>
+                      <a:tailEnd type="none" w="med" len="med"/>
+                    </a:lnL>
+                    <a:lnR w="6350" cap="flat" cmpd="sng" algn="ctr">
+                      <a:solidFill>
+                        <a:srgbClr val="E6E8F0"/>
+                      </a:solidFill>
+                      <a:prstDash val="solid"/>
+                      <a:round/>
+                      <a:headEnd type="none" w="med" len="med"/>
+                      <a:tailEnd type="none" w="med" len="med"/>
+                    </a:lnR>
+                    <a:lnT w="6350" cap="flat" cmpd="sng" algn="ctr">
+                      <a:solidFill>
+                        <a:srgbClr val="E6E8F0"/>
+                      </a:solidFill>
+                      <a:prstDash val="solid"/>
+                      <a:round/>
+                      <a:headEnd type="none" w="med" len="med"/>
+                      <a:tailEnd type="none" w="med" len="med"/>
+                    </a:lnT>
+                    <a:lnB w="6350" cap="flat" cmpd="sng" algn="ctr">
+                      <a:solidFill>
+                        <a:srgbClr val="E6E8F0"/>
+                      </a:solidFill>
+                      <a:prstDash val="solid"/>
+                      <a:round/>
+                      <a:headEnd type="none" w="med" len="med"/>
+                      <a:tailEnd type="none" w="med" len="med"/>
+                    </a:lnB>
+                    <a:solidFill>
+                      <a:srgbClr val="0B2AE0"/>
+                    </a:solidFill>
+                  </a:tcPr>
+                </a:tc>
+              </a:tr>
+              <a:tr h="384048">
+                <a:tc>
+                  <a:txBody>
+                    <a:bodyPr/>
+                    <a:lstStyle/>
+                    <a:p>
+                      <a:pPr algn="l" indent="0" marL="0">
+                        <a:buNone/>
+                      </a:pPr>
+                      <a:r>
+                        <a:rPr lang="en-US" sz="1250" b="1" dirty="0">
+                          <a:solidFill>
+                            <a:srgbClr val="12132A"/>
+                          </a:solidFill>
+                          <a:latin typeface="Calibri" pitchFamily="34" charset="0"/>
+                          <a:ea typeface="Calibri" pitchFamily="34" charset="-122"/>
+                          <a:cs typeface="Calibri" pitchFamily="34" charset="-120"/>
+                        </a:rPr>
+                        <a:t>AI inference (typical)</a:t>
+                      </a:r>
+                      <a:endParaRPr lang="en-US" sz="1250" dirty="0">
+                        <a:latin typeface="Calibri" charset="0"/>
+                        <a:ea typeface="Calibri" charset="0"/>
+                        <a:cs typeface="Calibri" charset="0"/>
+                      </a:endParaRPr>
+                    </a:p>
+                  </a:txBody>
+                  <a:tcPr marL="101600" marR="101600" marT="25400" marB="25400" anchor="ctr">
+                    <a:lnL w="6350" cap="flat" cmpd="sng" algn="ctr">
+                      <a:solidFill>
+                        <a:srgbClr val="E6E8F0"/>
+                      </a:solidFill>
+                      <a:prstDash val="solid"/>
+                      <a:round/>
+                      <a:headEnd type="none" w="med" len="med"/>
+                      <a:tailEnd type="none" w="med" len="med"/>
+                    </a:lnL>
+                    <a:lnR w="6350" cap="flat" cmpd="sng" algn="ctr">
+                      <a:solidFill>
+                        <a:srgbClr val="E6E8F0"/>
+                      </a:solidFill>
+                      <a:prstDash val="solid"/>
+                      <a:round/>
+                      <a:headEnd type="none" w="med" len="med"/>
+                      <a:tailEnd type="none" w="med" len="med"/>
+                    </a:lnR>
+                    <a:lnT w="6350" cap="flat" cmpd="sng" algn="ctr">
+                      <a:solidFill>
+                        <a:srgbClr val="E6E8F0"/>
+                      </a:solidFill>
+                      <a:prstDash val="solid"/>
+                      <a:round/>
+                      <a:headEnd type="none" w="med" len="med"/>
+                      <a:tailEnd type="none" w="med" len="med"/>
+                    </a:lnT>
+                    <a:lnB w="6350" cap="flat" cmpd="sng" algn="ctr">
+                      <a:solidFill>
+                        <a:srgbClr val="E6E8F0"/>
+                      </a:solidFill>
+                      <a:prstDash val="solid"/>
+                      <a:round/>
+                      <a:headEnd type="none" w="med" len="med"/>
+                      <a:tailEnd type="none" w="med" len="med"/>
+                    </a:lnB>
+                    <a:solidFill>
+                      <a:srgbClr val="FFFFFF"/>
+                    </a:solidFill>
+                  </a:tcPr>
+                </a:tc>
+                <a:tc>
+                  <a:txBody>
+                    <a:bodyPr/>
+                    <a:lstStyle/>
+                    <a:p>
+                      <a:pPr algn="ctr" indent="0" marL="0">
+                        <a:buNone/>
+                      </a:pPr>
+                      <a:r>
+                        <a:rPr lang="en-US" sz="1250" dirty="0">
+                          <a:solidFill>
+                            <a:srgbClr val="4A5568"/>
+                          </a:solidFill>
+                          <a:latin typeface="Calibri" pitchFamily="34" charset="0"/>
+                          <a:ea typeface="Calibri" pitchFamily="34" charset="-122"/>
+                          <a:cs typeface="Calibri" pitchFamily="34" charset="-120"/>
+                        </a:rPr>
+                        <a:t>RM20</a:t>
+                      </a:r>
+                      <a:endParaRPr lang="en-US" sz="1250" dirty="0">
+                        <a:latin typeface="Calibri" charset="0"/>
+                        <a:ea typeface="Calibri" charset="0"/>
+                        <a:cs typeface="Calibri" charset="0"/>
+                      </a:endParaRPr>
+                    </a:p>
+                  </a:txBody>
+                  <a:tcPr marL="101600" marR="101600" marT="25400" marB="25400" anchor="ctr">
+                    <a:lnL w="6350" cap="flat" cmpd="sng" algn="ctr">
+                      <a:solidFill>
+                        <a:srgbClr val="E6E8F0"/>
+                      </a:solidFill>
+                      <a:prstDash val="solid"/>
+                      <a:round/>
+                      <a:headEnd type="none" w="med" len="med"/>
+                      <a:tailEnd type="none" w="med" len="med"/>
+                    </a:lnL>
+                    <a:lnR w="6350" cap="flat" cmpd="sng" algn="ctr">
+                      <a:solidFill>
+                        <a:srgbClr val="E6E8F0"/>
+                      </a:solidFill>
+                      <a:prstDash val="solid"/>
+                      <a:round/>
+                      <a:headEnd type="none" w="med" len="med"/>
+                      <a:tailEnd type="none" w="med" len="med"/>
+                    </a:lnR>
+                    <a:lnT w="6350" cap="flat" cmpd="sng" algn="ctr">
+                      <a:solidFill>
+                        <a:srgbClr val="E6E8F0"/>
+                      </a:solidFill>
+                      <a:prstDash val="solid"/>
+                      <a:round/>
+                      <a:headEnd type="none" w="med" len="med"/>
+                      <a:tailEnd type="none" w="med" len="med"/>
+                    </a:lnT>
+                    <a:lnB w="6350" cap="flat" cmpd="sng" algn="ctr">
+                      <a:solidFill>
+                        <a:srgbClr val="E6E8F0"/>
+                      </a:solidFill>
+                      <a:prstDash val="solid"/>
+                      <a:round/>
+                      <a:headEnd type="none" w="med" len="med"/>
+                      <a:tailEnd type="none" w="med" len="med"/>
+                    </a:lnB>
+                    <a:solidFill>
+                      <a:srgbClr val="FFFFFF"/>
+                    </a:solidFill>
+                  </a:tcPr>
+                </a:tc>
+                <a:tc>
+                  <a:txBody>
+                    <a:bodyPr/>
+                    <a:lstStyle/>
+                    <a:p>
+                      <a:pPr algn="ctr" indent="0" marL="0">
+                        <a:buNone/>
+                      </a:pPr>
+                      <a:r>
+                        <a:rPr lang="en-US" sz="1250" dirty="0">
+                          <a:solidFill>
+                            <a:srgbClr val="4A5568"/>
+                          </a:solidFill>
+                          <a:latin typeface="Calibri" pitchFamily="34" charset="0"/>
+                          <a:ea typeface="Calibri" pitchFamily="34" charset="-122"/>
+                          <a:cs typeface="Calibri" pitchFamily="34" charset="-120"/>
+                        </a:rPr>
+                        <a:t>RM115</a:t>
+                      </a:r>
+                      <a:endParaRPr lang="en-US" sz="1250" dirty="0">
+                        <a:latin typeface="Calibri" charset="0"/>
+                        <a:ea typeface="Calibri" charset="0"/>
+                        <a:cs typeface="Calibri" charset="0"/>
+                      </a:endParaRPr>
+                    </a:p>
+                  </a:txBody>
+                  <a:tcPr marL="101600" marR="101600" marT="25400" marB="25400" anchor="ctr">
+                    <a:lnL w="6350" cap="flat" cmpd="sng" algn="ctr">
+                      <a:solidFill>
+                        <a:srgbClr val="E6E8F0"/>
+                      </a:solidFill>
+                      <a:prstDash val="solid"/>
+                      <a:round/>
+                      <a:headEnd type="none" w="med" len="med"/>
+                      <a:tailEnd type="none" w="med" len="med"/>
+                    </a:lnL>
+                    <a:lnR w="6350" cap="flat" cmpd="sng" algn="ctr">
+                      <a:solidFill>
+                        <a:srgbClr val="E6E8F0"/>
+                      </a:solidFill>
+                      <a:prstDash val="solid"/>
+                      <a:round/>
+                      <a:headEnd type="none" w="med" len="med"/>
+                      <a:tailEnd type="none" w="med" len="med"/>
+                    </a:lnR>
+                    <a:lnT w="6350" cap="flat" cmpd="sng" algn="ctr">
+                      <a:solidFill>
+                        <a:srgbClr val="E6E8F0"/>
+                      </a:solidFill>
+                      <a:prstDash val="solid"/>
+                      <a:round/>
+                      <a:headEnd type="none" w="med" len="med"/>
+                      <a:tailEnd type="none" w="med" len="med"/>
+                    </a:lnT>
+                    <a:lnB w="6350" cap="flat" cmpd="sng" algn="ctr">
+                      <a:solidFill>
+                        <a:srgbClr val="E6E8F0"/>
+                      </a:solidFill>
+                      <a:prstDash val="solid"/>
+                      <a:round/>
+                      <a:headEnd type="none" w="med" len="med"/>
+                      <a:tailEnd type="none" w="med" len="med"/>
+                    </a:lnB>
+                    <a:solidFill>
+                      <a:srgbClr val="FFFFFF"/>
+                    </a:solidFill>
+                  </a:tcPr>
+                </a:tc>
+                <a:tc>
+                  <a:txBody>
+                    <a:bodyPr/>
+                    <a:lstStyle/>
+                    <a:p>
+                      <a:pPr algn="ctr" indent="0" marL="0">
+                        <a:buNone/>
+                      </a:pPr>
+                      <a:r>
+                        <a:rPr lang="en-US" sz="1250" dirty="0">
+                          <a:solidFill>
+                            <a:srgbClr val="4A5568"/>
+                          </a:solidFill>
+                          <a:latin typeface="Calibri" pitchFamily="34" charset="0"/>
+                          <a:ea typeface="Calibri" pitchFamily="34" charset="-122"/>
+                          <a:cs typeface="Calibri" pitchFamily="34" charset="-120"/>
+                        </a:rPr>
+                        <a:t>RM260</a:t>
+                      </a:r>
+                      <a:endParaRPr lang="en-US" sz="1250" dirty="0">
+                        <a:latin typeface="Calibri" charset="0"/>
+                        <a:ea typeface="Calibri" charset="0"/>
+                        <a:cs typeface="Calibri" charset="0"/>
+                      </a:endParaRPr>
+                    </a:p>
+                  </a:txBody>
+                  <a:tcPr marL="101600" marR="101600" marT="25400" marB="25400" anchor="ctr">
+                    <a:lnL w="6350" cap="flat" cmpd="sng" algn="ctr">
+                      <a:solidFill>
+                        <a:srgbClr val="E6E8F0"/>
+                      </a:solidFill>
+                      <a:prstDash val="solid"/>
+                      <a:round/>
+                      <a:headEnd type="none" w="med" len="med"/>
+                      <a:tailEnd type="none" w="med" len="med"/>
+                    </a:lnL>
+                    <a:lnR w="6350" cap="flat" cmpd="sng" algn="ctr">
+                      <a:solidFill>
+                        <a:srgbClr val="E6E8F0"/>
+                      </a:solidFill>
+                      <a:prstDash val="solid"/>
+                      <a:round/>
+                      <a:headEnd type="none" w="med" len="med"/>
+                      <a:tailEnd type="none" w="med" len="med"/>
+                    </a:lnR>
+                    <a:lnT w="6350" cap="flat" cmpd="sng" algn="ctr">
+                      <a:solidFill>
+                        <a:srgbClr val="E6E8F0"/>
+                      </a:solidFill>
+                      <a:prstDash val="solid"/>
+                      <a:round/>
+                      <a:headEnd type="none" w="med" len="med"/>
+                      <a:tailEnd type="none" w="med" len="med"/>
+                    </a:lnT>
+                    <a:lnB w="6350" cap="flat" cmpd="sng" algn="ctr">
+                      <a:solidFill>
+                        <a:srgbClr val="E6E8F0"/>
+                      </a:solidFill>
+                      <a:prstDash val="solid"/>
+                      <a:round/>
+                      <a:headEnd type="none" w="med" len="med"/>
+                      <a:tailEnd type="none" w="med" len="med"/>
+                    </a:lnB>
+                    <a:solidFill>
+                      <a:srgbClr val="FFFFFF"/>
+                    </a:solidFill>
+                  </a:tcPr>
+                </a:tc>
+              </a:tr>
+              <a:tr h="384048">
+                <a:tc>
+                  <a:txBody>
+                    <a:bodyPr/>
+                    <a:lstStyle/>
+                    <a:p>
+                      <a:pPr algn="l" indent="0" marL="0">
+                        <a:buNone/>
+                      </a:pPr>
+                      <a:r>
+                        <a:rPr lang="en-US" sz="1250" b="1" dirty="0">
+                          <a:solidFill>
+                            <a:srgbClr val="12132A"/>
+                          </a:solidFill>
+                          <a:latin typeface="Calibri" pitchFamily="34" charset="0"/>
+                          <a:ea typeface="Calibri" pitchFamily="34" charset="-122"/>
+                          <a:cs typeface="Calibri" pitchFamily="34" charset="-120"/>
+                        </a:rPr>
+                        <a:t>Email (Resend)</a:t>
+                      </a:r>
+                      <a:endParaRPr lang="en-US" sz="1250" dirty="0">
+                        <a:latin typeface="Calibri" charset="0"/>
+                        <a:ea typeface="Calibri" charset="0"/>
+                        <a:cs typeface="Calibri" charset="0"/>
+                      </a:endParaRPr>
+                    </a:p>
+                  </a:txBody>
+                  <a:tcPr marL="101600" marR="101600" marT="25400" marB="25400" anchor="ctr">
+                    <a:lnL w="6350" cap="flat" cmpd="sng" algn="ctr">
+                      <a:solidFill>
+                        <a:srgbClr val="E6E8F0"/>
+                      </a:solidFill>
+                      <a:prstDash val="solid"/>
+                      <a:round/>
+                      <a:headEnd type="none" w="med" len="med"/>
+                      <a:tailEnd type="none" w="med" len="med"/>
+                    </a:lnL>
+                    <a:lnR w="6350" cap="flat" cmpd="sng" algn="ctr">
+                      <a:solidFill>
+                        <a:srgbClr val="E6E8F0"/>
+                      </a:solidFill>
+                      <a:prstDash val="solid"/>
+                      <a:round/>
+                      <a:headEnd type="none" w="med" len="med"/>
+                      <a:tailEnd type="none" w="med" len="med"/>
+                    </a:lnR>
+                    <a:lnT w="6350" cap="flat" cmpd="sng" algn="ctr">
+                      <a:solidFill>
+                        <a:srgbClr val="E6E8F0"/>
+                      </a:solidFill>
+                      <a:prstDash val="solid"/>
+                      <a:round/>
+                      <a:headEnd type="none" w="med" len="med"/>
+                      <a:tailEnd type="none" w="med" len="med"/>
+                    </a:lnT>
+                    <a:lnB w="6350" cap="flat" cmpd="sng" algn="ctr">
+                      <a:solidFill>
+                        <a:srgbClr val="E6E8F0"/>
+                      </a:solidFill>
+                      <a:prstDash val="solid"/>
+                      <a:round/>
+                      <a:headEnd type="none" w="med" len="med"/>
+                      <a:tailEnd type="none" w="med" len="med"/>
+                    </a:lnB>
+                    <a:solidFill>
+                      <a:srgbClr val="FFFFFF"/>
+                    </a:solidFill>
+                  </a:tcPr>
+                </a:tc>
+                <a:tc>
+                  <a:txBody>
+                    <a:bodyPr/>
+                    <a:lstStyle/>
+                    <a:p>
+                      <a:pPr algn="ctr" indent="0" marL="0">
+                        <a:buNone/>
+                      </a:pPr>
+                      <a:r>
+                        <a:rPr lang="en-US" sz="1250" dirty="0">
+                          <a:solidFill>
+                            <a:srgbClr val="4A5568"/>
+                          </a:solidFill>
+                          <a:latin typeface="Calibri" pitchFamily="34" charset="0"/>
+                          <a:ea typeface="Calibri" pitchFamily="34" charset="-122"/>
+                          <a:cs typeface="Calibri" pitchFamily="34" charset="-120"/>
+                        </a:rPr>
+                        <a:t>RM0.20</a:t>
+                      </a:r>
+                      <a:endParaRPr lang="en-US" sz="1250" dirty="0">
+                        <a:latin typeface="Calibri" charset="0"/>
+                        <a:ea typeface="Calibri" charset="0"/>
+                        <a:cs typeface="Calibri" charset="0"/>
+                      </a:endParaRPr>
+                    </a:p>
+                  </a:txBody>
+                  <a:tcPr marL="101600" marR="101600" marT="25400" marB="25400" anchor="ctr">
+                    <a:lnL w="6350" cap="flat" cmpd="sng" algn="ctr">
+                      <a:solidFill>
+                        <a:srgbClr val="E6E8F0"/>
+                      </a:solidFill>
+                      <a:prstDash val="solid"/>
+                      <a:round/>
+                      <a:headEnd type="none" w="med" len="med"/>
+                      <a:tailEnd type="none" w="med" len="med"/>
+                    </a:lnL>
+                    <a:lnR w="6350" cap="flat" cmpd="sng" algn="ctr">
+                      <a:solidFill>
+                        <a:srgbClr val="E6E8F0"/>
+                      </a:solidFill>
+                      <a:prstDash val="solid"/>
+                      <a:round/>
+                      <a:headEnd type="none" w="med" len="med"/>
+                      <a:tailEnd type="none" w="med" len="med"/>
+                    </a:lnR>
+                    <a:lnT w="6350" cap="flat" cmpd="sng" algn="ctr">
+                      <a:solidFill>
+                        <a:srgbClr val="E6E8F0"/>
+                      </a:solidFill>
+                      <a:prstDash val="solid"/>
+                      <a:round/>
+                      <a:headEnd type="none" w="med" len="med"/>
+                      <a:tailEnd type="none" w="med" len="med"/>
+                    </a:lnT>
+                    <a:lnB w="6350" cap="flat" cmpd="sng" algn="ctr">
+                      <a:solidFill>
+                        <a:srgbClr val="E6E8F0"/>
+                      </a:solidFill>
+                      <a:prstDash val="solid"/>
+                      <a:round/>
+                      <a:headEnd type="none" w="med" len="med"/>
+                      <a:tailEnd type="none" w="med" len="med"/>
+                    </a:lnB>
+                    <a:solidFill>
+                      <a:srgbClr val="FFFFFF"/>
+                    </a:solidFill>
+                  </a:tcPr>
+                </a:tc>
+                <a:tc>
+                  <a:txBody>
+                    <a:bodyPr/>
+                    <a:lstStyle/>
+                    <a:p>
+                      <a:pPr algn="ctr" indent="0" marL="0">
+                        <a:buNone/>
+                      </a:pPr>
+                      <a:r>
+                        <a:rPr lang="en-US" sz="1250" dirty="0">
+                          <a:solidFill>
+                            <a:srgbClr val="4A5568"/>
+                          </a:solidFill>
+                          <a:latin typeface="Calibri" pitchFamily="34" charset="0"/>
+                          <a:ea typeface="Calibri" pitchFamily="34" charset="-122"/>
+                          <a:cs typeface="Calibri" pitchFamily="34" charset="-120"/>
+                        </a:rPr>
+                        <a:t>RM1.10</a:t>
+                      </a:r>
+                      <a:endParaRPr lang="en-US" sz="1250" dirty="0">
+                        <a:latin typeface="Calibri" charset="0"/>
+                        <a:ea typeface="Calibri" charset="0"/>
+                        <a:cs typeface="Calibri" charset="0"/>
+                      </a:endParaRPr>
+                    </a:p>
+                  </a:txBody>
+                  <a:tcPr marL="101600" marR="101600" marT="25400" marB="25400" anchor="ctr">
+                    <a:lnL w="6350" cap="flat" cmpd="sng" algn="ctr">
+                      <a:solidFill>
+                        <a:srgbClr val="E6E8F0"/>
+                      </a:solidFill>
+                      <a:prstDash val="solid"/>
+                      <a:round/>
+                      <a:headEnd type="none" w="med" len="med"/>
+                      <a:tailEnd type="none" w="med" len="med"/>
+                    </a:lnL>
+                    <a:lnR w="6350" cap="flat" cmpd="sng" algn="ctr">
+                      <a:solidFill>
+                        <a:srgbClr val="E6E8F0"/>
+                      </a:solidFill>
+                      <a:prstDash val="solid"/>
+                      <a:round/>
+                      <a:headEnd type="none" w="med" len="med"/>
+                      <a:tailEnd type="none" w="med" len="med"/>
+                    </a:lnR>
+                    <a:lnT w="6350" cap="flat" cmpd="sng" algn="ctr">
+                      <a:solidFill>
+                        <a:srgbClr val="E6E8F0"/>
+                      </a:solidFill>
+                      <a:prstDash val="solid"/>
+                      <a:round/>
+                      <a:headEnd type="none" w="med" len="med"/>
+                      <a:tailEnd type="none" w="med" len="med"/>
+                    </a:lnT>
+                    <a:lnB w="6350" cap="flat" cmpd="sng" algn="ctr">
+                      <a:solidFill>
+                        <a:srgbClr val="E6E8F0"/>
+                      </a:solidFill>
+                      <a:prstDash val="solid"/>
+                      <a:round/>
+                      <a:headEnd type="none" w="med" len="med"/>
+                      <a:tailEnd type="none" w="med" len="med"/>
+                    </a:lnB>
+                    <a:solidFill>
+                      <a:srgbClr val="FFFFFF"/>
+                    </a:solidFill>
+                  </a:tcPr>
+                </a:tc>
+                <a:tc>
+                  <a:txBody>
+                    <a:bodyPr/>
+                    <a:lstStyle/>
+                    <a:p>
+                      <a:pPr algn="ctr" indent="0" marL="0">
+                        <a:buNone/>
+                      </a:pPr>
+                      <a:r>
+                        <a:rPr lang="en-US" sz="1250" dirty="0">
+                          <a:solidFill>
+                            <a:srgbClr val="4A5568"/>
+                          </a:solidFill>
+                          <a:latin typeface="Calibri" pitchFamily="34" charset="0"/>
+                          <a:ea typeface="Calibri" pitchFamily="34" charset="-122"/>
+                          <a:cs typeface="Calibri" pitchFamily="34" charset="-120"/>
+                        </a:rPr>
+                        <a:t>RM3.00</a:t>
+                      </a:r>
+                      <a:endParaRPr lang="en-US" sz="1250" dirty="0">
+                        <a:latin typeface="Calibri" charset="0"/>
+                        <a:ea typeface="Calibri" charset="0"/>
+                        <a:cs typeface="Calibri" charset="0"/>
+                      </a:endParaRPr>
+                    </a:p>
+                  </a:txBody>
+                  <a:tcPr marL="101600" marR="101600" marT="25400" marB="25400" anchor="ctr">
+                    <a:lnL w="6350" cap="flat" cmpd="sng" algn="ctr">
+                      <a:solidFill>
+                        <a:srgbClr val="E6E8F0"/>
+                      </a:solidFill>
+                      <a:prstDash val="solid"/>
+                      <a:round/>
+                      <a:headEnd type="none" w="med" len="med"/>
+                      <a:tailEnd type="none" w="med" len="med"/>
+                    </a:lnL>
+                    <a:lnR w="6350" cap="flat" cmpd="sng" algn="ctr">
+                      <a:solidFill>
+                        <a:srgbClr val="E6E8F0"/>
+                      </a:solidFill>
+                      <a:prstDash val="solid"/>
+                      <a:round/>
+                      <a:headEnd type="none" w="med" len="med"/>
+                      <a:tailEnd type="none" w="med" len="med"/>
+                    </a:lnR>
+                    <a:lnT w="6350" cap="flat" cmpd="sng" algn="ctr">
+                      <a:solidFill>
+                        <a:srgbClr val="E6E8F0"/>
+                      </a:solidFill>
+                      <a:prstDash val="solid"/>
+                      <a:round/>
+                      <a:headEnd type="none" w="med" len="med"/>
+                      <a:tailEnd type="none" w="med" len="med"/>
+                    </a:lnT>
+                    <a:lnB w="6350" cap="flat" cmpd="sng" algn="ctr">
+                      <a:solidFill>
+                        <a:srgbClr val="E6E8F0"/>
+                      </a:solidFill>
+                      <a:prstDash val="solid"/>
+                      <a:round/>
+                      <a:headEnd type="none" w="med" len="med"/>
+                      <a:tailEnd type="none" w="med" len="med"/>
+                    </a:lnB>
+                    <a:solidFill>
+                      <a:srgbClr val="FFFFFF"/>
+                    </a:solidFill>
+                  </a:tcPr>
+                </a:tc>
+              </a:tr>
+              <a:tr h="384048">
+                <a:tc>
+                  <a:txBody>
+                    <a:bodyPr/>
+                    <a:lstStyle/>
+                    <a:p>
+                      <a:pPr algn="l" indent="0" marL="0">
+                        <a:buNone/>
+                      </a:pPr>
+                      <a:r>
+                        <a:rPr lang="en-US" sz="1250" b="1" dirty="0">
+                          <a:solidFill>
+                            <a:srgbClr val="12132A"/>
+                          </a:solidFill>
+                          <a:latin typeface="Calibri" pitchFamily="34" charset="0"/>
+                          <a:ea typeface="Calibri" pitchFamily="34" charset="-122"/>
+                          <a:cs typeface="Calibri" pitchFamily="34" charset="-120"/>
+                        </a:rPr>
+                        <a:t>Video (Daily.co)</a:t>
+                      </a:r>
+                      <a:endParaRPr lang="en-US" sz="1250" dirty="0">
+                        <a:latin typeface="Calibri" charset="0"/>
+                        <a:ea typeface="Calibri" charset="0"/>
+                        <a:cs typeface="Calibri" charset="0"/>
+                      </a:endParaRPr>
+                    </a:p>
+                  </a:txBody>
+                  <a:tcPr marL="101600" marR="101600" marT="25400" marB="25400" anchor="ctr">
+                    <a:lnL w="6350" cap="flat" cmpd="sng" algn="ctr">
+                      <a:solidFill>
+                        <a:srgbClr val="E6E8F0"/>
+                      </a:solidFill>
+                      <a:prstDash val="solid"/>
+                      <a:round/>
+                      <a:headEnd type="none" w="med" len="med"/>
+                      <a:tailEnd type="none" w="med" len="med"/>
+                    </a:lnL>
+                    <a:lnR w="6350" cap="flat" cmpd="sng" algn="ctr">
+                      <a:solidFill>
+                        <a:srgbClr val="E6E8F0"/>
+                      </a:solidFill>
+                      <a:prstDash val="solid"/>
+                      <a:round/>
+                      <a:headEnd type="none" w="med" len="med"/>
+                      <a:tailEnd type="none" w="med" len="med"/>
+                    </a:lnR>
+                    <a:lnT w="6350" cap="flat" cmpd="sng" algn="ctr">
+                      <a:solidFill>
+                        <a:srgbClr val="E6E8F0"/>
+                      </a:solidFill>
+                      <a:prstDash val="solid"/>
+                      <a:round/>
+                      <a:headEnd type="none" w="med" len="med"/>
+                      <a:tailEnd type="none" w="med" len="med"/>
+                    </a:lnT>
+                    <a:lnB w="6350" cap="flat" cmpd="sng" algn="ctr">
+                      <a:solidFill>
+                        <a:srgbClr val="E6E8F0"/>
+                      </a:solidFill>
+                      <a:prstDash val="solid"/>
+                      <a:round/>
+                      <a:headEnd type="none" w="med" len="med"/>
+                      <a:tailEnd type="none" w="med" len="med"/>
+                    </a:lnB>
+                    <a:solidFill>
+                      <a:srgbClr val="FFFFFF"/>
+                    </a:solidFill>
+                  </a:tcPr>
+                </a:tc>
+                <a:tc>
+                  <a:txBody>
+                    <a:bodyPr/>
+                    <a:lstStyle/>
+                    <a:p>
+                      <a:pPr algn="ctr" indent="0" marL="0">
+                        <a:buNone/>
+                      </a:pPr>
+                      <a:r>
+                        <a:rPr lang="en-US" sz="1250" dirty="0">
+                          <a:solidFill>
+                            <a:srgbClr val="4A5568"/>
+                          </a:solidFill>
+                          <a:latin typeface="Calibri" pitchFamily="34" charset="0"/>
+                          <a:ea typeface="Calibri" pitchFamily="34" charset="-122"/>
+                          <a:cs typeface="Calibri" pitchFamily="34" charset="-120"/>
+                        </a:rPr>
+                        <a:t>RM7</a:t>
+                      </a:r>
+                      <a:endParaRPr lang="en-US" sz="1250" dirty="0">
+                        <a:latin typeface="Calibri" charset="0"/>
+                        <a:ea typeface="Calibri" charset="0"/>
+                        <a:cs typeface="Calibri" charset="0"/>
+                      </a:endParaRPr>
+                    </a:p>
+                  </a:txBody>
+                  <a:tcPr marL="101600" marR="101600" marT="25400" marB="25400" anchor="ctr">
+                    <a:lnL w="6350" cap="flat" cmpd="sng" algn="ctr">
+                      <a:solidFill>
+                        <a:srgbClr val="E6E8F0"/>
+                      </a:solidFill>
+                      <a:prstDash val="solid"/>
+                      <a:round/>
+                      <a:headEnd type="none" w="med" len="med"/>
+                      <a:tailEnd type="none" w="med" len="med"/>
+                    </a:lnL>
+                    <a:lnR w="6350" cap="flat" cmpd="sng" algn="ctr">
+                      <a:solidFill>
+                        <a:srgbClr val="E6E8F0"/>
+                      </a:solidFill>
+                      <a:prstDash val="solid"/>
+                      <a:round/>
+                      <a:headEnd type="none" w="med" len="med"/>
+                      <a:tailEnd type="none" w="med" len="med"/>
+                    </a:lnR>
+                    <a:lnT w="6350" cap="flat" cmpd="sng" algn="ctr">
+                      <a:solidFill>
+                        <a:srgbClr val="E6E8F0"/>
+                      </a:solidFill>
+                      <a:prstDash val="solid"/>
+                      <a:round/>
+                      <a:headEnd type="none" w="med" len="med"/>
+                      <a:tailEnd type="none" w="med" len="med"/>
+                    </a:lnT>
+                    <a:lnB w="6350" cap="flat" cmpd="sng" algn="ctr">
+                      <a:solidFill>
+                        <a:srgbClr val="E6E8F0"/>
+                      </a:solidFill>
+                      <a:prstDash val="solid"/>
+                      <a:round/>
+                      <a:headEnd type="none" w="med" len="med"/>
+                      <a:tailEnd type="none" w="med" len="med"/>
+                    </a:lnB>
+                    <a:solidFill>
+                      <a:srgbClr val="FFFFFF"/>
+                    </a:solidFill>
+                  </a:tcPr>
+                </a:tc>
+                <a:tc>
+                  <a:txBody>
+                    <a:bodyPr/>
+                    <a:lstStyle/>
+                    <a:p>
+                      <a:pPr algn="ctr" indent="0" marL="0">
+                        <a:buNone/>
+                      </a:pPr>
+                      <a:r>
+                        <a:rPr lang="en-US" sz="1250" dirty="0">
+                          <a:solidFill>
+                            <a:srgbClr val="4A5568"/>
+                          </a:solidFill>
+                          <a:latin typeface="Calibri" pitchFamily="34" charset="0"/>
+                          <a:ea typeface="Calibri" pitchFamily="34" charset="-122"/>
+                          <a:cs typeface="Calibri" pitchFamily="34" charset="-120"/>
+                        </a:rPr>
+                        <a:t>RM33</a:t>
+                      </a:r>
+                      <a:endParaRPr lang="en-US" sz="1250" dirty="0">
+                        <a:latin typeface="Calibri" charset="0"/>
+                        <a:ea typeface="Calibri" charset="0"/>
+                        <a:cs typeface="Calibri" charset="0"/>
+                      </a:endParaRPr>
+                    </a:p>
+                  </a:txBody>
+                  <a:tcPr marL="101600" marR="101600" marT="25400" marB="25400" anchor="ctr">
+                    <a:lnL w="6350" cap="flat" cmpd="sng" algn="ctr">
+                      <a:solidFill>
+                        <a:srgbClr val="E6E8F0"/>
+                      </a:solidFill>
+                      <a:prstDash val="solid"/>
+                      <a:round/>
+                      <a:headEnd type="none" w="med" len="med"/>
+                      <a:tailEnd type="none" w="med" len="med"/>
+                    </a:lnL>
+                    <a:lnR w="6350" cap="flat" cmpd="sng" algn="ctr">
+                      <a:solidFill>
+                        <a:srgbClr val="E6E8F0"/>
+                      </a:solidFill>
+                      <a:prstDash val="solid"/>
+                      <a:round/>
+                      <a:headEnd type="none" w="med" len="med"/>
+                      <a:tailEnd type="none" w="med" len="med"/>
+                    </a:lnR>
+                    <a:lnT w="6350" cap="flat" cmpd="sng" algn="ctr">
+                      <a:solidFill>
+                        <a:srgbClr val="E6E8F0"/>
+                      </a:solidFill>
+                      <a:prstDash val="solid"/>
+                      <a:round/>
+                      <a:headEnd type="none" w="med" len="med"/>
+                      <a:tailEnd type="none" w="med" len="med"/>
+                    </a:lnT>
+                    <a:lnB w="6350" cap="flat" cmpd="sng" algn="ctr">
+                      <a:solidFill>
+                        <a:srgbClr val="E6E8F0"/>
+                      </a:solidFill>
+                      <a:prstDash val="solid"/>
+                      <a:round/>
+                      <a:headEnd type="none" w="med" len="med"/>
+                      <a:tailEnd type="none" w="med" len="med"/>
+                    </a:lnB>
+                    <a:solidFill>
+                      <a:srgbClr val="FFFFFF"/>
+                    </a:solidFill>
+                  </a:tcPr>
+                </a:tc>
+                <a:tc>
+                  <a:txBody>
+                    <a:bodyPr/>
+                    <a:lstStyle/>
+                    <a:p>
+                      <a:pPr algn="ctr" indent="0" marL="0">
+                        <a:buNone/>
+                      </a:pPr>
+                      <a:r>
+                        <a:rPr lang="en-US" sz="1250" dirty="0">
+                          <a:solidFill>
+                            <a:srgbClr val="4A5568"/>
+                          </a:solidFill>
+                          <a:latin typeface="Calibri" pitchFamily="34" charset="0"/>
+                          <a:ea typeface="Calibri" pitchFamily="34" charset="-122"/>
+                          <a:cs typeface="Calibri" pitchFamily="34" charset="-120"/>
+                        </a:rPr>
+                        <a:t>RM92</a:t>
+                      </a:r>
+                      <a:endParaRPr lang="en-US" sz="1250" dirty="0">
+                        <a:latin typeface="Calibri" charset="0"/>
+                        <a:ea typeface="Calibri" charset="0"/>
+                        <a:cs typeface="Calibri" charset="0"/>
+                      </a:endParaRPr>
+                    </a:p>
+                  </a:txBody>
+                  <a:tcPr marL="101600" marR="101600" marT="25400" marB="25400" anchor="ctr">
+                    <a:lnL w="6350" cap="flat" cmpd="sng" algn="ctr">
+                      <a:solidFill>
+                        <a:srgbClr val="E6E8F0"/>
+                      </a:solidFill>
+                      <a:prstDash val="solid"/>
+                      <a:round/>
+                      <a:headEnd type="none" w="med" len="med"/>
+                      <a:tailEnd type="none" w="med" len="med"/>
+                    </a:lnL>
+                    <a:lnR w="6350" cap="flat" cmpd="sng" algn="ctr">
+                      <a:solidFill>
+                        <a:srgbClr val="E6E8F0"/>
+                      </a:solidFill>
+                      <a:prstDash val="solid"/>
+                      <a:round/>
+                      <a:headEnd type="none" w="med" len="med"/>
+                      <a:tailEnd type="none" w="med" len="med"/>
+                    </a:lnR>
+                    <a:lnT w="6350" cap="flat" cmpd="sng" algn="ctr">
+                      <a:solidFill>
+                        <a:srgbClr val="E6E8F0"/>
+                      </a:solidFill>
+                      <a:prstDash val="solid"/>
+                      <a:round/>
+                      <a:headEnd type="none" w="med" len="med"/>
+                      <a:tailEnd type="none" w="med" len="med"/>
+                    </a:lnT>
+                    <a:lnB w="6350" cap="flat" cmpd="sng" algn="ctr">
+                      <a:solidFill>
+                        <a:srgbClr val="E6E8F0"/>
+                      </a:solidFill>
+                      <a:prstDash val="solid"/>
+                      <a:round/>
+                      <a:headEnd type="none" w="med" len="med"/>
+                      <a:tailEnd type="none" w="med" len="med"/>
+                    </a:lnB>
+                    <a:solidFill>
+                      <a:srgbClr val="FFFFFF"/>
+                    </a:solidFill>
+                  </a:tcPr>
+                </a:tc>
+              </a:tr>
+              <a:tr h="384048">
+                <a:tc>
+                  <a:txBody>
+                    <a:bodyPr/>
+                    <a:lstStyle/>
+                    <a:p>
+                      <a:pPr algn="l" indent="0" marL="0">
+                        <a:buNone/>
+                      </a:pPr>
+                      <a:r>
+                        <a:rPr lang="en-US" sz="1250" b="1" dirty="0">
+                          <a:solidFill>
+                            <a:srgbClr val="12132A"/>
+                          </a:solidFill>
+                          <a:latin typeface="Calibri" pitchFamily="34" charset="0"/>
+                          <a:ea typeface="Calibri" pitchFamily="34" charset="-122"/>
+                          <a:cs typeface="Calibri" pitchFamily="34" charset="-120"/>
+                        </a:rPr>
+                        <a:t>Payment fee (Stripe)</a:t>
+                      </a:r>
+                      <a:endParaRPr lang="en-US" sz="1250" dirty="0">
+                        <a:latin typeface="Calibri" charset="0"/>
+                        <a:ea typeface="Calibri" charset="0"/>
+                        <a:cs typeface="Calibri" charset="0"/>
+                      </a:endParaRPr>
+                    </a:p>
+                  </a:txBody>
+                  <a:tcPr marL="101600" marR="101600" marT="25400" marB="25400" anchor="ctr">
+                    <a:lnL w="6350" cap="flat" cmpd="sng" algn="ctr">
+                      <a:solidFill>
+                        <a:srgbClr val="E6E8F0"/>
+                      </a:solidFill>
+                      <a:prstDash val="solid"/>
+                      <a:round/>
+                      <a:headEnd type="none" w="med" len="med"/>
+                      <a:tailEnd type="none" w="med" len="med"/>
+                    </a:lnL>
+                    <a:lnR w="6350" cap="flat" cmpd="sng" algn="ctr">
+                      <a:solidFill>
+                        <a:srgbClr val="E6E8F0"/>
+                      </a:solidFill>
+                      <a:prstDash val="solid"/>
+                      <a:round/>
+                      <a:headEnd type="none" w="med" len="med"/>
+                      <a:tailEnd type="none" w="med" len="med"/>
+                    </a:lnR>
+                    <a:lnT w="6350" cap="flat" cmpd="sng" algn="ctr">
+                      <a:solidFill>
+                        <a:srgbClr val="E6E8F0"/>
+                      </a:solidFill>
+                      <a:prstDash val="solid"/>
+                      <a:round/>
+                      <a:headEnd type="none" w="med" len="med"/>
+                      <a:tailEnd type="none" w="med" len="med"/>
+                    </a:lnT>
+                    <a:lnB w="6350" cap="flat" cmpd="sng" algn="ctr">
+                      <a:solidFill>
+                        <a:srgbClr val="E6E8F0"/>
+                      </a:solidFill>
+                      <a:prstDash val="solid"/>
+                      <a:round/>
+                      <a:headEnd type="none" w="med" len="med"/>
+                      <a:tailEnd type="none" w="med" len="med"/>
+                    </a:lnB>
+                    <a:solidFill>
+                      <a:srgbClr val="FFFFFF"/>
+                    </a:solidFill>
+                  </a:tcPr>
+                </a:tc>
+                <a:tc>
+                  <a:txBody>
+                    <a:bodyPr/>
+                    <a:lstStyle/>
+                    <a:p>
+                      <a:pPr algn="ctr" indent="0" marL="0">
+                        <a:buNone/>
+                      </a:pPr>
+                      <a:r>
+                        <a:rPr lang="en-US" sz="1250" dirty="0">
+                          <a:solidFill>
+                            <a:srgbClr val="4A5568"/>
+                          </a:solidFill>
+                          <a:latin typeface="Calibri" pitchFamily="34" charset="0"/>
+                          <a:ea typeface="Calibri" pitchFamily="34" charset="-122"/>
+                          <a:cs typeface="Calibri" pitchFamily="34" charset="-120"/>
+                        </a:rPr>
+                        <a:t>RM7</a:t>
+                      </a:r>
+                      <a:endParaRPr lang="en-US" sz="1250" dirty="0">
+                        <a:latin typeface="Calibri" charset="0"/>
+                        <a:ea typeface="Calibri" charset="0"/>
+                        <a:cs typeface="Calibri" charset="0"/>
+                      </a:endParaRPr>
+                    </a:p>
+                  </a:txBody>
+                  <a:tcPr marL="101600" marR="101600" marT="25400" marB="25400" anchor="ctr">
+                    <a:lnL w="6350" cap="flat" cmpd="sng" algn="ctr">
+                      <a:solidFill>
+                        <a:srgbClr val="E6E8F0"/>
+                      </a:solidFill>
+                      <a:prstDash val="solid"/>
+                      <a:round/>
+                      <a:headEnd type="none" w="med" len="med"/>
+                      <a:tailEnd type="none" w="med" len="med"/>
+                    </a:lnL>
+                    <a:lnR w="6350" cap="flat" cmpd="sng" algn="ctr">
+                      <a:solidFill>
+                        <a:srgbClr val="E6E8F0"/>
+                      </a:solidFill>
+                      <a:prstDash val="solid"/>
+                      <a:round/>
+                      <a:headEnd type="none" w="med" len="med"/>
+                      <a:tailEnd type="none" w="med" len="med"/>
+                    </a:lnR>
+                    <a:lnT w="6350" cap="flat" cmpd="sng" algn="ctr">
+                      <a:solidFill>
+                        <a:srgbClr val="E6E8F0"/>
+                      </a:solidFill>
+                      <a:prstDash val="solid"/>
+                      <a:round/>
+                      <a:headEnd type="none" w="med" len="med"/>
+                      <a:tailEnd type="none" w="med" len="med"/>
+                    </a:lnT>
+                    <a:lnB w="6350" cap="flat" cmpd="sng" algn="ctr">
+                      <a:solidFill>
+                        <a:srgbClr val="E6E8F0"/>
+                      </a:solidFill>
+                      <a:prstDash val="solid"/>
+                      <a:round/>
+                      <a:headEnd type="none" w="med" len="med"/>
+                      <a:tailEnd type="none" w="med" len="med"/>
+                    </a:lnB>
+                    <a:solidFill>
+                      <a:srgbClr val="FFFFFF"/>
+                    </a:solidFill>
+                  </a:tcPr>
+                </a:tc>
+                <a:tc>
+                  <a:txBody>
+                    <a:bodyPr/>
+                    <a:lstStyle/>
+                    <a:p>
+                      <a:pPr algn="ctr" indent="0" marL="0">
+                        <a:buNone/>
+                      </a:pPr>
+                      <a:r>
+                        <a:rPr lang="en-US" sz="1250" dirty="0">
+                          <a:solidFill>
+                            <a:srgbClr val="4A5568"/>
+                          </a:solidFill>
+                          <a:latin typeface="Calibri" pitchFamily="34" charset="0"/>
+                          <a:ea typeface="Calibri" pitchFamily="34" charset="-122"/>
+                          <a:cs typeface="Calibri" pitchFamily="34" charset="-120"/>
+                        </a:rPr>
+                        <a:t>RM25</a:t>
+                      </a:r>
+                      <a:endParaRPr lang="en-US" sz="1250" dirty="0">
+                        <a:latin typeface="Calibri" charset="0"/>
+                        <a:ea typeface="Calibri" charset="0"/>
+                        <a:cs typeface="Calibri" charset="0"/>
+                      </a:endParaRPr>
+                    </a:p>
+                  </a:txBody>
+                  <a:tcPr marL="101600" marR="101600" marT="25400" marB="25400" anchor="ctr">
+                    <a:lnL w="6350" cap="flat" cmpd="sng" algn="ctr">
+                      <a:solidFill>
+                        <a:srgbClr val="E6E8F0"/>
+                      </a:solidFill>
+                      <a:prstDash val="solid"/>
+                      <a:round/>
+                      <a:headEnd type="none" w="med" len="med"/>
+                      <a:tailEnd type="none" w="med" len="med"/>
+                    </a:lnL>
+                    <a:lnR w="6350" cap="flat" cmpd="sng" algn="ctr">
+                      <a:solidFill>
+                        <a:srgbClr val="E6E8F0"/>
+                      </a:solidFill>
+                      <a:prstDash val="solid"/>
+                      <a:round/>
+                      <a:headEnd type="none" w="med" len="med"/>
+                      <a:tailEnd type="none" w="med" len="med"/>
+                    </a:lnR>
+                    <a:lnT w="6350" cap="flat" cmpd="sng" algn="ctr">
+                      <a:solidFill>
+                        <a:srgbClr val="E6E8F0"/>
+                      </a:solidFill>
+                      <a:prstDash val="solid"/>
+                      <a:round/>
+                      <a:headEnd type="none" w="med" len="med"/>
+                      <a:tailEnd type="none" w="med" len="med"/>
+                    </a:lnT>
+                    <a:lnB w="6350" cap="flat" cmpd="sng" algn="ctr">
+                      <a:solidFill>
+                        <a:srgbClr val="E6E8F0"/>
+                      </a:solidFill>
+                      <a:prstDash val="solid"/>
+                      <a:round/>
+                      <a:headEnd type="none" w="med" len="med"/>
+                      <a:tailEnd type="none" w="med" len="med"/>
+                    </a:lnB>
+                    <a:solidFill>
+                      <a:srgbClr val="FFFFFF"/>
+                    </a:solidFill>
+                  </a:tcPr>
+                </a:tc>
+                <a:tc>
+                  <a:txBody>
+                    <a:bodyPr/>
+                    <a:lstStyle/>
+                    <a:p>
+                      <a:pPr algn="ctr" indent="0" marL="0">
+                        <a:buNone/>
+                      </a:pPr>
+                      <a:r>
+                        <a:rPr lang="en-US" sz="1250" dirty="0">
+                          <a:solidFill>
+                            <a:srgbClr val="4A5568"/>
+                          </a:solidFill>
+                          <a:latin typeface="Calibri" pitchFamily="34" charset="0"/>
+                          <a:ea typeface="Calibri" pitchFamily="34" charset="-122"/>
+                          <a:cs typeface="Calibri" pitchFamily="34" charset="-120"/>
+                        </a:rPr>
+                        <a:t>RM31</a:t>
+                      </a:r>
+                      <a:endParaRPr lang="en-US" sz="1250" dirty="0">
+                        <a:latin typeface="Calibri" charset="0"/>
+                        <a:ea typeface="Calibri" charset="0"/>
+                        <a:cs typeface="Calibri" charset="0"/>
+                      </a:endParaRPr>
+                    </a:p>
+                  </a:txBody>
+                  <a:tcPr marL="101600" marR="101600" marT="25400" marB="25400" anchor="ctr">
+                    <a:lnL w="6350" cap="flat" cmpd="sng" algn="ctr">
+                      <a:solidFill>
+                        <a:srgbClr val="E6E8F0"/>
+                      </a:solidFill>
+                      <a:prstDash val="solid"/>
+                      <a:round/>
+                      <a:headEnd type="none" w="med" len="med"/>
+                      <a:tailEnd type="none" w="med" len="med"/>
+                    </a:lnL>
+                    <a:lnR w="6350" cap="flat" cmpd="sng" algn="ctr">
+                      <a:solidFill>
+                        <a:srgbClr val="E6E8F0"/>
+                      </a:solidFill>
+                      <a:prstDash val="solid"/>
+                      <a:round/>
+                      <a:headEnd type="none" w="med" len="med"/>
+                      <a:tailEnd type="none" w="med" len="med"/>
+                    </a:lnR>
+                    <a:lnT w="6350" cap="flat" cmpd="sng" algn="ctr">
+                      <a:solidFill>
+                        <a:srgbClr val="E6E8F0"/>
+                      </a:solidFill>
+                      <a:prstDash val="solid"/>
+                      <a:round/>
+                      <a:headEnd type="none" w="med" len="med"/>
+                      <a:tailEnd type="none" w="med" len="med"/>
+                    </a:lnT>
+                    <a:lnB w="6350" cap="flat" cmpd="sng" algn="ctr">
+                      <a:solidFill>
+                        <a:srgbClr val="E6E8F0"/>
+                      </a:solidFill>
+                      <a:prstDash val="solid"/>
+                      <a:round/>
+                      <a:headEnd type="none" w="med" len="med"/>
+                      <a:tailEnd type="none" w="med" len="med"/>
+                    </a:lnB>
+                    <a:solidFill>
+                      <a:srgbClr val="FFFFFF"/>
+                    </a:solidFill>
+                  </a:tcPr>
+                </a:tc>
+              </a:tr>
+              <a:tr h="384048">
+                <a:tc>
+                  <a:txBody>
+                    <a:bodyPr/>
+                    <a:lstStyle/>
+                    <a:p>
+                      <a:pPr algn="l" indent="0" marL="0">
+                        <a:buNone/>
+                      </a:pPr>
+                      <a:r>
+                        <a:rPr lang="en-US" sz="1250" b="1" dirty="0">
+                          <a:solidFill>
+                            <a:srgbClr val="12132A"/>
+                          </a:solidFill>
+                          <a:latin typeface="Calibri" pitchFamily="34" charset="0"/>
+                          <a:ea typeface="Calibri" pitchFamily="34" charset="-122"/>
+                          <a:cs typeface="Calibri" pitchFamily="34" charset="-120"/>
+                        </a:rPr>
+                        <a:t>Platform share</a:t>
+                      </a:r>
+                      <a:endParaRPr lang="en-US" sz="1250" dirty="0">
+                        <a:latin typeface="Calibri" charset="0"/>
+                        <a:ea typeface="Calibri" charset="0"/>
+                        <a:cs typeface="Calibri" charset="0"/>
+                      </a:endParaRPr>
+                    </a:p>
+                  </a:txBody>
+                  <a:tcPr marL="101600" marR="101600" marT="25400" marB="25400" anchor="ctr">
+                    <a:lnL w="6350" cap="flat" cmpd="sng" algn="ctr">
+                      <a:solidFill>
+                        <a:srgbClr val="E6E8F0"/>
+                      </a:solidFill>
+                      <a:prstDash val="solid"/>
+                      <a:round/>
+                      <a:headEnd type="none" w="med" len="med"/>
+                      <a:tailEnd type="none" w="med" len="med"/>
+                    </a:lnL>
+                    <a:lnR w="6350" cap="flat" cmpd="sng" algn="ctr">
+                      <a:solidFill>
+                        <a:srgbClr val="E6E8F0"/>
+                      </a:solidFill>
+                      <a:prstDash val="solid"/>
+                      <a:round/>
+                      <a:headEnd type="none" w="med" len="med"/>
+                      <a:tailEnd type="none" w="med" len="med"/>
+                    </a:lnR>
+                    <a:lnT w="6350" cap="flat" cmpd="sng" algn="ctr">
+                      <a:solidFill>
+                        <a:srgbClr val="E6E8F0"/>
+                      </a:solidFill>
+                      <a:prstDash val="solid"/>
+                      <a:round/>
+                      <a:headEnd type="none" w="med" len="med"/>
+                      <a:tailEnd type="none" w="med" len="med"/>
+                    </a:lnT>
+                    <a:lnB w="6350" cap="flat" cmpd="sng" algn="ctr">
+                      <a:solidFill>
+                        <a:srgbClr val="E6E8F0"/>
+                      </a:solidFill>
+                      <a:prstDash val="solid"/>
+                      <a:round/>
+                      <a:headEnd type="none" w="med" len="med"/>
+                      <a:tailEnd type="none" w="med" len="med"/>
+                    </a:lnB>
+                    <a:solidFill>
+                      <a:srgbClr val="FFFFFF"/>
+                    </a:solidFill>
+                  </a:tcPr>
+                </a:tc>
+                <a:tc>
+                  <a:txBody>
+                    <a:bodyPr/>
+                    <a:lstStyle/>
+                    <a:p>
+                      <a:pPr algn="ctr" indent="0" marL="0">
+                        <a:buNone/>
+                      </a:pPr>
+                      <a:r>
+                        <a:rPr lang="en-US" sz="1250" dirty="0">
+                          <a:solidFill>
+                            <a:srgbClr val="4A5568"/>
+                          </a:solidFill>
+                          <a:latin typeface="Calibri" pitchFamily="34" charset="0"/>
+                          <a:ea typeface="Calibri" pitchFamily="34" charset="-122"/>
+                          <a:cs typeface="Calibri" pitchFamily="34" charset="-120"/>
+                        </a:rPr>
+                        <a:t>RM3</a:t>
+                      </a:r>
+                      <a:endParaRPr lang="en-US" sz="1250" dirty="0">
+                        <a:latin typeface="Calibri" charset="0"/>
+                        <a:ea typeface="Calibri" charset="0"/>
+                        <a:cs typeface="Calibri" charset="0"/>
+                      </a:endParaRPr>
+                    </a:p>
+                  </a:txBody>
+                  <a:tcPr marL="101600" marR="101600" marT="25400" marB="25400" anchor="ctr">
+                    <a:lnL w="6350" cap="flat" cmpd="sng" algn="ctr">
+                      <a:solidFill>
+                        <a:srgbClr val="E6E8F0"/>
+                      </a:solidFill>
+                      <a:prstDash val="solid"/>
+                      <a:round/>
+                      <a:headEnd type="none" w="med" len="med"/>
+                      <a:tailEnd type="none" w="med" len="med"/>
+                    </a:lnL>
+                    <a:lnR w="6350" cap="flat" cmpd="sng" algn="ctr">
+                      <a:solidFill>
+                        <a:srgbClr val="E6E8F0"/>
+                      </a:solidFill>
+                      <a:prstDash val="solid"/>
+                      <a:round/>
+                      <a:headEnd type="none" w="med" len="med"/>
+                      <a:tailEnd type="none" w="med" len="med"/>
+                    </a:lnR>
+                    <a:lnT w="6350" cap="flat" cmpd="sng" algn="ctr">
+                      <a:solidFill>
+                        <a:srgbClr val="E6E8F0"/>
+                      </a:solidFill>
+                      <a:prstDash val="solid"/>
+                      <a:round/>
+                      <a:headEnd type="none" w="med" len="med"/>
+                      <a:tailEnd type="none" w="med" len="med"/>
+                    </a:lnT>
+                    <a:lnB w="6350" cap="flat" cmpd="sng" algn="ctr">
+                      <a:solidFill>
+                        <a:srgbClr val="E6E8F0"/>
+                      </a:solidFill>
+                      <a:prstDash val="solid"/>
+                      <a:round/>
+                      <a:headEnd type="none" w="med" len="med"/>
+                      <a:tailEnd type="none" w="med" len="med"/>
+                    </a:lnB>
+                    <a:solidFill>
+                      <a:srgbClr val="FFFFFF"/>
+                    </a:solidFill>
+                  </a:tcPr>
+                </a:tc>
+                <a:tc>
+                  <a:txBody>
+                    <a:bodyPr/>
+                    <a:lstStyle/>
+                    <a:p>
+                      <a:pPr algn="ctr" indent="0" marL="0">
+                        <a:buNone/>
+                      </a:pPr>
+                      <a:r>
+                        <a:rPr lang="en-US" sz="1250" dirty="0">
+                          <a:solidFill>
+                            <a:srgbClr val="4A5568"/>
+                          </a:solidFill>
+                          <a:latin typeface="Calibri" pitchFamily="34" charset="0"/>
+                          <a:ea typeface="Calibri" pitchFamily="34" charset="-122"/>
+                          <a:cs typeface="Calibri" pitchFamily="34" charset="-120"/>
+                        </a:rPr>
+                        <a:t>RM3</a:t>
+                      </a:r>
+                      <a:endParaRPr lang="en-US" sz="1250" dirty="0">
+                        <a:latin typeface="Calibri" charset="0"/>
+                        <a:ea typeface="Calibri" charset="0"/>
+                        <a:cs typeface="Calibri" charset="0"/>
+                      </a:endParaRPr>
+                    </a:p>
+                  </a:txBody>
+                  <a:tcPr marL="101600" marR="101600" marT="25400" marB="25400" anchor="ctr">
+                    <a:lnL w="6350" cap="flat" cmpd="sng" algn="ctr">
+                      <a:solidFill>
+                        <a:srgbClr val="E6E8F0"/>
+                      </a:solidFill>
+                      <a:prstDash val="solid"/>
+                      <a:round/>
+                      <a:headEnd type="none" w="med" len="med"/>
+                      <a:tailEnd type="none" w="med" len="med"/>
+                    </a:lnL>
+                    <a:lnR w="6350" cap="flat" cmpd="sng" algn="ctr">
+                      <a:solidFill>
+                        <a:srgbClr val="E6E8F0"/>
+                      </a:solidFill>
+                      <a:prstDash val="solid"/>
+                      <a:round/>
+                      <a:headEnd type="none" w="med" len="med"/>
+                      <a:tailEnd type="none" w="med" len="med"/>
+                    </a:lnR>
+                    <a:lnT w="6350" cap="flat" cmpd="sng" algn="ctr">
+                      <a:solidFill>
+                        <a:srgbClr val="E6E8F0"/>
+                      </a:solidFill>
+                      <a:prstDash val="solid"/>
+                      <a:round/>
+                      <a:headEnd type="none" w="med" len="med"/>
+                      <a:tailEnd type="none" w="med" len="med"/>
+                    </a:lnT>
+                    <a:lnB w="6350" cap="flat" cmpd="sng" algn="ctr">
+                      <a:solidFill>
+                        <a:srgbClr val="E6E8F0"/>
+                      </a:solidFill>
+                      <a:prstDash val="solid"/>
+                      <a:round/>
+                      <a:headEnd type="none" w="med" len="med"/>
+                      <a:tailEnd type="none" w="med" len="med"/>
+                    </a:lnB>
+                    <a:solidFill>
+                      <a:srgbClr val="FFFFFF"/>
+                    </a:solidFill>
+                  </a:tcPr>
+                </a:tc>
+                <a:tc>
+                  <a:txBody>
+                    <a:bodyPr/>
+                    <a:lstStyle/>
+                    <a:p>
+                      <a:pPr algn="ctr" indent="0" marL="0">
+                        <a:buNone/>
+                      </a:pPr>
+                      <a:r>
+                        <a:rPr lang="en-US" sz="1250" dirty="0">
+                          <a:solidFill>
+                            <a:srgbClr val="4A5568"/>
+                          </a:solidFill>
+                          <a:latin typeface="Calibri" pitchFamily="34" charset="0"/>
+                          <a:ea typeface="Calibri" pitchFamily="34" charset="-122"/>
+                          <a:cs typeface="Calibri" pitchFamily="34" charset="-120"/>
+                        </a:rPr>
+                        <a:t>RM3</a:t>
+                      </a:r>
+                      <a:endParaRPr lang="en-US" sz="1250" dirty="0">
+                        <a:latin typeface="Calibri" charset="0"/>
+                        <a:ea typeface="Calibri" charset="0"/>
+                        <a:cs typeface="Calibri" charset="0"/>
+                      </a:endParaRPr>
+                    </a:p>
+                  </a:txBody>
+                  <a:tcPr marL="101600" marR="101600" marT="25400" marB="25400" anchor="ctr">
+                    <a:lnL w="6350" cap="flat" cmpd="sng" algn="ctr">
+                      <a:solidFill>
+                        <a:srgbClr val="E6E8F0"/>
+                      </a:solidFill>
+                      <a:prstDash val="solid"/>
+                      <a:round/>
+                      <a:headEnd type="none" w="med" len="med"/>
+                      <a:tailEnd type="none" w="med" len="med"/>
+                    </a:lnL>
+                    <a:lnR w="6350" cap="flat" cmpd="sng" algn="ctr">
+                      <a:solidFill>
+                        <a:srgbClr val="E6E8F0"/>
+                      </a:solidFill>
+                      <a:prstDash val="solid"/>
+                      <a:round/>
+                      <a:headEnd type="none" w="med" len="med"/>
+                      <a:tailEnd type="none" w="med" len="med"/>
+                    </a:lnR>
+                    <a:lnT w="6350" cap="flat" cmpd="sng" algn="ctr">
+                      <a:solidFill>
+                        <a:srgbClr val="E6E8F0"/>
+                      </a:solidFill>
+                      <a:prstDash val="solid"/>
+                      <a:round/>
+                      <a:headEnd type="none" w="med" len="med"/>
+                      <a:tailEnd type="none" w="med" len="med"/>
+                    </a:lnT>
+                    <a:lnB w="6350" cap="flat" cmpd="sng" algn="ctr">
+                      <a:solidFill>
+                        <a:srgbClr val="E6E8F0"/>
+                      </a:solidFill>
+                      <a:prstDash val="solid"/>
+                      <a:round/>
+                      <a:headEnd type="none" w="med" len="med"/>
+                      <a:tailEnd type="none" w="med" len="med"/>
+                    </a:lnB>
+                    <a:solidFill>
+                      <a:srgbClr val="FFFFFF"/>
+                    </a:solidFill>
+                  </a:tcPr>
+                </a:tc>
+              </a:tr>
+              <a:tr h="384048">
+                <a:tc>
+                  <a:txBody>
+                    <a:bodyPr/>
+                    <a:lstStyle/>
+                    <a:p>
+                      <a:pPr algn="l" indent="0" marL="0">
+                        <a:buNone/>
+                      </a:pPr>
+                      <a:r>
+                        <a:rPr lang="en-US" sz="1250" b="1" dirty="0">
+                          <a:solidFill>
+                            <a:srgbClr val="12132A"/>
+                          </a:solidFill>
+                          <a:latin typeface="Calibri" pitchFamily="34" charset="0"/>
+                          <a:ea typeface="Calibri" pitchFamily="34" charset="-122"/>
+                          <a:cs typeface="Calibri" pitchFamily="34" charset="-120"/>
+                        </a:rPr>
+                        <a:t>WhatsApp</a:t>
+                      </a:r>
+                      <a:endParaRPr lang="en-US" sz="1250" dirty="0">
+                        <a:latin typeface="Calibri" charset="0"/>
+                        <a:ea typeface="Calibri" charset="0"/>
+                        <a:cs typeface="Calibri" charset="0"/>
+                      </a:endParaRPr>
+                    </a:p>
+                  </a:txBody>
+                  <a:tcPr marL="101600" marR="101600" marT="25400" marB="25400" anchor="ctr">
+                    <a:lnL w="6350" cap="flat" cmpd="sng" algn="ctr">
+                      <a:solidFill>
+                        <a:srgbClr val="E6E8F0"/>
+                      </a:solidFill>
+                      <a:prstDash val="solid"/>
+                      <a:round/>
+                      <a:headEnd type="none" w="med" len="med"/>
+                      <a:tailEnd type="none" w="med" len="med"/>
+                    </a:lnL>
+                    <a:lnR w="6350" cap="flat" cmpd="sng" algn="ctr">
+                      <a:solidFill>
+                        <a:srgbClr val="E6E8F0"/>
+                      </a:solidFill>
+                      <a:prstDash val="solid"/>
+                      <a:round/>
+                      <a:headEnd type="none" w="med" len="med"/>
+                      <a:tailEnd type="none" w="med" len="med"/>
+                    </a:lnR>
+                    <a:lnT w="6350" cap="flat" cmpd="sng" algn="ctr">
+                      <a:solidFill>
+                        <a:srgbClr val="E6E8F0"/>
+                      </a:solidFill>
+                      <a:prstDash val="solid"/>
+                      <a:round/>
+                      <a:headEnd type="none" w="med" len="med"/>
+                      <a:tailEnd type="none" w="med" len="med"/>
+                    </a:lnT>
+                    <a:lnB w="6350" cap="flat" cmpd="sng" algn="ctr">
+                      <a:solidFill>
+                        <a:srgbClr val="E6E8F0"/>
+                      </a:solidFill>
+                      <a:prstDash val="solid"/>
+                      <a:round/>
+                      <a:headEnd type="none" w="med" len="med"/>
+                      <a:tailEnd type="none" w="med" len="med"/>
+                    </a:lnB>
+                    <a:solidFill>
+                      <a:srgbClr val="FFFFFF"/>
+                    </a:solidFill>
+                  </a:tcPr>
+                </a:tc>
+                <a:tc>
+                  <a:txBody>
+                    <a:bodyPr/>
+                    <a:lstStyle/>
+                    <a:p>
+                      <a:pPr algn="ctr" indent="0" marL="0">
+                        <a:buNone/>
+                      </a:pPr>
+                      <a:r>
+                        <a:rPr lang="en-US" sz="1250" dirty="0">
+                          <a:solidFill>
+                            <a:srgbClr val="4A5568"/>
+                          </a:solidFill>
+                          <a:latin typeface="Calibri" pitchFamily="34" charset="0"/>
+                          <a:ea typeface="Calibri" pitchFamily="34" charset="-122"/>
+                          <a:cs typeface="Calibri" pitchFamily="34" charset="-120"/>
+                        </a:rPr>
+                        <a:t>RM0</a:t>
+                      </a:r>
+                      <a:endParaRPr lang="en-US" sz="1250" dirty="0">
+                        <a:latin typeface="Calibri" charset="0"/>
+                        <a:ea typeface="Calibri" charset="0"/>
+                        <a:cs typeface="Calibri" charset="0"/>
+                      </a:endParaRPr>
+                    </a:p>
+                  </a:txBody>
+                  <a:tcPr marL="101600" marR="101600" marT="25400" marB="25400" anchor="ctr">
+                    <a:lnL w="6350" cap="flat" cmpd="sng" algn="ctr">
+                      <a:solidFill>
+                        <a:srgbClr val="E6E8F0"/>
+                      </a:solidFill>
+                      <a:prstDash val="solid"/>
+                      <a:round/>
+                      <a:headEnd type="none" w="med" len="med"/>
+                      <a:tailEnd type="none" w="med" len="med"/>
+                    </a:lnL>
+                    <a:lnR w="6350" cap="flat" cmpd="sng" algn="ctr">
+                      <a:solidFill>
+                        <a:srgbClr val="E6E8F0"/>
+                      </a:solidFill>
+                      <a:prstDash val="solid"/>
+                      <a:round/>
+                      <a:headEnd type="none" w="med" len="med"/>
+                      <a:tailEnd type="none" w="med" len="med"/>
+                    </a:lnR>
+                    <a:lnT w="6350" cap="flat" cmpd="sng" algn="ctr">
+                      <a:solidFill>
+                        <a:srgbClr val="E6E8F0"/>
+                      </a:solidFill>
+                      <a:prstDash val="solid"/>
+                      <a:round/>
+                      <a:headEnd type="none" w="med" len="med"/>
+                      <a:tailEnd type="none" w="med" len="med"/>
+                    </a:lnT>
+                    <a:lnB w="6350" cap="flat" cmpd="sng" algn="ctr">
+                      <a:solidFill>
+                        <a:srgbClr val="E6E8F0"/>
+                      </a:solidFill>
+                      <a:prstDash val="solid"/>
+                      <a:round/>
+                      <a:headEnd type="none" w="med" len="med"/>
+                      <a:tailEnd type="none" w="med" len="med"/>
+                    </a:lnB>
+                    <a:solidFill>
+                      <a:srgbClr val="FFFFFF"/>
+                    </a:solidFill>
+                  </a:tcPr>
+                </a:tc>
+                <a:tc>
+                  <a:txBody>
+                    <a:bodyPr/>
+                    <a:lstStyle/>
+                    <a:p>
+                      <a:pPr algn="ctr" indent="0" marL="0">
+                        <a:buNone/>
+                      </a:pPr>
+                      <a:r>
+                        <a:rPr lang="en-US" sz="1250" dirty="0">
+                          <a:solidFill>
+                            <a:srgbClr val="4A5568"/>
+                          </a:solidFill>
+                          <a:latin typeface="Calibri" pitchFamily="34" charset="0"/>
+                          <a:ea typeface="Calibri" pitchFamily="34" charset="-122"/>
+                          <a:cs typeface="Calibri" pitchFamily="34" charset="-120"/>
+                        </a:rPr>
+                        <a:t>RM0</a:t>
+                      </a:r>
+                      <a:endParaRPr lang="en-US" sz="1250" dirty="0">
+                        <a:latin typeface="Calibri" charset="0"/>
+                        <a:ea typeface="Calibri" charset="0"/>
+                        <a:cs typeface="Calibri" charset="0"/>
+                      </a:endParaRPr>
+                    </a:p>
+                  </a:txBody>
+                  <a:tcPr marL="101600" marR="101600" marT="25400" marB="25400" anchor="ctr">
+                    <a:lnL w="6350" cap="flat" cmpd="sng" algn="ctr">
+                      <a:solidFill>
+                        <a:srgbClr val="E6E8F0"/>
+                      </a:solidFill>
+                      <a:prstDash val="solid"/>
+                      <a:round/>
+                      <a:headEnd type="none" w="med" len="med"/>
+                      <a:tailEnd type="none" w="med" len="med"/>
+                    </a:lnL>
+                    <a:lnR w="6350" cap="flat" cmpd="sng" algn="ctr">
+                      <a:solidFill>
+                        <a:srgbClr val="E6E8F0"/>
+                      </a:solidFill>
+                      <a:prstDash val="solid"/>
+                      <a:round/>
+                      <a:headEnd type="none" w="med" len="med"/>
+                      <a:tailEnd type="none" w="med" len="med"/>
+                    </a:lnR>
+                    <a:lnT w="6350" cap="flat" cmpd="sng" algn="ctr">
+                      <a:solidFill>
+                        <a:srgbClr val="E6E8F0"/>
+                      </a:solidFill>
+                      <a:prstDash val="solid"/>
+                      <a:round/>
+                      <a:headEnd type="none" w="med" len="med"/>
+                      <a:tailEnd type="none" w="med" len="med"/>
+                    </a:lnT>
+                    <a:lnB w="6350" cap="flat" cmpd="sng" algn="ctr">
+                      <a:solidFill>
+                        <a:srgbClr val="E6E8F0"/>
+                      </a:solidFill>
+                      <a:prstDash val="solid"/>
+                      <a:round/>
+                      <a:headEnd type="none" w="med" len="med"/>
+                      <a:tailEnd type="none" w="med" len="med"/>
+                    </a:lnB>
+                    <a:solidFill>
+                      <a:srgbClr val="FFFFFF"/>
+                    </a:solidFill>
+                  </a:tcPr>
+                </a:tc>
+                <a:tc>
+                  <a:txBody>
+                    <a:bodyPr/>
+                    <a:lstStyle/>
+                    <a:p>
+                      <a:pPr algn="ctr" indent="0" marL="0">
+                        <a:buNone/>
+                      </a:pPr>
+                      <a:r>
+                        <a:rPr lang="en-US" sz="1250" dirty="0">
+                          <a:solidFill>
+                            <a:srgbClr val="4A5568"/>
+                          </a:solidFill>
+                          <a:latin typeface="Calibri" pitchFamily="34" charset="0"/>
+                          <a:ea typeface="Calibri" pitchFamily="34" charset="-122"/>
+                          <a:cs typeface="Calibri" pitchFamily="34" charset="-120"/>
+                        </a:rPr>
+                        <a:t>RM0</a:t>
+                      </a:r>
+                      <a:endParaRPr lang="en-US" sz="1250" dirty="0">
+                        <a:latin typeface="Calibri" charset="0"/>
+                        <a:ea typeface="Calibri" charset="0"/>
+                        <a:cs typeface="Calibri" charset="0"/>
+                      </a:endParaRPr>
+                    </a:p>
+                  </a:txBody>
+                  <a:tcPr marL="101600" marR="101600" marT="25400" marB="25400" anchor="ctr">
+                    <a:lnL w="6350" cap="flat" cmpd="sng" algn="ctr">
+                      <a:solidFill>
+                        <a:srgbClr val="E6E8F0"/>
+                      </a:solidFill>
+                      <a:prstDash val="solid"/>
+                      <a:round/>
+                      <a:headEnd type="none" w="med" len="med"/>
+                      <a:tailEnd type="none" w="med" len="med"/>
+                    </a:lnL>
+                    <a:lnR w="6350" cap="flat" cmpd="sng" algn="ctr">
+                      <a:solidFill>
+                        <a:srgbClr val="E6E8F0"/>
+                      </a:solidFill>
+                      <a:prstDash val="solid"/>
+                      <a:round/>
+                      <a:headEnd type="none" w="med" len="med"/>
+                      <a:tailEnd type="none" w="med" len="med"/>
+                    </a:lnR>
+                    <a:lnT w="6350" cap="flat" cmpd="sng" algn="ctr">
+                      <a:solidFill>
+                        <a:srgbClr val="E6E8F0"/>
+                      </a:solidFill>
+                      <a:prstDash val="solid"/>
+                      <a:round/>
+                      <a:headEnd type="none" w="med" len="med"/>
+                      <a:tailEnd type="none" w="med" len="med"/>
+                    </a:lnT>
+                    <a:lnB w="6350" cap="flat" cmpd="sng" algn="ctr">
+                      <a:solidFill>
+                        <a:srgbClr val="E6E8F0"/>
+                      </a:solidFill>
+                      <a:prstDash val="solid"/>
+                      <a:round/>
+                      <a:headEnd type="none" w="med" len="med"/>
+                      <a:tailEnd type="none" w="med" len="med"/>
+                    </a:lnB>
+                    <a:solidFill>
+                      <a:srgbClr val="FFFFFF"/>
+                    </a:solidFill>
+                  </a:tcPr>
+                </a:tc>
+              </a:tr>
+              <a:tr h="457200">
+                <a:tc>
+                  <a:txBody>
+                    <a:bodyPr/>
+                    <a:lstStyle/>
+                    <a:p>
+                      <a:pPr algn="l" indent="0" marL="0">
+                        <a:buNone/>
+                      </a:pPr>
+                      <a:r>
+                        <a:rPr lang="en-US" sz="1250" b="1" dirty="0">
+                          <a:solidFill>
+                            <a:srgbClr val="12132A"/>
+                          </a:solidFill>
+                          <a:latin typeface="Calibri" pitchFamily="34" charset="0"/>
+                          <a:ea typeface="Calibri" pitchFamily="34" charset="-122"/>
+                          <a:cs typeface="Calibri" pitchFamily="34" charset="-120"/>
+                        </a:rPr>
+                        <a:t>Total cost to serve</a:t>
+                      </a:r>
+                      <a:endParaRPr lang="en-US" sz="1250" dirty="0">
+                        <a:latin typeface="Calibri" charset="0"/>
+                        <a:ea typeface="Calibri" charset="0"/>
+                        <a:cs typeface="Calibri" charset="0"/>
+                      </a:endParaRPr>
+                    </a:p>
+                  </a:txBody>
+                  <a:tcPr marL="101600" marR="101600" marT="25400" marB="25400" anchor="ctr">
+                    <a:lnL w="6350" cap="flat" cmpd="sng" algn="ctr">
+                      <a:solidFill>
+                        <a:srgbClr val="E6E8F0"/>
+                      </a:solidFill>
+                      <a:prstDash val="solid"/>
+                      <a:round/>
+                      <a:headEnd type="none" w="med" len="med"/>
+                      <a:tailEnd type="none" w="med" len="med"/>
+                    </a:lnL>
+                    <a:lnR w="6350" cap="flat" cmpd="sng" algn="ctr">
+                      <a:solidFill>
+                        <a:srgbClr val="E6E8F0"/>
+                      </a:solidFill>
+                      <a:prstDash val="solid"/>
+                      <a:round/>
+                      <a:headEnd type="none" w="med" len="med"/>
+                      <a:tailEnd type="none" w="med" len="med"/>
+                    </a:lnR>
+                    <a:lnT w="6350" cap="flat" cmpd="sng" algn="ctr">
+                      <a:solidFill>
+                        <a:srgbClr val="E6E8F0"/>
+                      </a:solidFill>
+                      <a:prstDash val="solid"/>
+                      <a:round/>
+                      <a:headEnd type="none" w="med" len="med"/>
+                      <a:tailEnd type="none" w="med" len="med"/>
+                    </a:lnT>
+                    <a:lnB w="6350" cap="flat" cmpd="sng" algn="ctr">
+                      <a:solidFill>
+                        <a:srgbClr val="E6E8F0"/>
+                      </a:solidFill>
+                      <a:prstDash val="solid"/>
+                      <a:round/>
+                      <a:headEnd type="none" w="med" len="med"/>
+                      <a:tailEnd type="none" w="med" len="med"/>
+                    </a:lnB>
+                    <a:solidFill>
+                      <a:srgbClr val="F5F7FE"/>
+                    </a:solidFill>
+                  </a:tcPr>
+                </a:tc>
+                <a:tc>
+                  <a:txBody>
+                    <a:bodyPr/>
+                    <a:lstStyle/>
+                    <a:p>
+                      <a:pPr algn="ctr" indent="0" marL="0">
+                        <a:buNone/>
+                      </a:pPr>
+                      <a:r>
+                        <a:rPr lang="en-US" sz="1250" b="1" dirty="0">
+                          <a:solidFill>
+                            <a:srgbClr val="4A5568"/>
+                          </a:solidFill>
+                          <a:latin typeface="Calibri" pitchFamily="34" charset="0"/>
+                          <a:ea typeface="Calibri" pitchFamily="34" charset="-122"/>
+                          <a:cs typeface="Calibri" pitchFamily="34" charset="-120"/>
+                        </a:rPr>
+                        <a:t>RM37</a:t>
+                      </a:r>
+                      <a:endParaRPr lang="en-US" sz="1250" dirty="0">
+                        <a:latin typeface="Calibri" charset="0"/>
+                        <a:ea typeface="Calibri" charset="0"/>
+                        <a:cs typeface="Calibri" charset="0"/>
+                      </a:endParaRPr>
+                    </a:p>
+                  </a:txBody>
+                  <a:tcPr marL="101600" marR="101600" marT="25400" marB="25400" anchor="ctr">
+                    <a:lnL w="6350" cap="flat" cmpd="sng" algn="ctr">
+                      <a:solidFill>
+                        <a:srgbClr val="E6E8F0"/>
+                      </a:solidFill>
+                      <a:prstDash val="solid"/>
+                      <a:round/>
+                      <a:headEnd type="none" w="med" len="med"/>
+                      <a:tailEnd type="none" w="med" len="med"/>
+                    </a:lnL>
+                    <a:lnR w="6350" cap="flat" cmpd="sng" algn="ctr">
+                      <a:solidFill>
+                        <a:srgbClr val="E6E8F0"/>
+                      </a:solidFill>
+                      <a:prstDash val="solid"/>
+                      <a:round/>
+                      <a:headEnd type="none" w="med" len="med"/>
+                      <a:tailEnd type="none" w="med" len="med"/>
+                    </a:lnR>
+                    <a:lnT w="6350" cap="flat" cmpd="sng" algn="ctr">
+                      <a:solidFill>
+                        <a:srgbClr val="E6E8F0"/>
+                      </a:solidFill>
+                      <a:prstDash val="solid"/>
+                      <a:round/>
+                      <a:headEnd type="none" w="med" len="med"/>
+                      <a:tailEnd type="none" w="med" len="med"/>
+                    </a:lnT>
+                    <a:lnB w="6350" cap="flat" cmpd="sng" algn="ctr">
+                      <a:solidFill>
+                        <a:srgbClr val="E6E8F0"/>
+                      </a:solidFill>
+                      <a:prstDash val="solid"/>
+                      <a:round/>
+                      <a:headEnd type="none" w="med" len="med"/>
+                      <a:tailEnd type="none" w="med" len="med"/>
+                    </a:lnB>
+                    <a:solidFill>
+                      <a:srgbClr val="F5F7FE"/>
+                    </a:solidFill>
+                  </a:tcPr>
+                </a:tc>
+                <a:tc>
+                  <a:txBody>
+                    <a:bodyPr/>
+                    <a:lstStyle/>
+                    <a:p>
+                      <a:pPr algn="ctr" indent="0" marL="0">
+                        <a:buNone/>
+                      </a:pPr>
+                      <a:r>
+                        <a:rPr lang="en-US" sz="1250" b="1" dirty="0">
+                          <a:solidFill>
+                            <a:srgbClr val="4A5568"/>
+                          </a:solidFill>
+                          <a:latin typeface="Calibri" pitchFamily="34" charset="0"/>
+                          <a:ea typeface="Calibri" pitchFamily="34" charset="-122"/>
+                          <a:cs typeface="Calibri" pitchFamily="34" charset="-120"/>
+                        </a:rPr>
+                        <a:t>RM177</a:t>
+                      </a:r>
+                      <a:endParaRPr lang="en-US" sz="1250" dirty="0">
+                        <a:latin typeface="Calibri" charset="0"/>
+                        <a:ea typeface="Calibri" charset="0"/>
+                        <a:cs typeface="Calibri" charset="0"/>
+                      </a:endParaRPr>
+                    </a:p>
+                  </a:txBody>
+                  <a:tcPr marL="101600" marR="101600" marT="25400" marB="25400" anchor="ctr">
+                    <a:lnL w="6350" cap="flat" cmpd="sng" algn="ctr">
+                      <a:solidFill>
+                        <a:srgbClr val="E6E8F0"/>
+                      </a:solidFill>
+                      <a:prstDash val="solid"/>
+                      <a:round/>
+                      <a:headEnd type="none" w="med" len="med"/>
+                      <a:tailEnd type="none" w="med" len="med"/>
+                    </a:lnL>
+                    <a:lnR w="6350" cap="flat" cmpd="sng" algn="ctr">
+                      <a:solidFill>
+                        <a:srgbClr val="E6E8F0"/>
+                      </a:solidFill>
+                      <a:prstDash val="solid"/>
+                      <a:round/>
+                      <a:headEnd type="none" w="med" len="med"/>
+                      <a:tailEnd type="none" w="med" len="med"/>
+                    </a:lnR>
+                    <a:lnT w="6350" cap="flat" cmpd="sng" algn="ctr">
+                      <a:solidFill>
+                        <a:srgbClr val="E6E8F0"/>
+                      </a:solidFill>
+                      <a:prstDash val="solid"/>
+                      <a:round/>
+                      <a:headEnd type="none" w="med" len="med"/>
+                      <a:tailEnd type="none" w="med" len="med"/>
+                    </a:lnT>
+                    <a:lnB w="6350" cap="flat" cmpd="sng" algn="ctr">
+                      <a:solidFill>
+                        <a:srgbClr val="E6E8F0"/>
+                      </a:solidFill>
+                      <a:prstDash val="solid"/>
+                      <a:round/>
+                      <a:headEnd type="none" w="med" len="med"/>
+                      <a:tailEnd type="none" w="med" len="med"/>
+                    </a:lnB>
+                    <a:solidFill>
+                      <a:srgbClr val="F5F7FE"/>
+                    </a:solidFill>
+                  </a:tcPr>
+                </a:tc>
+                <a:tc>
+                  <a:txBody>
+                    <a:bodyPr/>
+                    <a:lstStyle/>
+                    <a:p>
+                      <a:pPr algn="ctr" indent="0" marL="0">
+                        <a:buNone/>
+                      </a:pPr>
+                      <a:r>
+                        <a:rPr lang="en-US" sz="1250" b="1" dirty="0">
+                          <a:solidFill>
+                            <a:srgbClr val="4A5568"/>
+                          </a:solidFill>
+                          <a:latin typeface="Calibri" pitchFamily="34" charset="0"/>
+                          <a:ea typeface="Calibri" pitchFamily="34" charset="-122"/>
+                          <a:cs typeface="Calibri" pitchFamily="34" charset="-120"/>
+                        </a:rPr>
+                        <a:t>RM389</a:t>
+                      </a:r>
+                      <a:endParaRPr lang="en-US" sz="1250" dirty="0">
+                        <a:latin typeface="Calibri" charset="0"/>
+                        <a:ea typeface="Calibri" charset="0"/>
+                        <a:cs typeface="Calibri" charset="0"/>
+                      </a:endParaRPr>
+                    </a:p>
+                  </a:txBody>
+                  <a:tcPr marL="101600" marR="101600" marT="25400" marB="25400" anchor="ctr">
+                    <a:lnL w="6350" cap="flat" cmpd="sng" algn="ctr">
+                      <a:solidFill>
+                        <a:srgbClr val="E6E8F0"/>
+                      </a:solidFill>
+                      <a:prstDash val="solid"/>
+                      <a:round/>
+                      <a:headEnd type="none" w="med" len="med"/>
+                      <a:tailEnd type="none" w="med" len="med"/>
+                    </a:lnL>
+                    <a:lnR w="6350" cap="flat" cmpd="sng" algn="ctr">
+                      <a:solidFill>
+                        <a:srgbClr val="E6E8F0"/>
+                      </a:solidFill>
+                      <a:prstDash val="solid"/>
+                      <a:round/>
+                      <a:headEnd type="none" w="med" len="med"/>
+                      <a:tailEnd type="none" w="med" len="med"/>
+                    </a:lnR>
+                    <a:lnT w="6350" cap="flat" cmpd="sng" algn="ctr">
+                      <a:solidFill>
+                        <a:srgbClr val="E6E8F0"/>
+                      </a:solidFill>
+                      <a:prstDash val="solid"/>
+                      <a:round/>
+                      <a:headEnd type="none" w="med" len="med"/>
+                      <a:tailEnd type="none" w="med" len="med"/>
+                    </a:lnT>
+                    <a:lnB w="6350" cap="flat" cmpd="sng" algn="ctr">
+                      <a:solidFill>
+                        <a:srgbClr val="E6E8F0"/>
+                      </a:solidFill>
+                      <a:prstDash val="solid"/>
+                      <a:round/>
+                      <a:headEnd type="none" w="med" len="med"/>
+                      <a:tailEnd type="none" w="med" len="med"/>
+                    </a:lnB>
+                    <a:solidFill>
+                      <a:srgbClr val="F5F7FE"/>
+                    </a:solidFill>
+                  </a:tcPr>
+                </a:tc>
+              </a:tr>
+              <a:tr h="457200">
+                <a:tc>
+                  <a:txBody>
+                    <a:bodyPr/>
+                    <a:lstStyle/>
+                    <a:p>
+                      <a:pPr algn="l" indent="0" marL="0">
+                        <a:buNone/>
+                      </a:pPr>
+                      <a:r>
+                        <a:rPr lang="en-US" sz="1250" b="1" dirty="0">
+                          <a:solidFill>
+                            <a:srgbClr val="12132A"/>
+                          </a:solidFill>
+                          <a:latin typeface="Calibri" pitchFamily="34" charset="0"/>
+                          <a:ea typeface="Calibri" pitchFamily="34" charset="-122"/>
+                          <a:cs typeface="Calibri" pitchFamily="34" charset="-120"/>
+                        </a:rPr>
+                        <a:t>Plan price</a:t>
+                      </a:r>
+                      <a:endParaRPr lang="en-US" sz="1250" dirty="0">
+                        <a:latin typeface="Calibri" charset="0"/>
+                        <a:ea typeface="Calibri" charset="0"/>
+                        <a:cs typeface="Calibri" charset="0"/>
+                      </a:endParaRPr>
+                    </a:p>
+                  </a:txBody>
+                  <a:tcPr marL="101600" marR="101600" marT="25400" marB="25400" anchor="ctr">
+                    <a:lnL w="6350" cap="flat" cmpd="sng" algn="ctr">
+                      <a:solidFill>
+                        <a:srgbClr val="E6E8F0"/>
+                      </a:solidFill>
+                      <a:prstDash val="solid"/>
+                      <a:round/>
+                      <a:headEnd type="none" w="med" len="med"/>
+                      <a:tailEnd type="none" w="med" len="med"/>
+                    </a:lnL>
+                    <a:lnR w="6350" cap="flat" cmpd="sng" algn="ctr">
+                      <a:solidFill>
+                        <a:srgbClr val="E6E8F0"/>
+                      </a:solidFill>
+                      <a:prstDash val="solid"/>
+                      <a:round/>
+                      <a:headEnd type="none" w="med" len="med"/>
+                      <a:tailEnd type="none" w="med" len="med"/>
+                    </a:lnR>
+                    <a:lnT w="6350" cap="flat" cmpd="sng" algn="ctr">
+                      <a:solidFill>
+                        <a:srgbClr val="E6E8F0"/>
+                      </a:solidFill>
+                      <a:prstDash val="solid"/>
+                      <a:round/>
+                      <a:headEnd type="none" w="med" len="med"/>
+                      <a:tailEnd type="none" w="med" len="med"/>
+                    </a:lnT>
+                    <a:lnB w="6350" cap="flat" cmpd="sng" algn="ctr">
+                      <a:solidFill>
+                        <a:srgbClr val="E6E8F0"/>
+                      </a:solidFill>
+                      <a:prstDash val="solid"/>
+                      <a:round/>
+                      <a:headEnd type="none" w="med" len="med"/>
+                      <a:tailEnd type="none" w="med" len="med"/>
+                    </a:lnB>
+                    <a:solidFill>
+                      <a:srgbClr val="F5F7FE"/>
+                    </a:solidFill>
+                  </a:tcPr>
+                </a:tc>
+                <a:tc>
+                  <a:txBody>
+                    <a:bodyPr/>
+                    <a:lstStyle/>
+                    <a:p>
+                      <a:pPr algn="ctr" indent="0" marL="0">
+                        <a:buNone/>
+                      </a:pPr>
+                      <a:r>
+                        <a:rPr lang="en-US" sz="1250" b="1" dirty="0">
+                          <a:solidFill>
+                            <a:srgbClr val="4A5568"/>
+                          </a:solidFill>
+                          <a:latin typeface="Calibri" pitchFamily="34" charset="0"/>
+                          <a:ea typeface="Calibri" pitchFamily="34" charset="-122"/>
+                          <a:cs typeface="Calibri" pitchFamily="34" charset="-120"/>
+                        </a:rPr>
+                        <a:t>RM199</a:t>
+                      </a:r>
+                      <a:endParaRPr lang="en-US" sz="1250" dirty="0">
+                        <a:latin typeface="Calibri" charset="0"/>
+                        <a:ea typeface="Calibri" charset="0"/>
+                        <a:cs typeface="Calibri" charset="0"/>
+                      </a:endParaRPr>
+                    </a:p>
+                  </a:txBody>
+                  <a:tcPr marL="101600" marR="101600" marT="25400" marB="25400" anchor="ctr">
+                    <a:lnL w="6350" cap="flat" cmpd="sng" algn="ctr">
+                      <a:solidFill>
+                        <a:srgbClr val="E6E8F0"/>
+                      </a:solidFill>
+                      <a:prstDash val="solid"/>
+                      <a:round/>
+                      <a:headEnd type="none" w="med" len="med"/>
+                      <a:tailEnd type="none" w="med" len="med"/>
+                    </a:lnL>
+                    <a:lnR w="6350" cap="flat" cmpd="sng" algn="ctr">
+                      <a:solidFill>
+                        <a:srgbClr val="E6E8F0"/>
+                      </a:solidFill>
+                      <a:prstDash val="solid"/>
+                      <a:round/>
+                      <a:headEnd type="none" w="med" len="med"/>
+                      <a:tailEnd type="none" w="med" len="med"/>
+                    </a:lnR>
+                    <a:lnT w="6350" cap="flat" cmpd="sng" algn="ctr">
+                      <a:solidFill>
+                        <a:srgbClr val="E6E8F0"/>
+                      </a:solidFill>
+                      <a:prstDash val="solid"/>
+                      <a:round/>
+                      <a:headEnd type="none" w="med" len="med"/>
+                      <a:tailEnd type="none" w="med" len="med"/>
+                    </a:lnT>
+                    <a:lnB w="6350" cap="flat" cmpd="sng" algn="ctr">
+                      <a:solidFill>
+                        <a:srgbClr val="E6E8F0"/>
+                      </a:solidFill>
+                      <a:prstDash val="solid"/>
+                      <a:round/>
+                      <a:headEnd type="none" w="med" len="med"/>
+                      <a:tailEnd type="none" w="med" len="med"/>
+                    </a:lnB>
+                    <a:solidFill>
+                      <a:srgbClr val="F5F7FE"/>
+                    </a:solidFill>
+                  </a:tcPr>
+                </a:tc>
+                <a:tc>
+                  <a:txBody>
+                    <a:bodyPr/>
+                    <a:lstStyle/>
+                    <a:p>
+                      <a:pPr algn="ctr" indent="0" marL="0">
+                        <a:buNone/>
+                      </a:pPr>
+                      <a:r>
+                        <a:rPr lang="en-US" sz="1250" b="1" dirty="0">
+                          <a:solidFill>
+                            <a:srgbClr val="4A5568"/>
+                          </a:solidFill>
+                          <a:latin typeface="Calibri" pitchFamily="34" charset="0"/>
+                          <a:ea typeface="Calibri" pitchFamily="34" charset="-122"/>
+                          <a:cs typeface="Calibri" pitchFamily="34" charset="-120"/>
+                        </a:rPr>
+                        <a:t>RM799</a:t>
+                      </a:r>
+                      <a:endParaRPr lang="en-US" sz="1250" dirty="0">
+                        <a:latin typeface="Calibri" charset="0"/>
+                        <a:ea typeface="Calibri" charset="0"/>
+                        <a:cs typeface="Calibri" charset="0"/>
+                      </a:endParaRPr>
+                    </a:p>
+                  </a:txBody>
+                  <a:tcPr marL="101600" marR="101600" marT="25400" marB="25400" anchor="ctr">
+                    <a:lnL w="6350" cap="flat" cmpd="sng" algn="ctr">
+                      <a:solidFill>
+                        <a:srgbClr val="E6E8F0"/>
+                      </a:solidFill>
+                      <a:prstDash val="solid"/>
+                      <a:round/>
+                      <a:headEnd type="none" w="med" len="med"/>
+                      <a:tailEnd type="none" w="med" len="med"/>
+                    </a:lnL>
+                    <a:lnR w="6350" cap="flat" cmpd="sng" algn="ctr">
+                      <a:solidFill>
+                        <a:srgbClr val="E6E8F0"/>
+                      </a:solidFill>
+                      <a:prstDash val="solid"/>
+                      <a:round/>
+                      <a:headEnd type="none" w="med" len="med"/>
+                      <a:tailEnd type="none" w="med" len="med"/>
+                    </a:lnR>
+                    <a:lnT w="6350" cap="flat" cmpd="sng" algn="ctr">
+                      <a:solidFill>
+                        <a:srgbClr val="E6E8F0"/>
+                      </a:solidFill>
+                      <a:prstDash val="solid"/>
+                      <a:round/>
+                      <a:headEnd type="none" w="med" len="med"/>
+                      <a:tailEnd type="none" w="med" len="med"/>
+                    </a:lnT>
+                    <a:lnB w="6350" cap="flat" cmpd="sng" algn="ctr">
+                      <a:solidFill>
+                        <a:srgbClr val="E6E8F0"/>
+                      </a:solidFill>
+                      <a:prstDash val="solid"/>
+                      <a:round/>
+                      <a:headEnd type="none" w="med" len="med"/>
+                      <a:tailEnd type="none" w="med" len="med"/>
+                    </a:lnB>
+                    <a:solidFill>
+                      <a:srgbClr val="F5F7FE"/>
+                    </a:solidFill>
+                  </a:tcPr>
+                </a:tc>
+                <a:tc>
+                  <a:txBody>
+                    <a:bodyPr/>
+                    <a:lstStyle/>
+                    <a:p>
+                      <a:pPr algn="ctr" indent="0" marL="0">
+                        <a:buNone/>
+                      </a:pPr>
+                      <a:r>
+                        <a:rPr lang="en-US" sz="1250" b="1" dirty="0">
+                          <a:solidFill>
+                            <a:srgbClr val="4A5568"/>
+                          </a:solidFill>
+                          <a:latin typeface="Calibri" pitchFamily="34" charset="0"/>
+                          <a:ea typeface="Calibri" pitchFamily="34" charset="-122"/>
+                          <a:cs typeface="Calibri" pitchFamily="34" charset="-120"/>
+                        </a:rPr>
+                        <a:t>RM999</a:t>
+                      </a:r>
+                      <a:endParaRPr lang="en-US" sz="1250" dirty="0">
+                        <a:latin typeface="Calibri" charset="0"/>
+                        <a:ea typeface="Calibri" charset="0"/>
+                        <a:cs typeface="Calibri" charset="0"/>
+                      </a:endParaRPr>
+                    </a:p>
+                  </a:txBody>
+                  <a:tcPr marL="101600" marR="101600" marT="25400" marB="25400" anchor="ctr">
+                    <a:lnL w="6350" cap="flat" cmpd="sng" algn="ctr">
+                      <a:solidFill>
+                        <a:srgbClr val="E6E8F0"/>
+                      </a:solidFill>
+                      <a:prstDash val="solid"/>
+                      <a:round/>
+                      <a:headEnd type="none" w="med" len="med"/>
+                      <a:tailEnd type="none" w="med" len="med"/>
+                    </a:lnL>
+                    <a:lnR w="6350" cap="flat" cmpd="sng" algn="ctr">
+                      <a:solidFill>
+                        <a:srgbClr val="E6E8F0"/>
+                      </a:solidFill>
+                      <a:prstDash val="solid"/>
+                      <a:round/>
+                      <a:headEnd type="none" w="med" len="med"/>
+                      <a:tailEnd type="none" w="med" len="med"/>
+                    </a:lnR>
+                    <a:lnT w="6350" cap="flat" cmpd="sng" algn="ctr">
+                      <a:solidFill>
+                        <a:srgbClr val="E6E8F0"/>
+                      </a:solidFill>
+                      <a:prstDash val="solid"/>
+                      <a:round/>
+                      <a:headEnd type="none" w="med" len="med"/>
+                      <a:tailEnd type="none" w="med" len="med"/>
+                    </a:lnT>
+                    <a:lnB w="6350" cap="flat" cmpd="sng" algn="ctr">
+                      <a:solidFill>
+                        <a:srgbClr val="E6E8F0"/>
+                      </a:solidFill>
+                      <a:prstDash val="solid"/>
+                      <a:round/>
+                      <a:headEnd type="none" w="med" len="med"/>
+                      <a:tailEnd type="none" w="med" len="med"/>
+                    </a:lnB>
+                    <a:solidFill>
+                      <a:srgbClr val="F5F7FE"/>
+                    </a:solidFill>
+                  </a:tcPr>
+                </a:tc>
+              </a:tr>
+              <a:tr h="502920">
+                <a:tc>
+                  <a:txBody>
+                    <a:bodyPr/>
+                    <a:lstStyle/>
+                    <a:p>
+                      <a:pPr algn="l" indent="0" marL="0">
+                        <a:buNone/>
+                      </a:pPr>
+                      <a:r>
+                        <a:rPr lang="en-US" sz="1400" b="1" dirty="0">
+                          <a:solidFill>
+                            <a:srgbClr val="12132A"/>
+                          </a:solidFill>
+                          <a:latin typeface="Calibri" pitchFamily="34" charset="0"/>
+                          <a:ea typeface="Calibri" pitchFamily="34" charset="-122"/>
+                          <a:cs typeface="Calibri" pitchFamily="34" charset="-120"/>
+                        </a:rPr>
+                        <a:t>All-in gross margin</a:t>
+                      </a:r>
+                      <a:endParaRPr lang="en-US" sz="1400" dirty="0">
+                        <a:latin typeface="Calibri" charset="0"/>
+                        <a:ea typeface="Calibri" charset="0"/>
+                        <a:cs typeface="Calibri" charset="0"/>
+                      </a:endParaRPr>
+                    </a:p>
+                  </a:txBody>
+                  <a:tcPr marL="101600" marR="101600" marT="25400" marB="25400" anchor="ctr">
+                    <a:lnL w="6350" cap="flat" cmpd="sng" algn="ctr">
+                      <a:solidFill>
+                        <a:srgbClr val="E6E8F0"/>
+                      </a:solidFill>
+                      <a:prstDash val="solid"/>
+                      <a:round/>
+                      <a:headEnd type="none" w="med" len="med"/>
+                      <a:tailEnd type="none" w="med" len="med"/>
+                    </a:lnL>
+                    <a:lnR w="6350" cap="flat" cmpd="sng" algn="ctr">
+                      <a:solidFill>
+                        <a:srgbClr val="E6E8F0"/>
+                      </a:solidFill>
+                      <a:prstDash val="solid"/>
+                      <a:round/>
+                      <a:headEnd type="none" w="med" len="med"/>
+                      <a:tailEnd type="none" w="med" len="med"/>
+                    </a:lnR>
+                    <a:lnT w="6350" cap="flat" cmpd="sng" algn="ctr">
+                      <a:solidFill>
+                        <a:srgbClr val="E6E8F0"/>
+                      </a:solidFill>
+                      <a:prstDash val="solid"/>
+                      <a:round/>
+                      <a:headEnd type="none" w="med" len="med"/>
+                      <a:tailEnd type="none" w="med" len="med"/>
+                    </a:lnT>
+                    <a:lnB w="6350" cap="flat" cmpd="sng" algn="ctr">
+                      <a:solidFill>
+                        <a:srgbClr val="E6E8F0"/>
+                      </a:solidFill>
+                      <a:prstDash val="solid"/>
+                      <a:round/>
+                      <a:headEnd type="none" w="med" len="med"/>
+                      <a:tailEnd type="none" w="med" len="med"/>
+                    </a:lnB>
+                    <a:solidFill>
+                      <a:srgbClr val="EFFBF1"/>
+                    </a:solidFill>
+                  </a:tcPr>
+                </a:tc>
+                <a:tc>
+                  <a:txBody>
+                    <a:bodyPr/>
+                    <a:lstStyle/>
+                    <a:p>
+                      <a:pPr algn="ctr" indent="0" marL="0">
+                        <a:buNone/>
+                      </a:pPr>
+                      <a:r>
+                        <a:rPr lang="en-US" sz="1400" b="1" dirty="0">
+                          <a:solidFill>
+                            <a:srgbClr val="16A34A"/>
+                          </a:solidFill>
+                          <a:latin typeface="Calibri" pitchFamily="34" charset="0"/>
+                          <a:ea typeface="Calibri" pitchFamily="34" charset="-122"/>
+                          <a:cs typeface="Calibri" pitchFamily="34" charset="-120"/>
+                        </a:rPr>
+                        <a:t>81%</a:t>
+                      </a:r>
+                      <a:endParaRPr lang="en-US" sz="1400" dirty="0">
+                        <a:latin typeface="Calibri" charset="0"/>
+                        <a:ea typeface="Calibri" charset="0"/>
+                        <a:cs typeface="Calibri" charset="0"/>
+                      </a:endParaRPr>
+                    </a:p>
+                  </a:txBody>
+                  <a:tcPr marL="101600" marR="101600" marT="25400" marB="25400" anchor="ctr">
+                    <a:lnL w="6350" cap="flat" cmpd="sng" algn="ctr">
+                      <a:solidFill>
+                        <a:srgbClr val="E6E8F0"/>
+                      </a:solidFill>
+                      <a:prstDash val="solid"/>
+                      <a:round/>
+                      <a:headEnd type="none" w="med" len="med"/>
+                      <a:tailEnd type="none" w="med" len="med"/>
+                    </a:lnL>
+                    <a:lnR w="6350" cap="flat" cmpd="sng" algn="ctr">
+                      <a:solidFill>
+                        <a:srgbClr val="E6E8F0"/>
+                      </a:solidFill>
+                      <a:prstDash val="solid"/>
+                      <a:round/>
+                      <a:headEnd type="none" w="med" len="med"/>
+                      <a:tailEnd type="none" w="med" len="med"/>
+                    </a:lnR>
+                    <a:lnT w="6350" cap="flat" cmpd="sng" algn="ctr">
+                      <a:solidFill>
+                        <a:srgbClr val="E6E8F0"/>
+                      </a:solidFill>
+                      <a:prstDash val="solid"/>
+                      <a:round/>
+                      <a:headEnd type="none" w="med" len="med"/>
+                      <a:tailEnd type="none" w="med" len="med"/>
+                    </a:lnT>
+                    <a:lnB w="6350" cap="flat" cmpd="sng" algn="ctr">
+                      <a:solidFill>
+                        <a:srgbClr val="E6E8F0"/>
+                      </a:solidFill>
+                      <a:prstDash val="solid"/>
+                      <a:round/>
+                      <a:headEnd type="none" w="med" len="med"/>
+                      <a:tailEnd type="none" w="med" len="med"/>
+                    </a:lnB>
+                    <a:solidFill>
+                      <a:srgbClr val="EFFBF1"/>
+                    </a:solidFill>
+                  </a:tcPr>
+                </a:tc>
+                <a:tc>
+                  <a:txBody>
+                    <a:bodyPr/>
+                    <a:lstStyle/>
+                    <a:p>
+                      <a:pPr algn="ctr" indent="0" marL="0">
+                        <a:buNone/>
+                      </a:pPr>
+                      <a:r>
+                        <a:rPr lang="en-US" sz="1400" b="1" dirty="0">
+                          <a:solidFill>
+                            <a:srgbClr val="16A34A"/>
+                          </a:solidFill>
+                          <a:latin typeface="Calibri" pitchFamily="34" charset="0"/>
+                          <a:ea typeface="Calibri" pitchFamily="34" charset="-122"/>
+                          <a:cs typeface="Calibri" pitchFamily="34" charset="-120"/>
+                        </a:rPr>
+                        <a:t>78%</a:t>
+                      </a:r>
+                      <a:endParaRPr lang="en-US" sz="1400" dirty="0">
+                        <a:latin typeface="Calibri" charset="0"/>
+                        <a:ea typeface="Calibri" charset="0"/>
+                        <a:cs typeface="Calibri" charset="0"/>
+                      </a:endParaRPr>
+                    </a:p>
+                  </a:txBody>
+                  <a:tcPr marL="101600" marR="101600" marT="25400" marB="25400" anchor="ctr">
+                    <a:lnL w="6350" cap="flat" cmpd="sng" algn="ctr">
+                      <a:solidFill>
+                        <a:srgbClr val="E6E8F0"/>
+                      </a:solidFill>
+                      <a:prstDash val="solid"/>
+                      <a:round/>
+                      <a:headEnd type="none" w="med" len="med"/>
+                      <a:tailEnd type="none" w="med" len="med"/>
+                    </a:lnL>
+                    <a:lnR w="6350" cap="flat" cmpd="sng" algn="ctr">
+                      <a:solidFill>
+                        <a:srgbClr val="E6E8F0"/>
+                      </a:solidFill>
+                      <a:prstDash val="solid"/>
+                      <a:round/>
+                      <a:headEnd type="none" w="med" len="med"/>
+                      <a:tailEnd type="none" w="med" len="med"/>
+                    </a:lnR>
+                    <a:lnT w="6350" cap="flat" cmpd="sng" algn="ctr">
+                      <a:solidFill>
+                        <a:srgbClr val="E6E8F0"/>
+                      </a:solidFill>
+                      <a:prstDash val="solid"/>
+                      <a:round/>
+                      <a:headEnd type="none" w="med" len="med"/>
+                      <a:tailEnd type="none" w="med" len="med"/>
+                    </a:lnT>
+                    <a:lnB w="6350" cap="flat" cmpd="sng" algn="ctr">
+                      <a:solidFill>
+                        <a:srgbClr val="E6E8F0"/>
+                      </a:solidFill>
+                      <a:prstDash val="solid"/>
+                      <a:round/>
+                      <a:headEnd type="none" w="med" len="med"/>
+                      <a:tailEnd type="none" w="med" len="med"/>
+                    </a:lnB>
+                    <a:solidFill>
+                      <a:srgbClr val="EFFBF1"/>
+                    </a:solidFill>
+                  </a:tcPr>
+                </a:tc>
+                <a:tc>
+                  <a:txBody>
+                    <a:bodyPr/>
+                    <a:lstStyle/>
+                    <a:p>
+                      <a:pPr algn="ctr" indent="0" marL="0">
+                        <a:buNone/>
+                      </a:pPr>
+                      <a:r>
+                        <a:rPr lang="en-US" sz="1400" b="1" dirty="0">
+                          <a:solidFill>
+                            <a:srgbClr val="16A34A"/>
+                          </a:solidFill>
+                          <a:latin typeface="Calibri" pitchFamily="34" charset="0"/>
+                          <a:ea typeface="Calibri" pitchFamily="34" charset="-122"/>
+                          <a:cs typeface="Calibri" pitchFamily="34" charset="-120"/>
+                        </a:rPr>
+                        <a:t>61%</a:t>
+                      </a:r>
+                      <a:endParaRPr lang="en-US" sz="1400" dirty="0">
+                        <a:latin typeface="Calibri" charset="0"/>
+                        <a:ea typeface="Calibri" charset="0"/>
+                        <a:cs typeface="Calibri" charset="0"/>
+                      </a:endParaRPr>
+                    </a:p>
+                  </a:txBody>
+                  <a:tcPr marL="101600" marR="101600" marT="25400" marB="25400" anchor="ctr">
+                    <a:lnL w="6350" cap="flat" cmpd="sng" algn="ctr">
+                      <a:solidFill>
+                        <a:srgbClr val="E6E8F0"/>
+                      </a:solidFill>
+                      <a:prstDash val="solid"/>
+                      <a:round/>
+                      <a:headEnd type="none" w="med" len="med"/>
+                      <a:tailEnd type="none" w="med" len="med"/>
+                    </a:lnL>
+                    <a:lnR w="6350" cap="flat" cmpd="sng" algn="ctr">
+                      <a:solidFill>
+                        <a:srgbClr val="E6E8F0"/>
+                      </a:solidFill>
+                      <a:prstDash val="solid"/>
+                      <a:round/>
+                      <a:headEnd type="none" w="med" len="med"/>
+                      <a:tailEnd type="none" w="med" len="med"/>
+                    </a:lnR>
+                    <a:lnT w="6350" cap="flat" cmpd="sng" algn="ctr">
+                      <a:solidFill>
+                        <a:srgbClr val="E6E8F0"/>
+                      </a:solidFill>
+                      <a:prstDash val="solid"/>
+                      <a:round/>
+                      <a:headEnd type="none" w="med" len="med"/>
+                      <a:tailEnd type="none" w="med" len="med"/>
+                    </a:lnT>
+                    <a:lnB w="6350" cap="flat" cmpd="sng" algn="ctr">
+                      <a:solidFill>
+                        <a:srgbClr val="E6E8F0"/>
+                      </a:solidFill>
+                      <a:prstDash val="solid"/>
+                      <a:round/>
+                      <a:headEnd type="none" w="med" len="med"/>
+                      <a:tailEnd type="none" w="med" len="med"/>
+                    </a:lnB>
+                    <a:solidFill>
+                      <a:srgbClr val="EFFBF1"/>
+                    </a:solidFill>
+                  </a:tcPr>
+                </a:tc>
+              </a:tr>
+            </a:tbl>
+          </a:graphicData>
+        </a:graphic>
+      </p:graphicFrame>
+      <p:sp>
+        <p:nvSpPr>
+          <p:cNvPr id="5" name="Shape 2"/>
+          <p:cNvSpPr/>
+          <p:nvPr/>
+        </p:nvSpPr>
+        <p:spPr>
+          <a:xfrm>
+            <a:off x="8412480" y="1874520"/>
+            <a:ext cx="3227832" cy="1051560"/>
+          </a:xfrm>
+          <a:prstGeom prst="roundRect">
+            <a:avLst>
+              <a:gd name="adj" fmla="val 10435"/>
+            </a:avLst>
+          </a:prstGeom>
+          <a:solidFill>
+            <a:srgbClr val="F5F7FE"/>
+          </a:solidFill>
+          <a:ln w="12700">
+            <a:solidFill>
+              <a:srgbClr val="D7DEFB"/>
+            </a:solidFill>
+            <a:prstDash val="solid"/>
+          </a:ln>
+          <a:effectLst>
+            <a:outerShdw sx="100000" sy="100000" kx="0" ky="0" algn="bl" rotWithShape="0" blurRad="101600" dist="25400" dir="5400000">
+              <a:srgbClr val="9AA0B5">
+                <a:alpha val="18000"/>
+              </a:srgbClr>
+            </a:outerShdw>
+          </a:effectLst>
+        </p:spPr>
+      </p:sp>
+      <p:sp>
+        <p:nvSpPr>
+          <p:cNvPr id="6" name="Text 3"/>
+          <p:cNvSpPr/>
+          <p:nvPr/>
+        </p:nvSpPr>
+        <p:spPr>
+          <a:xfrm>
+            <a:off x="8641080" y="2002536"/>
+            <a:ext cx="1828800" cy="320040"/>
+          </a:xfrm>
+          <a:prstGeom prst="rect">
+            <a:avLst/>
+          </a:prstGeom>
+          <a:noFill/>
+          <a:ln/>
+        </p:spPr>
+        <p:txBody>
+          <a:bodyPr wrap="square" lIns="0" tIns="0" rIns="0" bIns="0" rtlCol="0" anchor="ctr"/>
+          <a:lstStyle/>
+          <a:p>
+            <a:pPr algn="l" indent="0" marL="0">
+              <a:buNone/>
+            </a:pPr>
+            <a:r>
+              <a:rPr lang="en-US" sz="1400" b="1" dirty="0">
+                <a:solidFill>
+                  <a:srgbClr val="12132A"/>
+                </a:solidFill>
+                <a:latin typeface="Calibri" pitchFamily="34" charset="0"/>
+                <a:ea typeface="Calibri" pitchFamily="34" charset="-122"/>
+                <a:cs typeface="Calibri" pitchFamily="34" charset="-120"/>
+              </a:rPr>
+              <a:t>Launch</a:t>
+            </a:r>
+            <a:endParaRPr lang="en-US" sz="1400" dirty="0"/>
+          </a:p>
+        </p:txBody>
+      </p:sp>
+      <p:sp>
+        <p:nvSpPr>
+          <p:cNvPr id="7" name="Text 4"/>
+          <p:cNvSpPr/>
+          <p:nvPr/>
+        </p:nvSpPr>
+        <p:spPr>
+          <a:xfrm>
+            <a:off x="8641080" y="2404872"/>
+            <a:ext cx="1828800" cy="365760"/>
+          </a:xfrm>
+          <a:prstGeom prst="rect">
+            <a:avLst/>
+          </a:prstGeom>
+          <a:noFill/>
+          <a:ln/>
+        </p:spPr>
+        <p:txBody>
+          <a:bodyPr wrap="square" lIns="0" tIns="0" rIns="0" bIns="0" rtlCol="0" anchor="ctr"/>
+          <a:lstStyle/>
+          <a:p>
+            <a:pPr algn="l" indent="0" marL="0">
+              <a:buNone/>
+            </a:pPr>
+            <a:r>
+              <a:rPr lang="en-US" sz="1100" dirty="0">
+                <a:solidFill>
+                  <a:srgbClr val="4A5568"/>
+                </a:solidFill>
+                <a:latin typeface="Calibri" pitchFamily="34" charset="0"/>
+                <a:ea typeface="Calibri" pitchFamily="34" charset="-122"/>
+                <a:cs typeface="Calibri" pitchFamily="34" charset="-120"/>
+              </a:rPr>
+              <a:t>all-in gross margin</a:t>
+            </a:r>
+            <a:endParaRPr lang="en-US" sz="1100" dirty="0"/>
+          </a:p>
+        </p:txBody>
+      </p:sp>
+      <p:sp>
+        <p:nvSpPr>
+          <p:cNvPr id="8" name="Text 5"/>
+          <p:cNvSpPr/>
+          <p:nvPr/>
+        </p:nvSpPr>
+        <p:spPr>
+          <a:xfrm>
+            <a:off x="10314432" y="2093976"/>
+            <a:ext cx="1143000" cy="621792"/>
+          </a:xfrm>
+          <a:prstGeom prst="rect">
+            <a:avLst/>
+          </a:prstGeom>
+          <a:noFill/>
+          <a:ln/>
+        </p:spPr>
+        <p:txBody>
+          <a:bodyPr wrap="square" lIns="0" tIns="0" rIns="0" bIns="0" rtlCol="0" anchor="ctr"/>
+          <a:lstStyle/>
+          <a:p>
+            <a:pPr algn="r" indent="0" marL="0">
+              <a:buNone/>
+            </a:pPr>
+            <a:r>
+              <a:rPr lang="en-US" sz="3000" b="1" dirty="0">
+                <a:solidFill>
+                  <a:srgbClr val="16A34A"/>
+                </a:solidFill>
+                <a:latin typeface="Calibri" pitchFamily="34" charset="0"/>
+                <a:ea typeface="Calibri" pitchFamily="34" charset="-122"/>
+                <a:cs typeface="Calibri" pitchFamily="34" charset="-120"/>
+              </a:rPr>
+              <a:t>81%</a:t>
+            </a:r>
+            <a:endParaRPr lang="en-US" sz="3000" dirty="0"/>
+          </a:p>
+        </p:txBody>
+      </p:sp>
+      <p:sp>
+        <p:nvSpPr>
+          <p:cNvPr id="9" name="Shape 6"/>
+          <p:cNvSpPr/>
+          <p:nvPr/>
+        </p:nvSpPr>
+        <p:spPr>
+          <a:xfrm>
+            <a:off x="8412480" y="3044952"/>
+            <a:ext cx="3227832" cy="1051560"/>
+          </a:xfrm>
+          <a:prstGeom prst="roundRect">
+            <a:avLst>
+              <a:gd name="adj" fmla="val 10435"/>
+            </a:avLst>
+          </a:prstGeom>
+          <a:solidFill>
+            <a:srgbClr val="F5F7FE"/>
+          </a:solidFill>
+          <a:ln w="12700">
+            <a:solidFill>
+              <a:srgbClr val="D7DEFB"/>
+            </a:solidFill>
+            <a:prstDash val="solid"/>
+          </a:ln>
+          <a:effectLst>
+            <a:outerShdw sx="100000" sy="100000" kx="0" ky="0" algn="bl" rotWithShape="0" blurRad="101600" dist="25400" dir="5400000">
+              <a:srgbClr val="9AA0B5">
+                <a:alpha val="18000"/>
+              </a:srgbClr>
+            </a:outerShdw>
+          </a:effectLst>
+        </p:spPr>
+      </p:sp>
+      <p:sp>
+        <p:nvSpPr>
+          <p:cNvPr id="10" name="Text 7"/>
+          <p:cNvSpPr/>
+          <p:nvPr/>
+        </p:nvSpPr>
+        <p:spPr>
+          <a:xfrm>
+            <a:off x="8641080" y="3172968"/>
+            <a:ext cx="1828800" cy="320040"/>
+          </a:xfrm>
+          <a:prstGeom prst="rect">
+            <a:avLst/>
+          </a:prstGeom>
+          <a:noFill/>
+          <a:ln/>
+        </p:spPr>
+        <p:txBody>
+          <a:bodyPr wrap="square" lIns="0" tIns="0" rIns="0" bIns="0" rtlCol="0" anchor="ctr"/>
+          <a:lstStyle/>
+          <a:p>
+            <a:pPr algn="l" indent="0" marL="0">
+              <a:buNone/>
+            </a:pPr>
+            <a:r>
+              <a:rPr lang="en-US" sz="1400" b="1" dirty="0">
+                <a:solidFill>
+                  <a:srgbClr val="12132A"/>
+                </a:solidFill>
+                <a:latin typeface="Calibri" pitchFamily="34" charset="0"/>
+                <a:ea typeface="Calibri" pitchFamily="34" charset="-122"/>
+                <a:cs typeface="Calibri" pitchFamily="34" charset="-120"/>
+              </a:rPr>
+              <a:t>Scale</a:t>
+            </a:r>
+            <a:endParaRPr lang="en-US" sz="1400" dirty="0"/>
+          </a:p>
+        </p:txBody>
+      </p:sp>
+      <p:sp>
+        <p:nvSpPr>
+          <p:cNvPr id="11" name="Text 8"/>
+          <p:cNvSpPr/>
+          <p:nvPr/>
+        </p:nvSpPr>
+        <p:spPr>
+          <a:xfrm>
+            <a:off x="8641080" y="3575304"/>
+            <a:ext cx="1828800" cy="365760"/>
+          </a:xfrm>
+          <a:prstGeom prst="rect">
+            <a:avLst/>
+          </a:prstGeom>
+          <a:noFill/>
+          <a:ln/>
+        </p:spPr>
+        <p:txBody>
+          <a:bodyPr wrap="square" lIns="0" tIns="0" rIns="0" bIns="0" rtlCol="0" anchor="ctr"/>
+          <a:lstStyle/>
+          <a:p>
+            <a:pPr algn="l" indent="0" marL="0">
+              <a:buNone/>
+            </a:pPr>
+            <a:r>
+              <a:rPr lang="en-US" sz="1100" dirty="0">
+                <a:solidFill>
+                  <a:srgbClr val="4A5568"/>
+                </a:solidFill>
+                <a:latin typeface="Calibri" pitchFamily="34" charset="0"/>
+                <a:ea typeface="Calibri" pitchFamily="34" charset="-122"/>
+                <a:cs typeface="Calibri" pitchFamily="34" charset="-120"/>
+              </a:rPr>
+              <a:t>all-in gross margin</a:t>
+            </a:r>
+            <a:endParaRPr lang="en-US" sz="1100" dirty="0"/>
+          </a:p>
+        </p:txBody>
+      </p:sp>
+      <p:sp>
+        <p:nvSpPr>
+          <p:cNvPr id="12" name="Text 9"/>
+          <p:cNvSpPr/>
+          <p:nvPr/>
+        </p:nvSpPr>
+        <p:spPr>
+          <a:xfrm>
+            <a:off x="10314432" y="3264408"/>
+            <a:ext cx="1143000" cy="621792"/>
+          </a:xfrm>
+          <a:prstGeom prst="rect">
+            <a:avLst/>
+          </a:prstGeom>
+          <a:noFill/>
+          <a:ln/>
+        </p:spPr>
+        <p:txBody>
+          <a:bodyPr wrap="square" lIns="0" tIns="0" rIns="0" bIns="0" rtlCol="0" anchor="ctr"/>
+          <a:lstStyle/>
+          <a:p>
+            <a:pPr algn="r" indent="0" marL="0">
+              <a:buNone/>
+            </a:pPr>
+            <a:r>
+              <a:rPr lang="en-US" sz="3000" b="1" dirty="0">
+                <a:solidFill>
+                  <a:srgbClr val="16A34A"/>
+                </a:solidFill>
+                <a:latin typeface="Calibri" pitchFamily="34" charset="0"/>
+                <a:ea typeface="Calibri" pitchFamily="34" charset="-122"/>
+                <a:cs typeface="Calibri" pitchFamily="34" charset="-120"/>
+              </a:rPr>
+              <a:t>78%</a:t>
+            </a:r>
+            <a:endParaRPr lang="en-US" sz="3000" dirty="0"/>
+          </a:p>
+        </p:txBody>
+      </p:sp>
+      <p:sp>
+        <p:nvSpPr>
+          <p:cNvPr id="13" name="Shape 10"/>
+          <p:cNvSpPr/>
+          <p:nvPr/>
+        </p:nvSpPr>
+        <p:spPr>
+          <a:xfrm>
+            <a:off x="8412480" y="4215384"/>
+            <a:ext cx="3227832" cy="1051560"/>
+          </a:xfrm>
+          <a:prstGeom prst="roundRect">
+            <a:avLst>
+              <a:gd name="adj" fmla="val 10435"/>
+            </a:avLst>
+          </a:prstGeom>
+          <a:solidFill>
+            <a:srgbClr val="F5F7FE"/>
+          </a:solidFill>
+          <a:ln w="12700">
+            <a:solidFill>
+              <a:srgbClr val="D7DEFB"/>
+            </a:solidFill>
+            <a:prstDash val="solid"/>
+          </a:ln>
+          <a:effectLst>
+            <a:outerShdw sx="100000" sy="100000" kx="0" ky="0" algn="bl" rotWithShape="0" blurRad="101600" dist="25400" dir="5400000">
+              <a:srgbClr val="9AA0B5">
+                <a:alpha val="18000"/>
+              </a:srgbClr>
+            </a:outerShdw>
+          </a:effectLst>
+        </p:spPr>
+      </p:sp>
+      <p:sp>
+        <p:nvSpPr>
+          <p:cNvPr id="14" name="Text 11"/>
+          <p:cNvSpPr/>
+          <p:nvPr/>
+        </p:nvSpPr>
+        <p:spPr>
+          <a:xfrm>
+            <a:off x="8641080" y="4343400"/>
+            <a:ext cx="1828800" cy="320040"/>
+          </a:xfrm>
+          <a:prstGeom prst="rect">
+            <a:avLst/>
+          </a:prstGeom>
+          <a:noFill/>
+          <a:ln/>
+        </p:spPr>
+        <p:txBody>
+          <a:bodyPr wrap="square" lIns="0" tIns="0" rIns="0" bIns="0" rtlCol="0" anchor="ctr"/>
+          <a:lstStyle/>
+          <a:p>
+            <a:pPr algn="l" indent="0" marL="0">
+              <a:buNone/>
+            </a:pPr>
+            <a:r>
+              <a:rPr lang="en-US" sz="1400" b="1" dirty="0">
+                <a:solidFill>
+                  <a:srgbClr val="12132A"/>
+                </a:solidFill>
+                <a:latin typeface="Calibri" pitchFamily="34" charset="0"/>
+                <a:ea typeface="Calibri" pitchFamily="34" charset="-122"/>
+                <a:cs typeface="Calibri" pitchFamily="34" charset="-120"/>
+              </a:rPr>
+              <a:t>Elite</a:t>
+            </a:r>
+            <a:endParaRPr lang="en-US" sz="1400" dirty="0"/>
+          </a:p>
+        </p:txBody>
+      </p:sp>
+      <p:sp>
+        <p:nvSpPr>
+          <p:cNvPr id="15" name="Text 12"/>
+          <p:cNvSpPr/>
+          <p:nvPr/>
+        </p:nvSpPr>
+        <p:spPr>
+          <a:xfrm>
+            <a:off x="8641080" y="4745736"/>
+            <a:ext cx="1828800" cy="365760"/>
+          </a:xfrm>
+          <a:prstGeom prst="rect">
+            <a:avLst/>
+          </a:prstGeom>
+          <a:noFill/>
+          <a:ln/>
+        </p:spPr>
+        <p:txBody>
+          <a:bodyPr wrap="square" lIns="0" tIns="0" rIns="0" bIns="0" rtlCol="0" anchor="ctr"/>
+          <a:lstStyle/>
+          <a:p>
+            <a:pPr algn="l" indent="0" marL="0">
+              <a:buNone/>
+            </a:pPr>
+            <a:r>
+              <a:rPr lang="en-US" sz="1100" dirty="0">
+                <a:solidFill>
+                  <a:srgbClr val="4A5568"/>
+                </a:solidFill>
+                <a:latin typeface="Calibri" pitchFamily="34" charset="0"/>
+                <a:ea typeface="Calibri" pitchFamily="34" charset="-122"/>
+                <a:cs typeface="Calibri" pitchFamily="34" charset="-120"/>
+              </a:rPr>
+              <a:t>all-in gross margin</a:t>
+            </a:r>
+            <a:endParaRPr lang="en-US" sz="1100" dirty="0"/>
+          </a:p>
+        </p:txBody>
+      </p:sp>
+      <p:sp>
+        <p:nvSpPr>
+          <p:cNvPr id="16" name="Text 13"/>
+          <p:cNvSpPr/>
+          <p:nvPr/>
+        </p:nvSpPr>
+        <p:spPr>
+          <a:xfrm>
+            <a:off x="10314432" y="4434840"/>
+            <a:ext cx="1143000" cy="621792"/>
+          </a:xfrm>
+          <a:prstGeom prst="rect">
+            <a:avLst/>
+          </a:prstGeom>
+          <a:noFill/>
+          <a:ln/>
+        </p:spPr>
+        <p:txBody>
+          <a:bodyPr wrap="square" lIns="0" tIns="0" rIns="0" bIns="0" rtlCol="0" anchor="ctr"/>
+          <a:lstStyle/>
+          <a:p>
+            <a:pPr algn="r" indent="0" marL="0">
+              <a:buNone/>
+            </a:pPr>
+            <a:r>
+              <a:rPr lang="en-US" sz="3000" b="1" dirty="0">
+                <a:solidFill>
+                  <a:srgbClr val="16A34A"/>
+                </a:solidFill>
+                <a:latin typeface="Calibri" pitchFamily="34" charset="0"/>
+                <a:ea typeface="Calibri" pitchFamily="34" charset="-122"/>
+                <a:cs typeface="Calibri" pitchFamily="34" charset="-120"/>
+              </a:rPr>
+              <a:t>61%</a:t>
+            </a:r>
+            <a:endParaRPr lang="en-US" sz="3000" dirty="0"/>
+          </a:p>
+        </p:txBody>
+      </p:sp>
+      <p:sp>
+        <p:nvSpPr>
+          <p:cNvPr id="17" name="Text 14"/>
+          <p:cNvSpPr/>
+          <p:nvPr/>
+        </p:nvSpPr>
+        <p:spPr>
+          <a:xfrm>
+            <a:off x="548640" y="6144768"/>
+            <a:ext cx="11064240" cy="274320"/>
+          </a:xfrm>
+          <a:prstGeom prst="rect">
+            <a:avLst/>
+          </a:prstGeom>
+          <a:noFill/>
+          <a:ln/>
+        </p:spPr>
+        <p:txBody>
+          <a:bodyPr wrap="square" lIns="0" tIns="0" rIns="0" bIns="0" rtlCol="0" anchor="ctr"/>
+          <a:lstStyle/>
+          <a:p>
+            <a:pPr algn="l" indent="0" marL="0">
+              <a:buNone/>
+            </a:pPr>
+            <a:r>
+              <a:rPr lang="en-US" sz="950" i="1" dirty="0">
+                <a:solidFill>
+                  <a:srgbClr val="6B7280"/>
+                </a:solidFill>
+                <a:latin typeface="Calibri" pitchFamily="34" charset="0"/>
+                <a:ea typeface="Calibri" pitchFamily="34" charset="-122"/>
+                <a:cs typeface="Calibri" pitchFamily="34" charset="-120"/>
+              </a:rPr>
+              <a:t>Assumes typical AI usage at the plan allowance and ~5 / 25 / 70 video interviews per month. Monthly card billing (annual lowers the Stripe fee). Platform share amortises toward zero with scale. Realistic usage runs lower, so margins run higher.</a:t>
+            </a:r>
+            <a:endParaRPr lang="en-US" sz="950" dirty="0"/>
+          </a:p>
+        </p:txBody>
+      </p:sp>
+      <p:sp>
+        <p:nvSpPr>
+          <p:cNvPr id="18" name="Text 15"/>
+          <p:cNvSpPr/>
+          <p:nvPr/>
+        </p:nvSpPr>
+        <p:spPr>
+          <a:xfrm>
+            <a:off x="548640" y="6455664"/>
+            <a:ext cx="7315200" cy="274320"/>
+          </a:xfrm>
+          <a:prstGeom prst="rect">
+            <a:avLst/>
+          </a:prstGeom>
+          <a:noFill/>
+          <a:ln/>
+        </p:spPr>
+        <p:txBody>
+          <a:bodyPr wrap="square" lIns="0" tIns="0" rIns="0" bIns="0" rtlCol="0" anchor="ctr"/>
+          <a:lstStyle/>
+          <a:p>
+            <a:pPr algn="l" indent="0" marL="0">
+              <a:buNone/>
+            </a:pPr>
+            <a:r>
+              <a:rPr lang="en-US" sz="900" dirty="0">
+                <a:solidFill>
+                  <a:srgbClr val="6B7280"/>
+                </a:solidFill>
+                <a:latin typeface="Calibri" pitchFamily="34" charset="0"/>
+                <a:ea typeface="Calibri" pitchFamily="34" charset="-122"/>
+                <a:cs typeface="Calibri" pitchFamily="34" charset="-120"/>
+              </a:rPr>
+              <a:t>Aster  ·  Pricing model for CFO review</a:t>
+            </a:r>
+            <a:endParaRPr lang="en-US" sz="900" dirty="0"/>
+          </a:p>
+        </p:txBody>
+      </p:sp>
+      <p:sp>
+        <p:nvSpPr>
+          <p:cNvPr id="19" name="Text 16"/>
+          <p:cNvSpPr/>
+          <p:nvPr/>
+        </p:nvSpPr>
+        <p:spPr>
+          <a:xfrm>
+            <a:off x="11338560" y="6455664"/>
+            <a:ext cx="365760" cy="274320"/>
+          </a:xfrm>
+          <a:prstGeom prst="rect">
+            <a:avLst/>
+          </a:prstGeom>
+          <a:noFill/>
+          <a:ln/>
+        </p:spPr>
+        <p:txBody>
+          <a:bodyPr wrap="square" lIns="0" tIns="0" rIns="0" bIns="0" rtlCol="0" anchor="ctr"/>
+          <a:lstStyle/>
+          <a:p>
+            <a:pPr algn="r" indent="0" marL="0">
+              <a:buNone/>
+            </a:pPr>
+            <a:r>
+              <a:rPr lang="en-US" sz="900" dirty="0">
+                <a:solidFill>
+                  <a:srgbClr val="6B7280"/>
+                </a:solidFill>
+                <a:latin typeface="Calibri" pitchFamily="34" charset="0"/>
+                <a:ea typeface="Calibri" pitchFamily="34" charset="-122"/>
+                <a:cs typeface="Calibri" pitchFamily="34" charset="-120"/>
+              </a:rPr>
+              <a:t>10</a:t>
+            </a:r>
+            <a:endParaRPr lang="en-US" sz="900" dirty="0"/>
+          </a:p>
+        </p:txBody>
+      </p:sp>
+    </p:spTree>
+  </p:cSld>
+  <p:clrMapOvr>
+    <a:masterClrMapping/>
+  </p:clrMapOvr>
+</p:sld>
+</file>
+
+<file path=ppt/slides/slide11.xml><?xml version="1.0" encoding="utf-8"?>
+<p:sld xmlns:a="http://schemas.openxmlformats.org/drawingml/2006/main" xmlns:r="http://schemas.openxmlformats.org/officeDocument/2006/relationships" xmlns:p="http://schemas.openxmlformats.org/presentationml/2006/main">
+  <p:cSld name="Slide 11">
+    <p:bg>
+      <p:bgPr>
+        <a:solidFill>
+          <a:srgbClr val="FFFFFF"/>
+        </a:solidFill>
+      </p:bgPr>
+    </p:bg>
+    <p:spTree>
+      <p:nvGrpSpPr>
+        <p:cNvPr id="1" name=""/>
+        <p:cNvGrpSpPr/>
+        <p:nvPr/>
+      </p:nvGrpSpPr>
+      <p:grpSpPr>
+        <a:xfrm>
+          <a:off x="0" y="0"/>
+          <a:ext cx="0" cy="0"/>
+          <a:chOff x="0" y="0"/>
+          <a:chExt cx="0" cy="0"/>
+        </a:xfrm>
+      </p:grpSpPr>
+      <p:sp>
+        <p:nvSpPr>
+          <p:cNvPr id="2" name="Text 0"/>
+          <p:cNvSpPr/>
+          <p:nvPr/>
+        </p:nvSpPr>
+        <p:spPr>
+          <a:xfrm>
+            <a:off x="548640" y="502920"/>
+            <a:ext cx="8229600" cy="274320"/>
+          </a:xfrm>
+          <a:prstGeom prst="rect">
+            <a:avLst/>
+          </a:prstGeom>
+          <a:noFill/>
+          <a:ln/>
+        </p:spPr>
+        <p:txBody>
+          <a:bodyPr wrap="square" lIns="0" tIns="0" rIns="0" bIns="0" rtlCol="0" anchor="ctr"/>
+          <a:lstStyle/>
+          <a:p>
+            <a:pPr algn="l" indent="0" marL="0">
+              <a:buNone/>
+            </a:pPr>
+            <a:r>
+              <a:rPr lang="en-US" sz="1200" b="1" spc="200" kern="0" dirty="0">
+                <a:solidFill>
+                  <a:srgbClr val="0B2AE0"/>
+                </a:solidFill>
+                <a:latin typeface="Calibri" pitchFamily="34" charset="0"/>
+                <a:ea typeface="Calibri" pitchFamily="34" charset="-122"/>
+                <a:cs typeface="Calibri" pitchFamily="34" charset="-120"/>
+              </a:rPr>
               <a:t>WHERE MARGIN EXPANDS</a:t>
             </a:r>
             <a:endParaRPr lang="en-US" sz="1200" dirty="0"/>
@@ -3751,7 +6958,7 @@
                 <a:ea typeface="Calibri" pitchFamily="34" charset="-122"/>
                 <a:cs typeface="Calibri" pitchFamily="34" charset="-120"/>
               </a:rPr>
-              <a:t>10</a:t>
+              <a:t>11</a:t>
             </a:r>
             <a:endParaRPr lang="en-US" sz="900" dirty="0"/>
           </a:p>
@@ -3765,9 +6972,9 @@
 </p:sld>
 </file>
 
-<file path=ppt/slides/slide11.xml><?xml version="1.0" encoding="utf-8"?>
+<file path=ppt/slides/slide12.xml><?xml version="1.0" encoding="utf-8"?>
 <p:sld xmlns:a="http://schemas.openxmlformats.org/drawingml/2006/main" xmlns:r="http://schemas.openxmlformats.org/officeDocument/2006/relationships" xmlns:p="http://schemas.openxmlformats.org/presentationml/2006/main">
-  <p:cSld name="Slide 11">
+  <p:cSld name="Slide 12">
     <p:bg>
       <p:bgPr>
         <a:solidFill>
@@ -3869,7 +7076,7 @@
       </p:sp>
       <p:graphicFrame>
         <p:nvGraphicFramePr>
-          <p:cNvPr id="12" name="Table 0"/>
+          <p:cNvPr id="13" name="Table 0"/>
           <p:cNvGraphicFramePr>
             <a:graphicFrameLocks noGrp="1"/>
           </p:cNvGraphicFramePr>
@@ -6667,7 +9874,7 @@
                 <a:ea typeface="Calibri" pitchFamily="34" charset="-122"/>
                 <a:cs typeface="Calibri" pitchFamily="34" charset="-120"/>
               </a:rPr>
-              <a:t>~85% </a:t>
+              <a:t>~74% </a:t>
             </a:r>
             <a:pPr algn="l" indent="0" marL="0">
               <a:buNone/>
@@ -6681,7 +9888,7 @@
                 <a:ea typeface="Calibri" pitchFamily="34" charset="-122"/>
                 <a:cs typeface="Calibri" pitchFamily="34" charset="-120"/>
               </a:rPr>
-              <a:t>blended gross margin</a:t>
+              <a:t>blended all-in margin</a:t>
             </a:r>
             <a:endParaRPr lang="en-US" sz="2000" dirty="0"/>
           </a:p>
@@ -6837,7 +10044,7 @@
                 <a:ea typeface="Calibri" pitchFamily="34" charset="-122"/>
                 <a:cs typeface="Calibri" pitchFamily="34" charset="-120"/>
               </a:rPr>
-              <a:t>11</a:t>
+              <a:t>12</a:t>
             </a:r>
             <a:endParaRPr lang="en-US" sz="900" dirty="0"/>
           </a:p>
@@ -6851,9 +10058,9 @@
 </p:sld>
 </file>
 
-<file path=ppt/slides/slide12.xml><?xml version="1.0" encoding="utf-8"?>
+<file path=ppt/slides/slide13.xml><?xml version="1.0" encoding="utf-8"?>
 <p:sld xmlns:a="http://schemas.openxmlformats.org/drawingml/2006/main" xmlns:r="http://schemas.openxmlformats.org/officeDocument/2006/relationships" xmlns:p="http://schemas.openxmlformats.org/presentationml/2006/main">
-  <p:cSld name="Slide 12">
+  <p:cSld name="Slide 13">
     <p:bg>
       <p:bgPr>
         <a:solidFill>
@@ -7261,7 +10468,7 @@
                 <a:ea typeface="Calibri" pitchFamily="34" charset="-122"/>
                 <a:cs typeface="Calibri" pitchFamily="34" charset="-120"/>
               </a:rPr>
-              <a:t>COGS is modeled from model pricing, not yet measured from live token logs.</a:t>
+              <a:t>Costs are modeled from provider pricing, not yet measured from live logs.</a:t>
             </a:r>
             <a:endParaRPr lang="en-US" sz="1250" dirty="0"/>
           </a:p>
@@ -7303,7 +10510,7 @@
                 <a:ea typeface="Calibri" pitchFamily="34" charset="-122"/>
                 <a:cs typeface="Calibri" pitchFamily="34" charset="-120"/>
               </a:rPr>
-              <a:t>Heavy web-search use on screening pushes toward the max-cost end.</a:t>
+              <a:t>Video (Daily.co) is the next-largest cost after AI; interview-heavy Elite accounts compress margin.</a:t>
             </a:r>
             <a:endParaRPr lang="en-US" sz="1250" dirty="0"/>
           </a:p>
@@ -7559,7 +10766,7 @@
                 <a:ea typeface="Calibri" pitchFamily="34" charset="-122"/>
                 <a:cs typeface="Calibri" pitchFamily="34" charset="-120"/>
               </a:rPr>
-              <a:t>12</a:t>
+              <a:t>13</a:t>
             </a:r>
             <a:endParaRPr lang="en-US" sz="900" dirty="0"/>
           </a:p>
@@ -7573,9 +10780,9 @@
 </p:sld>
 </file>
 
-<file path=ppt/slides/slide13.xml><?xml version="1.0" encoding="utf-8"?>
+<file path=ppt/slides/slide14.xml><?xml version="1.0" encoding="utf-8"?>
 <p:sld xmlns:a="http://schemas.openxmlformats.org/drawingml/2006/main" xmlns:r="http://schemas.openxmlformats.org/officeDocument/2006/relationships" xmlns:p="http://schemas.openxmlformats.org/presentationml/2006/main">
-  <p:cSld name="Slide 13">
+  <p:cSld name="Slide 14">
     <p:bg>
       <p:bgPr>
         <a:solidFill>
@@ -8447,7 +11654,7 @@
                 <a:ea typeface="Calibri" pitchFamily="34" charset="-122"/>
                 <a:cs typeface="Calibri" pitchFamily="34" charset="-120"/>
               </a:rPr>
-              <a:t>74–90%</a:t>
+              <a:t>61–81%</a:t>
             </a:r>
             <a:endParaRPr lang="en-US" sz="3000" dirty="0"/>
           </a:p>
@@ -8486,7 +11693,7 @@
                 <a:ea typeface="Calibri" pitchFamily="34" charset="-122"/>
                 <a:cs typeface="Calibri" pitchFamily="34" charset="-120"/>
               </a:rPr>
-              <a:t>gross margin at typical AI cost*</a:t>
+              <a:t>all-in gross margin per plan*</a:t>
             </a:r>
             <a:endParaRPr lang="en-US" sz="1250" dirty="0"/>
           </a:p>
@@ -9024,7 +12231,7 @@
         <p:spPr>
           <a:xfrm>
             <a:off x="548640" y="6382512"/>
-            <a:ext cx="10515600" cy="274320"/>
+            <a:ext cx="10881360" cy="274320"/>
           </a:xfrm>
           <a:prstGeom prst="rect">
             <a:avLst/>
@@ -9048,7 +12255,7 @@
                 <a:ea typeface="Calibri" pitchFamily="34" charset="-122"/>
                 <a:cs typeface="Calibri" pitchFamily="34" charset="-120"/>
               </a:rPr>
-              <a:t>* Estimated from published per-token model pricing (see slide 8). Not yet measured from live token logs.</a:t>
+              <a:t>* All-in = AI + email + video + payment fees + platform share (slide 10), at typical usage. From published provider pricing; confirm with live logs.</a:t>
             </a:r>
             <a:endParaRPr lang="en-US" sz="950" dirty="0"/>
           </a:p>
@@ -19824,12 +23031,12 @@
             <a:tbl>
               <a:tblPr/>
               <a:tblGrid>
-                <a:gridCol w="2788920"/>
-                <a:gridCol w="1234440"/>
-                <a:gridCol w="1051560"/>
-                <a:gridCol w="1188720"/>
+                <a:gridCol w="2286000"/>
+                <a:gridCol w="960120"/>
+                <a:gridCol w="914400"/>
                 <a:gridCol w="1097280"/>
-                <a:gridCol w="1188720"/>
+                <a:gridCol w="1005840"/>
+                <a:gridCol w="1371600"/>
               </a:tblGrid>
               <a:tr h="548640">
                 <a:tc>
@@ -22377,7 +25584,7 @@
                 <a:ea typeface="Calibri" pitchFamily="34" charset="-122"/>
                 <a:cs typeface="Calibri" pitchFamily="34" charset="-120"/>
               </a:rPr>
-              <a:t>UNIT ECONOMICS</a:t>
+              <a:t>WHAT IT COSTS TO RUN A WORKSPACE</a:t>
             </a:r>
             <a:endParaRPr lang="en-US" sz="1200" dirty="0"/>
           </a:p>
@@ -22416,7 +25623,7 @@
                 <a:ea typeface="Calibri" pitchFamily="34" charset="-122"/>
                 <a:cs typeface="Calibri" pitchFamily="34" charset="-120"/>
               </a:rPr>
-              <a:t>Gross margin per subscription</a:t>
+              <a:t>The full cost stack</a:t>
             </a:r>
             <a:endParaRPr lang="en-US" sz="3400" dirty="0"/>
           </a:p>
@@ -22424,18 +25631,2281 @@
       </p:sp>
       <p:sp>
         <p:nvSpPr>
-          <p:cNvPr id="4" name="Shape 2"/>
+          <p:cNvPr id="4" name="Text 2"/>
           <p:cNvSpPr/>
           <p:nvPr/>
         </p:nvSpPr>
         <p:spPr>
           <a:xfrm>
-            <a:off x="548640" y="1481328"/>
-            <a:ext cx="11091672" cy="566928"/>
+            <a:off x="548640" y="1463040"/>
+            <a:ext cx="11064240" cy="457200"/>
+          </a:xfrm>
+          <a:prstGeom prst="rect">
+            <a:avLst/>
+          </a:prstGeom>
+          <a:noFill/>
+          <a:ln/>
+        </p:spPr>
+        <p:txBody>
+          <a:bodyPr wrap="square" lIns="0" tIns="0" rIns="0" bIns="0" rtlCol="0" anchor="ctr"/>
+          <a:lstStyle/>
+          <a:p>
+            <a:pPr algn="l" indent="0" marL="0">
+              <a:buNone/>
+            </a:pPr>
+            <a:r>
+              <a:rPr lang="en-US" sz="1300" dirty="0">
+                <a:solidFill>
+                  <a:srgbClr val="4A5568"/>
+                </a:solidFill>
+                <a:latin typeface="Calibri" pitchFamily="34" charset="0"/>
+                <a:ea typeface="Calibri" pitchFamily="34" charset="-122"/>
+                <a:cs typeface="Calibri" pitchFamily="34" charset="-120"/>
+              </a:rPr>
+              <a:t>Every workspace draws on a handful of paid services. All are Aster's cost except WhatsApp, which runs on the customer's own Meta account.</a:t>
+            </a:r>
+            <a:endParaRPr lang="en-US" sz="1300" dirty="0"/>
+          </a:p>
+        </p:txBody>
+      </p:sp>
+      <p:graphicFrame>
+        <p:nvGraphicFramePr>
+          <p:cNvPr id="10" name="Table 0"/>
+          <p:cNvGraphicFramePr>
+            <a:graphicFrameLocks noGrp="1"/>
+          </p:cNvGraphicFramePr>
+          <p:nvPr>
+            <p:extLst>
+              <p:ext uri="{D42A27DB-BD31-4B8C-83A1-F6EECF244321}">
+                <p14:modId xmlns:p14="http://schemas.microsoft.com/office/powerpoint/2010/main" val="1579011935"/>
+              </p:ext>
+            </p:extLst>
+          </p:nvPr>
+        </p:nvGraphicFramePr>
+        <p:xfrm>
+          <a:off x="548640" y="2011680"/>
+          <a:ext cx="7863840" cy="914400"/>
+        </p:xfrm>
+        <a:graphic>
+          <a:graphicData uri="http://schemas.openxmlformats.org/drawingml/2006/table">
+            <a:tbl>
+              <a:tblPr/>
+              <a:tblGrid>
+                <a:gridCol w="2194560"/>
+                <a:gridCol w="1783080"/>
+                <a:gridCol w="2514600"/>
+                <a:gridCol w="1371600"/>
+              </a:tblGrid>
+              <a:tr h="457200">
+                <a:tc>
+                  <a:txBody>
+                    <a:bodyPr/>
+                    <a:lstStyle/>
+                    <a:p>
+                      <a:pPr algn="l" indent="0" marL="0">
+                        <a:buNone/>
+                      </a:pPr>
+                      <a:r>
+                        <a:rPr lang="en-US" sz="1250" b="1" dirty="0">
+                          <a:solidFill>
+                            <a:srgbClr val="FFFFFF"/>
+                          </a:solidFill>
+                          <a:latin typeface="Calibri" pitchFamily="34" charset="0"/>
+                          <a:ea typeface="Calibri" pitchFamily="34" charset="-122"/>
+                          <a:cs typeface="Calibri" pitchFamily="34" charset="-120"/>
+                        </a:rPr>
+                        <a:t>Cost driver</a:t>
+                      </a:r>
+                      <a:endParaRPr lang="en-US" sz="1250" dirty="0">
+                        <a:latin typeface="Calibri" charset="0"/>
+                        <a:ea typeface="Calibri" charset="0"/>
+                        <a:cs typeface="Calibri" charset="0"/>
+                      </a:endParaRPr>
+                    </a:p>
+                  </a:txBody>
+                  <a:tcPr marL="76200" marR="76200" marT="25400" marB="25400" anchor="ctr">
+                    <a:lnL w="6350" cap="flat" cmpd="sng" algn="ctr">
+                      <a:solidFill>
+                        <a:srgbClr val="E6E8F0"/>
+                      </a:solidFill>
+                      <a:prstDash val="solid"/>
+                      <a:round/>
+                      <a:headEnd type="none" w="med" len="med"/>
+                      <a:tailEnd type="none" w="med" len="med"/>
+                    </a:lnL>
+                    <a:lnR w="6350" cap="flat" cmpd="sng" algn="ctr">
+                      <a:solidFill>
+                        <a:srgbClr val="E6E8F0"/>
+                      </a:solidFill>
+                      <a:prstDash val="solid"/>
+                      <a:round/>
+                      <a:headEnd type="none" w="med" len="med"/>
+                      <a:tailEnd type="none" w="med" len="med"/>
+                    </a:lnR>
+                    <a:lnT w="6350" cap="flat" cmpd="sng" algn="ctr">
+                      <a:solidFill>
+                        <a:srgbClr val="E6E8F0"/>
+                      </a:solidFill>
+                      <a:prstDash val="solid"/>
+                      <a:round/>
+                      <a:headEnd type="none" w="med" len="med"/>
+                      <a:tailEnd type="none" w="med" len="med"/>
+                    </a:lnT>
+                    <a:lnB w="6350" cap="flat" cmpd="sng" algn="ctr">
+                      <a:solidFill>
+                        <a:srgbClr val="E6E8F0"/>
+                      </a:solidFill>
+                      <a:prstDash val="solid"/>
+                      <a:round/>
+                      <a:headEnd type="none" w="med" len="med"/>
+                      <a:tailEnd type="none" w="med" len="med"/>
+                    </a:lnB>
+                    <a:solidFill>
+                      <a:srgbClr val="0A1FC2"/>
+                    </a:solidFill>
+                  </a:tcPr>
+                </a:tc>
+                <a:tc>
+                  <a:txBody>
+                    <a:bodyPr/>
+                    <a:lstStyle/>
+                    <a:p>
+                      <a:pPr algn="l" indent="0" marL="0">
+                        <a:buNone/>
+                      </a:pPr>
+                      <a:r>
+                        <a:rPr lang="en-US" sz="1250" b="1" dirty="0">
+                          <a:solidFill>
+                            <a:srgbClr val="FFFFFF"/>
+                          </a:solidFill>
+                          <a:latin typeface="Calibri" pitchFamily="34" charset="0"/>
+                          <a:ea typeface="Calibri" pitchFamily="34" charset="-122"/>
+                          <a:cs typeface="Calibri" pitchFamily="34" charset="-120"/>
+                        </a:rPr>
+                        <a:t>Provider</a:t>
+                      </a:r>
+                      <a:endParaRPr lang="en-US" sz="1250" dirty="0">
+                        <a:latin typeface="Calibri" charset="0"/>
+                        <a:ea typeface="Calibri" charset="0"/>
+                        <a:cs typeface="Calibri" charset="0"/>
+                      </a:endParaRPr>
+                    </a:p>
+                  </a:txBody>
+                  <a:tcPr marL="76200" marR="76200" marT="25400" marB="25400" anchor="ctr">
+                    <a:lnL w="6350" cap="flat" cmpd="sng" algn="ctr">
+                      <a:solidFill>
+                        <a:srgbClr val="E6E8F0"/>
+                      </a:solidFill>
+                      <a:prstDash val="solid"/>
+                      <a:round/>
+                      <a:headEnd type="none" w="med" len="med"/>
+                      <a:tailEnd type="none" w="med" len="med"/>
+                    </a:lnL>
+                    <a:lnR w="6350" cap="flat" cmpd="sng" algn="ctr">
+                      <a:solidFill>
+                        <a:srgbClr val="E6E8F0"/>
+                      </a:solidFill>
+                      <a:prstDash val="solid"/>
+                      <a:round/>
+                      <a:headEnd type="none" w="med" len="med"/>
+                      <a:tailEnd type="none" w="med" len="med"/>
+                    </a:lnR>
+                    <a:lnT w="6350" cap="flat" cmpd="sng" algn="ctr">
+                      <a:solidFill>
+                        <a:srgbClr val="E6E8F0"/>
+                      </a:solidFill>
+                      <a:prstDash val="solid"/>
+                      <a:round/>
+                      <a:headEnd type="none" w="med" len="med"/>
+                      <a:tailEnd type="none" w="med" len="med"/>
+                    </a:lnT>
+                    <a:lnB w="6350" cap="flat" cmpd="sng" algn="ctr">
+                      <a:solidFill>
+                        <a:srgbClr val="E6E8F0"/>
+                      </a:solidFill>
+                      <a:prstDash val="solid"/>
+                      <a:round/>
+                      <a:headEnd type="none" w="med" len="med"/>
+                      <a:tailEnd type="none" w="med" len="med"/>
+                    </a:lnB>
+                    <a:solidFill>
+                      <a:srgbClr val="0A1FC2"/>
+                    </a:solidFill>
+                  </a:tcPr>
+                </a:tc>
+                <a:tc>
+                  <a:txBody>
+                    <a:bodyPr/>
+                    <a:lstStyle/>
+                    <a:p>
+                      <a:pPr algn="l" indent="0" marL="0">
+                        <a:buNone/>
+                      </a:pPr>
+                      <a:r>
+                        <a:rPr lang="en-US" sz="1250" b="1" dirty="0">
+                          <a:solidFill>
+                            <a:srgbClr val="FFFFFF"/>
+                          </a:solidFill>
+                          <a:latin typeface="Calibri" pitchFamily="34" charset="0"/>
+                          <a:ea typeface="Calibri" pitchFamily="34" charset="-122"/>
+                          <a:cs typeface="Calibri" pitchFamily="34" charset="-120"/>
+                        </a:rPr>
+                        <a:t>Basis</a:t>
+                      </a:r>
+                      <a:endParaRPr lang="en-US" sz="1250" dirty="0">
+                        <a:latin typeface="Calibri" charset="0"/>
+                        <a:ea typeface="Calibri" charset="0"/>
+                        <a:cs typeface="Calibri" charset="0"/>
+                      </a:endParaRPr>
+                    </a:p>
+                  </a:txBody>
+                  <a:tcPr marL="76200" marR="76200" marT="25400" marB="25400" anchor="ctr">
+                    <a:lnL w="6350" cap="flat" cmpd="sng" algn="ctr">
+                      <a:solidFill>
+                        <a:srgbClr val="E6E8F0"/>
+                      </a:solidFill>
+                      <a:prstDash val="solid"/>
+                      <a:round/>
+                      <a:headEnd type="none" w="med" len="med"/>
+                      <a:tailEnd type="none" w="med" len="med"/>
+                    </a:lnL>
+                    <a:lnR w="6350" cap="flat" cmpd="sng" algn="ctr">
+                      <a:solidFill>
+                        <a:srgbClr val="E6E8F0"/>
+                      </a:solidFill>
+                      <a:prstDash val="solid"/>
+                      <a:round/>
+                      <a:headEnd type="none" w="med" len="med"/>
+                      <a:tailEnd type="none" w="med" len="med"/>
+                    </a:lnR>
+                    <a:lnT w="6350" cap="flat" cmpd="sng" algn="ctr">
+                      <a:solidFill>
+                        <a:srgbClr val="E6E8F0"/>
+                      </a:solidFill>
+                      <a:prstDash val="solid"/>
+                      <a:round/>
+                      <a:headEnd type="none" w="med" len="med"/>
+                      <a:tailEnd type="none" w="med" len="med"/>
+                    </a:lnT>
+                    <a:lnB w="6350" cap="flat" cmpd="sng" algn="ctr">
+                      <a:solidFill>
+                        <a:srgbClr val="E6E8F0"/>
+                      </a:solidFill>
+                      <a:prstDash val="solid"/>
+                      <a:round/>
+                      <a:headEnd type="none" w="med" len="med"/>
+                      <a:tailEnd type="none" w="med" len="med"/>
+                    </a:lnB>
+                    <a:solidFill>
+                      <a:srgbClr val="0A1FC2"/>
+                    </a:solidFill>
+                  </a:tcPr>
+                </a:tc>
+                <a:tc>
+                  <a:txBody>
+                    <a:bodyPr/>
+                    <a:lstStyle/>
+                    <a:p>
+                      <a:pPr algn="ctr" indent="0" marL="0">
+                        <a:buNone/>
+                      </a:pPr>
+                      <a:r>
+                        <a:rPr lang="en-US" sz="1250" b="1" dirty="0">
+                          <a:solidFill>
+                            <a:srgbClr val="FFFFFF"/>
+                          </a:solidFill>
+                          <a:latin typeface="Calibri" pitchFamily="34" charset="0"/>
+                          <a:ea typeface="Calibri" pitchFamily="34" charset="-122"/>
+                          <a:cs typeface="Calibri" pitchFamily="34" charset="-120"/>
+                        </a:rPr>
+                        <a:t>Who pays</a:t>
+                      </a:r>
+                      <a:endParaRPr lang="en-US" sz="1250" dirty="0">
+                        <a:latin typeface="Calibri" charset="0"/>
+                        <a:ea typeface="Calibri" charset="0"/>
+                        <a:cs typeface="Calibri" charset="0"/>
+                      </a:endParaRPr>
+                    </a:p>
+                  </a:txBody>
+                  <a:tcPr marL="76200" marR="76200" marT="25400" marB="25400" anchor="ctr">
+                    <a:lnL w="6350" cap="flat" cmpd="sng" algn="ctr">
+                      <a:solidFill>
+                        <a:srgbClr val="E6E8F0"/>
+                      </a:solidFill>
+                      <a:prstDash val="solid"/>
+                      <a:round/>
+                      <a:headEnd type="none" w="med" len="med"/>
+                      <a:tailEnd type="none" w="med" len="med"/>
+                    </a:lnL>
+                    <a:lnR w="6350" cap="flat" cmpd="sng" algn="ctr">
+                      <a:solidFill>
+                        <a:srgbClr val="E6E8F0"/>
+                      </a:solidFill>
+                      <a:prstDash val="solid"/>
+                      <a:round/>
+                      <a:headEnd type="none" w="med" len="med"/>
+                      <a:tailEnd type="none" w="med" len="med"/>
+                    </a:lnR>
+                    <a:lnT w="6350" cap="flat" cmpd="sng" algn="ctr">
+                      <a:solidFill>
+                        <a:srgbClr val="E6E8F0"/>
+                      </a:solidFill>
+                      <a:prstDash val="solid"/>
+                      <a:round/>
+                      <a:headEnd type="none" w="med" len="med"/>
+                      <a:tailEnd type="none" w="med" len="med"/>
+                    </a:lnT>
+                    <a:lnB w="6350" cap="flat" cmpd="sng" algn="ctr">
+                      <a:solidFill>
+                        <a:srgbClr val="E6E8F0"/>
+                      </a:solidFill>
+                      <a:prstDash val="solid"/>
+                      <a:round/>
+                      <a:headEnd type="none" w="med" len="med"/>
+                      <a:tailEnd type="none" w="med" len="med"/>
+                    </a:lnB>
+                    <a:solidFill>
+                      <a:srgbClr val="0A1FC2"/>
+                    </a:solidFill>
+                  </a:tcPr>
+                </a:tc>
+              </a:tr>
+              <a:tr h="457200">
+                <a:tc>
+                  <a:txBody>
+                    <a:bodyPr/>
+                    <a:lstStyle/>
+                    <a:p>
+                      <a:pPr algn="l" indent="0" marL="0">
+                        <a:buNone/>
+                      </a:pPr>
+                      <a:r>
+                        <a:rPr lang="en-US" sz="1200" b="1" dirty="0">
+                          <a:solidFill>
+                            <a:srgbClr val="12132A"/>
+                          </a:solidFill>
+                          <a:latin typeface="Calibri" pitchFamily="34" charset="0"/>
+                          <a:ea typeface="Calibri" pitchFamily="34" charset="-122"/>
+                          <a:cs typeface="Calibri" pitchFamily="34" charset="-120"/>
+                        </a:rPr>
+                        <a:t>AI inference</a:t>
+                      </a:r>
+                      <a:endParaRPr lang="en-US" sz="1200" dirty="0">
+                        <a:latin typeface="Calibri" charset="0"/>
+                        <a:ea typeface="Calibri" charset="0"/>
+                        <a:cs typeface="Calibri" charset="0"/>
+                      </a:endParaRPr>
+                    </a:p>
+                  </a:txBody>
+                  <a:tcPr marL="76200" marR="76200" marT="25400" marB="25400" anchor="ctr">
+                    <a:lnL w="6350" cap="flat" cmpd="sng" algn="ctr">
+                      <a:solidFill>
+                        <a:srgbClr val="E6E8F0"/>
+                      </a:solidFill>
+                      <a:prstDash val="solid"/>
+                      <a:round/>
+                      <a:headEnd type="none" w="med" len="med"/>
+                      <a:tailEnd type="none" w="med" len="med"/>
+                    </a:lnL>
+                    <a:lnR w="6350" cap="flat" cmpd="sng" algn="ctr">
+                      <a:solidFill>
+                        <a:srgbClr val="E6E8F0"/>
+                      </a:solidFill>
+                      <a:prstDash val="solid"/>
+                      <a:round/>
+                      <a:headEnd type="none" w="med" len="med"/>
+                      <a:tailEnd type="none" w="med" len="med"/>
+                    </a:lnR>
+                    <a:lnT w="6350" cap="flat" cmpd="sng" algn="ctr">
+                      <a:solidFill>
+                        <a:srgbClr val="E6E8F0"/>
+                      </a:solidFill>
+                      <a:prstDash val="solid"/>
+                      <a:round/>
+                      <a:headEnd type="none" w="med" len="med"/>
+                      <a:tailEnd type="none" w="med" len="med"/>
+                    </a:lnT>
+                    <a:lnB w="6350" cap="flat" cmpd="sng" algn="ctr">
+                      <a:solidFill>
+                        <a:srgbClr val="E6E8F0"/>
+                      </a:solidFill>
+                      <a:prstDash val="solid"/>
+                      <a:round/>
+                      <a:headEnd type="none" w="med" len="med"/>
+                      <a:tailEnd type="none" w="med" len="med"/>
+                    </a:lnB>
+                    <a:solidFill>
+                      <a:srgbClr val="FFFFFF"/>
+                    </a:solidFill>
+                  </a:tcPr>
+                </a:tc>
+                <a:tc>
+                  <a:txBody>
+                    <a:bodyPr/>
+                    <a:lstStyle/>
+                    <a:p>
+                      <a:pPr algn="l" indent="0" marL="0">
+                        <a:buNone/>
+                      </a:pPr>
+                      <a:r>
+                        <a:rPr lang="en-US" sz="1200" dirty="0">
+                          <a:solidFill>
+                            <a:srgbClr val="4A5568"/>
+                          </a:solidFill>
+                          <a:latin typeface="Calibri" pitchFamily="34" charset="0"/>
+                          <a:ea typeface="Calibri" pitchFamily="34" charset="-122"/>
+                          <a:cs typeface="Calibri" pitchFamily="34" charset="-120"/>
+                        </a:rPr>
+                        <a:t>Anthropic (Claude)</a:t>
+                      </a:r>
+                      <a:endParaRPr lang="en-US" sz="1200" dirty="0">
+                        <a:latin typeface="Calibri" charset="0"/>
+                        <a:ea typeface="Calibri" charset="0"/>
+                        <a:cs typeface="Calibri" charset="0"/>
+                      </a:endParaRPr>
+                    </a:p>
+                  </a:txBody>
+                  <a:tcPr marL="76200" marR="76200" marT="25400" marB="25400" anchor="ctr">
+                    <a:lnL w="6350" cap="flat" cmpd="sng" algn="ctr">
+                      <a:solidFill>
+                        <a:srgbClr val="E6E8F0"/>
+                      </a:solidFill>
+                      <a:prstDash val="solid"/>
+                      <a:round/>
+                      <a:headEnd type="none" w="med" len="med"/>
+                      <a:tailEnd type="none" w="med" len="med"/>
+                    </a:lnL>
+                    <a:lnR w="6350" cap="flat" cmpd="sng" algn="ctr">
+                      <a:solidFill>
+                        <a:srgbClr val="E6E8F0"/>
+                      </a:solidFill>
+                      <a:prstDash val="solid"/>
+                      <a:round/>
+                      <a:headEnd type="none" w="med" len="med"/>
+                      <a:tailEnd type="none" w="med" len="med"/>
+                    </a:lnR>
+                    <a:lnT w="6350" cap="flat" cmpd="sng" algn="ctr">
+                      <a:solidFill>
+                        <a:srgbClr val="E6E8F0"/>
+                      </a:solidFill>
+                      <a:prstDash val="solid"/>
+                      <a:round/>
+                      <a:headEnd type="none" w="med" len="med"/>
+                      <a:tailEnd type="none" w="med" len="med"/>
+                    </a:lnT>
+                    <a:lnB w="6350" cap="flat" cmpd="sng" algn="ctr">
+                      <a:solidFill>
+                        <a:srgbClr val="E6E8F0"/>
+                      </a:solidFill>
+                      <a:prstDash val="solid"/>
+                      <a:round/>
+                      <a:headEnd type="none" w="med" len="med"/>
+                      <a:tailEnd type="none" w="med" len="med"/>
+                    </a:lnB>
+                    <a:solidFill>
+                      <a:srgbClr val="FFFFFF"/>
+                    </a:solidFill>
+                  </a:tcPr>
+                </a:tc>
+                <a:tc>
+                  <a:txBody>
+                    <a:bodyPr/>
+                    <a:lstStyle/>
+                    <a:p>
+                      <a:pPr algn="l" indent="0" marL="0">
+                        <a:buNone/>
+                      </a:pPr>
+                      <a:r>
+                        <a:rPr lang="en-US" sz="1200" dirty="0">
+                          <a:solidFill>
+                            <a:srgbClr val="4A5568"/>
+                          </a:solidFill>
+                          <a:latin typeface="Calibri" pitchFamily="34" charset="0"/>
+                          <a:ea typeface="Calibri" pitchFamily="34" charset="-122"/>
+                          <a:cs typeface="Calibri" pitchFamily="34" charset="-120"/>
+                        </a:rPr>
+                        <a:t>Per action, from tokens</a:t>
+                      </a:r>
+                      <a:endParaRPr lang="en-US" sz="1200" dirty="0">
+                        <a:latin typeface="Calibri" charset="0"/>
+                        <a:ea typeface="Calibri" charset="0"/>
+                        <a:cs typeface="Calibri" charset="0"/>
+                      </a:endParaRPr>
+                    </a:p>
+                  </a:txBody>
+                  <a:tcPr marL="76200" marR="76200" marT="25400" marB="25400" anchor="ctr">
+                    <a:lnL w="6350" cap="flat" cmpd="sng" algn="ctr">
+                      <a:solidFill>
+                        <a:srgbClr val="E6E8F0"/>
+                      </a:solidFill>
+                      <a:prstDash val="solid"/>
+                      <a:round/>
+                      <a:headEnd type="none" w="med" len="med"/>
+                      <a:tailEnd type="none" w="med" len="med"/>
+                    </a:lnL>
+                    <a:lnR w="6350" cap="flat" cmpd="sng" algn="ctr">
+                      <a:solidFill>
+                        <a:srgbClr val="E6E8F0"/>
+                      </a:solidFill>
+                      <a:prstDash val="solid"/>
+                      <a:round/>
+                      <a:headEnd type="none" w="med" len="med"/>
+                      <a:tailEnd type="none" w="med" len="med"/>
+                    </a:lnR>
+                    <a:lnT w="6350" cap="flat" cmpd="sng" algn="ctr">
+                      <a:solidFill>
+                        <a:srgbClr val="E6E8F0"/>
+                      </a:solidFill>
+                      <a:prstDash val="solid"/>
+                      <a:round/>
+                      <a:headEnd type="none" w="med" len="med"/>
+                      <a:tailEnd type="none" w="med" len="med"/>
+                    </a:lnT>
+                    <a:lnB w="6350" cap="flat" cmpd="sng" algn="ctr">
+                      <a:solidFill>
+                        <a:srgbClr val="E6E8F0"/>
+                      </a:solidFill>
+                      <a:prstDash val="solid"/>
+                      <a:round/>
+                      <a:headEnd type="none" w="med" len="med"/>
+                      <a:tailEnd type="none" w="med" len="med"/>
+                    </a:lnB>
+                    <a:solidFill>
+                      <a:srgbClr val="FFFFFF"/>
+                    </a:solidFill>
+                  </a:tcPr>
+                </a:tc>
+                <a:tc>
+                  <a:txBody>
+                    <a:bodyPr/>
+                    <a:lstStyle/>
+                    <a:p>
+                      <a:pPr algn="ctr" indent="0" marL="0">
+                        <a:buNone/>
+                      </a:pPr>
+                      <a:r>
+                        <a:rPr lang="en-US" sz="1200" dirty="0">
+                          <a:solidFill>
+                            <a:srgbClr val="4A5568"/>
+                          </a:solidFill>
+                          <a:latin typeface="Calibri" pitchFamily="34" charset="0"/>
+                          <a:ea typeface="Calibri" pitchFamily="34" charset="-122"/>
+                          <a:cs typeface="Calibri" pitchFamily="34" charset="-120"/>
+                        </a:rPr>
+                        <a:t>Aster</a:t>
+                      </a:r>
+                      <a:endParaRPr lang="en-US" sz="1200" dirty="0">
+                        <a:latin typeface="Calibri" charset="0"/>
+                        <a:ea typeface="Calibri" charset="0"/>
+                        <a:cs typeface="Calibri" charset="0"/>
+                      </a:endParaRPr>
+                    </a:p>
+                  </a:txBody>
+                  <a:tcPr marL="76200" marR="76200" marT="25400" marB="25400" anchor="ctr">
+                    <a:lnL w="6350" cap="flat" cmpd="sng" algn="ctr">
+                      <a:solidFill>
+                        <a:srgbClr val="E6E8F0"/>
+                      </a:solidFill>
+                      <a:prstDash val="solid"/>
+                      <a:round/>
+                      <a:headEnd type="none" w="med" len="med"/>
+                      <a:tailEnd type="none" w="med" len="med"/>
+                    </a:lnL>
+                    <a:lnR w="6350" cap="flat" cmpd="sng" algn="ctr">
+                      <a:solidFill>
+                        <a:srgbClr val="E6E8F0"/>
+                      </a:solidFill>
+                      <a:prstDash val="solid"/>
+                      <a:round/>
+                      <a:headEnd type="none" w="med" len="med"/>
+                      <a:tailEnd type="none" w="med" len="med"/>
+                    </a:lnR>
+                    <a:lnT w="6350" cap="flat" cmpd="sng" algn="ctr">
+                      <a:solidFill>
+                        <a:srgbClr val="E6E8F0"/>
+                      </a:solidFill>
+                      <a:prstDash val="solid"/>
+                      <a:round/>
+                      <a:headEnd type="none" w="med" len="med"/>
+                      <a:tailEnd type="none" w="med" len="med"/>
+                    </a:lnT>
+                    <a:lnB w="6350" cap="flat" cmpd="sng" algn="ctr">
+                      <a:solidFill>
+                        <a:srgbClr val="E6E8F0"/>
+                      </a:solidFill>
+                      <a:prstDash val="solid"/>
+                      <a:round/>
+                      <a:headEnd type="none" w="med" len="med"/>
+                      <a:tailEnd type="none" w="med" len="med"/>
+                    </a:lnB>
+                    <a:solidFill>
+                      <a:srgbClr val="FFFFFF"/>
+                    </a:solidFill>
+                  </a:tcPr>
+                </a:tc>
+              </a:tr>
+              <a:tr h="457200">
+                <a:tc>
+                  <a:txBody>
+                    <a:bodyPr/>
+                    <a:lstStyle/>
+                    <a:p>
+                      <a:pPr algn="l" indent="0" marL="0">
+                        <a:buNone/>
+                      </a:pPr>
+                      <a:r>
+                        <a:rPr lang="en-US" sz="1200" b="1" dirty="0">
+                          <a:solidFill>
+                            <a:srgbClr val="12132A"/>
+                          </a:solidFill>
+                          <a:latin typeface="Calibri" pitchFamily="34" charset="0"/>
+                          <a:ea typeface="Calibri" pitchFamily="34" charset="-122"/>
+                          <a:cs typeface="Calibri" pitchFamily="34" charset="-120"/>
+                        </a:rPr>
+                        <a:t>Transactional email</a:t>
+                      </a:r>
+                      <a:endParaRPr lang="en-US" sz="1200" dirty="0">
+                        <a:latin typeface="Calibri" charset="0"/>
+                        <a:ea typeface="Calibri" charset="0"/>
+                        <a:cs typeface="Calibri" charset="0"/>
+                      </a:endParaRPr>
+                    </a:p>
+                  </a:txBody>
+                  <a:tcPr marL="76200" marR="76200" marT="25400" marB="25400" anchor="ctr">
+                    <a:lnL w="6350" cap="flat" cmpd="sng" algn="ctr">
+                      <a:solidFill>
+                        <a:srgbClr val="E6E8F0"/>
+                      </a:solidFill>
+                      <a:prstDash val="solid"/>
+                      <a:round/>
+                      <a:headEnd type="none" w="med" len="med"/>
+                      <a:tailEnd type="none" w="med" len="med"/>
+                    </a:lnL>
+                    <a:lnR w="6350" cap="flat" cmpd="sng" algn="ctr">
+                      <a:solidFill>
+                        <a:srgbClr val="E6E8F0"/>
+                      </a:solidFill>
+                      <a:prstDash val="solid"/>
+                      <a:round/>
+                      <a:headEnd type="none" w="med" len="med"/>
+                      <a:tailEnd type="none" w="med" len="med"/>
+                    </a:lnR>
+                    <a:lnT w="6350" cap="flat" cmpd="sng" algn="ctr">
+                      <a:solidFill>
+                        <a:srgbClr val="E6E8F0"/>
+                      </a:solidFill>
+                      <a:prstDash val="solid"/>
+                      <a:round/>
+                      <a:headEnd type="none" w="med" len="med"/>
+                      <a:tailEnd type="none" w="med" len="med"/>
+                    </a:lnT>
+                    <a:lnB w="6350" cap="flat" cmpd="sng" algn="ctr">
+                      <a:solidFill>
+                        <a:srgbClr val="E6E8F0"/>
+                      </a:solidFill>
+                      <a:prstDash val="solid"/>
+                      <a:round/>
+                      <a:headEnd type="none" w="med" len="med"/>
+                      <a:tailEnd type="none" w="med" len="med"/>
+                    </a:lnB>
+                    <a:solidFill>
+                      <a:srgbClr val="F5F7FE"/>
+                    </a:solidFill>
+                  </a:tcPr>
+                </a:tc>
+                <a:tc>
+                  <a:txBody>
+                    <a:bodyPr/>
+                    <a:lstStyle/>
+                    <a:p>
+                      <a:pPr algn="l" indent="0" marL="0">
+                        <a:buNone/>
+                      </a:pPr>
+                      <a:r>
+                        <a:rPr lang="en-US" sz="1200" dirty="0">
+                          <a:solidFill>
+                            <a:srgbClr val="4A5568"/>
+                          </a:solidFill>
+                          <a:latin typeface="Calibri" pitchFamily="34" charset="0"/>
+                          <a:ea typeface="Calibri" pitchFamily="34" charset="-122"/>
+                          <a:cs typeface="Calibri" pitchFamily="34" charset="-120"/>
+                        </a:rPr>
+                        <a:t>Resend</a:t>
+                      </a:r>
+                      <a:endParaRPr lang="en-US" sz="1200" dirty="0">
+                        <a:latin typeface="Calibri" charset="0"/>
+                        <a:ea typeface="Calibri" charset="0"/>
+                        <a:cs typeface="Calibri" charset="0"/>
+                      </a:endParaRPr>
+                    </a:p>
+                  </a:txBody>
+                  <a:tcPr marL="76200" marR="76200" marT="25400" marB="25400" anchor="ctr">
+                    <a:lnL w="6350" cap="flat" cmpd="sng" algn="ctr">
+                      <a:solidFill>
+                        <a:srgbClr val="E6E8F0"/>
+                      </a:solidFill>
+                      <a:prstDash val="solid"/>
+                      <a:round/>
+                      <a:headEnd type="none" w="med" len="med"/>
+                      <a:tailEnd type="none" w="med" len="med"/>
+                    </a:lnL>
+                    <a:lnR w="6350" cap="flat" cmpd="sng" algn="ctr">
+                      <a:solidFill>
+                        <a:srgbClr val="E6E8F0"/>
+                      </a:solidFill>
+                      <a:prstDash val="solid"/>
+                      <a:round/>
+                      <a:headEnd type="none" w="med" len="med"/>
+                      <a:tailEnd type="none" w="med" len="med"/>
+                    </a:lnR>
+                    <a:lnT w="6350" cap="flat" cmpd="sng" algn="ctr">
+                      <a:solidFill>
+                        <a:srgbClr val="E6E8F0"/>
+                      </a:solidFill>
+                      <a:prstDash val="solid"/>
+                      <a:round/>
+                      <a:headEnd type="none" w="med" len="med"/>
+                      <a:tailEnd type="none" w="med" len="med"/>
+                    </a:lnT>
+                    <a:lnB w="6350" cap="flat" cmpd="sng" algn="ctr">
+                      <a:solidFill>
+                        <a:srgbClr val="E6E8F0"/>
+                      </a:solidFill>
+                      <a:prstDash val="solid"/>
+                      <a:round/>
+                      <a:headEnd type="none" w="med" len="med"/>
+                      <a:tailEnd type="none" w="med" len="med"/>
+                    </a:lnB>
+                    <a:solidFill>
+                      <a:srgbClr val="F5F7FE"/>
+                    </a:solidFill>
+                  </a:tcPr>
+                </a:tc>
+                <a:tc>
+                  <a:txBody>
+                    <a:bodyPr/>
+                    <a:lstStyle/>
+                    <a:p>
+                      <a:pPr algn="l" indent="0" marL="0">
+                        <a:buNone/>
+                      </a:pPr>
+                      <a:r>
+                        <a:rPr lang="en-US" sz="1200" dirty="0">
+                          <a:solidFill>
+                            <a:srgbClr val="4A5568"/>
+                          </a:solidFill>
+                          <a:latin typeface="Calibri" pitchFamily="34" charset="0"/>
+                          <a:ea typeface="Calibri" pitchFamily="34" charset="-122"/>
+                          <a:cs typeface="Calibri" pitchFamily="34" charset="-120"/>
+                        </a:rPr>
+                        <a:t>≈ RM0.004 / email</a:t>
+                      </a:r>
+                      <a:endParaRPr lang="en-US" sz="1200" dirty="0">
+                        <a:latin typeface="Calibri" charset="0"/>
+                        <a:ea typeface="Calibri" charset="0"/>
+                        <a:cs typeface="Calibri" charset="0"/>
+                      </a:endParaRPr>
+                    </a:p>
+                  </a:txBody>
+                  <a:tcPr marL="76200" marR="76200" marT="25400" marB="25400" anchor="ctr">
+                    <a:lnL w="6350" cap="flat" cmpd="sng" algn="ctr">
+                      <a:solidFill>
+                        <a:srgbClr val="E6E8F0"/>
+                      </a:solidFill>
+                      <a:prstDash val="solid"/>
+                      <a:round/>
+                      <a:headEnd type="none" w="med" len="med"/>
+                      <a:tailEnd type="none" w="med" len="med"/>
+                    </a:lnL>
+                    <a:lnR w="6350" cap="flat" cmpd="sng" algn="ctr">
+                      <a:solidFill>
+                        <a:srgbClr val="E6E8F0"/>
+                      </a:solidFill>
+                      <a:prstDash val="solid"/>
+                      <a:round/>
+                      <a:headEnd type="none" w="med" len="med"/>
+                      <a:tailEnd type="none" w="med" len="med"/>
+                    </a:lnR>
+                    <a:lnT w="6350" cap="flat" cmpd="sng" algn="ctr">
+                      <a:solidFill>
+                        <a:srgbClr val="E6E8F0"/>
+                      </a:solidFill>
+                      <a:prstDash val="solid"/>
+                      <a:round/>
+                      <a:headEnd type="none" w="med" len="med"/>
+                      <a:tailEnd type="none" w="med" len="med"/>
+                    </a:lnT>
+                    <a:lnB w="6350" cap="flat" cmpd="sng" algn="ctr">
+                      <a:solidFill>
+                        <a:srgbClr val="E6E8F0"/>
+                      </a:solidFill>
+                      <a:prstDash val="solid"/>
+                      <a:round/>
+                      <a:headEnd type="none" w="med" len="med"/>
+                      <a:tailEnd type="none" w="med" len="med"/>
+                    </a:lnB>
+                    <a:solidFill>
+                      <a:srgbClr val="F5F7FE"/>
+                    </a:solidFill>
+                  </a:tcPr>
+                </a:tc>
+                <a:tc>
+                  <a:txBody>
+                    <a:bodyPr/>
+                    <a:lstStyle/>
+                    <a:p>
+                      <a:pPr algn="ctr" indent="0" marL="0">
+                        <a:buNone/>
+                      </a:pPr>
+                      <a:r>
+                        <a:rPr lang="en-US" sz="1200" dirty="0">
+                          <a:solidFill>
+                            <a:srgbClr val="4A5568"/>
+                          </a:solidFill>
+                          <a:latin typeface="Calibri" pitchFamily="34" charset="0"/>
+                          <a:ea typeface="Calibri" pitchFamily="34" charset="-122"/>
+                          <a:cs typeface="Calibri" pitchFamily="34" charset="-120"/>
+                        </a:rPr>
+                        <a:t>Aster</a:t>
+                      </a:r>
+                      <a:endParaRPr lang="en-US" sz="1200" dirty="0">
+                        <a:latin typeface="Calibri" charset="0"/>
+                        <a:ea typeface="Calibri" charset="0"/>
+                        <a:cs typeface="Calibri" charset="0"/>
+                      </a:endParaRPr>
+                    </a:p>
+                  </a:txBody>
+                  <a:tcPr marL="76200" marR="76200" marT="25400" marB="25400" anchor="ctr">
+                    <a:lnL w="6350" cap="flat" cmpd="sng" algn="ctr">
+                      <a:solidFill>
+                        <a:srgbClr val="E6E8F0"/>
+                      </a:solidFill>
+                      <a:prstDash val="solid"/>
+                      <a:round/>
+                      <a:headEnd type="none" w="med" len="med"/>
+                      <a:tailEnd type="none" w="med" len="med"/>
+                    </a:lnL>
+                    <a:lnR w="6350" cap="flat" cmpd="sng" algn="ctr">
+                      <a:solidFill>
+                        <a:srgbClr val="E6E8F0"/>
+                      </a:solidFill>
+                      <a:prstDash val="solid"/>
+                      <a:round/>
+                      <a:headEnd type="none" w="med" len="med"/>
+                      <a:tailEnd type="none" w="med" len="med"/>
+                    </a:lnR>
+                    <a:lnT w="6350" cap="flat" cmpd="sng" algn="ctr">
+                      <a:solidFill>
+                        <a:srgbClr val="E6E8F0"/>
+                      </a:solidFill>
+                      <a:prstDash val="solid"/>
+                      <a:round/>
+                      <a:headEnd type="none" w="med" len="med"/>
+                      <a:tailEnd type="none" w="med" len="med"/>
+                    </a:lnT>
+                    <a:lnB w="6350" cap="flat" cmpd="sng" algn="ctr">
+                      <a:solidFill>
+                        <a:srgbClr val="E6E8F0"/>
+                      </a:solidFill>
+                      <a:prstDash val="solid"/>
+                      <a:round/>
+                      <a:headEnd type="none" w="med" len="med"/>
+                      <a:tailEnd type="none" w="med" len="med"/>
+                    </a:lnB>
+                    <a:solidFill>
+                      <a:srgbClr val="F5F7FE"/>
+                    </a:solidFill>
+                  </a:tcPr>
+                </a:tc>
+              </a:tr>
+              <a:tr h="457200">
+                <a:tc>
+                  <a:txBody>
+                    <a:bodyPr/>
+                    <a:lstStyle/>
+                    <a:p>
+                      <a:pPr algn="l" indent="0" marL="0">
+                        <a:buNone/>
+                      </a:pPr>
+                      <a:r>
+                        <a:rPr lang="en-US" sz="1200" b="1" dirty="0">
+                          <a:solidFill>
+                            <a:srgbClr val="12132A"/>
+                          </a:solidFill>
+                          <a:latin typeface="Calibri" pitchFamily="34" charset="0"/>
+                          <a:ea typeface="Calibri" pitchFamily="34" charset="-122"/>
+                          <a:cs typeface="Calibri" pitchFamily="34" charset="-120"/>
+                        </a:rPr>
+                        <a:t>Video interviews</a:t>
+                      </a:r>
+                      <a:endParaRPr lang="en-US" sz="1200" dirty="0">
+                        <a:latin typeface="Calibri" charset="0"/>
+                        <a:ea typeface="Calibri" charset="0"/>
+                        <a:cs typeface="Calibri" charset="0"/>
+                      </a:endParaRPr>
+                    </a:p>
+                  </a:txBody>
+                  <a:tcPr marL="76200" marR="76200" marT="25400" marB="25400" anchor="ctr">
+                    <a:lnL w="6350" cap="flat" cmpd="sng" algn="ctr">
+                      <a:solidFill>
+                        <a:srgbClr val="E6E8F0"/>
+                      </a:solidFill>
+                      <a:prstDash val="solid"/>
+                      <a:round/>
+                      <a:headEnd type="none" w="med" len="med"/>
+                      <a:tailEnd type="none" w="med" len="med"/>
+                    </a:lnL>
+                    <a:lnR w="6350" cap="flat" cmpd="sng" algn="ctr">
+                      <a:solidFill>
+                        <a:srgbClr val="E6E8F0"/>
+                      </a:solidFill>
+                      <a:prstDash val="solid"/>
+                      <a:round/>
+                      <a:headEnd type="none" w="med" len="med"/>
+                      <a:tailEnd type="none" w="med" len="med"/>
+                    </a:lnR>
+                    <a:lnT w="6350" cap="flat" cmpd="sng" algn="ctr">
+                      <a:solidFill>
+                        <a:srgbClr val="E6E8F0"/>
+                      </a:solidFill>
+                      <a:prstDash val="solid"/>
+                      <a:round/>
+                      <a:headEnd type="none" w="med" len="med"/>
+                      <a:tailEnd type="none" w="med" len="med"/>
+                    </a:lnT>
+                    <a:lnB w="6350" cap="flat" cmpd="sng" algn="ctr">
+                      <a:solidFill>
+                        <a:srgbClr val="E6E8F0"/>
+                      </a:solidFill>
+                      <a:prstDash val="solid"/>
+                      <a:round/>
+                      <a:headEnd type="none" w="med" len="med"/>
+                      <a:tailEnd type="none" w="med" len="med"/>
+                    </a:lnB>
+                    <a:solidFill>
+                      <a:srgbClr val="FFFFFF"/>
+                    </a:solidFill>
+                  </a:tcPr>
+                </a:tc>
+                <a:tc>
+                  <a:txBody>
+                    <a:bodyPr/>
+                    <a:lstStyle/>
+                    <a:p>
+                      <a:pPr algn="l" indent="0" marL="0">
+                        <a:buNone/>
+                      </a:pPr>
+                      <a:r>
+                        <a:rPr lang="en-US" sz="1200" dirty="0">
+                          <a:solidFill>
+                            <a:srgbClr val="4A5568"/>
+                          </a:solidFill>
+                          <a:latin typeface="Calibri" pitchFamily="34" charset="0"/>
+                          <a:ea typeface="Calibri" pitchFamily="34" charset="-122"/>
+                          <a:cs typeface="Calibri" pitchFamily="34" charset="-120"/>
+                        </a:rPr>
+                        <a:t>Daily.co</a:t>
+                      </a:r>
+                      <a:endParaRPr lang="en-US" sz="1200" dirty="0">
+                        <a:latin typeface="Calibri" charset="0"/>
+                        <a:ea typeface="Calibri" charset="0"/>
+                        <a:cs typeface="Calibri" charset="0"/>
+                      </a:endParaRPr>
+                    </a:p>
+                  </a:txBody>
+                  <a:tcPr marL="76200" marR="76200" marT="25400" marB="25400" anchor="ctr">
+                    <a:lnL w="6350" cap="flat" cmpd="sng" algn="ctr">
+                      <a:solidFill>
+                        <a:srgbClr val="E6E8F0"/>
+                      </a:solidFill>
+                      <a:prstDash val="solid"/>
+                      <a:round/>
+                      <a:headEnd type="none" w="med" len="med"/>
+                      <a:tailEnd type="none" w="med" len="med"/>
+                    </a:lnL>
+                    <a:lnR w="6350" cap="flat" cmpd="sng" algn="ctr">
+                      <a:solidFill>
+                        <a:srgbClr val="E6E8F0"/>
+                      </a:solidFill>
+                      <a:prstDash val="solid"/>
+                      <a:round/>
+                      <a:headEnd type="none" w="med" len="med"/>
+                      <a:tailEnd type="none" w="med" len="med"/>
+                    </a:lnR>
+                    <a:lnT w="6350" cap="flat" cmpd="sng" algn="ctr">
+                      <a:solidFill>
+                        <a:srgbClr val="E6E8F0"/>
+                      </a:solidFill>
+                      <a:prstDash val="solid"/>
+                      <a:round/>
+                      <a:headEnd type="none" w="med" len="med"/>
+                      <a:tailEnd type="none" w="med" len="med"/>
+                    </a:lnT>
+                    <a:lnB w="6350" cap="flat" cmpd="sng" algn="ctr">
+                      <a:solidFill>
+                        <a:srgbClr val="E6E8F0"/>
+                      </a:solidFill>
+                      <a:prstDash val="solid"/>
+                      <a:round/>
+                      <a:headEnd type="none" w="med" len="med"/>
+                      <a:tailEnd type="none" w="med" len="med"/>
+                    </a:lnB>
+                    <a:solidFill>
+                      <a:srgbClr val="FFFFFF"/>
+                    </a:solidFill>
+                  </a:tcPr>
+                </a:tc>
+                <a:tc>
+                  <a:txBody>
+                    <a:bodyPr/>
+                    <a:lstStyle/>
+                    <a:p>
+                      <a:pPr algn="l" indent="0" marL="0">
+                        <a:buNone/>
+                      </a:pPr>
+                      <a:r>
+                        <a:rPr lang="en-US" sz="1200" dirty="0">
+                          <a:solidFill>
+                            <a:srgbClr val="4A5568"/>
+                          </a:solidFill>
+                          <a:latin typeface="Calibri" pitchFamily="34" charset="0"/>
+                          <a:ea typeface="Calibri" pitchFamily="34" charset="-122"/>
+                          <a:cs typeface="Calibri" pitchFamily="34" charset="-120"/>
+                        </a:rPr>
+                        <a:t>RM0.016 / participant-min</a:t>
+                      </a:r>
+                      <a:endParaRPr lang="en-US" sz="1200" dirty="0">
+                        <a:latin typeface="Calibri" charset="0"/>
+                        <a:ea typeface="Calibri" charset="0"/>
+                        <a:cs typeface="Calibri" charset="0"/>
+                      </a:endParaRPr>
+                    </a:p>
+                  </a:txBody>
+                  <a:tcPr marL="76200" marR="76200" marT="25400" marB="25400" anchor="ctr">
+                    <a:lnL w="6350" cap="flat" cmpd="sng" algn="ctr">
+                      <a:solidFill>
+                        <a:srgbClr val="E6E8F0"/>
+                      </a:solidFill>
+                      <a:prstDash val="solid"/>
+                      <a:round/>
+                      <a:headEnd type="none" w="med" len="med"/>
+                      <a:tailEnd type="none" w="med" len="med"/>
+                    </a:lnL>
+                    <a:lnR w="6350" cap="flat" cmpd="sng" algn="ctr">
+                      <a:solidFill>
+                        <a:srgbClr val="E6E8F0"/>
+                      </a:solidFill>
+                      <a:prstDash val="solid"/>
+                      <a:round/>
+                      <a:headEnd type="none" w="med" len="med"/>
+                      <a:tailEnd type="none" w="med" len="med"/>
+                    </a:lnR>
+                    <a:lnT w="6350" cap="flat" cmpd="sng" algn="ctr">
+                      <a:solidFill>
+                        <a:srgbClr val="E6E8F0"/>
+                      </a:solidFill>
+                      <a:prstDash val="solid"/>
+                      <a:round/>
+                      <a:headEnd type="none" w="med" len="med"/>
+                      <a:tailEnd type="none" w="med" len="med"/>
+                    </a:lnT>
+                    <a:lnB w="6350" cap="flat" cmpd="sng" algn="ctr">
+                      <a:solidFill>
+                        <a:srgbClr val="E6E8F0"/>
+                      </a:solidFill>
+                      <a:prstDash val="solid"/>
+                      <a:round/>
+                      <a:headEnd type="none" w="med" len="med"/>
+                      <a:tailEnd type="none" w="med" len="med"/>
+                    </a:lnB>
+                    <a:solidFill>
+                      <a:srgbClr val="FFFFFF"/>
+                    </a:solidFill>
+                  </a:tcPr>
+                </a:tc>
+                <a:tc>
+                  <a:txBody>
+                    <a:bodyPr/>
+                    <a:lstStyle/>
+                    <a:p>
+                      <a:pPr algn="ctr" indent="0" marL="0">
+                        <a:buNone/>
+                      </a:pPr>
+                      <a:r>
+                        <a:rPr lang="en-US" sz="1200" dirty="0">
+                          <a:solidFill>
+                            <a:srgbClr val="4A5568"/>
+                          </a:solidFill>
+                          <a:latin typeface="Calibri" pitchFamily="34" charset="0"/>
+                          <a:ea typeface="Calibri" pitchFamily="34" charset="-122"/>
+                          <a:cs typeface="Calibri" pitchFamily="34" charset="-120"/>
+                        </a:rPr>
+                        <a:t>Aster</a:t>
+                      </a:r>
+                      <a:endParaRPr lang="en-US" sz="1200" dirty="0">
+                        <a:latin typeface="Calibri" charset="0"/>
+                        <a:ea typeface="Calibri" charset="0"/>
+                        <a:cs typeface="Calibri" charset="0"/>
+                      </a:endParaRPr>
+                    </a:p>
+                  </a:txBody>
+                  <a:tcPr marL="76200" marR="76200" marT="25400" marB="25400" anchor="ctr">
+                    <a:lnL w="6350" cap="flat" cmpd="sng" algn="ctr">
+                      <a:solidFill>
+                        <a:srgbClr val="E6E8F0"/>
+                      </a:solidFill>
+                      <a:prstDash val="solid"/>
+                      <a:round/>
+                      <a:headEnd type="none" w="med" len="med"/>
+                      <a:tailEnd type="none" w="med" len="med"/>
+                    </a:lnL>
+                    <a:lnR w="6350" cap="flat" cmpd="sng" algn="ctr">
+                      <a:solidFill>
+                        <a:srgbClr val="E6E8F0"/>
+                      </a:solidFill>
+                      <a:prstDash val="solid"/>
+                      <a:round/>
+                      <a:headEnd type="none" w="med" len="med"/>
+                      <a:tailEnd type="none" w="med" len="med"/>
+                    </a:lnR>
+                    <a:lnT w="6350" cap="flat" cmpd="sng" algn="ctr">
+                      <a:solidFill>
+                        <a:srgbClr val="E6E8F0"/>
+                      </a:solidFill>
+                      <a:prstDash val="solid"/>
+                      <a:round/>
+                      <a:headEnd type="none" w="med" len="med"/>
+                      <a:tailEnd type="none" w="med" len="med"/>
+                    </a:lnT>
+                    <a:lnB w="6350" cap="flat" cmpd="sng" algn="ctr">
+                      <a:solidFill>
+                        <a:srgbClr val="E6E8F0"/>
+                      </a:solidFill>
+                      <a:prstDash val="solid"/>
+                      <a:round/>
+                      <a:headEnd type="none" w="med" len="med"/>
+                      <a:tailEnd type="none" w="med" len="med"/>
+                    </a:lnB>
+                    <a:solidFill>
+                      <a:srgbClr val="FFFFFF"/>
+                    </a:solidFill>
+                  </a:tcPr>
+                </a:tc>
+              </a:tr>
+              <a:tr h="457200">
+                <a:tc>
+                  <a:txBody>
+                    <a:bodyPr/>
+                    <a:lstStyle/>
+                    <a:p>
+                      <a:pPr algn="l" indent="0" marL="0">
+                        <a:buNone/>
+                      </a:pPr>
+                      <a:r>
+                        <a:rPr lang="en-US" sz="1200" b="1" dirty="0">
+                          <a:solidFill>
+                            <a:srgbClr val="12132A"/>
+                          </a:solidFill>
+                          <a:latin typeface="Calibri" pitchFamily="34" charset="0"/>
+                          <a:ea typeface="Calibri" pitchFamily="34" charset="-122"/>
+                          <a:cs typeface="Calibri" pitchFamily="34" charset="-120"/>
+                        </a:rPr>
+                        <a:t>Database + file storage</a:t>
+                      </a:r>
+                      <a:endParaRPr lang="en-US" sz="1200" dirty="0">
+                        <a:latin typeface="Calibri" charset="0"/>
+                        <a:ea typeface="Calibri" charset="0"/>
+                        <a:cs typeface="Calibri" charset="0"/>
+                      </a:endParaRPr>
+                    </a:p>
+                  </a:txBody>
+                  <a:tcPr marL="76200" marR="76200" marT="25400" marB="25400" anchor="ctr">
+                    <a:lnL w="6350" cap="flat" cmpd="sng" algn="ctr">
+                      <a:solidFill>
+                        <a:srgbClr val="E6E8F0"/>
+                      </a:solidFill>
+                      <a:prstDash val="solid"/>
+                      <a:round/>
+                      <a:headEnd type="none" w="med" len="med"/>
+                      <a:tailEnd type="none" w="med" len="med"/>
+                    </a:lnL>
+                    <a:lnR w="6350" cap="flat" cmpd="sng" algn="ctr">
+                      <a:solidFill>
+                        <a:srgbClr val="E6E8F0"/>
+                      </a:solidFill>
+                      <a:prstDash val="solid"/>
+                      <a:round/>
+                      <a:headEnd type="none" w="med" len="med"/>
+                      <a:tailEnd type="none" w="med" len="med"/>
+                    </a:lnR>
+                    <a:lnT w="6350" cap="flat" cmpd="sng" algn="ctr">
+                      <a:solidFill>
+                        <a:srgbClr val="E6E8F0"/>
+                      </a:solidFill>
+                      <a:prstDash val="solid"/>
+                      <a:round/>
+                      <a:headEnd type="none" w="med" len="med"/>
+                      <a:tailEnd type="none" w="med" len="med"/>
+                    </a:lnT>
+                    <a:lnB w="6350" cap="flat" cmpd="sng" algn="ctr">
+                      <a:solidFill>
+                        <a:srgbClr val="E6E8F0"/>
+                      </a:solidFill>
+                      <a:prstDash val="solid"/>
+                      <a:round/>
+                      <a:headEnd type="none" w="med" len="med"/>
+                      <a:tailEnd type="none" w="med" len="med"/>
+                    </a:lnB>
+                    <a:solidFill>
+                      <a:srgbClr val="F5F7FE"/>
+                    </a:solidFill>
+                  </a:tcPr>
+                </a:tc>
+                <a:tc>
+                  <a:txBody>
+                    <a:bodyPr/>
+                    <a:lstStyle/>
+                    <a:p>
+                      <a:pPr algn="l" indent="0" marL="0">
+                        <a:buNone/>
+                      </a:pPr>
+                      <a:r>
+                        <a:rPr lang="en-US" sz="1200" dirty="0">
+                          <a:solidFill>
+                            <a:srgbClr val="4A5568"/>
+                          </a:solidFill>
+                          <a:latin typeface="Calibri" pitchFamily="34" charset="0"/>
+                          <a:ea typeface="Calibri" pitchFamily="34" charset="-122"/>
+                          <a:cs typeface="Calibri" pitchFamily="34" charset="-120"/>
+                        </a:rPr>
+                        <a:t>Supabase</a:t>
+                      </a:r>
+                      <a:endParaRPr lang="en-US" sz="1200" dirty="0">
+                        <a:latin typeface="Calibri" charset="0"/>
+                        <a:ea typeface="Calibri" charset="0"/>
+                        <a:cs typeface="Calibri" charset="0"/>
+                      </a:endParaRPr>
+                    </a:p>
+                  </a:txBody>
+                  <a:tcPr marL="76200" marR="76200" marT="25400" marB="25400" anchor="ctr">
+                    <a:lnL w="6350" cap="flat" cmpd="sng" algn="ctr">
+                      <a:solidFill>
+                        <a:srgbClr val="E6E8F0"/>
+                      </a:solidFill>
+                      <a:prstDash val="solid"/>
+                      <a:round/>
+                      <a:headEnd type="none" w="med" len="med"/>
+                      <a:tailEnd type="none" w="med" len="med"/>
+                    </a:lnL>
+                    <a:lnR w="6350" cap="flat" cmpd="sng" algn="ctr">
+                      <a:solidFill>
+                        <a:srgbClr val="E6E8F0"/>
+                      </a:solidFill>
+                      <a:prstDash val="solid"/>
+                      <a:round/>
+                      <a:headEnd type="none" w="med" len="med"/>
+                      <a:tailEnd type="none" w="med" len="med"/>
+                    </a:lnR>
+                    <a:lnT w="6350" cap="flat" cmpd="sng" algn="ctr">
+                      <a:solidFill>
+                        <a:srgbClr val="E6E8F0"/>
+                      </a:solidFill>
+                      <a:prstDash val="solid"/>
+                      <a:round/>
+                      <a:headEnd type="none" w="med" len="med"/>
+                      <a:tailEnd type="none" w="med" len="med"/>
+                    </a:lnT>
+                    <a:lnB w="6350" cap="flat" cmpd="sng" algn="ctr">
+                      <a:solidFill>
+                        <a:srgbClr val="E6E8F0"/>
+                      </a:solidFill>
+                      <a:prstDash val="solid"/>
+                      <a:round/>
+                      <a:headEnd type="none" w="med" len="med"/>
+                      <a:tailEnd type="none" w="med" len="med"/>
+                    </a:lnB>
+                    <a:solidFill>
+                      <a:srgbClr val="F5F7FE"/>
+                    </a:solidFill>
+                  </a:tcPr>
+                </a:tc>
+                <a:tc>
+                  <a:txBody>
+                    <a:bodyPr/>
+                    <a:lstStyle/>
+                    <a:p>
+                      <a:pPr algn="l" indent="0" marL="0">
+                        <a:buNone/>
+                      </a:pPr>
+                      <a:r>
+                        <a:rPr lang="en-US" sz="1200" dirty="0">
+                          <a:solidFill>
+                            <a:srgbClr val="4A5568"/>
+                          </a:solidFill>
+                          <a:latin typeface="Calibri" pitchFamily="34" charset="0"/>
+                          <a:ea typeface="Calibri" pitchFamily="34" charset="-122"/>
+                          <a:cs typeface="Calibri" pitchFamily="34" charset="-120"/>
+                        </a:rPr>
+                        <a:t>Fixed base + storage</a:t>
+                      </a:r>
+                      <a:endParaRPr lang="en-US" sz="1200" dirty="0">
+                        <a:latin typeface="Calibri" charset="0"/>
+                        <a:ea typeface="Calibri" charset="0"/>
+                        <a:cs typeface="Calibri" charset="0"/>
+                      </a:endParaRPr>
+                    </a:p>
+                  </a:txBody>
+                  <a:tcPr marL="76200" marR="76200" marT="25400" marB="25400" anchor="ctr">
+                    <a:lnL w="6350" cap="flat" cmpd="sng" algn="ctr">
+                      <a:solidFill>
+                        <a:srgbClr val="E6E8F0"/>
+                      </a:solidFill>
+                      <a:prstDash val="solid"/>
+                      <a:round/>
+                      <a:headEnd type="none" w="med" len="med"/>
+                      <a:tailEnd type="none" w="med" len="med"/>
+                    </a:lnL>
+                    <a:lnR w="6350" cap="flat" cmpd="sng" algn="ctr">
+                      <a:solidFill>
+                        <a:srgbClr val="E6E8F0"/>
+                      </a:solidFill>
+                      <a:prstDash val="solid"/>
+                      <a:round/>
+                      <a:headEnd type="none" w="med" len="med"/>
+                      <a:tailEnd type="none" w="med" len="med"/>
+                    </a:lnR>
+                    <a:lnT w="6350" cap="flat" cmpd="sng" algn="ctr">
+                      <a:solidFill>
+                        <a:srgbClr val="E6E8F0"/>
+                      </a:solidFill>
+                      <a:prstDash val="solid"/>
+                      <a:round/>
+                      <a:headEnd type="none" w="med" len="med"/>
+                      <a:tailEnd type="none" w="med" len="med"/>
+                    </a:lnT>
+                    <a:lnB w="6350" cap="flat" cmpd="sng" algn="ctr">
+                      <a:solidFill>
+                        <a:srgbClr val="E6E8F0"/>
+                      </a:solidFill>
+                      <a:prstDash val="solid"/>
+                      <a:round/>
+                      <a:headEnd type="none" w="med" len="med"/>
+                      <a:tailEnd type="none" w="med" len="med"/>
+                    </a:lnB>
+                    <a:solidFill>
+                      <a:srgbClr val="F5F7FE"/>
+                    </a:solidFill>
+                  </a:tcPr>
+                </a:tc>
+                <a:tc>
+                  <a:txBody>
+                    <a:bodyPr/>
+                    <a:lstStyle/>
+                    <a:p>
+                      <a:pPr algn="ctr" indent="0" marL="0">
+                        <a:buNone/>
+                      </a:pPr>
+                      <a:r>
+                        <a:rPr lang="en-US" sz="1200" dirty="0">
+                          <a:solidFill>
+                            <a:srgbClr val="4A5568"/>
+                          </a:solidFill>
+                          <a:latin typeface="Calibri" pitchFamily="34" charset="0"/>
+                          <a:ea typeface="Calibri" pitchFamily="34" charset="-122"/>
+                          <a:cs typeface="Calibri" pitchFamily="34" charset="-120"/>
+                        </a:rPr>
+                        <a:t>Aster</a:t>
+                      </a:r>
+                      <a:endParaRPr lang="en-US" sz="1200" dirty="0">
+                        <a:latin typeface="Calibri" charset="0"/>
+                        <a:ea typeface="Calibri" charset="0"/>
+                        <a:cs typeface="Calibri" charset="0"/>
+                      </a:endParaRPr>
+                    </a:p>
+                  </a:txBody>
+                  <a:tcPr marL="76200" marR="76200" marT="25400" marB="25400" anchor="ctr">
+                    <a:lnL w="6350" cap="flat" cmpd="sng" algn="ctr">
+                      <a:solidFill>
+                        <a:srgbClr val="E6E8F0"/>
+                      </a:solidFill>
+                      <a:prstDash val="solid"/>
+                      <a:round/>
+                      <a:headEnd type="none" w="med" len="med"/>
+                      <a:tailEnd type="none" w="med" len="med"/>
+                    </a:lnL>
+                    <a:lnR w="6350" cap="flat" cmpd="sng" algn="ctr">
+                      <a:solidFill>
+                        <a:srgbClr val="E6E8F0"/>
+                      </a:solidFill>
+                      <a:prstDash val="solid"/>
+                      <a:round/>
+                      <a:headEnd type="none" w="med" len="med"/>
+                      <a:tailEnd type="none" w="med" len="med"/>
+                    </a:lnR>
+                    <a:lnT w="6350" cap="flat" cmpd="sng" algn="ctr">
+                      <a:solidFill>
+                        <a:srgbClr val="E6E8F0"/>
+                      </a:solidFill>
+                      <a:prstDash val="solid"/>
+                      <a:round/>
+                      <a:headEnd type="none" w="med" len="med"/>
+                      <a:tailEnd type="none" w="med" len="med"/>
+                    </a:lnT>
+                    <a:lnB w="6350" cap="flat" cmpd="sng" algn="ctr">
+                      <a:solidFill>
+                        <a:srgbClr val="E6E8F0"/>
+                      </a:solidFill>
+                      <a:prstDash val="solid"/>
+                      <a:round/>
+                      <a:headEnd type="none" w="med" len="med"/>
+                      <a:tailEnd type="none" w="med" len="med"/>
+                    </a:lnB>
+                    <a:solidFill>
+                      <a:srgbClr val="F5F7FE"/>
+                    </a:solidFill>
+                  </a:tcPr>
+                </a:tc>
+              </a:tr>
+              <a:tr h="457200">
+                <a:tc>
+                  <a:txBody>
+                    <a:bodyPr/>
+                    <a:lstStyle/>
+                    <a:p>
+                      <a:pPr algn="l" indent="0" marL="0">
+                        <a:buNone/>
+                      </a:pPr>
+                      <a:r>
+                        <a:rPr lang="en-US" sz="1200" b="1" dirty="0">
+                          <a:solidFill>
+                            <a:srgbClr val="12132A"/>
+                          </a:solidFill>
+                          <a:latin typeface="Calibri" pitchFamily="34" charset="0"/>
+                          <a:ea typeface="Calibri" pitchFamily="34" charset="-122"/>
+                          <a:cs typeface="Calibri" pitchFamily="34" charset="-120"/>
+                        </a:rPr>
+                        <a:t>Hosting / CDN</a:t>
+                      </a:r>
+                      <a:endParaRPr lang="en-US" sz="1200" dirty="0">
+                        <a:latin typeface="Calibri" charset="0"/>
+                        <a:ea typeface="Calibri" charset="0"/>
+                        <a:cs typeface="Calibri" charset="0"/>
+                      </a:endParaRPr>
+                    </a:p>
+                  </a:txBody>
+                  <a:tcPr marL="76200" marR="76200" marT="25400" marB="25400" anchor="ctr">
+                    <a:lnL w="6350" cap="flat" cmpd="sng" algn="ctr">
+                      <a:solidFill>
+                        <a:srgbClr val="E6E8F0"/>
+                      </a:solidFill>
+                      <a:prstDash val="solid"/>
+                      <a:round/>
+                      <a:headEnd type="none" w="med" len="med"/>
+                      <a:tailEnd type="none" w="med" len="med"/>
+                    </a:lnL>
+                    <a:lnR w="6350" cap="flat" cmpd="sng" algn="ctr">
+                      <a:solidFill>
+                        <a:srgbClr val="E6E8F0"/>
+                      </a:solidFill>
+                      <a:prstDash val="solid"/>
+                      <a:round/>
+                      <a:headEnd type="none" w="med" len="med"/>
+                      <a:tailEnd type="none" w="med" len="med"/>
+                    </a:lnR>
+                    <a:lnT w="6350" cap="flat" cmpd="sng" algn="ctr">
+                      <a:solidFill>
+                        <a:srgbClr val="E6E8F0"/>
+                      </a:solidFill>
+                      <a:prstDash val="solid"/>
+                      <a:round/>
+                      <a:headEnd type="none" w="med" len="med"/>
+                      <a:tailEnd type="none" w="med" len="med"/>
+                    </a:lnT>
+                    <a:lnB w="6350" cap="flat" cmpd="sng" algn="ctr">
+                      <a:solidFill>
+                        <a:srgbClr val="E6E8F0"/>
+                      </a:solidFill>
+                      <a:prstDash val="solid"/>
+                      <a:round/>
+                      <a:headEnd type="none" w="med" len="med"/>
+                      <a:tailEnd type="none" w="med" len="med"/>
+                    </a:lnB>
+                    <a:solidFill>
+                      <a:srgbClr val="FFFFFF"/>
+                    </a:solidFill>
+                  </a:tcPr>
+                </a:tc>
+                <a:tc>
+                  <a:txBody>
+                    <a:bodyPr/>
+                    <a:lstStyle/>
+                    <a:p>
+                      <a:pPr algn="l" indent="0" marL="0">
+                        <a:buNone/>
+                      </a:pPr>
+                      <a:r>
+                        <a:rPr lang="en-US" sz="1200" dirty="0">
+                          <a:solidFill>
+                            <a:srgbClr val="4A5568"/>
+                          </a:solidFill>
+                          <a:latin typeface="Calibri" pitchFamily="34" charset="0"/>
+                          <a:ea typeface="Calibri" pitchFamily="34" charset="-122"/>
+                          <a:cs typeface="Calibri" pitchFamily="34" charset="-120"/>
+                        </a:rPr>
+                        <a:t>Vercel</a:t>
+                      </a:r>
+                      <a:endParaRPr lang="en-US" sz="1200" dirty="0">
+                        <a:latin typeface="Calibri" charset="0"/>
+                        <a:ea typeface="Calibri" charset="0"/>
+                        <a:cs typeface="Calibri" charset="0"/>
+                      </a:endParaRPr>
+                    </a:p>
+                  </a:txBody>
+                  <a:tcPr marL="76200" marR="76200" marT="25400" marB="25400" anchor="ctr">
+                    <a:lnL w="6350" cap="flat" cmpd="sng" algn="ctr">
+                      <a:solidFill>
+                        <a:srgbClr val="E6E8F0"/>
+                      </a:solidFill>
+                      <a:prstDash val="solid"/>
+                      <a:round/>
+                      <a:headEnd type="none" w="med" len="med"/>
+                      <a:tailEnd type="none" w="med" len="med"/>
+                    </a:lnL>
+                    <a:lnR w="6350" cap="flat" cmpd="sng" algn="ctr">
+                      <a:solidFill>
+                        <a:srgbClr val="E6E8F0"/>
+                      </a:solidFill>
+                      <a:prstDash val="solid"/>
+                      <a:round/>
+                      <a:headEnd type="none" w="med" len="med"/>
+                      <a:tailEnd type="none" w="med" len="med"/>
+                    </a:lnR>
+                    <a:lnT w="6350" cap="flat" cmpd="sng" algn="ctr">
+                      <a:solidFill>
+                        <a:srgbClr val="E6E8F0"/>
+                      </a:solidFill>
+                      <a:prstDash val="solid"/>
+                      <a:round/>
+                      <a:headEnd type="none" w="med" len="med"/>
+                      <a:tailEnd type="none" w="med" len="med"/>
+                    </a:lnT>
+                    <a:lnB w="6350" cap="flat" cmpd="sng" algn="ctr">
+                      <a:solidFill>
+                        <a:srgbClr val="E6E8F0"/>
+                      </a:solidFill>
+                      <a:prstDash val="solid"/>
+                      <a:round/>
+                      <a:headEnd type="none" w="med" len="med"/>
+                      <a:tailEnd type="none" w="med" len="med"/>
+                    </a:lnB>
+                    <a:solidFill>
+                      <a:srgbClr val="FFFFFF"/>
+                    </a:solidFill>
+                  </a:tcPr>
+                </a:tc>
+                <a:tc>
+                  <a:txBody>
+                    <a:bodyPr/>
+                    <a:lstStyle/>
+                    <a:p>
+                      <a:pPr algn="l" indent="0" marL="0">
+                        <a:buNone/>
+                      </a:pPr>
+                      <a:r>
+                        <a:rPr lang="en-US" sz="1200" dirty="0">
+                          <a:solidFill>
+                            <a:srgbClr val="4A5568"/>
+                          </a:solidFill>
+                          <a:latin typeface="Calibri" pitchFamily="34" charset="0"/>
+                          <a:ea typeface="Calibri" pitchFamily="34" charset="-122"/>
+                          <a:cs typeface="Calibri" pitchFamily="34" charset="-120"/>
+                        </a:rPr>
+                        <a:t>Fixed</a:t>
+                      </a:r>
+                      <a:endParaRPr lang="en-US" sz="1200" dirty="0">
+                        <a:latin typeface="Calibri" charset="0"/>
+                        <a:ea typeface="Calibri" charset="0"/>
+                        <a:cs typeface="Calibri" charset="0"/>
+                      </a:endParaRPr>
+                    </a:p>
+                  </a:txBody>
+                  <a:tcPr marL="76200" marR="76200" marT="25400" marB="25400" anchor="ctr">
+                    <a:lnL w="6350" cap="flat" cmpd="sng" algn="ctr">
+                      <a:solidFill>
+                        <a:srgbClr val="E6E8F0"/>
+                      </a:solidFill>
+                      <a:prstDash val="solid"/>
+                      <a:round/>
+                      <a:headEnd type="none" w="med" len="med"/>
+                      <a:tailEnd type="none" w="med" len="med"/>
+                    </a:lnL>
+                    <a:lnR w="6350" cap="flat" cmpd="sng" algn="ctr">
+                      <a:solidFill>
+                        <a:srgbClr val="E6E8F0"/>
+                      </a:solidFill>
+                      <a:prstDash val="solid"/>
+                      <a:round/>
+                      <a:headEnd type="none" w="med" len="med"/>
+                      <a:tailEnd type="none" w="med" len="med"/>
+                    </a:lnR>
+                    <a:lnT w="6350" cap="flat" cmpd="sng" algn="ctr">
+                      <a:solidFill>
+                        <a:srgbClr val="E6E8F0"/>
+                      </a:solidFill>
+                      <a:prstDash val="solid"/>
+                      <a:round/>
+                      <a:headEnd type="none" w="med" len="med"/>
+                      <a:tailEnd type="none" w="med" len="med"/>
+                    </a:lnT>
+                    <a:lnB w="6350" cap="flat" cmpd="sng" algn="ctr">
+                      <a:solidFill>
+                        <a:srgbClr val="E6E8F0"/>
+                      </a:solidFill>
+                      <a:prstDash val="solid"/>
+                      <a:round/>
+                      <a:headEnd type="none" w="med" len="med"/>
+                      <a:tailEnd type="none" w="med" len="med"/>
+                    </a:lnB>
+                    <a:solidFill>
+                      <a:srgbClr val="FFFFFF"/>
+                    </a:solidFill>
+                  </a:tcPr>
+                </a:tc>
+                <a:tc>
+                  <a:txBody>
+                    <a:bodyPr/>
+                    <a:lstStyle/>
+                    <a:p>
+                      <a:pPr algn="ctr" indent="0" marL="0">
+                        <a:buNone/>
+                      </a:pPr>
+                      <a:r>
+                        <a:rPr lang="en-US" sz="1200" dirty="0">
+                          <a:solidFill>
+                            <a:srgbClr val="4A5568"/>
+                          </a:solidFill>
+                          <a:latin typeface="Calibri" pitchFamily="34" charset="0"/>
+                          <a:ea typeface="Calibri" pitchFamily="34" charset="-122"/>
+                          <a:cs typeface="Calibri" pitchFamily="34" charset="-120"/>
+                        </a:rPr>
+                        <a:t>Aster</a:t>
+                      </a:r>
+                      <a:endParaRPr lang="en-US" sz="1200" dirty="0">
+                        <a:latin typeface="Calibri" charset="0"/>
+                        <a:ea typeface="Calibri" charset="0"/>
+                        <a:cs typeface="Calibri" charset="0"/>
+                      </a:endParaRPr>
+                    </a:p>
+                  </a:txBody>
+                  <a:tcPr marL="76200" marR="76200" marT="25400" marB="25400" anchor="ctr">
+                    <a:lnL w="6350" cap="flat" cmpd="sng" algn="ctr">
+                      <a:solidFill>
+                        <a:srgbClr val="E6E8F0"/>
+                      </a:solidFill>
+                      <a:prstDash val="solid"/>
+                      <a:round/>
+                      <a:headEnd type="none" w="med" len="med"/>
+                      <a:tailEnd type="none" w="med" len="med"/>
+                    </a:lnL>
+                    <a:lnR w="6350" cap="flat" cmpd="sng" algn="ctr">
+                      <a:solidFill>
+                        <a:srgbClr val="E6E8F0"/>
+                      </a:solidFill>
+                      <a:prstDash val="solid"/>
+                      <a:round/>
+                      <a:headEnd type="none" w="med" len="med"/>
+                      <a:tailEnd type="none" w="med" len="med"/>
+                    </a:lnR>
+                    <a:lnT w="6350" cap="flat" cmpd="sng" algn="ctr">
+                      <a:solidFill>
+                        <a:srgbClr val="E6E8F0"/>
+                      </a:solidFill>
+                      <a:prstDash val="solid"/>
+                      <a:round/>
+                      <a:headEnd type="none" w="med" len="med"/>
+                      <a:tailEnd type="none" w="med" len="med"/>
+                    </a:lnT>
+                    <a:lnB w="6350" cap="flat" cmpd="sng" algn="ctr">
+                      <a:solidFill>
+                        <a:srgbClr val="E6E8F0"/>
+                      </a:solidFill>
+                      <a:prstDash val="solid"/>
+                      <a:round/>
+                      <a:headEnd type="none" w="med" len="med"/>
+                      <a:tailEnd type="none" w="med" len="med"/>
+                    </a:lnB>
+                    <a:solidFill>
+                      <a:srgbClr val="FFFFFF"/>
+                    </a:solidFill>
+                  </a:tcPr>
+                </a:tc>
+              </a:tr>
+              <a:tr h="457200">
+                <a:tc>
+                  <a:txBody>
+                    <a:bodyPr/>
+                    <a:lstStyle/>
+                    <a:p>
+                      <a:pPr algn="l" indent="0" marL="0">
+                        <a:buNone/>
+                      </a:pPr>
+                      <a:r>
+                        <a:rPr lang="en-US" sz="1200" b="1" dirty="0">
+                          <a:solidFill>
+                            <a:srgbClr val="12132A"/>
+                          </a:solidFill>
+                          <a:latin typeface="Calibri" pitchFamily="34" charset="0"/>
+                          <a:ea typeface="Calibri" pitchFamily="34" charset="-122"/>
+                          <a:cs typeface="Calibri" pitchFamily="34" charset="-120"/>
+                        </a:rPr>
+                        <a:t>Payment processing</a:t>
+                      </a:r>
+                      <a:endParaRPr lang="en-US" sz="1200" dirty="0">
+                        <a:latin typeface="Calibri" charset="0"/>
+                        <a:ea typeface="Calibri" charset="0"/>
+                        <a:cs typeface="Calibri" charset="0"/>
+                      </a:endParaRPr>
+                    </a:p>
+                  </a:txBody>
+                  <a:tcPr marL="76200" marR="76200" marT="25400" marB="25400" anchor="ctr">
+                    <a:lnL w="6350" cap="flat" cmpd="sng" algn="ctr">
+                      <a:solidFill>
+                        <a:srgbClr val="E6E8F0"/>
+                      </a:solidFill>
+                      <a:prstDash val="solid"/>
+                      <a:round/>
+                      <a:headEnd type="none" w="med" len="med"/>
+                      <a:tailEnd type="none" w="med" len="med"/>
+                    </a:lnL>
+                    <a:lnR w="6350" cap="flat" cmpd="sng" algn="ctr">
+                      <a:solidFill>
+                        <a:srgbClr val="E6E8F0"/>
+                      </a:solidFill>
+                      <a:prstDash val="solid"/>
+                      <a:round/>
+                      <a:headEnd type="none" w="med" len="med"/>
+                      <a:tailEnd type="none" w="med" len="med"/>
+                    </a:lnR>
+                    <a:lnT w="6350" cap="flat" cmpd="sng" algn="ctr">
+                      <a:solidFill>
+                        <a:srgbClr val="E6E8F0"/>
+                      </a:solidFill>
+                      <a:prstDash val="solid"/>
+                      <a:round/>
+                      <a:headEnd type="none" w="med" len="med"/>
+                      <a:tailEnd type="none" w="med" len="med"/>
+                    </a:lnT>
+                    <a:lnB w="6350" cap="flat" cmpd="sng" algn="ctr">
+                      <a:solidFill>
+                        <a:srgbClr val="E6E8F0"/>
+                      </a:solidFill>
+                      <a:prstDash val="solid"/>
+                      <a:round/>
+                      <a:headEnd type="none" w="med" len="med"/>
+                      <a:tailEnd type="none" w="med" len="med"/>
+                    </a:lnB>
+                    <a:solidFill>
+                      <a:srgbClr val="F5F7FE"/>
+                    </a:solidFill>
+                  </a:tcPr>
+                </a:tc>
+                <a:tc>
+                  <a:txBody>
+                    <a:bodyPr/>
+                    <a:lstStyle/>
+                    <a:p>
+                      <a:pPr algn="l" indent="0" marL="0">
+                        <a:buNone/>
+                      </a:pPr>
+                      <a:r>
+                        <a:rPr lang="en-US" sz="1200" dirty="0">
+                          <a:solidFill>
+                            <a:srgbClr val="4A5568"/>
+                          </a:solidFill>
+                          <a:latin typeface="Calibri" pitchFamily="34" charset="0"/>
+                          <a:ea typeface="Calibri" pitchFamily="34" charset="-122"/>
+                          <a:cs typeface="Calibri" pitchFamily="34" charset="-120"/>
+                        </a:rPr>
+                        <a:t>Stripe (Malaysia)</a:t>
+                      </a:r>
+                      <a:endParaRPr lang="en-US" sz="1200" dirty="0">
+                        <a:latin typeface="Calibri" charset="0"/>
+                        <a:ea typeface="Calibri" charset="0"/>
+                        <a:cs typeface="Calibri" charset="0"/>
+                      </a:endParaRPr>
+                    </a:p>
+                  </a:txBody>
+                  <a:tcPr marL="76200" marR="76200" marT="25400" marB="25400" anchor="ctr">
+                    <a:lnL w="6350" cap="flat" cmpd="sng" algn="ctr">
+                      <a:solidFill>
+                        <a:srgbClr val="E6E8F0"/>
+                      </a:solidFill>
+                      <a:prstDash val="solid"/>
+                      <a:round/>
+                      <a:headEnd type="none" w="med" len="med"/>
+                      <a:tailEnd type="none" w="med" len="med"/>
+                    </a:lnL>
+                    <a:lnR w="6350" cap="flat" cmpd="sng" algn="ctr">
+                      <a:solidFill>
+                        <a:srgbClr val="E6E8F0"/>
+                      </a:solidFill>
+                      <a:prstDash val="solid"/>
+                      <a:round/>
+                      <a:headEnd type="none" w="med" len="med"/>
+                      <a:tailEnd type="none" w="med" len="med"/>
+                    </a:lnR>
+                    <a:lnT w="6350" cap="flat" cmpd="sng" algn="ctr">
+                      <a:solidFill>
+                        <a:srgbClr val="E6E8F0"/>
+                      </a:solidFill>
+                      <a:prstDash val="solid"/>
+                      <a:round/>
+                      <a:headEnd type="none" w="med" len="med"/>
+                      <a:tailEnd type="none" w="med" len="med"/>
+                    </a:lnT>
+                    <a:lnB w="6350" cap="flat" cmpd="sng" algn="ctr">
+                      <a:solidFill>
+                        <a:srgbClr val="E6E8F0"/>
+                      </a:solidFill>
+                      <a:prstDash val="solid"/>
+                      <a:round/>
+                      <a:headEnd type="none" w="med" len="med"/>
+                      <a:tailEnd type="none" w="med" len="med"/>
+                    </a:lnB>
+                    <a:solidFill>
+                      <a:srgbClr val="F5F7FE"/>
+                    </a:solidFill>
+                  </a:tcPr>
+                </a:tc>
+                <a:tc>
+                  <a:txBody>
+                    <a:bodyPr/>
+                    <a:lstStyle/>
+                    <a:p>
+                      <a:pPr algn="l" indent="0" marL="0">
+                        <a:buNone/>
+                      </a:pPr>
+                      <a:r>
+                        <a:rPr lang="en-US" sz="1200" dirty="0">
+                          <a:solidFill>
+                            <a:srgbClr val="4A5568"/>
+                          </a:solidFill>
+                          <a:latin typeface="Calibri" pitchFamily="34" charset="0"/>
+                          <a:ea typeface="Calibri" pitchFamily="34" charset="-122"/>
+                          <a:cs typeface="Calibri" pitchFamily="34" charset="-120"/>
+                        </a:rPr>
+                        <a:t>3% + RM1 / charge</a:t>
+                      </a:r>
+                      <a:endParaRPr lang="en-US" sz="1200" dirty="0">
+                        <a:latin typeface="Calibri" charset="0"/>
+                        <a:ea typeface="Calibri" charset="0"/>
+                        <a:cs typeface="Calibri" charset="0"/>
+                      </a:endParaRPr>
+                    </a:p>
+                  </a:txBody>
+                  <a:tcPr marL="76200" marR="76200" marT="25400" marB="25400" anchor="ctr">
+                    <a:lnL w="6350" cap="flat" cmpd="sng" algn="ctr">
+                      <a:solidFill>
+                        <a:srgbClr val="E6E8F0"/>
+                      </a:solidFill>
+                      <a:prstDash val="solid"/>
+                      <a:round/>
+                      <a:headEnd type="none" w="med" len="med"/>
+                      <a:tailEnd type="none" w="med" len="med"/>
+                    </a:lnL>
+                    <a:lnR w="6350" cap="flat" cmpd="sng" algn="ctr">
+                      <a:solidFill>
+                        <a:srgbClr val="E6E8F0"/>
+                      </a:solidFill>
+                      <a:prstDash val="solid"/>
+                      <a:round/>
+                      <a:headEnd type="none" w="med" len="med"/>
+                      <a:tailEnd type="none" w="med" len="med"/>
+                    </a:lnR>
+                    <a:lnT w="6350" cap="flat" cmpd="sng" algn="ctr">
+                      <a:solidFill>
+                        <a:srgbClr val="E6E8F0"/>
+                      </a:solidFill>
+                      <a:prstDash val="solid"/>
+                      <a:round/>
+                      <a:headEnd type="none" w="med" len="med"/>
+                      <a:tailEnd type="none" w="med" len="med"/>
+                    </a:lnT>
+                    <a:lnB w="6350" cap="flat" cmpd="sng" algn="ctr">
+                      <a:solidFill>
+                        <a:srgbClr val="E6E8F0"/>
+                      </a:solidFill>
+                      <a:prstDash val="solid"/>
+                      <a:round/>
+                      <a:headEnd type="none" w="med" len="med"/>
+                      <a:tailEnd type="none" w="med" len="med"/>
+                    </a:lnB>
+                    <a:solidFill>
+                      <a:srgbClr val="F5F7FE"/>
+                    </a:solidFill>
+                  </a:tcPr>
+                </a:tc>
+                <a:tc>
+                  <a:txBody>
+                    <a:bodyPr/>
+                    <a:lstStyle/>
+                    <a:p>
+                      <a:pPr algn="ctr" indent="0" marL="0">
+                        <a:buNone/>
+                      </a:pPr>
+                      <a:r>
+                        <a:rPr lang="en-US" sz="1200" dirty="0">
+                          <a:solidFill>
+                            <a:srgbClr val="4A5568"/>
+                          </a:solidFill>
+                          <a:latin typeface="Calibri" pitchFamily="34" charset="0"/>
+                          <a:ea typeface="Calibri" pitchFamily="34" charset="-122"/>
+                          <a:cs typeface="Calibri" pitchFamily="34" charset="-120"/>
+                        </a:rPr>
+                        <a:t>Aster</a:t>
+                      </a:r>
+                      <a:endParaRPr lang="en-US" sz="1200" dirty="0">
+                        <a:latin typeface="Calibri" charset="0"/>
+                        <a:ea typeface="Calibri" charset="0"/>
+                        <a:cs typeface="Calibri" charset="0"/>
+                      </a:endParaRPr>
+                    </a:p>
+                  </a:txBody>
+                  <a:tcPr marL="76200" marR="76200" marT="25400" marB="25400" anchor="ctr">
+                    <a:lnL w="6350" cap="flat" cmpd="sng" algn="ctr">
+                      <a:solidFill>
+                        <a:srgbClr val="E6E8F0"/>
+                      </a:solidFill>
+                      <a:prstDash val="solid"/>
+                      <a:round/>
+                      <a:headEnd type="none" w="med" len="med"/>
+                      <a:tailEnd type="none" w="med" len="med"/>
+                    </a:lnL>
+                    <a:lnR w="6350" cap="flat" cmpd="sng" algn="ctr">
+                      <a:solidFill>
+                        <a:srgbClr val="E6E8F0"/>
+                      </a:solidFill>
+                      <a:prstDash val="solid"/>
+                      <a:round/>
+                      <a:headEnd type="none" w="med" len="med"/>
+                      <a:tailEnd type="none" w="med" len="med"/>
+                    </a:lnR>
+                    <a:lnT w="6350" cap="flat" cmpd="sng" algn="ctr">
+                      <a:solidFill>
+                        <a:srgbClr val="E6E8F0"/>
+                      </a:solidFill>
+                      <a:prstDash val="solid"/>
+                      <a:round/>
+                      <a:headEnd type="none" w="med" len="med"/>
+                      <a:tailEnd type="none" w="med" len="med"/>
+                    </a:lnT>
+                    <a:lnB w="6350" cap="flat" cmpd="sng" algn="ctr">
+                      <a:solidFill>
+                        <a:srgbClr val="E6E8F0"/>
+                      </a:solidFill>
+                      <a:prstDash val="solid"/>
+                      <a:round/>
+                      <a:headEnd type="none" w="med" len="med"/>
+                      <a:tailEnd type="none" w="med" len="med"/>
+                    </a:lnB>
+                    <a:solidFill>
+                      <a:srgbClr val="F5F7FE"/>
+                    </a:solidFill>
+                  </a:tcPr>
+                </a:tc>
+              </a:tr>
+              <a:tr h="457200">
+                <a:tc>
+                  <a:txBody>
+                    <a:bodyPr/>
+                    <a:lstStyle/>
+                    <a:p>
+                      <a:pPr algn="l" indent="0" marL="0">
+                        <a:buNone/>
+                      </a:pPr>
+                      <a:r>
+                        <a:rPr lang="en-US" sz="1200" b="1" dirty="0">
+                          <a:solidFill>
+                            <a:srgbClr val="12132A"/>
+                          </a:solidFill>
+                          <a:latin typeface="Calibri" pitchFamily="34" charset="0"/>
+                          <a:ea typeface="Calibri" pitchFamily="34" charset="-122"/>
+                          <a:cs typeface="Calibri" pitchFamily="34" charset="-120"/>
+                        </a:rPr>
+                        <a:t>WhatsApp reminders</a:t>
+                      </a:r>
+                      <a:endParaRPr lang="en-US" sz="1200" dirty="0">
+                        <a:latin typeface="Calibri" charset="0"/>
+                        <a:ea typeface="Calibri" charset="0"/>
+                        <a:cs typeface="Calibri" charset="0"/>
+                      </a:endParaRPr>
+                    </a:p>
+                  </a:txBody>
+                  <a:tcPr marL="76200" marR="76200" marT="25400" marB="25400" anchor="ctr">
+                    <a:lnL w="6350" cap="flat" cmpd="sng" algn="ctr">
+                      <a:solidFill>
+                        <a:srgbClr val="E6E8F0"/>
+                      </a:solidFill>
+                      <a:prstDash val="solid"/>
+                      <a:round/>
+                      <a:headEnd type="none" w="med" len="med"/>
+                      <a:tailEnd type="none" w="med" len="med"/>
+                    </a:lnL>
+                    <a:lnR w="6350" cap="flat" cmpd="sng" algn="ctr">
+                      <a:solidFill>
+                        <a:srgbClr val="E6E8F0"/>
+                      </a:solidFill>
+                      <a:prstDash val="solid"/>
+                      <a:round/>
+                      <a:headEnd type="none" w="med" len="med"/>
+                      <a:tailEnd type="none" w="med" len="med"/>
+                    </a:lnR>
+                    <a:lnT w="6350" cap="flat" cmpd="sng" algn="ctr">
+                      <a:solidFill>
+                        <a:srgbClr val="E6E8F0"/>
+                      </a:solidFill>
+                      <a:prstDash val="solid"/>
+                      <a:round/>
+                      <a:headEnd type="none" w="med" len="med"/>
+                      <a:tailEnd type="none" w="med" len="med"/>
+                    </a:lnT>
+                    <a:lnB w="6350" cap="flat" cmpd="sng" algn="ctr">
+                      <a:solidFill>
+                        <a:srgbClr val="E6E8F0"/>
+                      </a:solidFill>
+                      <a:prstDash val="solid"/>
+                      <a:round/>
+                      <a:headEnd type="none" w="med" len="med"/>
+                      <a:tailEnd type="none" w="med" len="med"/>
+                    </a:lnB>
+                    <a:solidFill>
+                      <a:srgbClr val="FFFFFF"/>
+                    </a:solidFill>
+                  </a:tcPr>
+                </a:tc>
+                <a:tc>
+                  <a:txBody>
+                    <a:bodyPr/>
+                    <a:lstStyle/>
+                    <a:p>
+                      <a:pPr algn="l" indent="0" marL="0">
+                        <a:buNone/>
+                      </a:pPr>
+                      <a:r>
+                        <a:rPr lang="en-US" sz="1200" dirty="0">
+                          <a:solidFill>
+                            <a:srgbClr val="4A5568"/>
+                          </a:solidFill>
+                          <a:latin typeface="Calibri" pitchFamily="34" charset="0"/>
+                          <a:ea typeface="Calibri" pitchFamily="34" charset="-122"/>
+                          <a:cs typeface="Calibri" pitchFamily="34" charset="-120"/>
+                        </a:rPr>
+                        <a:t>Meta Cloud API</a:t>
+                      </a:r>
+                      <a:endParaRPr lang="en-US" sz="1200" dirty="0">
+                        <a:latin typeface="Calibri" charset="0"/>
+                        <a:ea typeface="Calibri" charset="0"/>
+                        <a:cs typeface="Calibri" charset="0"/>
+                      </a:endParaRPr>
+                    </a:p>
+                  </a:txBody>
+                  <a:tcPr marL="76200" marR="76200" marT="25400" marB="25400" anchor="ctr">
+                    <a:lnL w="6350" cap="flat" cmpd="sng" algn="ctr">
+                      <a:solidFill>
+                        <a:srgbClr val="E6E8F0"/>
+                      </a:solidFill>
+                      <a:prstDash val="solid"/>
+                      <a:round/>
+                      <a:headEnd type="none" w="med" len="med"/>
+                      <a:tailEnd type="none" w="med" len="med"/>
+                    </a:lnL>
+                    <a:lnR w="6350" cap="flat" cmpd="sng" algn="ctr">
+                      <a:solidFill>
+                        <a:srgbClr val="E6E8F0"/>
+                      </a:solidFill>
+                      <a:prstDash val="solid"/>
+                      <a:round/>
+                      <a:headEnd type="none" w="med" len="med"/>
+                      <a:tailEnd type="none" w="med" len="med"/>
+                    </a:lnR>
+                    <a:lnT w="6350" cap="flat" cmpd="sng" algn="ctr">
+                      <a:solidFill>
+                        <a:srgbClr val="E6E8F0"/>
+                      </a:solidFill>
+                      <a:prstDash val="solid"/>
+                      <a:round/>
+                      <a:headEnd type="none" w="med" len="med"/>
+                      <a:tailEnd type="none" w="med" len="med"/>
+                    </a:lnT>
+                    <a:lnB w="6350" cap="flat" cmpd="sng" algn="ctr">
+                      <a:solidFill>
+                        <a:srgbClr val="E6E8F0"/>
+                      </a:solidFill>
+                      <a:prstDash val="solid"/>
+                      <a:round/>
+                      <a:headEnd type="none" w="med" len="med"/>
+                      <a:tailEnd type="none" w="med" len="med"/>
+                    </a:lnB>
+                    <a:solidFill>
+                      <a:srgbClr val="FFFFFF"/>
+                    </a:solidFill>
+                  </a:tcPr>
+                </a:tc>
+                <a:tc>
+                  <a:txBody>
+                    <a:bodyPr/>
+                    <a:lstStyle/>
+                    <a:p>
+                      <a:pPr algn="l" indent="0" marL="0">
+                        <a:buNone/>
+                      </a:pPr>
+                      <a:r>
+                        <a:rPr lang="en-US" sz="1200" dirty="0">
+                          <a:solidFill>
+                            <a:srgbClr val="4A5568"/>
+                          </a:solidFill>
+                          <a:latin typeface="Calibri" pitchFamily="34" charset="0"/>
+                          <a:ea typeface="Calibri" pitchFamily="34" charset="-122"/>
+                          <a:cs typeface="Calibri" pitchFamily="34" charset="-120"/>
+                        </a:rPr>
+                        <a:t>Customer's own account</a:t>
+                      </a:r>
+                      <a:endParaRPr lang="en-US" sz="1200" dirty="0">
+                        <a:latin typeface="Calibri" charset="0"/>
+                        <a:ea typeface="Calibri" charset="0"/>
+                        <a:cs typeface="Calibri" charset="0"/>
+                      </a:endParaRPr>
+                    </a:p>
+                  </a:txBody>
+                  <a:tcPr marL="76200" marR="76200" marT="25400" marB="25400" anchor="ctr">
+                    <a:lnL w="6350" cap="flat" cmpd="sng" algn="ctr">
+                      <a:solidFill>
+                        <a:srgbClr val="E6E8F0"/>
+                      </a:solidFill>
+                      <a:prstDash val="solid"/>
+                      <a:round/>
+                      <a:headEnd type="none" w="med" len="med"/>
+                      <a:tailEnd type="none" w="med" len="med"/>
+                    </a:lnL>
+                    <a:lnR w="6350" cap="flat" cmpd="sng" algn="ctr">
+                      <a:solidFill>
+                        <a:srgbClr val="E6E8F0"/>
+                      </a:solidFill>
+                      <a:prstDash val="solid"/>
+                      <a:round/>
+                      <a:headEnd type="none" w="med" len="med"/>
+                      <a:tailEnd type="none" w="med" len="med"/>
+                    </a:lnR>
+                    <a:lnT w="6350" cap="flat" cmpd="sng" algn="ctr">
+                      <a:solidFill>
+                        <a:srgbClr val="E6E8F0"/>
+                      </a:solidFill>
+                      <a:prstDash val="solid"/>
+                      <a:round/>
+                      <a:headEnd type="none" w="med" len="med"/>
+                      <a:tailEnd type="none" w="med" len="med"/>
+                    </a:lnT>
+                    <a:lnB w="6350" cap="flat" cmpd="sng" algn="ctr">
+                      <a:solidFill>
+                        <a:srgbClr val="E6E8F0"/>
+                      </a:solidFill>
+                      <a:prstDash val="solid"/>
+                      <a:round/>
+                      <a:headEnd type="none" w="med" len="med"/>
+                      <a:tailEnd type="none" w="med" len="med"/>
+                    </a:lnB>
+                    <a:solidFill>
+                      <a:srgbClr val="FFFFFF"/>
+                    </a:solidFill>
+                  </a:tcPr>
+                </a:tc>
+                <a:tc>
+                  <a:txBody>
+                    <a:bodyPr/>
+                    <a:lstStyle/>
+                    <a:p>
+                      <a:pPr algn="ctr" indent="0" marL="0">
+                        <a:buNone/>
+                      </a:pPr>
+                      <a:r>
+                        <a:rPr lang="en-US" sz="1200" b="1" dirty="0">
+                          <a:solidFill>
+                            <a:srgbClr val="16A34A"/>
+                          </a:solidFill>
+                          <a:latin typeface="Calibri" pitchFamily="34" charset="0"/>
+                          <a:ea typeface="Calibri" pitchFamily="34" charset="-122"/>
+                          <a:cs typeface="Calibri" pitchFamily="34" charset="-120"/>
+                        </a:rPr>
+                        <a:t>Customer</a:t>
+                      </a:r>
+                      <a:endParaRPr lang="en-US" sz="1200" dirty="0">
+                        <a:latin typeface="Calibri" charset="0"/>
+                        <a:ea typeface="Calibri" charset="0"/>
+                        <a:cs typeface="Calibri" charset="0"/>
+                      </a:endParaRPr>
+                    </a:p>
+                  </a:txBody>
+                  <a:tcPr marL="76200" marR="76200" marT="25400" marB="25400" anchor="ctr">
+                    <a:lnL w="6350" cap="flat" cmpd="sng" algn="ctr">
+                      <a:solidFill>
+                        <a:srgbClr val="E6E8F0"/>
+                      </a:solidFill>
+                      <a:prstDash val="solid"/>
+                      <a:round/>
+                      <a:headEnd type="none" w="med" len="med"/>
+                      <a:tailEnd type="none" w="med" len="med"/>
+                    </a:lnL>
+                    <a:lnR w="6350" cap="flat" cmpd="sng" algn="ctr">
+                      <a:solidFill>
+                        <a:srgbClr val="E6E8F0"/>
+                      </a:solidFill>
+                      <a:prstDash val="solid"/>
+                      <a:round/>
+                      <a:headEnd type="none" w="med" len="med"/>
+                      <a:tailEnd type="none" w="med" len="med"/>
+                    </a:lnR>
+                    <a:lnT w="6350" cap="flat" cmpd="sng" algn="ctr">
+                      <a:solidFill>
+                        <a:srgbClr val="E6E8F0"/>
+                      </a:solidFill>
+                      <a:prstDash val="solid"/>
+                      <a:round/>
+                      <a:headEnd type="none" w="med" len="med"/>
+                      <a:tailEnd type="none" w="med" len="med"/>
+                    </a:lnT>
+                    <a:lnB w="6350" cap="flat" cmpd="sng" algn="ctr">
+                      <a:solidFill>
+                        <a:srgbClr val="E6E8F0"/>
+                      </a:solidFill>
+                      <a:prstDash val="solid"/>
+                      <a:round/>
+                      <a:headEnd type="none" w="med" len="med"/>
+                      <a:tailEnd type="none" w="med" len="med"/>
+                    </a:lnB>
+                    <a:solidFill>
+                      <a:srgbClr val="FFFFFF"/>
+                    </a:solidFill>
+                  </a:tcPr>
+                </a:tc>
+              </a:tr>
+            </a:tbl>
+          </a:graphicData>
+        </a:graphic>
+      </p:graphicFrame>
+      <p:sp>
+        <p:nvSpPr>
+          <p:cNvPr id="6" name="Shape 3"/>
+          <p:cNvSpPr/>
+          <p:nvPr/>
+        </p:nvSpPr>
+        <p:spPr>
+          <a:xfrm>
+            <a:off x="8595360" y="2011680"/>
+            <a:ext cx="3044952" cy="1691640"/>
           </a:xfrm>
           <a:prstGeom prst="roundRect">
             <a:avLst>
-              <a:gd name="adj" fmla="val 12903"/>
+              <a:gd name="adj" fmla="val 6486"/>
             </a:avLst>
           </a:prstGeom>
           <a:solidFill>
@@ -22447,18 +27917,25 @@
             </a:solidFill>
             <a:prstDash val="solid"/>
           </a:ln>
-        </p:spPr>
-      </p:sp>
-      <p:sp>
-        <p:nvSpPr>
-          <p:cNvPr id="5" name="Text 3"/>
+          <a:effectLst>
+            <a:outerShdw sx="100000" sy="100000" kx="0" ky="0" algn="bl" rotWithShape="0" blurRad="101600" dist="25400" dir="5400000">
+              <a:srgbClr val="9AA0B5">
+                <a:alpha val="18000"/>
+              </a:srgbClr>
+            </a:outerShdw>
+          </a:effectLst>
+        </p:spPr>
+      </p:sp>
+      <p:sp>
+        <p:nvSpPr>
+          <p:cNvPr id="7" name="Text 4"/>
           <p:cNvSpPr/>
           <p:nvPr/>
         </p:nvSpPr>
         <p:spPr>
           <a:xfrm>
-            <a:off x="777240" y="1481328"/>
-            <a:ext cx="10698480" cy="566928"/>
+            <a:off x="8823960" y="2212848"/>
+            <a:ext cx="2606040" cy="548640"/>
           </a:xfrm>
           <a:prstGeom prst="rect">
             <a:avLst/>
@@ -22474,7 +27951,7 @@
               <a:buNone/>
             </a:pPr>
             <a:r>
-              <a:rPr lang="en-US" sz="1200" b="1" dirty="0">
+              <a:rPr lang="en-US" sz="1500" b="1" dirty="0">
                 <a:solidFill>
                   <a:srgbClr val="166534"/>
                 </a:solidFill>
@@ -22482,8 +27959,33 @@
                 <a:ea typeface="Calibri" pitchFamily="34" charset="-122"/>
                 <a:cs typeface="Calibri" pitchFamily="34" charset="-120"/>
               </a:rPr>
-              <a:t>Basis:  </a:t>
+              <a:t>WhatsApp = RM0 to Aster</a:t>
             </a:r>
+            <a:endParaRPr lang="en-US" sz="1500" dirty="0"/>
+          </a:p>
+        </p:txBody>
+      </p:sp>
+      <p:sp>
+        <p:nvSpPr>
+          <p:cNvPr id="8" name="Text 5"/>
+          <p:cNvSpPr/>
+          <p:nvPr/>
+        </p:nvSpPr>
+        <p:spPr>
+          <a:xfrm>
+            <a:off x="8823960" y="2761488"/>
+            <a:ext cx="2606040" cy="822960"/>
+          </a:xfrm>
+          <a:prstGeom prst="rect">
+            <a:avLst/>
+          </a:prstGeom>
+          <a:noFill/>
+          <a:ln/>
+        </p:spPr>
+        <p:txBody>
+          <a:bodyPr wrap="square" lIns="0" tIns="0" rIns="0" bIns="0" rtlCol="0" anchor="ctr"/>
+          <a:lstStyle/>
+          <a:p>
             <a:pPr algn="l" indent="0" marL="0">
               <a:buNone/>
             </a:pPr>
@@ -22496,46 +27998,30 @@
                 <a:ea typeface="Calibri" pitchFamily="34" charset="-122"/>
                 <a:cs typeface="Calibri" pitchFamily="34" charset="-120"/>
               </a:rPr>
-              <a:t>AI cost from slide 8, at 100% of the monthly allowance consumed (worst case for margin; most accounts use far less). Excludes ~3% card fees and fixed infrastructure.</a:t>
+              <a:t>Customers connect their own WhatsApp Business account, so reminder volume never lands on our bill.</a:t>
             </a:r>
             <a:endParaRPr lang="en-US" sz="1200" dirty="0"/>
           </a:p>
         </p:txBody>
       </p:sp>
-      <p:graphicFrame>
-        <p:nvGraphicFramePr>
-          <p:cNvPr id="6" name="Chart 0" descr=""/>
-          <p:cNvGraphicFramePr/>
-          <p:nvPr/>
-        </p:nvGraphicFramePr>
-        <p:xfrm>
-          <a:off x="548640" y="2331720"/>
-          <a:ext cx="6858000" cy="3840480"/>
-        </p:xfrm>
-        <a:graphic xmlns:a="http://schemas.openxmlformats.org/drawingml/2006/main">
-          <a:graphicData uri="http://schemas.openxmlformats.org/drawingml/2006/chart">
-            <c:chart xmlns:c="http://schemas.openxmlformats.org/drawingml/2006/chart" r:id="rId1"/>
-          </a:graphicData>
-        </a:graphic>
-      </p:graphicFrame>
-      <p:sp>
-        <p:nvSpPr>
-          <p:cNvPr id="7" name="Shape 4"/>
+      <p:sp>
+        <p:nvSpPr>
+          <p:cNvPr id="9" name="Shape 6"/>
           <p:cNvSpPr/>
           <p:nvPr/>
         </p:nvSpPr>
         <p:spPr>
           <a:xfrm>
-            <a:off x="7772400" y="2468880"/>
-            <a:ext cx="3867912" cy="1051560"/>
+            <a:off x="8595360" y="3886200"/>
+            <a:ext cx="3044952" cy="1783080"/>
           </a:xfrm>
           <a:prstGeom prst="roundRect">
             <a:avLst>
-              <a:gd name="adj" fmla="val 10435"/>
+              <a:gd name="adj" fmla="val 6154"/>
             </a:avLst>
           </a:prstGeom>
           <a:solidFill>
-            <a:srgbClr val="F5F7FE"/>
+            <a:srgbClr val="EAEEFE"/>
           </a:solidFill>
           <a:ln w="12700">
             <a:solidFill>
@@ -22554,14 +28040,14 @@
       </p:sp>
       <p:sp>
         <p:nvSpPr>
-          <p:cNvPr id="8" name="Text 5"/>
+          <p:cNvPr id="10" name="Text 7"/>
           <p:cNvSpPr/>
           <p:nvPr/>
         </p:nvSpPr>
         <p:spPr>
           <a:xfrm>
-            <a:off x="8001000" y="2596896"/>
-            <a:ext cx="1828800" cy="320040"/>
+            <a:off x="8823960" y="4087368"/>
+            <a:ext cx="2606040" cy="320040"/>
           </a:xfrm>
           <a:prstGeom prst="rect">
             <a:avLst/>
@@ -22585,7 +28071,7 @@
                 <a:ea typeface="Calibri" pitchFamily="34" charset="-122"/>
                 <a:cs typeface="Calibri" pitchFamily="34" charset="-120"/>
               </a:rPr>
-              <a:t>Launch</a:t>
+              <a:t>Fixed platform cost</a:t>
             </a:r>
             <a:endParaRPr lang="en-US" sz="1400" dirty="0"/>
           </a:p>
@@ -22593,14 +28079,14 @@
       </p:sp>
       <p:sp>
         <p:nvSpPr>
-          <p:cNvPr id="9" name="Text 6"/>
+          <p:cNvPr id="11" name="Text 8"/>
           <p:cNvSpPr/>
           <p:nvPr/>
         </p:nvSpPr>
         <p:spPr>
           <a:xfrm>
-            <a:off x="8001000" y="2999232"/>
-            <a:ext cx="2377440" cy="457200"/>
+            <a:off x="8823960" y="4389120"/>
+            <a:ext cx="2606040" cy="457200"/>
           </a:xfrm>
           <a:prstGeom prst="rect">
             <a:avLst/>
@@ -22616,30 +28102,30 @@
               <a:buNone/>
             </a:pPr>
             <a:r>
-              <a:rPr lang="en-US" sz="1050" dirty="0">
+              <a:rPr lang="en-US" sz="2400" b="1" dirty="0">
                 <a:solidFill>
-                  <a:srgbClr val="4A5568"/>
+                  <a:srgbClr val="0B2AE0"/>
                 </a:solidFill>
                 <a:latin typeface="Calibri" pitchFamily="34" charset="0"/>
                 <a:ea typeface="Calibri" pitchFamily="34" charset="-122"/>
                 <a:cs typeface="Calibri" pitchFamily="34" charset="-120"/>
               </a:rPr>
-              <a:t>Gross margin, typical AI cost</a:t>
+              <a:t>≈ RM270 / mo</a:t>
             </a:r>
-            <a:endParaRPr lang="en-US" sz="1050" dirty="0"/>
+            <a:endParaRPr lang="en-US" sz="2400" dirty="0"/>
           </a:p>
         </p:txBody>
       </p:sp>
       <p:sp>
         <p:nvSpPr>
-          <p:cNvPr id="10" name="Text 7"/>
+          <p:cNvPr id="12" name="Text 9"/>
           <p:cNvSpPr/>
           <p:nvPr/>
         </p:nvSpPr>
         <p:spPr>
           <a:xfrm>
-            <a:off x="10222992" y="2688336"/>
-            <a:ext cx="1234440" cy="621792"/>
+            <a:off x="8823960" y="4864608"/>
+            <a:ext cx="2606040" cy="777240"/>
           </a:xfrm>
           <a:prstGeom prst="rect">
             <a:avLst/>
@@ -22651,361 +28137,6 @@
           <a:bodyPr wrap="square" lIns="0" tIns="0" rIns="0" bIns="0" rtlCol="0" anchor="ctr"/>
           <a:lstStyle/>
           <a:p>
-            <a:pPr algn="r" indent="0" marL="0">
-              <a:buNone/>
-            </a:pPr>
-            <a:r>
-              <a:rPr lang="en-US" sz="3000" b="1" dirty="0">
-                <a:solidFill>
-                  <a:srgbClr val="16A34A"/>
-                </a:solidFill>
-                <a:latin typeface="Calibri" pitchFamily="34" charset="0"/>
-                <a:ea typeface="Calibri" pitchFamily="34" charset="-122"/>
-                <a:cs typeface="Calibri" pitchFamily="34" charset="-120"/>
-              </a:rPr>
-              <a:t>90%</a:t>
-            </a:r>
-            <a:endParaRPr lang="en-US" sz="3000" dirty="0"/>
-          </a:p>
-        </p:txBody>
-      </p:sp>
-      <p:sp>
-        <p:nvSpPr>
-          <p:cNvPr id="11" name="Shape 8"/>
-          <p:cNvSpPr/>
-          <p:nvPr/>
-        </p:nvSpPr>
-        <p:spPr>
-          <a:xfrm>
-            <a:off x="7772400" y="3639312"/>
-            <a:ext cx="3867912" cy="1051560"/>
-          </a:xfrm>
-          <a:prstGeom prst="roundRect">
-            <a:avLst>
-              <a:gd name="adj" fmla="val 10435"/>
-            </a:avLst>
-          </a:prstGeom>
-          <a:solidFill>
-            <a:srgbClr val="F5F7FE"/>
-          </a:solidFill>
-          <a:ln w="12700">
-            <a:solidFill>
-              <a:srgbClr val="D7DEFB"/>
-            </a:solidFill>
-            <a:prstDash val="solid"/>
-          </a:ln>
-          <a:effectLst>
-            <a:outerShdw sx="100000" sy="100000" kx="0" ky="0" algn="bl" rotWithShape="0" blurRad="101600" dist="25400" dir="5400000">
-              <a:srgbClr val="9AA0B5">
-                <a:alpha val="18000"/>
-              </a:srgbClr>
-            </a:outerShdw>
-          </a:effectLst>
-        </p:spPr>
-      </p:sp>
-      <p:sp>
-        <p:nvSpPr>
-          <p:cNvPr id="12" name="Text 9"/>
-          <p:cNvSpPr/>
-          <p:nvPr/>
-        </p:nvSpPr>
-        <p:spPr>
-          <a:xfrm>
-            <a:off x="8001000" y="3767328"/>
-            <a:ext cx="1828800" cy="320040"/>
-          </a:xfrm>
-          <a:prstGeom prst="rect">
-            <a:avLst/>
-          </a:prstGeom>
-          <a:noFill/>
-          <a:ln/>
-        </p:spPr>
-        <p:txBody>
-          <a:bodyPr wrap="square" lIns="0" tIns="0" rIns="0" bIns="0" rtlCol="0" anchor="ctr"/>
-          <a:lstStyle/>
-          <a:p>
-            <a:pPr algn="l" indent="0" marL="0">
-              <a:buNone/>
-            </a:pPr>
-            <a:r>
-              <a:rPr lang="en-US" sz="1400" b="1" dirty="0">
-                <a:solidFill>
-                  <a:srgbClr val="12132A"/>
-                </a:solidFill>
-                <a:latin typeface="Calibri" pitchFamily="34" charset="0"/>
-                <a:ea typeface="Calibri" pitchFamily="34" charset="-122"/>
-                <a:cs typeface="Calibri" pitchFamily="34" charset="-120"/>
-              </a:rPr>
-              <a:t>Scale</a:t>
-            </a:r>
-            <a:endParaRPr lang="en-US" sz="1400" dirty="0"/>
-          </a:p>
-        </p:txBody>
-      </p:sp>
-      <p:sp>
-        <p:nvSpPr>
-          <p:cNvPr id="13" name="Text 10"/>
-          <p:cNvSpPr/>
-          <p:nvPr/>
-        </p:nvSpPr>
-        <p:spPr>
-          <a:xfrm>
-            <a:off x="8001000" y="4169664"/>
-            <a:ext cx="2377440" cy="457200"/>
-          </a:xfrm>
-          <a:prstGeom prst="rect">
-            <a:avLst/>
-          </a:prstGeom>
-          <a:noFill/>
-          <a:ln/>
-        </p:spPr>
-        <p:txBody>
-          <a:bodyPr wrap="square" lIns="0" tIns="0" rIns="0" bIns="0" rtlCol="0" anchor="ctr"/>
-          <a:lstStyle/>
-          <a:p>
-            <a:pPr algn="l" indent="0" marL="0">
-              <a:buNone/>
-            </a:pPr>
-            <a:r>
-              <a:rPr lang="en-US" sz="1050" dirty="0">
-                <a:solidFill>
-                  <a:srgbClr val="4A5568"/>
-                </a:solidFill>
-                <a:latin typeface="Calibri" pitchFamily="34" charset="0"/>
-                <a:ea typeface="Calibri" pitchFamily="34" charset="-122"/>
-                <a:cs typeface="Calibri" pitchFamily="34" charset="-120"/>
-              </a:rPr>
-              <a:t>Gross margin, typical AI cost</a:t>
-            </a:r>
-            <a:endParaRPr lang="en-US" sz="1050" dirty="0"/>
-          </a:p>
-        </p:txBody>
-      </p:sp>
-      <p:sp>
-        <p:nvSpPr>
-          <p:cNvPr id="14" name="Text 11"/>
-          <p:cNvSpPr/>
-          <p:nvPr/>
-        </p:nvSpPr>
-        <p:spPr>
-          <a:xfrm>
-            <a:off x="10222992" y="3858768"/>
-            <a:ext cx="1234440" cy="621792"/>
-          </a:xfrm>
-          <a:prstGeom prst="rect">
-            <a:avLst/>
-          </a:prstGeom>
-          <a:noFill/>
-          <a:ln/>
-        </p:spPr>
-        <p:txBody>
-          <a:bodyPr wrap="square" lIns="0" tIns="0" rIns="0" bIns="0" rtlCol="0" anchor="ctr"/>
-          <a:lstStyle/>
-          <a:p>
-            <a:pPr algn="r" indent="0" marL="0">
-              <a:buNone/>
-            </a:pPr>
-            <a:r>
-              <a:rPr lang="en-US" sz="3000" b="1" dirty="0">
-                <a:solidFill>
-                  <a:srgbClr val="16A34A"/>
-                </a:solidFill>
-                <a:latin typeface="Calibri" pitchFamily="34" charset="0"/>
-                <a:ea typeface="Calibri" pitchFamily="34" charset="-122"/>
-                <a:cs typeface="Calibri" pitchFamily="34" charset="-120"/>
-              </a:rPr>
-              <a:t>86%</a:t>
-            </a:r>
-            <a:endParaRPr lang="en-US" sz="3000" dirty="0"/>
-          </a:p>
-        </p:txBody>
-      </p:sp>
-      <p:sp>
-        <p:nvSpPr>
-          <p:cNvPr id="15" name="Shape 12"/>
-          <p:cNvSpPr/>
-          <p:nvPr/>
-        </p:nvSpPr>
-        <p:spPr>
-          <a:xfrm>
-            <a:off x="7772400" y="4809744"/>
-            <a:ext cx="3867912" cy="1051560"/>
-          </a:xfrm>
-          <a:prstGeom prst="roundRect">
-            <a:avLst>
-              <a:gd name="adj" fmla="val 10435"/>
-            </a:avLst>
-          </a:prstGeom>
-          <a:solidFill>
-            <a:srgbClr val="F5F7FE"/>
-          </a:solidFill>
-          <a:ln w="12700">
-            <a:solidFill>
-              <a:srgbClr val="D7DEFB"/>
-            </a:solidFill>
-            <a:prstDash val="solid"/>
-          </a:ln>
-          <a:effectLst>
-            <a:outerShdw sx="100000" sy="100000" kx="0" ky="0" algn="bl" rotWithShape="0" blurRad="101600" dist="25400" dir="5400000">
-              <a:srgbClr val="9AA0B5">
-                <a:alpha val="18000"/>
-              </a:srgbClr>
-            </a:outerShdw>
-          </a:effectLst>
-        </p:spPr>
-      </p:sp>
-      <p:sp>
-        <p:nvSpPr>
-          <p:cNvPr id="16" name="Text 13"/>
-          <p:cNvSpPr/>
-          <p:nvPr/>
-        </p:nvSpPr>
-        <p:spPr>
-          <a:xfrm>
-            <a:off x="8001000" y="4937760"/>
-            <a:ext cx="1828800" cy="320040"/>
-          </a:xfrm>
-          <a:prstGeom prst="rect">
-            <a:avLst/>
-          </a:prstGeom>
-          <a:noFill/>
-          <a:ln/>
-        </p:spPr>
-        <p:txBody>
-          <a:bodyPr wrap="square" lIns="0" tIns="0" rIns="0" bIns="0" rtlCol="0" anchor="ctr"/>
-          <a:lstStyle/>
-          <a:p>
-            <a:pPr algn="l" indent="0" marL="0">
-              <a:buNone/>
-            </a:pPr>
-            <a:r>
-              <a:rPr lang="en-US" sz="1400" b="1" dirty="0">
-                <a:solidFill>
-                  <a:srgbClr val="12132A"/>
-                </a:solidFill>
-                <a:latin typeface="Calibri" pitchFamily="34" charset="0"/>
-                <a:ea typeface="Calibri" pitchFamily="34" charset="-122"/>
-                <a:cs typeface="Calibri" pitchFamily="34" charset="-120"/>
-              </a:rPr>
-              <a:t>Elite</a:t>
-            </a:r>
-            <a:endParaRPr lang="en-US" sz="1400" dirty="0"/>
-          </a:p>
-        </p:txBody>
-      </p:sp>
-      <p:sp>
-        <p:nvSpPr>
-          <p:cNvPr id="17" name="Text 14"/>
-          <p:cNvSpPr/>
-          <p:nvPr/>
-        </p:nvSpPr>
-        <p:spPr>
-          <a:xfrm>
-            <a:off x="8001000" y="5340096"/>
-            <a:ext cx="2377440" cy="457200"/>
-          </a:xfrm>
-          <a:prstGeom prst="rect">
-            <a:avLst/>
-          </a:prstGeom>
-          <a:noFill/>
-          <a:ln/>
-        </p:spPr>
-        <p:txBody>
-          <a:bodyPr wrap="square" lIns="0" tIns="0" rIns="0" bIns="0" rtlCol="0" anchor="ctr"/>
-          <a:lstStyle/>
-          <a:p>
-            <a:pPr algn="l" indent="0" marL="0">
-              <a:buNone/>
-            </a:pPr>
-            <a:r>
-              <a:rPr lang="en-US" sz="1050" dirty="0">
-                <a:solidFill>
-                  <a:srgbClr val="4A5568"/>
-                </a:solidFill>
-                <a:latin typeface="Calibri" pitchFamily="34" charset="0"/>
-                <a:ea typeface="Calibri" pitchFamily="34" charset="-122"/>
-                <a:cs typeface="Calibri" pitchFamily="34" charset="-120"/>
-              </a:rPr>
-              <a:t>Gross margin, typical AI cost</a:t>
-            </a:r>
-            <a:endParaRPr lang="en-US" sz="1050" dirty="0"/>
-          </a:p>
-        </p:txBody>
-      </p:sp>
-      <p:sp>
-        <p:nvSpPr>
-          <p:cNvPr id="18" name="Text 15"/>
-          <p:cNvSpPr/>
-          <p:nvPr/>
-        </p:nvSpPr>
-        <p:spPr>
-          <a:xfrm>
-            <a:off x="10222992" y="5029200"/>
-            <a:ext cx="1234440" cy="621792"/>
-          </a:xfrm>
-          <a:prstGeom prst="rect">
-            <a:avLst/>
-          </a:prstGeom>
-          <a:noFill/>
-          <a:ln/>
-        </p:spPr>
-        <p:txBody>
-          <a:bodyPr wrap="square" lIns="0" tIns="0" rIns="0" bIns="0" rtlCol="0" anchor="ctr"/>
-          <a:lstStyle/>
-          <a:p>
-            <a:pPr algn="r" indent="0" marL="0">
-              <a:buNone/>
-            </a:pPr>
-            <a:r>
-              <a:rPr lang="en-US" sz="3000" b="1" dirty="0">
-                <a:solidFill>
-                  <a:srgbClr val="16A34A"/>
-                </a:solidFill>
-                <a:latin typeface="Calibri" pitchFamily="34" charset="0"/>
-                <a:ea typeface="Calibri" pitchFamily="34" charset="-122"/>
-                <a:cs typeface="Calibri" pitchFamily="34" charset="-120"/>
-              </a:rPr>
-              <a:t>74%</a:t>
-            </a:r>
-            <a:endParaRPr lang="en-US" sz="3000" dirty="0"/>
-          </a:p>
-        </p:txBody>
-      </p:sp>
-      <p:sp>
-        <p:nvSpPr>
-          <p:cNvPr id="19" name="Text 16"/>
-          <p:cNvSpPr/>
-          <p:nvPr/>
-        </p:nvSpPr>
-        <p:spPr>
-          <a:xfrm>
-            <a:off x="548640" y="6309360"/>
-            <a:ext cx="11064240" cy="320040"/>
-          </a:xfrm>
-          <a:prstGeom prst="rect">
-            <a:avLst/>
-          </a:prstGeom>
-          <a:noFill/>
-          <a:ln/>
-        </p:spPr>
-        <p:txBody>
-          <a:bodyPr wrap="square" lIns="0" tIns="0" rIns="0" bIns="0" rtlCol="0" anchor="ctr"/>
-          <a:lstStyle/>
-          <a:p>
-            <a:pPr algn="l" indent="0" marL="0">
-              <a:buNone/>
-            </a:pPr>
-            <a:r>
-              <a:rPr lang="en-US" sz="1100" b="1" dirty="0">
-                <a:solidFill>
-                  <a:srgbClr val="B45309"/>
-                </a:solidFill>
-                <a:latin typeface="Calibri" pitchFamily="34" charset="0"/>
-                <a:ea typeface="Calibri" pitchFamily="34" charset="-122"/>
-                <a:cs typeface="Calibri" pitchFamily="34" charset="-120"/>
-              </a:rPr>
-              <a:t>Worst-case floor  </a:t>
-            </a:r>
             <a:pPr algn="l" indent="0" marL="0">
               <a:buNone/>
             </a:pPr>
@@ -23018,7 +28149,7 @@
                 <a:ea typeface="Calibri" pitchFamily="34" charset="-122"/>
                 <a:cs typeface="Calibri" pitchFamily="34" charset="-120"/>
               </a:rPr>
-              <a:t>(max unit cost AND 100% usage): Launch 66% · Scale 53% · Elite 17%.</a:t>
+              <a:t>Supabase Pro + Vercel + Resend base, shared across every workspace. Per-company overhead shrinks toward zero as you grow.</a:t>
             </a:r>
             <a:endParaRPr lang="en-US" sz="1100" dirty="0"/>
           </a:p>
@@ -23026,7 +28157,46 @@
       </p:sp>
       <p:sp>
         <p:nvSpPr>
-          <p:cNvPr id="20" name="Text 17"/>
+          <p:cNvPr id="13" name="Text 10"/>
+          <p:cNvSpPr/>
+          <p:nvPr/>
+        </p:nvSpPr>
+        <p:spPr>
+          <a:xfrm>
+            <a:off x="548640" y="5943600"/>
+            <a:ext cx="11064240" cy="457200"/>
+          </a:xfrm>
+          <a:prstGeom prst="rect">
+            <a:avLst/>
+          </a:prstGeom>
+          <a:noFill/>
+          <a:ln/>
+        </p:spPr>
+        <p:txBody>
+          <a:bodyPr wrap="square" lIns="0" tIns="0" rIns="0" bIns="0" rtlCol="0" anchor="ctr"/>
+          <a:lstStyle/>
+          <a:p>
+            <a:pPr algn="l" indent="0" marL="0">
+              <a:buNone/>
+            </a:pPr>
+            <a:r>
+              <a:rPr lang="en-US" sz="950" i="1" dirty="0">
+                <a:solidFill>
+                  <a:srgbClr val="6B7280"/>
+                </a:solidFill>
+                <a:latin typeface="Calibri" pitchFamily="34" charset="0"/>
+                <a:ea typeface="Calibri" pitchFamily="34" charset="-122"/>
+                <a:cs typeface="Calibri" pitchFamily="34" charset="-120"/>
+              </a:rPr>
+              <a:t>Provider list prices (Aug 2026): Resend Pro $20/50K emails then $0.90/1K · Daily.co $0.004/participant-min after 10K free · Supabase Pro $25 · Stripe MY 3% + RM1. Converted at RM4.09/USD.</a:t>
+            </a:r>
+            <a:endParaRPr lang="en-US" sz="950" dirty="0"/>
+          </a:p>
+        </p:txBody>
+      </p:sp>
+      <p:sp>
+        <p:nvSpPr>
+          <p:cNvPr id="14" name="Text 11"/>
           <p:cNvSpPr/>
           <p:nvPr/>
         </p:nvSpPr>
@@ -23065,7 +28235,7 @@
       </p:sp>
       <p:sp>
         <p:nvSpPr>
-          <p:cNvPr id="21" name="Text 18"/>
+          <p:cNvPr id="15" name="Text 12"/>
           <p:cNvSpPr/>
           <p:nvPr/>
         </p:nvSpPr>

--- a/docs/aster-pricing-cfo.pptx
+++ b/docs/aster-pricing-cfo.pptx
@@ -25404,13 +25404,100 @@
       </p:sp>
       <p:sp>
         <p:nvSpPr>
-          <p:cNvPr id="10" name="Text 7"/>
+          <p:cNvPr id="10" name="Shape 7"/>
           <p:cNvSpPr/>
           <p:nvPr/>
         </p:nvSpPr>
         <p:spPr>
           <a:xfrm>
-            <a:off x="548640" y="5806440"/>
+            <a:off x="548640" y="4956048"/>
+            <a:ext cx="7635240" cy="749808"/>
+          </a:xfrm>
+          <a:prstGeom prst="roundRect">
+            <a:avLst>
+              <a:gd name="adj" fmla="val 14634"/>
+            </a:avLst>
+          </a:prstGeom>
+          <a:solidFill>
+            <a:srgbClr val="EAEEFE"/>
+          </a:solidFill>
+          <a:ln w="12700">
+            <a:solidFill>
+              <a:srgbClr val="D7DEFB"/>
+            </a:solidFill>
+            <a:prstDash val="solid"/>
+          </a:ln>
+          <a:effectLst>
+            <a:outerShdw sx="100000" sy="100000" kx="0" ky="0" algn="bl" rotWithShape="0" blurRad="101600" dist="25400" dir="5400000">
+              <a:srgbClr val="9AA0B5">
+                <a:alpha val="18000"/>
+              </a:srgbClr>
+            </a:outerShdw>
+          </a:effectLst>
+        </p:spPr>
+      </p:sp>
+      <p:sp>
+        <p:nvSpPr>
+          <p:cNvPr id="11" name="Text 8"/>
+          <p:cNvSpPr/>
+          <p:nvPr/>
+        </p:nvSpPr>
+        <p:spPr>
+          <a:xfrm>
+            <a:off x="777240" y="4956048"/>
+            <a:ext cx="7178040" cy="749808"/>
+          </a:xfrm>
+          <a:prstGeom prst="rect">
+            <a:avLst/>
+          </a:prstGeom>
+          <a:noFill/>
+          <a:ln/>
+        </p:spPr>
+        <p:txBody>
+          <a:bodyPr wrap="square" lIns="0" tIns="0" rIns="0" bIns="0" rtlCol="0" anchor="ctr"/>
+          <a:lstStyle/>
+          <a:p>
+            <a:pPr algn="l" indent="0" marL="0">
+              <a:buNone/>
+            </a:pPr>
+            <a:r>
+              <a:rPr lang="en-US" sz="1150" b="1" dirty="0">
+                <a:solidFill>
+                  <a:srgbClr val="0B2AE0"/>
+                </a:solidFill>
+                <a:latin typeface="Calibri" pitchFamily="34" charset="0"/>
+                <a:ea typeface="Calibri" pitchFamily="34" charset="-122"/>
+                <a:cs typeface="Calibri" pitchFamily="34" charset="-120"/>
+              </a:rPr>
+              <a:t>How AI Rank is metered:  </a:t>
+            </a:r>
+            <a:pPr algn="l" indent="0" marL="0">
+              <a:buNone/>
+            </a:pPr>
+            <a:r>
+              <a:rPr lang="en-US" sz="1150" dirty="0">
+                <a:solidFill>
+                  <a:srgbClr val="4A5568"/>
+                </a:solidFill>
+                <a:latin typeface="Calibri" pitchFamily="34" charset="0"/>
+                <a:ea typeface="Calibri" pitchFamily="34" charset="-122"/>
+                <a:cs typeface="Calibri" pitchFamily="34" charset="-120"/>
+              </a:rPr>
+              <a:t>1 credit per 10 candidates (50 in Candidate Search). Re-ranking re-scores the whole pool as one Claude call, so it re-charges by batch size, 11 candidates = 2 credits. One call covers a batch, so margin rises with batch size.</a:t>
+            </a:r>
+            <a:endParaRPr lang="en-US" sz="1150" dirty="0"/>
+          </a:p>
+        </p:txBody>
+      </p:sp>
+      <p:sp>
+        <p:nvSpPr>
+          <p:cNvPr id="12" name="Text 9"/>
+          <p:cNvSpPr/>
+          <p:nvPr/>
+        </p:nvSpPr>
+        <p:spPr>
+          <a:xfrm>
+            <a:off x="548640" y="5852160"/>
             <a:ext cx="11064240" cy="457200"/>
           </a:xfrm>
           <a:prstGeom prst="rect">
@@ -25435,7 +25522,7 @@
                 <a:ea typeface="Calibri" pitchFamily="34" charset="-122"/>
                 <a:cs typeface="Calibri" pitchFamily="34" charset="-120"/>
               </a:rPr>
-              <a:t>Claude API is billed in USD (Sonnet 5 $3/$15, Opus 5 $5/$25, Haiku 4.5 $1/$5 per 1M tokens), converted here at RM4.09/USD. Web search ≈ RM0.04 per lookup. Sonnet's intro $2/$10 rate (through 31 Aug) is a near-term tailwind; a weaker ringgit is a risk (see slide 12).</a:t>
+              <a:t>Claude API is billed in USD (Sonnet 5 $3/$15, Opus 5 $5/$25, Haiku 4.5 $1/$5 per 1M tokens), converted here at RM4.09/USD. Web search ≈ RM0.04 per lookup. Sonnet's intro $2/$10 rate (through 31 Aug) is a near-term tailwind; a weaker ringgit is a risk (see slide 13).</a:t>
             </a:r>
             <a:endParaRPr lang="en-US" sz="1000" dirty="0"/>
           </a:p>
@@ -25443,7 +25530,7 @@
       </p:sp>
       <p:sp>
         <p:nvSpPr>
-          <p:cNvPr id="11" name="Text 8"/>
+          <p:cNvPr id="13" name="Text 10"/>
           <p:cNvSpPr/>
           <p:nvPr/>
         </p:nvSpPr>
@@ -25482,7 +25569,7 @@
       </p:sp>
       <p:sp>
         <p:nvSpPr>
-          <p:cNvPr id="12" name="Text 9"/>
+          <p:cNvPr id="14" name="Text 11"/>
           <p:cNvSpPr/>
           <p:nvPr/>
         </p:nvSpPr>

--- a/docs/aster-pricing-cfo.pptx
+++ b/docs/aster-pricing-cfo.pptx
@@ -2076,87 +2076,33 @@
           <a:ln/>
         </p:spPr>
       </p:sp>
-      <p:sp>
-        <p:nvSpPr>
-          <p:cNvPr id="4" name="Text 2"/>
-          <p:cNvSpPr/>
+      <p:pic>
+        <p:nvPicPr>
+          <p:cNvPr id="4" name="Image 0" descr="preencoded.png">    </p:cNvPr>
+          <p:cNvPicPr>
+            <a:picLocks noChangeAspect="1"/>
+          </p:cNvPicPr>
           <p:nvPr/>
-        </p:nvSpPr>
-        <p:spPr>
-          <a:xfrm>
-            <a:off x="777240" y="640080"/>
-            <a:ext cx="914400" cy="731520"/>
+        </p:nvPicPr>
+        <p:blipFill>
+          <a:blip r:embed="rId1"/>
+          <a:stretch>
+            <a:fillRect/>
+          </a:stretch>
+        </p:blipFill>
+        <p:spPr>
+          <a:xfrm>
+            <a:off x="777240" y="566928"/>
+            <a:ext cx="2148840" cy="519303"/>
           </a:xfrm>
           <a:prstGeom prst="rect">
             <a:avLst/>
           </a:prstGeom>
-          <a:noFill/>
-          <a:ln/>
-        </p:spPr>
-        <p:txBody>
-          <a:bodyPr wrap="square" lIns="0" tIns="0" rIns="0" bIns="0" rtlCol="0" anchor="ctr"/>
-          <a:lstStyle/>
-          <a:p>
-            <a:pPr algn="l" indent="0" marL="0">
-              <a:buNone/>
-            </a:pPr>
-            <a:r>
-              <a:rPr lang="en-US" sz="3000" b="1" dirty="0">
-                <a:solidFill>
-                  <a:srgbClr val="FFFFFF"/>
-                </a:solidFill>
-                <a:latin typeface="Calibri" pitchFamily="34" charset="0"/>
-                <a:ea typeface="Calibri" pitchFamily="34" charset="-122"/>
-                <a:cs typeface="Calibri" pitchFamily="34" charset="-120"/>
-              </a:rPr>
-              <a:t>✦</a:t>
-            </a:r>
-            <a:endParaRPr lang="en-US" sz="3000" dirty="0"/>
-          </a:p>
-        </p:txBody>
-      </p:sp>
-      <p:sp>
-        <p:nvSpPr>
-          <p:cNvPr id="5" name="Text 3"/>
-          <p:cNvSpPr/>
-          <p:nvPr/>
-        </p:nvSpPr>
-        <p:spPr>
-          <a:xfrm>
-            <a:off x="1280160" y="676656"/>
-            <a:ext cx="2743200" cy="640080"/>
-          </a:xfrm>
-          <a:prstGeom prst="rect">
-            <a:avLst/>
-          </a:prstGeom>
-          <a:noFill/>
-          <a:ln/>
-        </p:spPr>
-        <p:txBody>
-          <a:bodyPr wrap="square" lIns="0" tIns="0" rIns="0" bIns="0" rtlCol="0" anchor="ctr"/>
-          <a:lstStyle/>
-          <a:p>
-            <a:pPr algn="l" indent="0" marL="0">
-              <a:buNone/>
-            </a:pPr>
-            <a:r>
-              <a:rPr lang="en-US" sz="2600" b="1" dirty="0">
-                <a:solidFill>
-                  <a:srgbClr val="FFFFFF"/>
-                </a:solidFill>
-                <a:latin typeface="Calibri" pitchFamily="34" charset="0"/>
-                <a:ea typeface="Calibri" pitchFamily="34" charset="-122"/>
-                <a:cs typeface="Calibri" pitchFamily="34" charset="-120"/>
-              </a:rPr>
-              <a:t>aster</a:t>
-            </a:r>
-            <a:endParaRPr lang="en-US" sz="2600" dirty="0"/>
-          </a:p>
-        </p:txBody>
-      </p:sp>
-      <p:sp>
-        <p:nvSpPr>
-          <p:cNvPr id="6" name="Text 4"/>
+        </p:spPr>
+      </p:pic>
+      <p:sp>
+        <p:nvSpPr>
+          <p:cNvPr id="5" name="Text 2"/>
           <p:cNvSpPr/>
           <p:nvPr/>
         </p:nvSpPr>
@@ -2195,7 +2141,7 @@
       </p:sp>
       <p:sp>
         <p:nvSpPr>
-          <p:cNvPr id="7" name="Text 5"/>
+          <p:cNvPr id="6" name="Text 3"/>
           <p:cNvSpPr/>
           <p:nvPr/>
         </p:nvSpPr>
@@ -2234,7 +2180,7 @@
       </p:sp>
       <p:sp>
         <p:nvSpPr>
-          <p:cNvPr id="8" name="Shape 6"/>
+          <p:cNvPr id="7" name="Shape 4"/>
           <p:cNvSpPr/>
           <p:nvPr/>
         </p:nvSpPr>
@@ -2265,7 +2211,7 @@
       </p:sp>
       <p:sp>
         <p:nvSpPr>
-          <p:cNvPr id="9" name="Text 7"/>
+          <p:cNvPr id="8" name="Text 5"/>
           <p:cNvSpPr/>
           <p:nvPr/>
         </p:nvSpPr>
@@ -2304,7 +2250,7 @@
       </p:sp>
       <p:sp>
         <p:nvSpPr>
-          <p:cNvPr id="10" name="Shape 8"/>
+          <p:cNvPr id="9" name="Shape 6"/>
           <p:cNvSpPr/>
           <p:nvPr/>
         </p:nvSpPr>
@@ -2335,7 +2281,7 @@
       </p:sp>
       <p:sp>
         <p:nvSpPr>
-          <p:cNvPr id="11" name="Text 9"/>
+          <p:cNvPr id="10" name="Text 7"/>
           <p:cNvSpPr/>
           <p:nvPr/>
         </p:nvSpPr>
@@ -2374,7 +2320,7 @@
       </p:sp>
       <p:sp>
         <p:nvSpPr>
-          <p:cNvPr id="12" name="Shape 10"/>
+          <p:cNvPr id="11" name="Shape 8"/>
           <p:cNvSpPr/>
           <p:nvPr/>
         </p:nvSpPr>
@@ -2405,7 +2351,7 @@
       </p:sp>
       <p:sp>
         <p:nvSpPr>
-          <p:cNvPr id="13" name="Text 11"/>
+          <p:cNvPr id="12" name="Text 9"/>
           <p:cNvSpPr/>
           <p:nvPr/>
         </p:nvSpPr>
@@ -2444,7 +2390,7 @@
       </p:sp>
       <p:sp>
         <p:nvSpPr>
-          <p:cNvPr id="14" name="Text 12"/>
+          <p:cNvPr id="13" name="Text 10"/>
           <p:cNvSpPr/>
           <p:nvPr/>
         </p:nvSpPr>
@@ -10848,48 +10794,33 @@
           <a:ln/>
         </p:spPr>
       </p:sp>
-      <p:sp>
-        <p:nvSpPr>
-          <p:cNvPr id="4" name="Text 2"/>
-          <p:cNvSpPr/>
+      <p:pic>
+        <p:nvPicPr>
+          <p:cNvPr id="4" name="Image 0" descr="preencoded.png">    </p:cNvPr>
+          <p:cNvPicPr>
+            <a:picLocks noChangeAspect="1"/>
+          </p:cNvPicPr>
           <p:nvPr/>
-        </p:nvSpPr>
-        <p:spPr>
-          <a:xfrm>
-            <a:off x="777240" y="640080"/>
-            <a:ext cx="3657600" cy="548640"/>
+        </p:nvPicPr>
+        <p:blipFill>
+          <a:blip r:embed="rId1"/>
+          <a:stretch>
+            <a:fillRect/>
+          </a:stretch>
+        </p:blipFill>
+        <p:spPr>
+          <a:xfrm>
+            <a:off x="777240" y="621792"/>
+            <a:ext cx="1874520" cy="453009"/>
           </a:xfrm>
           <a:prstGeom prst="rect">
             <a:avLst/>
           </a:prstGeom>
-          <a:noFill/>
-          <a:ln/>
-        </p:spPr>
-        <p:txBody>
-          <a:bodyPr wrap="square" lIns="0" tIns="0" rIns="0" bIns="0" rtlCol="0" anchor="ctr"/>
-          <a:lstStyle/>
-          <a:p>
-            <a:pPr algn="l" indent="0" marL="0">
-              <a:buNone/>
-            </a:pPr>
-            <a:r>
-              <a:rPr lang="en-US" sz="2200" b="1" dirty="0">
-                <a:solidFill>
-                  <a:srgbClr val="FFFFFF"/>
-                </a:solidFill>
-                <a:latin typeface="Calibri" pitchFamily="34" charset="0"/>
-                <a:ea typeface="Calibri" pitchFamily="34" charset="-122"/>
-                <a:cs typeface="Calibri" pitchFamily="34" charset="-120"/>
-              </a:rPr>
-              <a:t>✦ aster</a:t>
-            </a:r>
-            <a:endParaRPr lang="en-US" sz="2200" dirty="0"/>
-          </a:p>
-        </p:txBody>
-      </p:sp>
-      <p:sp>
-        <p:nvSpPr>
-          <p:cNvPr id="5" name="Text 3"/>
+        </p:spPr>
+      </p:pic>
+      <p:sp>
+        <p:nvSpPr>
+          <p:cNvPr id="5" name="Text 2"/>
           <p:cNvSpPr/>
           <p:nvPr/>
         </p:nvSpPr>
@@ -10928,7 +10859,7 @@
       </p:sp>
       <p:sp>
         <p:nvSpPr>
-          <p:cNvPr id="6" name="Text 4"/>
+          <p:cNvPr id="6" name="Text 3"/>
           <p:cNvSpPr/>
           <p:nvPr/>
         </p:nvSpPr>
@@ -10967,7 +10898,7 @@
       </p:sp>
       <p:sp>
         <p:nvSpPr>
-          <p:cNvPr id="7" name="Shape 5"/>
+          <p:cNvPr id="7" name="Shape 4"/>
           <p:cNvSpPr/>
           <p:nvPr/>
         </p:nvSpPr>
@@ -10998,7 +10929,7 @@
       </p:sp>
       <p:sp>
         <p:nvSpPr>
-          <p:cNvPr id="8" name="Text 6"/>
+          <p:cNvPr id="8" name="Text 5"/>
           <p:cNvSpPr/>
           <p:nvPr/>
         </p:nvSpPr>
@@ -11037,7 +10968,7 @@
       </p:sp>
       <p:sp>
         <p:nvSpPr>
-          <p:cNvPr id="9" name="Shape 7"/>
+          <p:cNvPr id="9" name="Shape 6"/>
           <p:cNvSpPr/>
           <p:nvPr/>
         </p:nvSpPr>
@@ -11068,7 +10999,7 @@
       </p:sp>
       <p:sp>
         <p:nvSpPr>
-          <p:cNvPr id="10" name="Text 8"/>
+          <p:cNvPr id="10" name="Text 7"/>
           <p:cNvSpPr/>
           <p:nvPr/>
         </p:nvSpPr>
@@ -11107,7 +11038,7 @@
       </p:sp>
       <p:sp>
         <p:nvSpPr>
-          <p:cNvPr id="11" name="Shape 9"/>
+          <p:cNvPr id="11" name="Shape 8"/>
           <p:cNvSpPr/>
           <p:nvPr/>
         </p:nvSpPr>
@@ -11138,7 +11069,7 @@
       </p:sp>
       <p:sp>
         <p:nvSpPr>
-          <p:cNvPr id="12" name="Text 10"/>
+          <p:cNvPr id="12" name="Text 9"/>
           <p:cNvSpPr/>
           <p:nvPr/>
         </p:nvSpPr>
@@ -11177,7 +11108,7 @@
       </p:sp>
       <p:sp>
         <p:nvSpPr>
-          <p:cNvPr id="13" name="Text 11"/>
+          <p:cNvPr id="13" name="Text 10"/>
           <p:cNvSpPr/>
           <p:nvPr/>
         </p:nvSpPr>

--- a/docs/aster-pricing-cfo.pptx
+++ b/docs/aster-pricing-cfo.pptx
@@ -4979,7 +4979,7 @@
                           <a:ea typeface="Calibri" pitchFamily="34" charset="-122"/>
                           <a:cs typeface="Calibri" pitchFamily="34" charset="-120"/>
                         </a:rPr>
-                        <a:t>RM999</a:t>
+                        <a:t>RM1,399</a:t>
                       </a:r>
                       <a:endParaRPr lang="en-US" sz="1250" dirty="0">
                         <a:latin typeface="Calibri" charset="0"/>
@@ -5253,7 +5253,7 @@
                           <a:ea typeface="Calibri" pitchFamily="34" charset="-122"/>
                           <a:cs typeface="Calibri" pitchFamily="34" charset="-120"/>
                         </a:rPr>
-                        <a:t>61%</a:t>
+                        <a:t>72%</a:t>
                       </a:r>
                       <a:endParaRPr lang="en-US" sz="1400" dirty="0">
                         <a:latin typeface="Calibri" charset="0"/>
@@ -5756,7 +5756,7 @@
                 <a:ea typeface="Calibri" pitchFamily="34" charset="-122"/>
                 <a:cs typeface="Calibri" pitchFamily="34" charset="-120"/>
               </a:rPr>
-              <a:t>61%</a:t>
+              <a:t>72%</a:t>
             </a:r>
             <a:endParaRPr lang="en-US" sz="3000" dirty="0"/>
           </a:p>
@@ -8493,7 +8493,7 @@
                           <a:ea typeface="Calibri" pitchFamily="34" charset="-122"/>
                           <a:cs typeface="Calibri" pitchFamily="34" charset="-120"/>
                         </a:rPr>
-                        <a:t>RM57,900</a:t>
+                        <a:t>RM61,900</a:t>
                       </a:r>
                       <a:endParaRPr lang="en-US" sz="1250" dirty="0">
                         <a:latin typeface="Calibri" charset="0"/>
@@ -8561,7 +8561,7 @@
                           <a:ea typeface="Calibri" pitchFamily="34" charset="-122"/>
                           <a:cs typeface="Calibri" pitchFamily="34" charset="-120"/>
                         </a:rPr>
-                        <a:t>RM140,785</a:t>
+                        <a:t>RM150,785</a:t>
                       </a:r>
                       <a:endParaRPr lang="en-US" sz="1250" dirty="0">
                         <a:latin typeface="Calibri" charset="0"/>
@@ -8629,7 +8629,7 @@
                           <a:ea typeface="Calibri" pitchFamily="34" charset="-122"/>
                           <a:cs typeface="Calibri" pitchFamily="34" charset="-120"/>
                         </a:rPr>
-                        <a:t>RM319,540</a:t>
+                        <a:t>RM343,540</a:t>
                       </a:r>
                       <a:endParaRPr lang="en-US" sz="1250" dirty="0">
                         <a:latin typeface="Calibri" charset="0"/>
@@ -8767,7 +8767,7 @@
                           <a:ea typeface="Calibri" pitchFamily="34" charset="-122"/>
                           <a:cs typeface="Calibri" pitchFamily="34" charset="-120"/>
                         </a:rPr>
-                        <a:t>RM8,685</a:t>
+                        <a:t>RM9,285</a:t>
                       </a:r>
                       <a:endParaRPr lang="en-US" sz="1250" dirty="0">
                         <a:latin typeface="Calibri" charset="0"/>
@@ -8835,7 +8835,7 @@
                           <a:ea typeface="Calibri" pitchFamily="34" charset="-122"/>
                           <a:cs typeface="Calibri" pitchFamily="34" charset="-120"/>
                         </a:rPr>
-                        <a:t>RM21,118</a:t>
+                        <a:t>RM22,618</a:t>
                       </a:r>
                       <a:endParaRPr lang="en-US" sz="1250" dirty="0">
                         <a:latin typeface="Calibri" charset="0"/>
@@ -8903,7 +8903,7 @@
                           <a:ea typeface="Calibri" pitchFamily="34" charset="-122"/>
                           <a:cs typeface="Calibri" pitchFamily="34" charset="-120"/>
                         </a:rPr>
-                        <a:t>RM47,931</a:t>
+                        <a:t>RM51,531</a:t>
                       </a:r>
                       <a:endParaRPr lang="en-US" sz="1250" dirty="0">
                         <a:latin typeface="Calibri" charset="0"/>
@@ -9041,7 +9041,7 @@
                           <a:ea typeface="Calibri" pitchFamily="34" charset="-122"/>
                           <a:cs typeface="Calibri" pitchFamily="34" charset="-120"/>
                         </a:rPr>
-                        <a:t>RM66,585</a:t>
+                        <a:t>RM71,185</a:t>
                       </a:r>
                       <a:endParaRPr lang="en-US" sz="1400" dirty="0">
                         <a:latin typeface="Calibri" charset="0"/>
@@ -9109,7 +9109,7 @@
                           <a:ea typeface="Calibri" pitchFamily="34" charset="-122"/>
                           <a:cs typeface="Calibri" pitchFamily="34" charset="-120"/>
                         </a:rPr>
-                        <a:t>RM161,903</a:t>
+                        <a:t>RM173,403</a:t>
                       </a:r>
                       <a:endParaRPr lang="en-US" sz="1400" dirty="0">
                         <a:latin typeface="Calibri" charset="0"/>
@@ -9177,7 +9177,7 @@
                           <a:ea typeface="Calibri" pitchFamily="34" charset="-122"/>
                           <a:cs typeface="Calibri" pitchFamily="34" charset="-120"/>
                         </a:rPr>
-                        <a:t>RM367,471</a:t>
+                        <a:t>RM395,071</a:t>
                       </a:r>
                       <a:endParaRPr lang="en-US" sz="1400" dirty="0">
                         <a:latin typeface="Calibri" charset="0"/>
@@ -9315,7 +9315,7 @@
                           <a:ea typeface="Calibri" pitchFamily="34" charset="-122"/>
                           <a:cs typeface="Calibri" pitchFamily="34" charset="-120"/>
                         </a:rPr>
-                        <a:t>RM799K</a:t>
+                        <a:t>RM854K</a:t>
                       </a:r>
                       <a:endParaRPr lang="en-US" sz="1400" dirty="0">
                         <a:latin typeface="Calibri" charset="0"/>
@@ -9383,7 +9383,7 @@
                           <a:ea typeface="Calibri" pitchFamily="34" charset="-122"/>
                           <a:cs typeface="Calibri" pitchFamily="34" charset="-120"/>
                         </a:rPr>
-                        <a:t>RM1.94M</a:t>
+                        <a:t>RM2.08M</a:t>
                       </a:r>
                       <a:endParaRPr lang="en-US" sz="1400" dirty="0">
                         <a:latin typeface="Calibri" charset="0"/>
@@ -9451,7 +9451,7 @@
                           <a:ea typeface="Calibri" pitchFamily="34" charset="-122"/>
                           <a:cs typeface="Calibri" pitchFamily="34" charset="-120"/>
                         </a:rPr>
-                        <a:t>RM4.41M</a:t>
+                        <a:t>RM4.74M</a:t>
                       </a:r>
                       <a:endParaRPr lang="en-US" sz="1400" dirty="0">
                         <a:latin typeface="Calibri" charset="0"/>
@@ -9613,7 +9613,7 @@
                 <a:ea typeface="Calibri" pitchFamily="34" charset="-122"/>
                 <a:cs typeface="Calibri" pitchFamily="34" charset="-120"/>
               </a:rPr>
-              <a:t>RM1.94M</a:t>
+              <a:t>RM2.08M</a:t>
             </a:r>
             <a:endParaRPr lang="en-US" sz="4000" dirty="0"/>
           </a:p>
@@ -9767,7 +9767,7 @@
                 <a:ea typeface="Calibri" pitchFamily="34" charset="-122"/>
                 <a:cs typeface="Calibri" pitchFamily="34" charset="-120"/>
               </a:rPr>
-              <a:t>RM733 </a:t>
+              <a:t>RM785 </a:t>
             </a:r>
             <a:pPr algn="l" indent="0" marL="0">
               <a:buNone/>
@@ -9820,7 +9820,7 @@
                 <a:ea typeface="Calibri" pitchFamily="34" charset="-122"/>
                 <a:cs typeface="Calibri" pitchFamily="34" charset="-120"/>
               </a:rPr>
-              <a:t>~74% </a:t>
+              <a:t>~76% </a:t>
             </a:r>
             <a:pPr algn="l" indent="0" marL="0">
               <a:buNone/>
@@ -10236,7 +10236,7 @@
                 <a:ea typeface="Calibri" pitchFamily="34" charset="-122"/>
                 <a:cs typeface="Calibri" pitchFamily="34" charset="-120"/>
               </a:rPr>
-              <a:t>Sign off the list prices (RM199 / RM799 / RM999) or reset them; they are proposed, not live in Stripe.</a:t>
+              <a:t>Sign off the list prices (RM199 / RM799 / RM1,399) or reset them; they are proposed, not live in Stripe.</a:t>
             </a:r>
             <a:endParaRPr lang="en-US" sz="1250" dirty="0"/>
           </a:p>
@@ -11585,7 +11585,7 @@
                 <a:ea typeface="Calibri" pitchFamily="34" charset="-122"/>
                 <a:cs typeface="Calibri" pitchFamily="34" charset="-120"/>
               </a:rPr>
-              <a:t>61–81%</a:t>
+              <a:t>72–81%</a:t>
             </a:r>
             <a:endParaRPr lang="en-US" sz="3000" dirty="0"/>
           </a:p>
@@ -11873,7 +11873,7 @@
                 <a:ea typeface="Calibri" pitchFamily="34" charset="-122"/>
                 <a:cs typeface="Calibri" pitchFamily="34" charset="-120"/>
               </a:rPr>
-              <a:t>Each tier bundles enough screening and AI credits to run its open roles. The bundle is worth 2–5× the plan price at list credit rates, which anchors upgrades.</a:t>
+              <a:t>Each tier bundles enough screening and AI credits to run its open roles. The bundle is worth 2–4× the plan price at list credit rates, which anchors upgrades.</a:t>
             </a:r>
             <a:endParaRPr lang="en-US" sz="1250" dirty="0"/>
           </a:p>
@@ -14350,7 +14350,7 @@
                 <a:ea typeface="Calibri" pitchFamily="34" charset="-122"/>
                 <a:cs typeface="Calibri" pitchFamily="34" charset="-120"/>
               </a:rPr>
-              <a:t>RM999</a:t>
+              <a:t>RM1,399</a:t>
             </a:r>
             <a:pPr algn="l" indent="0" marL="0">
               <a:buNone/>
@@ -14403,7 +14403,7 @@
                 <a:ea typeface="Calibri" pitchFamily="34" charset="-122"/>
                 <a:cs typeface="Calibri" pitchFamily="34" charset="-120"/>
               </a:rPr>
-              <a:t>RM833 / mo on annual</a:t>
+              <a:t>RM1,166 / mo on annual</a:t>
             </a:r>
             <a:endParaRPr lang="en-US" sz="1150" dirty="0"/>
           </a:p>
@@ -14442,7 +14442,7 @@
                 <a:ea typeface="Calibri" pitchFamily="34" charset="-122"/>
                 <a:cs typeface="Calibri" pitchFamily="34" charset="-120"/>
               </a:rPr>
-              <a:t>RM9,990 billed yearly</a:t>
+              <a:t>RM13,990 billed yearly</a:t>
             </a:r>
             <a:endParaRPr lang="en-US" sz="1150" dirty="0"/>
           </a:p>
@@ -19873,7 +19873,7 @@
                 <a:ea typeface="Calibri" pitchFamily="34" charset="-122"/>
                 <a:cs typeface="Calibri" pitchFamily="34" charset="-120"/>
               </a:rPr>
-              <a:t>The included AI is worth 2–5× the plan price</a:t>
+              <a:t>The included AI is worth 2–4× the plan price</a:t>
             </a:r>
             <a:endParaRPr lang="en-US" sz="3400" dirty="0"/>
           </a:p>
@@ -20684,7 +20684,7 @@
                 <a:ea typeface="Calibri" pitchFamily="34" charset="-122"/>
                 <a:cs typeface="Calibri" pitchFamily="34" charset="-120"/>
               </a:rPr>
-              <a:t>5.3×</a:t>
+              <a:t>3.8×</a:t>
             </a:r>
             <a:endParaRPr lang="en-US" sz="2400" dirty="0"/>
           </a:p>
@@ -20902,7 +20902,7 @@
                 <a:ea typeface="Calibri" pitchFamily="34" charset="-122"/>
                 <a:cs typeface="Calibri" pitchFamily="34" charset="-120"/>
               </a:rPr>
-              <a:t>RM999</a:t>
+              <a:t>RM1,399</a:t>
             </a:r>
             <a:endParaRPr lang="en-US" sz="2400" dirty="0"/>
           </a:p>

--- a/docs/aster-pricing-cfo.pptx
+++ b/docs/aster-pricing-cfo.pptx
@@ -22954,7 +22954,7 @@
           </p:nvPr>
         </p:nvGraphicFramePr>
         <p:xfrm>
-          <a:off x="548640" y="2148840"/>
+          <a:off x="548640" y="2103120"/>
           <a:ext cx="7635240" cy="914400"/>
         </p:xfrm>
         <a:graphic>
@@ -22969,7 +22969,7 @@
                 <a:gridCol w="1005840"/>
                 <a:gridCol w="1371600"/>
               </a:tblGrid>
-              <a:tr h="548640">
+              <a:tr h="457200">
                 <a:tc>
                   <a:txBody>
                     <a:bodyPr/>
@@ -23379,7 +23379,7 @@
                   </a:tcPr>
                 </a:tc>
               </a:tr>
-              <a:tr h="548640">
+              <a:tr h="457200">
                 <a:tc>
                   <a:txBody>
                     <a:bodyPr/>
@@ -23789,7 +23789,7 @@
                   </a:tcPr>
                 </a:tc>
               </a:tr>
-              <a:tr h="548640">
+              <a:tr h="457200">
                 <a:tc>
                   <a:txBody>
                     <a:bodyPr/>
@@ -23807,7 +23807,7 @@
                           <a:ea typeface="Calibri" pitchFamily="34" charset="-122"/>
                           <a:cs typeface="Calibri" pitchFamily="34" charset="-120"/>
                         </a:rPr>
-                        <a:t>AI Rank / AI Insight</a:t>
+                        <a:t>AI Rank</a:t>
                       </a:r>
                       <a:endParaRPr lang="en-US" sz="1250" dirty="0">
                         <a:latin typeface="Calibri" charset="0"/>
@@ -24199,7 +24199,7 @@
                   </a:tcPr>
                 </a:tc>
               </a:tr>
-              <a:tr h="548640">
+              <a:tr h="457200">
                 <a:tc>
                   <a:txBody>
                     <a:bodyPr/>
@@ -24217,7 +24217,7 @@
                           <a:ea typeface="Calibri" pitchFamily="34" charset="-122"/>
                           <a:cs typeface="Calibri" pitchFamily="34" charset="-120"/>
                         </a:rPr>
-                        <a:t>Interview questions</a:t>
+                        <a:t>AI Insight</a:t>
                       </a:r>
                       <a:endParaRPr lang="en-US" sz="1250" dirty="0">
                         <a:latin typeface="Calibri" charset="0"/>
@@ -24489,7 +24489,7 @@
                           <a:ea typeface="Calibri" pitchFamily="34" charset="-122"/>
                           <a:cs typeface="Calibri" pitchFamily="34" charset="-120"/>
                         </a:rPr>
-                        <a:t>~RM0.04</a:t>
+                        <a:t>~RM0.05</a:t>
                       </a:r>
                       <a:endParaRPr lang="en-US" sz="1250" dirty="0">
                         <a:latin typeface="Calibri" charset="0"/>
@@ -24609,7 +24609,417 @@
                   </a:tcPr>
                 </a:tc>
               </a:tr>
-              <a:tr h="548640">
+              <a:tr h="457200">
+                <a:tc>
+                  <a:txBody>
+                    <a:bodyPr/>
+                    <a:lstStyle/>
+                    <a:p>
+                      <a:pPr algn="l" indent="0" marL="0">
+                        <a:buNone/>
+                      </a:pPr>
+                      <a:r>
+                        <a:rPr lang="en-US" sz="1250" b="1" dirty="0">
+                          <a:solidFill>
+                            <a:srgbClr val="12132A"/>
+                          </a:solidFill>
+                          <a:latin typeface="Calibri" pitchFamily="34" charset="0"/>
+                          <a:ea typeface="Calibri" pitchFamily="34" charset="-122"/>
+                          <a:cs typeface="Calibri" pitchFamily="34" charset="-120"/>
+                        </a:rPr>
+                        <a:t>Interview questions</a:t>
+                      </a:r>
+                      <a:endParaRPr lang="en-US" sz="1250" dirty="0">
+                        <a:latin typeface="Calibri" charset="0"/>
+                        <a:ea typeface="Calibri" charset="0"/>
+                        <a:cs typeface="Calibri" charset="0"/>
+                      </a:endParaRPr>
+                    </a:p>
+                  </a:txBody>
+                  <a:tcPr marL="76200" marR="76200" marT="25400" marB="25400" anchor="ctr">
+                    <a:lnL w="6350" cap="flat" cmpd="sng" algn="ctr">
+                      <a:solidFill>
+                        <a:srgbClr val="E6E8F0"/>
+                      </a:solidFill>
+                      <a:prstDash val="solid"/>
+                      <a:round/>
+                      <a:headEnd type="none" w="med" len="med"/>
+                      <a:tailEnd type="none" w="med" len="med"/>
+                    </a:lnL>
+                    <a:lnR w="6350" cap="flat" cmpd="sng" algn="ctr">
+                      <a:solidFill>
+                        <a:srgbClr val="E6E8F0"/>
+                      </a:solidFill>
+                      <a:prstDash val="solid"/>
+                      <a:round/>
+                      <a:headEnd type="none" w="med" len="med"/>
+                      <a:tailEnd type="none" w="med" len="med"/>
+                    </a:lnR>
+                    <a:lnT w="6350" cap="flat" cmpd="sng" algn="ctr">
+                      <a:solidFill>
+                        <a:srgbClr val="E6E8F0"/>
+                      </a:solidFill>
+                      <a:prstDash val="solid"/>
+                      <a:round/>
+                      <a:headEnd type="none" w="med" len="med"/>
+                      <a:tailEnd type="none" w="med" len="med"/>
+                    </a:lnT>
+                    <a:lnB w="6350" cap="flat" cmpd="sng" algn="ctr">
+                      <a:solidFill>
+                        <a:srgbClr val="E6E8F0"/>
+                      </a:solidFill>
+                      <a:prstDash val="solid"/>
+                      <a:round/>
+                      <a:headEnd type="none" w="med" len="med"/>
+                      <a:tailEnd type="none" w="med" len="med"/>
+                    </a:lnB>
+                    <a:solidFill>
+                      <a:srgbClr val="F5F7FE"/>
+                    </a:solidFill>
+                  </a:tcPr>
+                </a:tc>
+                <a:tc>
+                  <a:txBody>
+                    <a:bodyPr/>
+                    <a:lstStyle/>
+                    <a:p>
+                      <a:pPr algn="ctr" indent="0" marL="0">
+                        <a:buNone/>
+                      </a:pPr>
+                      <a:r>
+                        <a:rPr lang="en-US" sz="1250" dirty="0">
+                          <a:solidFill>
+                            <a:srgbClr val="4A5568"/>
+                          </a:solidFill>
+                          <a:latin typeface="Calibri" pitchFamily="34" charset="0"/>
+                          <a:ea typeface="Calibri" pitchFamily="34" charset="-122"/>
+                          <a:cs typeface="Calibri" pitchFamily="34" charset="-120"/>
+                        </a:rPr>
+                        <a:t>Haiku 4.5</a:t>
+                      </a:r>
+                      <a:endParaRPr lang="en-US" sz="1250" dirty="0">
+                        <a:latin typeface="Calibri" charset="0"/>
+                        <a:ea typeface="Calibri" charset="0"/>
+                        <a:cs typeface="Calibri" charset="0"/>
+                      </a:endParaRPr>
+                    </a:p>
+                  </a:txBody>
+                  <a:tcPr marL="76200" marR="76200" marT="25400" marB="25400" anchor="ctr">
+                    <a:lnL w="6350" cap="flat" cmpd="sng" algn="ctr">
+                      <a:solidFill>
+                        <a:srgbClr val="E6E8F0"/>
+                      </a:solidFill>
+                      <a:prstDash val="solid"/>
+                      <a:round/>
+                      <a:headEnd type="none" w="med" len="med"/>
+                      <a:tailEnd type="none" w="med" len="med"/>
+                    </a:lnL>
+                    <a:lnR w="6350" cap="flat" cmpd="sng" algn="ctr">
+                      <a:solidFill>
+                        <a:srgbClr val="E6E8F0"/>
+                      </a:solidFill>
+                      <a:prstDash val="solid"/>
+                      <a:round/>
+                      <a:headEnd type="none" w="med" len="med"/>
+                      <a:tailEnd type="none" w="med" len="med"/>
+                    </a:lnR>
+                    <a:lnT w="6350" cap="flat" cmpd="sng" algn="ctr">
+                      <a:solidFill>
+                        <a:srgbClr val="E6E8F0"/>
+                      </a:solidFill>
+                      <a:prstDash val="solid"/>
+                      <a:round/>
+                      <a:headEnd type="none" w="med" len="med"/>
+                      <a:tailEnd type="none" w="med" len="med"/>
+                    </a:lnT>
+                    <a:lnB w="6350" cap="flat" cmpd="sng" algn="ctr">
+                      <a:solidFill>
+                        <a:srgbClr val="E6E8F0"/>
+                      </a:solidFill>
+                      <a:prstDash val="solid"/>
+                      <a:round/>
+                      <a:headEnd type="none" w="med" len="med"/>
+                      <a:tailEnd type="none" w="med" len="med"/>
+                    </a:lnB>
+                    <a:solidFill>
+                      <a:srgbClr val="F5F7FE"/>
+                    </a:solidFill>
+                  </a:tcPr>
+                </a:tc>
+                <a:tc>
+                  <a:txBody>
+                    <a:bodyPr/>
+                    <a:lstStyle/>
+                    <a:p>
+                      <a:pPr algn="r" indent="0" marL="0">
+                        <a:buNone/>
+                      </a:pPr>
+                      <a:r>
+                        <a:rPr lang="en-US" sz="1250" dirty="0">
+                          <a:solidFill>
+                            <a:srgbClr val="4A5568"/>
+                          </a:solidFill>
+                          <a:latin typeface="Calibri" pitchFamily="34" charset="0"/>
+                          <a:ea typeface="Calibri" pitchFamily="34" charset="-122"/>
+                          <a:cs typeface="Calibri" pitchFamily="34" charset="-120"/>
+                        </a:rPr>
+                        <a:t>RM1.64</a:t>
+                      </a:r>
+                      <a:endParaRPr lang="en-US" sz="1250" dirty="0">
+                        <a:latin typeface="Calibri" charset="0"/>
+                        <a:ea typeface="Calibri" charset="0"/>
+                        <a:cs typeface="Calibri" charset="0"/>
+                      </a:endParaRPr>
+                    </a:p>
+                  </a:txBody>
+                  <a:tcPr marL="76200" marR="76200" marT="25400" marB="25400" anchor="ctr">
+                    <a:lnL w="6350" cap="flat" cmpd="sng" algn="ctr">
+                      <a:solidFill>
+                        <a:srgbClr val="E6E8F0"/>
+                      </a:solidFill>
+                      <a:prstDash val="solid"/>
+                      <a:round/>
+                      <a:headEnd type="none" w="med" len="med"/>
+                      <a:tailEnd type="none" w="med" len="med"/>
+                    </a:lnL>
+                    <a:lnR w="6350" cap="flat" cmpd="sng" algn="ctr">
+                      <a:solidFill>
+                        <a:srgbClr val="E6E8F0"/>
+                      </a:solidFill>
+                      <a:prstDash val="solid"/>
+                      <a:round/>
+                      <a:headEnd type="none" w="med" len="med"/>
+                      <a:tailEnd type="none" w="med" len="med"/>
+                    </a:lnR>
+                    <a:lnT w="6350" cap="flat" cmpd="sng" algn="ctr">
+                      <a:solidFill>
+                        <a:srgbClr val="E6E8F0"/>
+                      </a:solidFill>
+                      <a:prstDash val="solid"/>
+                      <a:round/>
+                      <a:headEnd type="none" w="med" len="med"/>
+                      <a:tailEnd type="none" w="med" len="med"/>
+                    </a:lnT>
+                    <a:lnB w="6350" cap="flat" cmpd="sng" algn="ctr">
+                      <a:solidFill>
+                        <a:srgbClr val="E6E8F0"/>
+                      </a:solidFill>
+                      <a:prstDash val="solid"/>
+                      <a:round/>
+                      <a:headEnd type="none" w="med" len="med"/>
+                      <a:tailEnd type="none" w="med" len="med"/>
+                    </a:lnB>
+                    <a:solidFill>
+                      <a:srgbClr val="F5F7FE"/>
+                    </a:solidFill>
+                  </a:tcPr>
+                </a:tc>
+                <a:tc>
+                  <a:txBody>
+                    <a:bodyPr/>
+                    <a:lstStyle/>
+                    <a:p>
+                      <a:pPr algn="r" indent="0" marL="0">
+                        <a:buNone/>
+                      </a:pPr>
+                      <a:r>
+                        <a:rPr lang="en-US" sz="1250" dirty="0">
+                          <a:solidFill>
+                            <a:srgbClr val="4A5568"/>
+                          </a:solidFill>
+                          <a:latin typeface="Calibri" pitchFamily="34" charset="0"/>
+                          <a:ea typeface="Calibri" pitchFamily="34" charset="-122"/>
+                          <a:cs typeface="Calibri" pitchFamily="34" charset="-120"/>
+                        </a:rPr>
+                        <a:t>~RM0.04</a:t>
+                      </a:r>
+                      <a:endParaRPr lang="en-US" sz="1250" dirty="0">
+                        <a:latin typeface="Calibri" charset="0"/>
+                        <a:ea typeface="Calibri" charset="0"/>
+                        <a:cs typeface="Calibri" charset="0"/>
+                      </a:endParaRPr>
+                    </a:p>
+                  </a:txBody>
+                  <a:tcPr marL="76200" marR="76200" marT="25400" marB="25400" anchor="ctr">
+                    <a:lnL w="6350" cap="flat" cmpd="sng" algn="ctr">
+                      <a:solidFill>
+                        <a:srgbClr val="E6E8F0"/>
+                      </a:solidFill>
+                      <a:prstDash val="solid"/>
+                      <a:round/>
+                      <a:headEnd type="none" w="med" len="med"/>
+                      <a:tailEnd type="none" w="med" len="med"/>
+                    </a:lnL>
+                    <a:lnR w="6350" cap="flat" cmpd="sng" algn="ctr">
+                      <a:solidFill>
+                        <a:srgbClr val="E6E8F0"/>
+                      </a:solidFill>
+                      <a:prstDash val="solid"/>
+                      <a:round/>
+                      <a:headEnd type="none" w="med" len="med"/>
+                      <a:tailEnd type="none" w="med" len="med"/>
+                    </a:lnR>
+                    <a:lnT w="6350" cap="flat" cmpd="sng" algn="ctr">
+                      <a:solidFill>
+                        <a:srgbClr val="E6E8F0"/>
+                      </a:solidFill>
+                      <a:prstDash val="solid"/>
+                      <a:round/>
+                      <a:headEnd type="none" w="med" len="med"/>
+                      <a:tailEnd type="none" w="med" len="med"/>
+                    </a:lnT>
+                    <a:lnB w="6350" cap="flat" cmpd="sng" algn="ctr">
+                      <a:solidFill>
+                        <a:srgbClr val="E6E8F0"/>
+                      </a:solidFill>
+                      <a:prstDash val="solid"/>
+                      <a:round/>
+                      <a:headEnd type="none" w="med" len="med"/>
+                      <a:tailEnd type="none" w="med" len="med"/>
+                    </a:lnB>
+                    <a:solidFill>
+                      <a:srgbClr val="F5F7FE"/>
+                    </a:solidFill>
+                  </a:tcPr>
+                </a:tc>
+                <a:tc>
+                  <a:txBody>
+                    <a:bodyPr/>
+                    <a:lstStyle/>
+                    <a:p>
+                      <a:pPr algn="r" indent="0" marL="0">
+                        <a:buNone/>
+                      </a:pPr>
+                      <a:r>
+                        <a:rPr lang="en-US" sz="1250" dirty="0">
+                          <a:solidFill>
+                            <a:srgbClr val="4A5568"/>
+                          </a:solidFill>
+                          <a:latin typeface="Calibri" pitchFamily="34" charset="0"/>
+                          <a:ea typeface="Calibri" pitchFamily="34" charset="-122"/>
+                          <a:cs typeface="Calibri" pitchFamily="34" charset="-120"/>
+                        </a:rPr>
+                        <a:t>~RM0.04</a:t>
+                      </a:r>
+                      <a:endParaRPr lang="en-US" sz="1250" dirty="0">
+                        <a:latin typeface="Calibri" charset="0"/>
+                        <a:ea typeface="Calibri" charset="0"/>
+                        <a:cs typeface="Calibri" charset="0"/>
+                      </a:endParaRPr>
+                    </a:p>
+                  </a:txBody>
+                  <a:tcPr marL="76200" marR="76200" marT="25400" marB="25400" anchor="ctr">
+                    <a:lnL w="6350" cap="flat" cmpd="sng" algn="ctr">
+                      <a:solidFill>
+                        <a:srgbClr val="E6E8F0"/>
+                      </a:solidFill>
+                      <a:prstDash val="solid"/>
+                      <a:round/>
+                      <a:headEnd type="none" w="med" len="med"/>
+                      <a:tailEnd type="none" w="med" len="med"/>
+                    </a:lnL>
+                    <a:lnR w="6350" cap="flat" cmpd="sng" algn="ctr">
+                      <a:solidFill>
+                        <a:srgbClr val="E6E8F0"/>
+                      </a:solidFill>
+                      <a:prstDash val="solid"/>
+                      <a:round/>
+                      <a:headEnd type="none" w="med" len="med"/>
+                      <a:tailEnd type="none" w="med" len="med"/>
+                    </a:lnR>
+                    <a:lnT w="6350" cap="flat" cmpd="sng" algn="ctr">
+                      <a:solidFill>
+                        <a:srgbClr val="E6E8F0"/>
+                      </a:solidFill>
+                      <a:prstDash val="solid"/>
+                      <a:round/>
+                      <a:headEnd type="none" w="med" len="med"/>
+                      <a:tailEnd type="none" w="med" len="med"/>
+                    </a:lnT>
+                    <a:lnB w="6350" cap="flat" cmpd="sng" algn="ctr">
+                      <a:solidFill>
+                        <a:srgbClr val="E6E8F0"/>
+                      </a:solidFill>
+                      <a:prstDash val="solid"/>
+                      <a:round/>
+                      <a:headEnd type="none" w="med" len="med"/>
+                      <a:tailEnd type="none" w="med" len="med"/>
+                    </a:lnB>
+                    <a:solidFill>
+                      <a:srgbClr val="F5F7FE"/>
+                    </a:solidFill>
+                  </a:tcPr>
+                </a:tc>
+                <a:tc>
+                  <a:txBody>
+                    <a:bodyPr/>
+                    <a:lstStyle/>
+                    <a:p>
+                      <a:pPr algn="r" indent="0" marL="0">
+                        <a:buNone/>
+                      </a:pPr>
+                      <a:r>
+                        <a:rPr lang="en-US" sz="1250" b="1" dirty="0">
+                          <a:solidFill>
+                            <a:srgbClr val="16A34A"/>
+                          </a:solidFill>
+                          <a:latin typeface="Calibri" pitchFamily="34" charset="0"/>
+                          <a:ea typeface="Calibri" pitchFamily="34" charset="-122"/>
+                          <a:cs typeface="Calibri" pitchFamily="34" charset="-120"/>
+                        </a:rPr>
+                        <a:t>97%</a:t>
+                      </a:r>
+                      <a:endParaRPr lang="en-US" sz="1250" dirty="0">
+                        <a:latin typeface="Calibri" charset="0"/>
+                        <a:ea typeface="Calibri" charset="0"/>
+                        <a:cs typeface="Calibri" charset="0"/>
+                      </a:endParaRPr>
+                    </a:p>
+                  </a:txBody>
+                  <a:tcPr marL="76200" marR="76200" marT="25400" marB="25400" anchor="ctr">
+                    <a:lnL w="6350" cap="flat" cmpd="sng" algn="ctr">
+                      <a:solidFill>
+                        <a:srgbClr val="E6E8F0"/>
+                      </a:solidFill>
+                      <a:prstDash val="solid"/>
+                      <a:round/>
+                      <a:headEnd type="none" w="med" len="med"/>
+                      <a:tailEnd type="none" w="med" len="med"/>
+                    </a:lnL>
+                    <a:lnR w="6350" cap="flat" cmpd="sng" algn="ctr">
+                      <a:solidFill>
+                        <a:srgbClr val="E6E8F0"/>
+                      </a:solidFill>
+                      <a:prstDash val="solid"/>
+                      <a:round/>
+                      <a:headEnd type="none" w="med" len="med"/>
+                      <a:tailEnd type="none" w="med" len="med"/>
+                    </a:lnR>
+                    <a:lnT w="6350" cap="flat" cmpd="sng" algn="ctr">
+                      <a:solidFill>
+                        <a:srgbClr val="E6E8F0"/>
+                      </a:solidFill>
+                      <a:prstDash val="solid"/>
+                      <a:round/>
+                      <a:headEnd type="none" w="med" len="med"/>
+                      <a:tailEnd type="none" w="med" len="med"/>
+                    </a:lnT>
+                    <a:lnB w="6350" cap="flat" cmpd="sng" algn="ctr">
+                      <a:solidFill>
+                        <a:srgbClr val="E6E8F0"/>
+                      </a:solidFill>
+                      <a:prstDash val="solid"/>
+                      <a:round/>
+                      <a:headEnd type="none" w="med" len="med"/>
+                      <a:tailEnd type="none" w="med" len="med"/>
+                    </a:lnB>
+                    <a:solidFill>
+                      <a:srgbClr val="F5F7FE"/>
+                    </a:solidFill>
+                  </a:tcPr>
+                </a:tc>
+              </a:tr>
+              <a:tr h="457200">
                 <a:tc>
                   <a:txBody>
                     <a:bodyPr/>
@@ -24674,7 +25084,7 @@
                       <a:tailEnd type="none" w="med" len="med"/>
                     </a:lnB>
                     <a:solidFill>
-                      <a:srgbClr val="F5F7FE"/>
+                      <a:srgbClr val="FFFFFF"/>
                     </a:solidFill>
                   </a:tcPr>
                 </a:tc>
@@ -24742,7 +25152,7 @@
                       <a:tailEnd type="none" w="med" len="med"/>
                     </a:lnB>
                     <a:solidFill>
-                      <a:srgbClr val="F5F7FE"/>
+                      <a:srgbClr val="FFFFFF"/>
                     </a:solidFill>
                   </a:tcPr>
                 </a:tc>
@@ -24810,7 +25220,7 @@
                       <a:tailEnd type="none" w="med" len="med"/>
                     </a:lnB>
                     <a:solidFill>
-                      <a:srgbClr val="F5F7FE"/>
+                      <a:srgbClr val="FFFFFF"/>
                     </a:solidFill>
                   </a:tcPr>
                 </a:tc>
@@ -24878,7 +25288,7 @@
                       <a:tailEnd type="none" w="med" len="med"/>
                     </a:lnB>
                     <a:solidFill>
-                      <a:srgbClr val="F5F7FE"/>
+                      <a:srgbClr val="FFFFFF"/>
                     </a:solidFill>
                   </a:tcPr>
                 </a:tc>
@@ -24946,7 +25356,7 @@
                       <a:tailEnd type="none" w="med" len="med"/>
                     </a:lnB>
                     <a:solidFill>
-                      <a:srgbClr val="F5F7FE"/>
+                      <a:srgbClr val="FFFFFF"/>
                     </a:solidFill>
                   </a:tcPr>
                 </a:tc>
@@ -25014,7 +25424,7 @@
                       <a:tailEnd type="none" w="med" len="med"/>
                     </a:lnB>
                     <a:solidFill>
-                      <a:srgbClr val="F5F7FE"/>
+                      <a:srgbClr val="FFFFFF"/>
                     </a:solidFill>
                   </a:tcPr>
                 </a:tc>

--- a/docs/aster-pricing-cfo.pptx
+++ b/docs/aster-pricing-cfo.pptx
@@ -4227,7 +4227,7 @@
                           <a:ea typeface="Calibri" pitchFamily="34" charset="-122"/>
                           <a:cs typeface="Calibri" pitchFamily="34" charset="-120"/>
                         </a:rPr>
-                        <a:t>WhatsApp</a:t>
+                        <a:t>WhatsApp (billed to customer)</a:t>
                       </a:r>
                       <a:endParaRPr lang="en-US" sz="1250" dirty="0">
                         <a:latin typeface="Calibri" charset="0"/>
@@ -4287,15 +4287,15 @@
                         <a:buNone/>
                       </a:pPr>
                       <a:r>
-                        <a:rPr lang="en-US" sz="1250" dirty="0">
+                        <a:rPr lang="en-US" sz="1250" i="1" dirty="0">
                           <a:solidFill>
-                            <a:srgbClr val="4A5568"/>
+                            <a:srgbClr val="16A34A"/>
                           </a:solidFill>
                           <a:latin typeface="Calibri" pitchFamily="34" charset="0"/>
                           <a:ea typeface="Calibri" pitchFamily="34" charset="-122"/>
                           <a:cs typeface="Calibri" pitchFamily="34" charset="-120"/>
                         </a:rPr>
-                        <a:t>RM0</a:t>
+                        <a:t>Customer</a:t>
                       </a:r>
                       <a:endParaRPr lang="en-US" sz="1250" dirty="0">
                         <a:latin typeface="Calibri" charset="0"/>
@@ -4355,15 +4355,15 @@
                         <a:buNone/>
                       </a:pPr>
                       <a:r>
-                        <a:rPr lang="en-US" sz="1250" dirty="0">
+                        <a:rPr lang="en-US" sz="1250" i="1" dirty="0">
                           <a:solidFill>
-                            <a:srgbClr val="4A5568"/>
+                            <a:srgbClr val="16A34A"/>
                           </a:solidFill>
                           <a:latin typeface="Calibri" pitchFamily="34" charset="0"/>
                           <a:ea typeface="Calibri" pitchFamily="34" charset="-122"/>
                           <a:cs typeface="Calibri" pitchFamily="34" charset="-120"/>
                         </a:rPr>
-                        <a:t>RM0</a:t>
+                        <a:t>Customer</a:t>
                       </a:r>
                       <a:endParaRPr lang="en-US" sz="1250" dirty="0">
                         <a:latin typeface="Calibri" charset="0"/>
@@ -4423,15 +4423,15 @@
                         <a:buNone/>
                       </a:pPr>
                       <a:r>
-                        <a:rPr lang="en-US" sz="1250" dirty="0">
+                        <a:rPr lang="en-US" sz="1250" i="1" dirty="0">
                           <a:solidFill>
-                            <a:srgbClr val="4A5568"/>
+                            <a:srgbClr val="16A34A"/>
                           </a:solidFill>
                           <a:latin typeface="Calibri" pitchFamily="34" charset="0"/>
                           <a:ea typeface="Calibri" pitchFamily="34" charset="-122"/>
                           <a:cs typeface="Calibri" pitchFamily="34" charset="-120"/>
                         </a:rPr>
-                        <a:t>RM0</a:t>
+                        <a:t>Customer</a:t>
                       </a:r>
                       <a:endParaRPr lang="en-US" sz="1250" dirty="0">
                         <a:latin typeface="Calibri" charset="0"/>
@@ -28387,7 +28387,7 @@
                 <a:ea typeface="Calibri" pitchFamily="34" charset="-122"/>
                 <a:cs typeface="Calibri" pitchFamily="34" charset="-120"/>
               </a:rPr>
-              <a:t>WhatsApp = RM0 to Aster</a:t>
+              <a:t>WhatsApp: billed to customer</a:t>
             </a:r>
             <a:endParaRPr lang="en-US" sz="1500" dirty="0"/>
           </a:p>
@@ -28426,7 +28426,7 @@
                 <a:ea typeface="Calibri" pitchFamily="34" charset="-122"/>
                 <a:cs typeface="Calibri" pitchFamily="34" charset="-120"/>
               </a:rPr>
-              <a:t>Customers connect their own WhatsApp Business account, so reminder volume never lands on our bill.</a:t>
+              <a:t>Customers connect their own WhatsApp Business account and pay Meta directly, so reminder volume never lands on our bill.</a:t>
             </a:r>
             <a:endParaRPr lang="en-US" sz="1200" dirty="0"/>
           </a:p>

--- a/docs/aster-pricing-cfo.pptx
+++ b/docs/aster-pricing-cfo.pptx
@@ -3747,7 +3747,7 @@
                           <a:ea typeface="Calibri" pitchFamily="34" charset="-122"/>
                           <a:cs typeface="Calibri" pitchFamily="34" charset="-120"/>
                         </a:rPr>
-                        <a:t>RM7</a:t>
+                        <a:t>RM4</a:t>
                       </a:r>
                       <a:endParaRPr lang="en-US" sz="1250" dirty="0">
                         <a:latin typeface="Calibri" charset="0"/>
@@ -3815,7 +3815,7 @@
                           <a:ea typeface="Calibri" pitchFamily="34" charset="-122"/>
                           <a:cs typeface="Calibri" pitchFamily="34" charset="-120"/>
                         </a:rPr>
-                        <a:t>RM25</a:t>
+                        <a:t>RM19</a:t>
                       </a:r>
                       <a:endParaRPr lang="en-US" sz="1250" dirty="0">
                         <a:latin typeface="Calibri" charset="0"/>
@@ -3883,7 +3883,7 @@
                           <a:ea typeface="Calibri" pitchFamily="34" charset="-122"/>
                           <a:cs typeface="Calibri" pitchFamily="34" charset="-120"/>
                         </a:rPr>
-                        <a:t>RM31</a:t>
+                        <a:t>RM43</a:t>
                       </a:r>
                       <a:endParaRPr lang="en-US" sz="1250" dirty="0">
                         <a:latin typeface="Calibri" charset="0"/>
@@ -4569,7 +4569,7 @@
                           <a:ea typeface="Calibri" pitchFamily="34" charset="-122"/>
                           <a:cs typeface="Calibri" pitchFamily="34" charset="-120"/>
                         </a:rPr>
-                        <a:t>RM37</a:t>
+                        <a:t>RM34</a:t>
                       </a:r>
                       <a:endParaRPr lang="en-US" sz="1250" dirty="0">
                         <a:latin typeface="Calibri" charset="0"/>
@@ -4637,7 +4637,7 @@
                           <a:ea typeface="Calibri" pitchFamily="34" charset="-122"/>
                           <a:cs typeface="Calibri" pitchFamily="34" charset="-120"/>
                         </a:rPr>
-                        <a:t>RM177</a:t>
+                        <a:t>RM171</a:t>
                       </a:r>
                       <a:endParaRPr lang="en-US" sz="1250" dirty="0">
                         <a:latin typeface="Calibri" charset="0"/>
@@ -4705,7 +4705,7 @@
                           <a:ea typeface="Calibri" pitchFamily="34" charset="-122"/>
                           <a:cs typeface="Calibri" pitchFamily="34" charset="-120"/>
                         </a:rPr>
-                        <a:t>RM389</a:t>
+                        <a:t>RM401</a:t>
                       </a:r>
                       <a:endParaRPr lang="en-US" sz="1250" dirty="0">
                         <a:latin typeface="Calibri" charset="0"/>
@@ -4843,7 +4843,7 @@
                           <a:ea typeface="Calibri" pitchFamily="34" charset="-122"/>
                           <a:cs typeface="Calibri" pitchFamily="34" charset="-120"/>
                         </a:rPr>
-                        <a:t>RM199</a:t>
+                        <a:t>RM99</a:t>
                       </a:r>
                       <a:endParaRPr lang="en-US" sz="1250" dirty="0">
                         <a:latin typeface="Calibri" charset="0"/>
@@ -4911,7 +4911,7 @@
                           <a:ea typeface="Calibri" pitchFamily="34" charset="-122"/>
                           <a:cs typeface="Calibri" pitchFamily="34" charset="-120"/>
                         </a:rPr>
-                        <a:t>RM799</a:t>
+                        <a:t>RM599</a:t>
                       </a:r>
                       <a:endParaRPr lang="en-US" sz="1250" dirty="0">
                         <a:latin typeface="Calibri" charset="0"/>
@@ -5117,7 +5117,7 @@
                           <a:ea typeface="Calibri" pitchFamily="34" charset="-122"/>
                           <a:cs typeface="Calibri" pitchFamily="34" charset="-120"/>
                         </a:rPr>
-                        <a:t>81%</a:t>
+                        <a:t>66%</a:t>
                       </a:r>
                       <a:endParaRPr lang="en-US" sz="1400" dirty="0">
                         <a:latin typeface="Calibri" charset="0"/>
@@ -5185,7 +5185,7 @@
                           <a:ea typeface="Calibri" pitchFamily="34" charset="-122"/>
                           <a:cs typeface="Calibri" pitchFamily="34" charset="-120"/>
                         </a:rPr>
-                        <a:t>78%</a:t>
+                        <a:t>71%</a:t>
                       </a:r>
                       <a:endParaRPr lang="en-US" sz="1400" dirty="0">
                         <a:latin typeface="Calibri" charset="0"/>
@@ -5253,7 +5253,7 @@
                           <a:ea typeface="Calibri" pitchFamily="34" charset="-122"/>
                           <a:cs typeface="Calibri" pitchFamily="34" charset="-120"/>
                         </a:rPr>
-                        <a:t>72%</a:t>
+                        <a:t>71%</a:t>
                       </a:r>
                       <a:endParaRPr lang="en-US" sz="1400" dirty="0">
                         <a:latin typeface="Calibri" charset="0"/>
@@ -5454,7 +5454,7 @@
                 <a:ea typeface="Calibri" pitchFamily="34" charset="-122"/>
                 <a:cs typeface="Calibri" pitchFamily="34" charset="-120"/>
               </a:rPr>
-              <a:t>81%</a:t>
+              <a:t>66%</a:t>
             </a:r>
             <a:endParaRPr lang="en-US" sz="3000" dirty="0"/>
           </a:p>
@@ -5605,7 +5605,7 @@
                 <a:ea typeface="Calibri" pitchFamily="34" charset="-122"/>
                 <a:cs typeface="Calibri" pitchFamily="34" charset="-120"/>
               </a:rPr>
-              <a:t>78%</a:t>
+              <a:t>71%</a:t>
             </a:r>
             <a:endParaRPr lang="en-US" sz="3000" dirty="0"/>
           </a:p>
@@ -5756,7 +5756,7 @@
                 <a:ea typeface="Calibri" pitchFamily="34" charset="-122"/>
                 <a:cs typeface="Calibri" pitchFamily="34" charset="-120"/>
               </a:rPr>
-              <a:t>72%</a:t>
+              <a:t>71%</a:t>
             </a:r>
             <a:endParaRPr lang="en-US" sz="3000" dirty="0"/>
           </a:p>
@@ -8493,7 +8493,7 @@
                           <a:ea typeface="Calibri" pitchFamily="34" charset="-122"/>
                           <a:cs typeface="Calibri" pitchFamily="34" charset="-120"/>
                         </a:rPr>
-                        <a:t>RM61,900</a:t>
+                        <a:t>RM49,900</a:t>
                       </a:r>
                       <a:endParaRPr lang="en-US" sz="1250" dirty="0">
                         <a:latin typeface="Calibri" charset="0"/>
@@ -8561,7 +8561,7 @@
                           <a:ea typeface="Calibri" pitchFamily="34" charset="-122"/>
                           <a:cs typeface="Calibri" pitchFamily="34" charset="-120"/>
                         </a:rPr>
-                        <a:t>RM150,785</a:t>
+                        <a:t>RM124,785</a:t>
                       </a:r>
                       <a:endParaRPr lang="en-US" sz="1250" dirty="0">
                         <a:latin typeface="Calibri" charset="0"/>
@@ -8629,7 +8629,7 @@
                           <a:ea typeface="Calibri" pitchFamily="34" charset="-122"/>
                           <a:cs typeface="Calibri" pitchFamily="34" charset="-120"/>
                         </a:rPr>
-                        <a:t>RM343,540</a:t>
+                        <a:t>RM288,540</a:t>
                       </a:r>
                       <a:endParaRPr lang="en-US" sz="1250" dirty="0">
                         <a:latin typeface="Calibri" charset="0"/>
@@ -8767,7 +8767,7 @@
                           <a:ea typeface="Calibri" pitchFamily="34" charset="-122"/>
                           <a:cs typeface="Calibri" pitchFamily="34" charset="-120"/>
                         </a:rPr>
-                        <a:t>RM9,285</a:t>
+                        <a:t>RM7,485</a:t>
                       </a:r>
                       <a:endParaRPr lang="en-US" sz="1250" dirty="0">
                         <a:latin typeface="Calibri" charset="0"/>
@@ -8835,7 +8835,7 @@
                           <a:ea typeface="Calibri" pitchFamily="34" charset="-122"/>
                           <a:cs typeface="Calibri" pitchFamily="34" charset="-120"/>
                         </a:rPr>
-                        <a:t>RM22,618</a:t>
+                        <a:t>RM18,718</a:t>
                       </a:r>
                       <a:endParaRPr lang="en-US" sz="1250" dirty="0">
                         <a:latin typeface="Calibri" charset="0"/>
@@ -8903,7 +8903,7 @@
                           <a:ea typeface="Calibri" pitchFamily="34" charset="-122"/>
                           <a:cs typeface="Calibri" pitchFamily="34" charset="-120"/>
                         </a:rPr>
-                        <a:t>RM51,531</a:t>
+                        <a:t>RM43,281</a:t>
                       </a:r>
                       <a:endParaRPr lang="en-US" sz="1250" dirty="0">
                         <a:latin typeface="Calibri" charset="0"/>
@@ -9041,7 +9041,7 @@
                           <a:ea typeface="Calibri" pitchFamily="34" charset="-122"/>
                           <a:cs typeface="Calibri" pitchFamily="34" charset="-120"/>
                         </a:rPr>
-                        <a:t>RM71,185</a:t>
+                        <a:t>RM57,385</a:t>
                       </a:r>
                       <a:endParaRPr lang="en-US" sz="1400" dirty="0">
                         <a:latin typeface="Calibri" charset="0"/>
@@ -9109,7 +9109,7 @@
                           <a:ea typeface="Calibri" pitchFamily="34" charset="-122"/>
                           <a:cs typeface="Calibri" pitchFamily="34" charset="-120"/>
                         </a:rPr>
-                        <a:t>RM173,403</a:t>
+                        <a:t>RM143,503</a:t>
                       </a:r>
                       <a:endParaRPr lang="en-US" sz="1400" dirty="0">
                         <a:latin typeface="Calibri" charset="0"/>
@@ -9177,7 +9177,7 @@
                           <a:ea typeface="Calibri" pitchFamily="34" charset="-122"/>
                           <a:cs typeface="Calibri" pitchFamily="34" charset="-120"/>
                         </a:rPr>
-                        <a:t>RM395,071</a:t>
+                        <a:t>RM331,821</a:t>
                       </a:r>
                       <a:endParaRPr lang="en-US" sz="1400" dirty="0">
                         <a:latin typeface="Calibri" charset="0"/>
@@ -9315,7 +9315,7 @@
                           <a:ea typeface="Calibri" pitchFamily="34" charset="-122"/>
                           <a:cs typeface="Calibri" pitchFamily="34" charset="-120"/>
                         </a:rPr>
-                        <a:t>RM854K</a:t>
+                        <a:t>RM689K</a:t>
                       </a:r>
                       <a:endParaRPr lang="en-US" sz="1400" dirty="0">
                         <a:latin typeface="Calibri" charset="0"/>
@@ -9383,7 +9383,7 @@
                           <a:ea typeface="Calibri" pitchFamily="34" charset="-122"/>
                           <a:cs typeface="Calibri" pitchFamily="34" charset="-120"/>
                         </a:rPr>
-                        <a:t>RM2.08M</a:t>
+                        <a:t>RM1.72M</a:t>
                       </a:r>
                       <a:endParaRPr lang="en-US" sz="1400" dirty="0">
                         <a:latin typeface="Calibri" charset="0"/>
@@ -9451,7 +9451,7 @@
                           <a:ea typeface="Calibri" pitchFamily="34" charset="-122"/>
                           <a:cs typeface="Calibri" pitchFamily="34" charset="-120"/>
                         </a:rPr>
-                        <a:t>RM4.74M</a:t>
+                        <a:t>RM3.98M</a:t>
                       </a:r>
                       <a:endParaRPr lang="en-US" sz="1400" dirty="0">
                         <a:latin typeface="Calibri" charset="0"/>
@@ -9613,7 +9613,7 @@
                 <a:ea typeface="Calibri" pitchFamily="34" charset="-122"/>
                 <a:cs typeface="Calibri" pitchFamily="34" charset="-120"/>
               </a:rPr>
-              <a:t>RM2.08M</a:t>
+              <a:t>RM1.72M</a:t>
             </a:r>
             <a:endParaRPr lang="en-US" sz="4000" dirty="0"/>
           </a:p>
@@ -9767,7 +9767,7 @@
                 <a:ea typeface="Calibri" pitchFamily="34" charset="-122"/>
                 <a:cs typeface="Calibri" pitchFamily="34" charset="-120"/>
               </a:rPr>
-              <a:t>RM785 </a:t>
+              <a:t>RM649 </a:t>
             </a:r>
             <a:pPr algn="l" indent="0" marL="0">
               <a:buNone/>
@@ -9820,7 +9820,7 @@
                 <a:ea typeface="Calibri" pitchFamily="34" charset="-122"/>
                 <a:cs typeface="Calibri" pitchFamily="34" charset="-120"/>
               </a:rPr>
-              <a:t>~76% </a:t>
+              <a:t>~72% </a:t>
             </a:r>
             <a:pPr algn="l" indent="0" marL="0">
               <a:buNone/>
@@ -10236,7 +10236,7 @@
                 <a:ea typeface="Calibri" pitchFamily="34" charset="-122"/>
                 <a:cs typeface="Calibri" pitchFamily="34" charset="-120"/>
               </a:rPr>
-              <a:t>Sign off the list prices (RM199 / RM799 / RM1,399) or reset them; they are proposed, not live in Stripe.</a:t>
+              <a:t>Sign off the list prices (RM99 / RM599 / RM1,399) or reset them; they are proposed, not live in Stripe.</a:t>
             </a:r>
             <a:endParaRPr lang="en-US" sz="1250" dirty="0"/>
           </a:p>
@@ -11585,7 +11585,7 @@
                 <a:ea typeface="Calibri" pitchFamily="34" charset="-122"/>
                 <a:cs typeface="Calibri" pitchFamily="34" charset="-120"/>
               </a:rPr>
-              <a:t>72–81%</a:t>
+              <a:t>66–71%</a:t>
             </a:r>
             <a:endParaRPr lang="en-US" sz="3000" dirty="0"/>
           </a:p>
@@ -11873,7 +11873,7 @@
                 <a:ea typeface="Calibri" pitchFamily="34" charset="-122"/>
                 <a:cs typeface="Calibri" pitchFamily="34" charset="-120"/>
               </a:rPr>
-              <a:t>Each tier bundles enough screening and AI credits to run its open roles. The bundle is worth 2–4× the plan price at list credit rates, which anchors upgrades.</a:t>
+              <a:t>Each tier bundles enough screening and AI credits to run its open roles. The bundle is worth 4–5× the plan price at list credit rates, which anchors upgrades.</a:t>
             </a:r>
             <a:endParaRPr lang="en-US" sz="1250" dirty="0"/>
           </a:p>
@@ -13523,7 +13523,7 @@
                 <a:ea typeface="Calibri" pitchFamily="34" charset="-122"/>
                 <a:cs typeface="Calibri" pitchFamily="34" charset="-120"/>
               </a:rPr>
-              <a:t>RM199</a:t>
+              <a:t>RM99</a:t>
             </a:r>
             <a:pPr algn="l" indent="0" marL="0">
               <a:buNone/>
@@ -13576,7 +13576,7 @@
                 <a:ea typeface="Calibri" pitchFamily="34" charset="-122"/>
                 <a:cs typeface="Calibri" pitchFamily="34" charset="-120"/>
               </a:rPr>
-              <a:t>RM166 / mo on annual</a:t>
+              <a:t>RM83 / mo on annual</a:t>
             </a:r>
             <a:endParaRPr lang="en-US" sz="1150" dirty="0"/>
           </a:p>
@@ -13615,7 +13615,7 @@
                 <a:ea typeface="Calibri" pitchFamily="34" charset="-122"/>
                 <a:cs typeface="Calibri" pitchFamily="34" charset="-120"/>
               </a:rPr>
-              <a:t>RM1,990 billed yearly</a:t>
+              <a:t>RM990 billed yearly</a:t>
             </a:r>
             <a:endParaRPr lang="en-US" sz="1150" dirty="0"/>
           </a:p>
@@ -13967,7 +13967,7 @@
                 <a:ea typeface="Calibri" pitchFamily="34" charset="-122"/>
                 <a:cs typeface="Calibri" pitchFamily="34" charset="-120"/>
               </a:rPr>
-              <a:t>RM799</a:t>
+              <a:t>RM599</a:t>
             </a:r>
             <a:pPr algn="l" indent="0" marL="0">
               <a:buNone/>
@@ -14020,7 +14020,7 @@
                 <a:ea typeface="Calibri" pitchFamily="34" charset="-122"/>
                 <a:cs typeface="Calibri" pitchFamily="34" charset="-120"/>
               </a:rPr>
-              <a:t>RM666 / mo on annual</a:t>
+              <a:t>RM499 / mo on annual</a:t>
             </a:r>
             <a:endParaRPr lang="en-US" sz="1150" dirty="0"/>
           </a:p>
@@ -14059,7 +14059,7 @@
                 <a:ea typeface="Calibri" pitchFamily="34" charset="-122"/>
                 <a:cs typeface="Calibri" pitchFamily="34" charset="-120"/>
               </a:rPr>
-              <a:t>RM7,990 billed yearly</a:t>
+              <a:t>RM5,990 billed yearly</a:t>
             </a:r>
             <a:endParaRPr lang="en-US" sz="1150" dirty="0"/>
           </a:p>
@@ -19873,7 +19873,7 @@
                 <a:ea typeface="Calibri" pitchFamily="34" charset="-122"/>
                 <a:cs typeface="Calibri" pitchFamily="34" charset="-120"/>
               </a:rPr>
-              <a:t>The included AI is worth 2–4× the plan price</a:t>
+              <a:t>The included AI is worth 4–5× the plan price</a:t>
             </a:r>
             <a:endParaRPr lang="en-US" sz="3400" dirty="0"/>
           </a:p>
@@ -20024,7 +20024,7 @@
                 <a:ea typeface="Calibri" pitchFamily="34" charset="-122"/>
                 <a:cs typeface="Calibri" pitchFamily="34" charset="-120"/>
               </a:rPr>
-              <a:t>2.4×</a:t>
+              <a:t>4.8×</a:t>
             </a:r>
             <a:endParaRPr lang="en-US" sz="2400" dirty="0"/>
           </a:p>
@@ -20242,7 +20242,7 @@
                 <a:ea typeface="Calibri" pitchFamily="34" charset="-122"/>
                 <a:cs typeface="Calibri" pitchFamily="34" charset="-120"/>
               </a:rPr>
-              <a:t>RM199</a:t>
+              <a:t>RM99</a:t>
             </a:r>
             <a:endParaRPr lang="en-US" sz="2400" dirty="0"/>
           </a:p>
@@ -20354,7 +20354,7 @@
                 <a:ea typeface="Calibri" pitchFamily="34" charset="-122"/>
                 <a:cs typeface="Calibri" pitchFamily="34" charset="-120"/>
               </a:rPr>
-              <a:t>3.1×</a:t>
+              <a:t>4.2×</a:t>
             </a:r>
             <a:endParaRPr lang="en-US" sz="2400" dirty="0"/>
           </a:p>
@@ -20572,7 +20572,7 @@
                 <a:ea typeface="Calibri" pitchFamily="34" charset="-122"/>
                 <a:cs typeface="Calibri" pitchFamily="34" charset="-120"/>
               </a:rPr>
-              <a:t>RM799</a:t>
+              <a:t>RM599</a:t>
             </a:r>
             <a:endParaRPr lang="en-US" sz="2400" dirty="0"/>
           </a:p>
